--- a/slides.pptx
+++ b/slides.pptx
@@ -3337,7 +3337,7 @@
             <a:avLst/>
           </a:prstGeom>
           <a:solidFill>
-            <a:srgbClr val="22223A"/>
+            <a:srgbClr val="F0F4F8"/>
           </a:solidFill>
           <a:ln w="19050">
             <a:solidFill>
@@ -3660,7 +3660,7 @@
             <a:avLst/>
           </a:prstGeom>
           <a:solidFill>
-            <a:srgbClr val="22223A"/>
+            <a:srgbClr val="F0F4F8"/>
           </a:solidFill>
           <a:ln w="19050">
             <a:solidFill>
@@ -5424,7 +5424,7 @@
             <a:avLst/>
           </a:prstGeom>
           <a:solidFill>
-            <a:srgbClr val="22223A"/>
+            <a:srgbClr val="F0F4F8"/>
           </a:solidFill>
           <a:ln w="19050">
             <a:solidFill>
@@ -5557,7 +5557,7 @@
             <a:avLst/>
           </a:prstGeom>
           <a:solidFill>
-            <a:srgbClr val="22223A"/>
+            <a:srgbClr val="F0F4F8"/>
           </a:solidFill>
           <a:ln w="19050">
             <a:solidFill>
@@ -5880,7 +5880,7 @@
             <a:avLst/>
           </a:prstGeom>
           <a:solidFill>
-            <a:srgbClr val="22223A"/>
+            <a:srgbClr val="F0F4F8"/>
           </a:solidFill>
           <a:ln w="25400">
             <a:solidFill>
@@ -6172,7 +6172,7 @@
             <a:avLst/>
           </a:prstGeom>
           <a:solidFill>
-            <a:srgbClr val="22223A"/>
+            <a:srgbClr val="F0F4F8"/>
           </a:solidFill>
           <a:ln w="19050">
             <a:solidFill>
@@ -6457,7 +6457,7 @@
             <a:avLst/>
           </a:prstGeom>
           <a:solidFill>
-            <a:srgbClr val="22223A"/>
+            <a:srgbClr val="F0F4F8"/>
           </a:solidFill>
           <a:ln w="19050">
             <a:solidFill>
@@ -6551,7 +6551,7 @@
             <a:avLst/>
           </a:prstGeom>
           <a:solidFill>
-            <a:srgbClr val="22223A"/>
+            <a:srgbClr val="F0F4F8"/>
           </a:solidFill>
           <a:ln w="19050">
             <a:solidFill>
@@ -6645,7 +6645,7 @@
             <a:avLst/>
           </a:prstGeom>
           <a:solidFill>
-            <a:srgbClr val="22223A"/>
+            <a:srgbClr val="F0F4F8"/>
           </a:solidFill>
           <a:ln w="19050">
             <a:solidFill>
@@ -6739,7 +6739,7 @@
             <a:avLst/>
           </a:prstGeom>
           <a:solidFill>
-            <a:srgbClr val="22223A"/>
+            <a:srgbClr val="F0F4F8"/>
           </a:solidFill>
           <a:ln w="19050">
             <a:solidFill>
@@ -7373,7 +7373,7 @@
             <a:avLst/>
           </a:prstGeom>
           <a:solidFill>
-            <a:srgbClr val="22223A"/>
+            <a:srgbClr val="F0F4F8"/>
           </a:solidFill>
           <a:ln w="19050">
             <a:solidFill>
@@ -7614,7 +7614,7 @@
             <a:avLst/>
           </a:prstGeom>
           <a:solidFill>
-            <a:srgbClr val="22223A"/>
+            <a:srgbClr val="F0F4F8"/>
           </a:solidFill>
           <a:ln w="19050">
             <a:solidFill>
@@ -7957,7 +7957,7 @@
             <a:avLst/>
           </a:prstGeom>
           <a:solidFill>
-            <a:srgbClr val="22223A"/>
+            <a:srgbClr val="F0F4F8"/>
           </a:solidFill>
           <a:ln w="25400">
             <a:solidFill>
@@ -8210,7 +8210,7 @@
             <a:avLst/>
           </a:prstGeom>
           <a:solidFill>
-            <a:srgbClr val="22223A"/>
+            <a:srgbClr val="F0F4F8"/>
           </a:solidFill>
           <a:ln w="19050">
             <a:solidFill>
@@ -8426,7 +8426,7 @@
             <a:avLst/>
           </a:prstGeom>
           <a:solidFill>
-            <a:srgbClr val="22223A"/>
+            <a:srgbClr val="F0F4F8"/>
           </a:solidFill>
           <a:ln w="19050">
             <a:solidFill>
@@ -8642,7 +8642,7 @@
             <a:avLst/>
           </a:prstGeom>
           <a:solidFill>
-            <a:srgbClr val="22223A"/>
+            <a:srgbClr val="F0F4F8"/>
           </a:solidFill>
           <a:ln w="19050">
             <a:solidFill>
@@ -9064,7 +9064,7 @@
             <a:avLst/>
           </a:prstGeom>
           <a:solidFill>
-            <a:srgbClr val="22223A"/>
+            <a:srgbClr val="F0F4F8"/>
           </a:solidFill>
           <a:ln w="19050">
             <a:solidFill>
@@ -11626,7 +11626,7 @@
             <a:avLst/>
           </a:prstGeom>
           <a:solidFill>
-            <a:srgbClr val="22223A"/>
+            <a:srgbClr val="F0F4F8"/>
           </a:solidFill>
           <a:ln w="19050">
             <a:solidFill>
@@ -11724,7 +11724,7 @@
             <a:avLst/>
           </a:prstGeom>
           <a:solidFill>
-            <a:srgbClr val="22223A"/>
+            <a:srgbClr val="F0F4F8"/>
           </a:solidFill>
           <a:ln w="19050">
             <a:solidFill>
@@ -11818,7 +11818,7 @@
             <a:avLst/>
           </a:prstGeom>
           <a:solidFill>
-            <a:srgbClr val="22223A"/>
+            <a:srgbClr val="F0F4F8"/>
           </a:solidFill>
           <a:ln w="19050">
             <a:solidFill>
@@ -11916,7 +11916,7 @@
             <a:avLst/>
           </a:prstGeom>
           <a:solidFill>
-            <a:srgbClr val="22223A"/>
+            <a:srgbClr val="F0F4F8"/>
           </a:solidFill>
           <a:ln w="19050">
             <a:solidFill>
@@ -12317,7 +12317,7 @@
             <a:avLst/>
           </a:prstGeom>
           <a:solidFill>
-            <a:srgbClr val="22223A"/>
+            <a:srgbClr val="F0F4F8"/>
           </a:solidFill>
           <a:ln w="19050">
             <a:solidFill>
@@ -12641,7 +12641,7 @@
             <a:avLst/>
           </a:prstGeom>
           <a:solidFill>
-            <a:srgbClr val="22223A"/>
+            <a:srgbClr val="F0F4F8"/>
           </a:solidFill>
           <a:ln w="19050">
             <a:solidFill>
@@ -12946,7 +12946,7 @@
             <a:avLst/>
           </a:prstGeom>
           <a:solidFill>
-            <a:srgbClr val="22223A"/>
+            <a:srgbClr val="F0F4F8"/>
           </a:solidFill>
           <a:ln w="19050">
             <a:solidFill>
@@ -13040,7 +13040,7 @@
             <a:avLst/>
           </a:prstGeom>
           <a:solidFill>
-            <a:srgbClr val="22223A"/>
+            <a:srgbClr val="F0F4F8"/>
           </a:solidFill>
           <a:ln w="19050">
             <a:solidFill>
@@ -13134,7 +13134,7 @@
             <a:avLst/>
           </a:prstGeom>
           <a:solidFill>
-            <a:srgbClr val="22223A"/>
+            <a:srgbClr val="F0F4F8"/>
           </a:solidFill>
           <a:ln w="19050">
             <a:solidFill>

--- a/slides.pptx
+++ b/slides.pptx
@@ -38,6 +38,9 @@
     <p:sldId id="286" r:id="rId37"/>
     <p:sldId id="287" r:id="rId38"/>
     <p:sldId id="288" r:id="rId39"/>
+    <p:sldId id="289" r:id="rId40"/>
+    <p:sldId id="290" r:id="rId41"/>
+    <p:sldId id="291" r:id="rId42"/>
   </p:sldIdLst>
   <p:sldSz cx="12191695" cy="6858000" type="screen4x3"/>
   <p:notesSz cx="6858000" cy="9144000"/>
@@ -3541,7 +3544,7 @@
               </a:defRPr>
             </a:pPr>
             <a:r>
-              <a:t>1/33</a:t>
+              <a:t>1/36</a:t>
             </a:r>
           </a:p>
         </p:txBody>
@@ -4102,7 +4105,7 @@
               </a:defRPr>
             </a:pPr>
             <a:r>
-              <a:t>10/33</a:t>
+              <a:t>10/36</a:t>
             </a:r>
           </a:p>
         </p:txBody>
@@ -5089,7 +5092,7 @@
               </a:defRPr>
             </a:pPr>
             <a:r>
-              <a:t>11/33</a:t>
+              <a:t>11/36</a:t>
             </a:r>
           </a:p>
         </p:txBody>
@@ -5369,7 +5372,7 @@
               </a:defRPr>
             </a:pPr>
             <a:r>
-              <a:t>12/33</a:t>
+              <a:t>12/36</a:t>
             </a:r>
           </a:p>
         </p:txBody>
@@ -5610,7 +5613,7 @@
               </a:defRPr>
             </a:pPr>
             <a:r>
-              <a:t>13/33</a:t>
+              <a:t>13/36</a:t>
             </a:r>
           </a:p>
         </p:txBody>
@@ -6194,7 +6197,7 @@
               </a:defRPr>
             </a:pPr>
             <a:r>
-              <a:t>14/33</a:t>
+              <a:t>14/36</a:t>
             </a:r>
           </a:p>
         </p:txBody>
@@ -7397,7 +7400,7 @@
               </a:defRPr>
             </a:pPr>
             <a:r>
-              <a:t>15/33</a:t>
+              <a:t>15/36</a:t>
             </a:r>
           </a:p>
         </p:txBody>
@@ -7946,7 +7949,7 @@
               </a:defRPr>
             </a:pPr>
             <a:r>
-              <a:t>16/33</a:t>
+              <a:t>16/36</a:t>
             </a:r>
           </a:p>
         </p:txBody>
@@ -8226,7 +8229,7 @@
               </a:defRPr>
             </a:pPr>
             <a:r>
-              <a:t>17/33</a:t>
+              <a:t>17/36</a:t>
             </a:r>
           </a:p>
         </p:txBody>
@@ -8805,7 +8808,7 @@
               </a:defRPr>
             </a:pPr>
             <a:r>
-              <a:t>18/33</a:t>
+              <a:t>18/36</a:t>
             </a:r>
           </a:p>
         </p:txBody>
@@ -9749,7 +9752,7 @@
               </a:defRPr>
             </a:pPr>
             <a:r>
-              <a:t>19/33</a:t>
+              <a:t>19/36</a:t>
             </a:r>
           </a:p>
         </p:txBody>
@@ -10583,7 +10586,7 @@
               </a:defRPr>
             </a:pPr>
             <a:r>
-              <a:t>2/33</a:t>
+              <a:t>2/36</a:t>
             </a:r>
           </a:p>
         </p:txBody>
@@ -10704,7 +10707,7 @@
         </p:nvSpPr>
         <p:spPr>
           <a:xfrm>
-            <a:off x="822960" y="1645920"/>
+            <a:off x="822960" y="1371600"/>
             <a:ext cx="2743200" cy="365760"/>
           </a:xfrm>
           <a:prstGeom prst="rect">
@@ -10743,8 +10746,8 @@
         </p:nvSpPr>
         <p:spPr>
           <a:xfrm>
-            <a:off x="822960" y="2103120"/>
-            <a:ext cx="5029200" cy="914400"/>
+            <a:off x="822960" y="1828800"/>
+            <a:ext cx="5029200" cy="731520"/>
           </a:xfrm>
           <a:prstGeom prst="roundRect">
             <a:avLst/>
@@ -10798,8 +10801,8 @@
         </p:nvSpPr>
         <p:spPr>
           <a:xfrm>
-            <a:off x="822960" y="3200400"/>
-            <a:ext cx="5029200" cy="457200"/>
+            <a:off x="822960" y="2651760"/>
+            <a:ext cx="5029200" cy="365760"/>
           </a:xfrm>
           <a:prstGeom prst="rect">
             <a:avLst/>
@@ -10837,8 +10840,8 @@
         </p:nvSpPr>
         <p:spPr>
           <a:xfrm>
-            <a:off x="6400800" y="1645920"/>
-            <a:ext cx="2743200" cy="365760"/>
+            <a:off x="822960" y="3108960"/>
+            <a:ext cx="5029200" cy="2011680"/>
           </a:xfrm>
           <a:prstGeom prst="rect">
             <a:avLst/>
@@ -10853,6 +10856,109 @@
           <a:p>
             <a:pPr algn="l">
               <a:spcAft>
+                <a:spcPts val="800"/>
+              </a:spcAft>
+              <a:defRPr sz="1300">
+                <a:solidFill>
+                  <a:srgbClr val="1A1A2E"/>
+                </a:solidFill>
+                <a:latin typeface="Calibri"/>
+              </a:defRPr>
+              <a:buClr>
+                <a:srgbClr val="0E6EB8"/>
+              </a:buClr>
+              <a:buChar char="•"/>
+            </a:pPr>
+            <a:r>
+              <a:t>255 regs/thread (hardware max!)</a:t>
+            </a:r>
+          </a:p>
+          <a:p>
+            <a:pPr algn="l">
+              <a:spcAft>
+                <a:spcPts val="800"/>
+              </a:spcAft>
+              <a:defRPr sz="1300">
+                <a:solidFill>
+                  <a:srgbClr val="1A1A2E"/>
+                </a:solidFill>
+                <a:latin typeface="Calibri"/>
+              </a:defRPr>
+              <a:buClr>
+                <a:srgbClr val="0E6EB8"/>
+              </a:buClr>
+              <a:buChar char="•"/>
+            </a:pPr>
+            <a:r>
+              <a:t>0 TMA instructions — legacy ld.global only</a:t>
+            </a:r>
+          </a:p>
+          <a:p>
+            <a:pPr algn="l">
+              <a:spcAft>
+                <a:spcPts val="800"/>
+              </a:spcAft>
+              <a:defRPr sz="1300">
+                <a:solidFill>
+                  <a:srgbClr val="1A1A2E"/>
+                </a:solidFill>
+                <a:latin typeface="Calibri"/>
+              </a:defRPr>
+              <a:buClr>
+                <a:srgbClr val="0E6EB8"/>
+              </a:buClr>
+              <a:buChar char="•"/>
+            </a:pPr>
+            <a:r>
+              <a:t>211K local memory loads (register spills to HBM)</a:t>
+            </a:r>
+          </a:p>
+          <a:p>
+            <a:pPr algn="l">
+              <a:spcAft>
+                <a:spcPts val="800"/>
+              </a:spcAft>
+              <a:defRPr sz="1300">
+                <a:solidFill>
+                  <a:srgbClr val="1A1A2E"/>
+                </a:solidFill>
+                <a:latin typeface="Calibri"/>
+              </a:defRPr>
+              <a:buClr>
+                <a:srgbClr val="0E6EB8"/>
+              </a:buClr>
+              <a:buChar char="•"/>
+            </a:pPr>
+            <a:r>
+              <a:t>128 threads/block (4 warps)</a:t>
+            </a:r>
+          </a:p>
+        </p:txBody>
+      </p:sp>
+      <p:sp>
+        <p:nvSpPr>
+          <p:cNvPr id="8" name="TextBox 7"/>
+          <p:cNvSpPr txBox="1"/>
+          <p:nvPr/>
+        </p:nvSpPr>
+        <p:spPr>
+          <a:xfrm>
+            <a:off x="6400800" y="1371600"/>
+            <a:ext cx="2743200" cy="365760"/>
+          </a:xfrm>
+          <a:prstGeom prst="rect">
+            <a:avLst/>
+          </a:prstGeom>
+          <a:noFill/>
+        </p:spPr>
+        <p:txBody>
+          <a:bodyPr wrap="square">
+            <a:spAutoFit/>
+          </a:bodyPr>
+          <a:lstStyle/>
+          <a:p>
+            <a:pPr algn="l">
+              <a:spcAft>
                 <a:spcPts val="540"/>
               </a:spcAft>
               <a:defRPr sz="1800" b="1">
@@ -10870,14 +10976,14 @@
       </p:sp>
       <p:sp>
         <p:nvSpPr>
-          <p:cNvPr id="8" name="Rounded Rectangle 7"/>
+          <p:cNvPr id="9" name="Rounded Rectangle 8"/>
           <p:cNvSpPr/>
           <p:nvPr/>
         </p:nvSpPr>
         <p:spPr>
           <a:xfrm>
-            <a:off x="6400800" y="2103120"/>
-            <a:ext cx="5029200" cy="914400"/>
+            <a:off x="6400800" y="1828800"/>
+            <a:ext cx="5029200" cy="731520"/>
           </a:xfrm>
           <a:prstGeom prst="roundRect">
             <a:avLst/>
@@ -10925,14 +11031,14 @@
       </p:sp>
       <p:sp>
         <p:nvSpPr>
-          <p:cNvPr id="9" name="TextBox 8"/>
+          <p:cNvPr id="10" name="TextBox 9"/>
           <p:cNvSpPr txBox="1"/>
           <p:nvPr/>
         </p:nvSpPr>
         <p:spPr>
           <a:xfrm>
-            <a:off x="6400800" y="3200400"/>
-            <a:ext cx="5029200" cy="457200"/>
+            <a:off x="6400800" y="2651760"/>
+            <a:ext cx="5029200" cy="365760"/>
           </a:xfrm>
           <a:prstGeom prst="rect">
             <a:avLst/>
@@ -10964,14 +11070,14 @@
       </p:sp>
       <p:sp>
         <p:nvSpPr>
-          <p:cNvPr id="10" name="TextBox 9"/>
+          <p:cNvPr id="11" name="TextBox 10"/>
           <p:cNvSpPr txBox="1"/>
           <p:nvPr/>
         </p:nvSpPr>
         <p:spPr>
           <a:xfrm>
-            <a:off x="5486400" y="2286000"/>
-            <a:ext cx="1097280" cy="640080"/>
+            <a:off x="6400800" y="3108960"/>
+            <a:ext cx="5029200" cy="2011680"/>
           </a:xfrm>
           <a:prstGeom prst="rect">
             <a:avLst/>
@@ -10984,32 +11090,139 @@
           </a:bodyPr>
           <a:lstStyle/>
           <a:p>
-            <a:pPr algn="ctr">
-              <a:spcAft>
-                <a:spcPts val="1080"/>
-              </a:spcAft>
-              <a:defRPr sz="3600" b="1">
-                <a:solidFill>
-                  <a:srgbClr val="B46A00"/>
-                </a:solidFill>
-                <a:latin typeface="Calibri"/>
-              </a:defRPr>
-            </a:pPr>
-            <a:r>
-              <a:t>→</a:t>
-            </a:r>
-          </a:p>
-        </p:txBody>
-      </p:sp>
-      <p:sp>
-        <p:nvSpPr>
-          <p:cNvPr id="11" name="TextBox 10"/>
+            <a:pPr algn="l">
+              <a:spcAft>
+                <a:spcPts val="800"/>
+              </a:spcAft>
+              <a:defRPr sz="1300">
+                <a:solidFill>
+                  <a:srgbClr val="1A1A2E"/>
+                </a:solidFill>
+                <a:latin typeface="Calibri"/>
+              </a:defRPr>
+              <a:buClr>
+                <a:srgbClr val="057A55"/>
+              </a:buClr>
+              <a:buChar char="•"/>
+            </a:pPr>
+            <a:r>
+              <a:t>168 regs/thread (no spills!)</a:t>
+            </a:r>
+          </a:p>
+          <a:p>
+            <a:pPr algn="l">
+              <a:spcAft>
+                <a:spcPts val="800"/>
+              </a:spcAft>
+              <a:defRPr sz="1300">
+                <a:solidFill>
+                  <a:srgbClr val="1A1A2E"/>
+                </a:solidFill>
+                <a:latin typeface="Calibri"/>
+              </a:defRPr>
+              <a:buClr>
+                <a:srgbClr val="057A55"/>
+              </a:buClr>
+              <a:buChar char="•"/>
+            </a:pPr>
+            <a:r>
+              <a:t>7.17K TMA instructions — hardware DMA engine</a:t>
+            </a:r>
+          </a:p>
+          <a:p>
+            <a:pPr algn="l">
+              <a:spcAft>
+                <a:spcPts val="800"/>
+              </a:spcAft>
+              <a:defRPr sz="1300">
+                <a:solidFill>
+                  <a:srgbClr val="1A1A2E"/>
+                </a:solidFill>
+                <a:latin typeface="Calibri"/>
+              </a:defRPr>
+              <a:buClr>
+                <a:srgbClr val="057A55"/>
+              </a:buClr>
+              <a:buChar char="•"/>
+            </a:pPr>
+            <a:r>
+              <a:t>0 local memory loads (zero register spills)</a:t>
+            </a:r>
+          </a:p>
+          <a:p>
+            <a:pPr algn="l">
+              <a:spcAft>
+                <a:spcPts val="800"/>
+              </a:spcAft>
+              <a:defRPr sz="1300">
+                <a:solidFill>
+                  <a:srgbClr val="1A1A2E"/>
+                </a:solidFill>
+                <a:latin typeface="Calibri"/>
+              </a:defRPr>
+              <a:buClr>
+                <a:srgbClr val="057A55"/>
+              </a:buClr>
+              <a:buChar char="•"/>
+            </a:pPr>
+            <a:r>
+              <a:t>384 threads/block (12 warps)</a:t>
+            </a:r>
+          </a:p>
+        </p:txBody>
+      </p:sp>
+      <p:sp>
+        <p:nvSpPr>
+          <p:cNvPr id="12" name="Rectangle 11"/>
+          <p:cNvSpPr/>
+          <p:nvPr/>
+        </p:nvSpPr>
+        <p:spPr>
+          <a:xfrm>
+            <a:off x="5989320" y="1371600"/>
+            <a:ext cx="27432" cy="4114800"/>
+          </a:xfrm>
+          <a:prstGeom prst="rect">
+            <a:avLst/>
+          </a:prstGeom>
+          <a:solidFill>
+            <a:srgbClr val="777777"/>
+          </a:solidFill>
+          <a:ln>
+            <a:noFill/>
+          </a:ln>
+        </p:spPr>
+        <p:style>
+          <a:lnRef idx="1">
+            <a:schemeClr val="accent1"/>
+          </a:lnRef>
+          <a:fillRef idx="3">
+            <a:schemeClr val="accent1"/>
+          </a:fillRef>
+          <a:effectRef idx="2">
+            <a:schemeClr val="accent1"/>
+          </a:effectRef>
+          <a:fontRef idx="minor">
+            <a:schemeClr val="lt1"/>
+          </a:fontRef>
+        </p:style>
+        <p:txBody>
+          <a:bodyPr rtlCol="0" anchor="ctr"/>
+          <a:lstStyle/>
+          <a:p>
+            <a:pPr algn="ctr"/>
+          </a:p>
+        </p:txBody>
+      </p:sp>
+      <p:sp>
+        <p:nvSpPr>
+          <p:cNvPr id="13" name="TextBox 12"/>
           <p:cNvSpPr txBox="1"/>
           <p:nvPr/>
         </p:nvSpPr>
         <p:spPr>
           <a:xfrm>
-            <a:off x="1371600" y="4754880"/>
+            <a:off x="1371600" y="5303520"/>
             <a:ext cx="9418320" cy="731520"/>
           </a:xfrm>
           <a:prstGeom prst="rect">
@@ -11035,18 +11248,14 @@
               </a:defRPr>
             </a:pPr>
             <a:r>
-              <a:t>"The name change reflects the architecture shift:</a:t>
-            </a:r>
-            <a:br/>
-            <a:r>
-              <a:t>from hand-tuned to template-generated"</a:t>
-            </a:r>
-          </a:p>
-        </p:txBody>
-      </p:sp>
-      <p:sp>
-        <p:nvSpPr>
-          <p:cNvPr id="12" name="TextBox 11"/>
+              <a:t>"From hand-tuned to template-generated — fewer registers, zero spills, hardware DMA"</a:t>
+            </a:r>
+          </a:p>
+        </p:txBody>
+      </p:sp>
+      <p:sp>
+        <p:nvSpPr>
+          <p:cNvPr id="14" name="TextBox 13"/>
           <p:cNvSpPr txBox="1"/>
           <p:nvPr/>
         </p:nvSpPr>
@@ -11078,7 +11287,7 @@
               </a:defRPr>
             </a:pPr>
             <a:r>
-              <a:t>20/33</a:t>
+              <a:t>20/36</a:t>
             </a:r>
           </a:p>
         </p:txBody>
@@ -11292,7 +11501,7 @@
               </a:defRPr>
             </a:pPr>
             <a:r>
-              <a:t>21/33</a:t>
+              <a:t>21/36</a:t>
             </a:r>
           </a:p>
         </p:txBody>
@@ -11400,31 +11609,31 @@
               </a:defRPr>
             </a:pPr>
             <a:r>
-              <a:t>FA-3 — NCU Comparison</a:t>
-            </a:r>
-          </a:p>
-        </p:txBody>
-      </p:sp>
-      <p:sp>
-        <p:nvSpPr>
-          <p:cNvPr id="4" name="Rectangle 3"/>
+              <a:t>FA-3 — NCU: The Register Spill Story</a:t>
+            </a:r>
+          </a:p>
+        </p:txBody>
+      </p:sp>
+      <p:sp>
+        <p:nvSpPr>
+          <p:cNvPr id="4" name="Rounded Rectangle 3"/>
           <p:cNvSpPr/>
           <p:nvPr/>
         </p:nvSpPr>
         <p:spPr>
           <a:xfrm>
-            <a:off x="1371600" y="1371600"/>
-            <a:ext cx="9418320" cy="4114800"/>
-          </a:xfrm>
-          <a:prstGeom prst="rect">
+            <a:off x="640080" y="1371600"/>
+            <a:ext cx="5303520" cy="2286000"/>
+          </a:xfrm>
+          <a:prstGeom prst="roundRect">
             <a:avLst/>
           </a:prstGeom>
           <a:solidFill>
-            <a:srgbClr val="E8EEF4"/>
+            <a:srgbClr val="F0F4F8"/>
           </a:solidFill>
-          <a:ln w="25400">
+          <a:ln w="19050">
             <a:solidFill>
-              <a:srgbClr val="777777"/>
+              <a:srgbClr val="0E6EB8"/>
             </a:solidFill>
           </a:ln>
         </p:spPr>
@@ -11443,20 +11652,17 @@
           </a:fontRef>
         </p:style>
         <p:txBody>
-          <a:bodyPr rtlCol="0" anchor="ctr" wrap="square"/>
+          <a:bodyPr rtlCol="0" anchor="ctr" wrap="square" lIns="101600" rIns="101600" tIns="76200" bIns="76200"/>
           <a:lstStyle/>
           <a:p>
             <a:pPr algn="ctr">
-              <a:defRPr sz="2400" b="1">
-                <a:solidFill>
-                  <a:srgbClr val="777777"/>
-                </a:solidFill>
-                <a:latin typeface="Calibri"/>
-              </a:defRPr>
-            </a:pPr>
-            <a:r>
-              <a:t>[SCREENSHOT: NCU FA-2 vs FA-3]</a:t>
-            </a:r>
+              <a:defRPr sz="1400" b="1">
+                <a:solidFill>
+                  <a:srgbClr val="1A1A2E"/>
+                </a:solidFill>
+                <a:latin typeface="Calibri"/>
+              </a:defRPr>
+            </a:pPr>
           </a:p>
         </p:txBody>
       </p:sp>
@@ -11468,8 +11674,8 @@
         </p:nvSpPr>
         <p:spPr>
           <a:xfrm>
-            <a:off x="914400" y="5760720"/>
-            <a:ext cx="10332720" cy="457200"/>
+            <a:off x="822960" y="1463040"/>
+            <a:ext cx="4937760" cy="365760"/>
           </a:xfrm>
           <a:prstGeom prst="rect">
             <a:avLst/>
@@ -11482,19 +11688,19 @@
           </a:bodyPr>
           <a:lstStyle/>
           <a:p>
-            <a:pPr algn="ctr">
-              <a:spcAft>
-                <a:spcPts val="480"/>
-              </a:spcAft>
-              <a:defRPr sz="1600" b="0">
-                <a:solidFill>
-                  <a:srgbClr val="555555"/>
-                </a:solidFill>
-                <a:latin typeface="Calibri"/>
-              </a:defRPr>
-            </a:pPr>
-            <a:r>
-              <a:t>Compare: occupancy, warp stalls, memory throughput between FA-2 and FA-3 kernels</a:t>
+            <a:pPr algn="l">
+              <a:spcAft>
+                <a:spcPts val="540"/>
+              </a:spcAft>
+              <a:defRPr sz="1800" b="1">
+                <a:solidFill>
+                  <a:srgbClr val="0E6EB8"/>
+                </a:solidFill>
+                <a:latin typeface="Calibri"/>
+              </a:defRPr>
+            </a:pPr>
+            <a:r>
+              <a:t>FA-2  (flash_fwd_kernel)</a:t>
             </a:r>
           </a:p>
         </p:txBody>
@@ -11507,8 +11713,8 @@
         </p:nvSpPr>
         <p:spPr>
           <a:xfrm>
-            <a:off x="11155680" y="6400800"/>
-            <a:ext cx="914400" cy="365760"/>
+            <a:off x="822960" y="1920240"/>
+            <a:ext cx="4937760" cy="1645920"/>
           </a:xfrm>
           <a:prstGeom prst="rect">
             <a:avLst/>
@@ -11521,6 +11727,441 @@
           </a:bodyPr>
           <a:lstStyle/>
           <a:p>
+            <a:pPr algn="l">
+              <a:spcAft>
+                <a:spcPts val="800"/>
+              </a:spcAft>
+              <a:defRPr sz="1400">
+                <a:solidFill>
+                  <a:srgbClr val="1A1A2E"/>
+                </a:solidFill>
+                <a:latin typeface="Calibri"/>
+              </a:defRPr>
+              <a:buClr>
+                <a:srgbClr val="0E6EB8"/>
+              </a:buClr>
+              <a:buChar char="•"/>
+            </a:pPr>
+            <a:r>
+              <a:t>255 registers/thread — hardware maximum</a:t>
+            </a:r>
+          </a:p>
+          <a:p>
+            <a:pPr algn="l">
+              <a:spcAft>
+                <a:spcPts val="800"/>
+              </a:spcAft>
+              <a:defRPr sz="1400">
+                <a:solidFill>
+                  <a:srgbClr val="1A1A2E"/>
+                </a:solidFill>
+                <a:latin typeface="Calibri"/>
+              </a:defRPr>
+              <a:buClr>
+                <a:srgbClr val="0E6EB8"/>
+              </a:buClr>
+              <a:buChar char="•"/>
+            </a:pPr>
+            <a:r>
+              <a:t>211,970 local memory load instructions</a:t>
+            </a:r>
+          </a:p>
+          <a:p>
+            <a:pPr algn="l">
+              <a:spcAft>
+                <a:spcPts val="800"/>
+              </a:spcAft>
+              <a:defRPr sz="1400">
+                <a:solidFill>
+                  <a:srgbClr val="1A1A2E"/>
+                </a:solidFill>
+                <a:latin typeface="Calibri"/>
+              </a:defRPr>
+              <a:buClr>
+                <a:srgbClr val="0E6EB8"/>
+              </a:buClr>
+              <a:buChar char="•"/>
+            </a:pPr>
+            <a:r>
+              <a:t>Local memory = HBM round-trips!</a:t>
+            </a:r>
+          </a:p>
+          <a:p>
+            <a:pPr algn="l">
+              <a:spcAft>
+                <a:spcPts val="800"/>
+              </a:spcAft>
+              <a:defRPr sz="1400">
+                <a:solidFill>
+                  <a:srgbClr val="1A1A2E"/>
+                </a:solidFill>
+                <a:latin typeface="Calibri"/>
+              </a:defRPr>
+              <a:buClr>
+                <a:srgbClr val="0E6EB8"/>
+              </a:buClr>
+              <a:buChar char="•"/>
+            </a:pPr>
+            <a:r>
+              <a:t>L1TEX suggestion: 29.4% est. speedup</a:t>
+            </a:r>
+          </a:p>
+          <a:p>
+            <a:pPr algn="l">
+              <a:spcAft>
+                <a:spcPts val="800"/>
+              </a:spcAft>
+              <a:defRPr sz="1400">
+                <a:solidFill>
+                  <a:srgbClr val="1A1A2E"/>
+                </a:solidFill>
+                <a:latin typeface="Calibri"/>
+              </a:defRPr>
+              <a:buClr>
+                <a:srgbClr val="0E6EB8"/>
+              </a:buClr>
+              <a:buChar char="•"/>
+            </a:pPr>
+            <a:r>
+              <a:t>1/32 bytes utilized per sector (catastrophic)</a:t>
+            </a:r>
+          </a:p>
+        </p:txBody>
+      </p:sp>
+      <p:sp>
+        <p:nvSpPr>
+          <p:cNvPr id="7" name="Rounded Rectangle 6"/>
+          <p:cNvSpPr/>
+          <p:nvPr/>
+        </p:nvSpPr>
+        <p:spPr>
+          <a:xfrm>
+            <a:off x="6217920" y="1371600"/>
+            <a:ext cx="5303520" cy="2286000"/>
+          </a:xfrm>
+          <a:prstGeom prst="roundRect">
+            <a:avLst/>
+          </a:prstGeom>
+          <a:solidFill>
+            <a:srgbClr val="F0F4F8"/>
+          </a:solidFill>
+          <a:ln w="19050">
+            <a:solidFill>
+              <a:srgbClr val="057A55"/>
+            </a:solidFill>
+          </a:ln>
+        </p:spPr>
+        <p:style>
+          <a:lnRef idx="1">
+            <a:schemeClr val="accent1"/>
+          </a:lnRef>
+          <a:fillRef idx="3">
+            <a:schemeClr val="accent1"/>
+          </a:fillRef>
+          <a:effectRef idx="2">
+            <a:schemeClr val="accent1"/>
+          </a:effectRef>
+          <a:fontRef idx="minor">
+            <a:schemeClr val="lt1"/>
+          </a:fontRef>
+        </p:style>
+        <p:txBody>
+          <a:bodyPr rtlCol="0" anchor="ctr" wrap="square" lIns="101600" rIns="101600" tIns="76200" bIns="76200"/>
+          <a:lstStyle/>
+          <a:p>
+            <a:pPr algn="ctr">
+              <a:defRPr sz="1400" b="1">
+                <a:solidFill>
+                  <a:srgbClr val="1A1A2E"/>
+                </a:solidFill>
+                <a:latin typeface="Calibri"/>
+              </a:defRPr>
+            </a:pPr>
+          </a:p>
+        </p:txBody>
+      </p:sp>
+      <p:sp>
+        <p:nvSpPr>
+          <p:cNvPr id="8" name="TextBox 7"/>
+          <p:cNvSpPr txBox="1"/>
+          <p:nvPr/>
+        </p:nvSpPr>
+        <p:spPr>
+          <a:xfrm>
+            <a:off x="6400800" y="1463040"/>
+            <a:ext cx="4937760" cy="365760"/>
+          </a:xfrm>
+          <a:prstGeom prst="rect">
+            <a:avLst/>
+          </a:prstGeom>
+          <a:noFill/>
+        </p:spPr>
+        <p:txBody>
+          <a:bodyPr wrap="square">
+            <a:spAutoFit/>
+          </a:bodyPr>
+          <a:lstStyle/>
+          <a:p>
+            <a:pPr algn="l">
+              <a:spcAft>
+                <a:spcPts val="540"/>
+              </a:spcAft>
+              <a:defRPr sz="1800" b="1">
+                <a:solidFill>
+                  <a:srgbClr val="057A55"/>
+                </a:solidFill>
+                <a:latin typeface="Calibri"/>
+              </a:defRPr>
+            </a:pPr>
+            <a:r>
+              <a:t>FA-3  (device_kernel)</a:t>
+            </a:r>
+          </a:p>
+        </p:txBody>
+      </p:sp>
+      <p:sp>
+        <p:nvSpPr>
+          <p:cNvPr id="9" name="TextBox 8"/>
+          <p:cNvSpPr txBox="1"/>
+          <p:nvPr/>
+        </p:nvSpPr>
+        <p:spPr>
+          <a:xfrm>
+            <a:off x="6400800" y="1920240"/>
+            <a:ext cx="4937760" cy="1645920"/>
+          </a:xfrm>
+          <a:prstGeom prst="rect">
+            <a:avLst/>
+          </a:prstGeom>
+          <a:noFill/>
+        </p:spPr>
+        <p:txBody>
+          <a:bodyPr wrap="square">
+            <a:spAutoFit/>
+          </a:bodyPr>
+          <a:lstStyle/>
+          <a:p>
+            <a:pPr algn="l">
+              <a:spcAft>
+                <a:spcPts val="800"/>
+              </a:spcAft>
+              <a:defRPr sz="1400">
+                <a:solidFill>
+                  <a:srgbClr val="1A1A2E"/>
+                </a:solidFill>
+                <a:latin typeface="Calibri"/>
+              </a:defRPr>
+              <a:buClr>
+                <a:srgbClr val="057A55"/>
+              </a:buClr>
+              <a:buChar char="•"/>
+            </a:pPr>
+            <a:r>
+              <a:t>168 registers/thread — 87 fewer</a:t>
+            </a:r>
+          </a:p>
+          <a:p>
+            <a:pPr algn="l">
+              <a:spcAft>
+                <a:spcPts val="800"/>
+              </a:spcAft>
+              <a:defRPr sz="1400">
+                <a:solidFill>
+                  <a:srgbClr val="1A1A2E"/>
+                </a:solidFill>
+                <a:latin typeface="Calibri"/>
+              </a:defRPr>
+              <a:buClr>
+                <a:srgbClr val="057A55"/>
+              </a:buClr>
+              <a:buChar char="•"/>
+            </a:pPr>
+            <a:r>
+              <a:t>0 local memory load instructions</a:t>
+            </a:r>
+          </a:p>
+          <a:p>
+            <a:pPr algn="l">
+              <a:spcAft>
+                <a:spcPts val="800"/>
+              </a:spcAft>
+              <a:defRPr sz="1400">
+                <a:solidFill>
+                  <a:srgbClr val="1A1A2E"/>
+                </a:solidFill>
+                <a:latin typeface="Calibri"/>
+              </a:defRPr>
+              <a:buClr>
+                <a:srgbClr val="057A55"/>
+              </a:buClr>
+              <a:buChar char="•"/>
+            </a:pPr>
+            <a:r>
+              <a:t>7,170 TMA instructions (hardware DMA)</a:t>
+            </a:r>
+          </a:p>
+          <a:p>
+            <a:pPr algn="l">
+              <a:spcAft>
+                <a:spcPts val="800"/>
+              </a:spcAft>
+              <a:defRPr sz="1400">
+                <a:solidFill>
+                  <a:srgbClr val="1A1A2E"/>
+                </a:solidFill>
+                <a:latin typeface="Calibri"/>
+              </a:defRPr>
+              <a:buClr>
+                <a:srgbClr val="057A55"/>
+              </a:buClr>
+              <a:buChar char="•"/>
+            </a:pPr>
+            <a:r>
+              <a:t>196.91 KB SMEM (vs 63.54 KB)</a:t>
+            </a:r>
+          </a:p>
+          <a:p>
+            <a:pPr algn="l">
+              <a:spcAft>
+                <a:spcPts val="800"/>
+              </a:spcAft>
+              <a:defRPr sz="1400">
+                <a:solidFill>
+                  <a:srgbClr val="1A1A2E"/>
+                </a:solidFill>
+                <a:latin typeface="Calibri"/>
+              </a:defRPr>
+              <a:buClr>
+                <a:srgbClr val="057A55"/>
+              </a:buClr>
+              <a:buChar char="•"/>
+            </a:pPr>
+            <a:r>
+              <a:t>Data lives in SMEM, not registers</a:t>
+            </a:r>
+          </a:p>
+        </p:txBody>
+      </p:sp>
+      <p:sp>
+        <p:nvSpPr>
+          <p:cNvPr id="10" name="Rounded Rectangle 9"/>
+          <p:cNvSpPr/>
+          <p:nvPr/>
+        </p:nvSpPr>
+        <p:spPr>
+          <a:xfrm>
+            <a:off x="2286000" y="4114800"/>
+            <a:ext cx="7589520" cy="731520"/>
+          </a:xfrm>
+          <a:prstGeom prst="roundRect">
+            <a:avLst/>
+          </a:prstGeom>
+          <a:solidFill>
+            <a:srgbClr val="F0F4F8"/>
+          </a:solidFill>
+          <a:ln w="19050">
+            <a:solidFill>
+              <a:srgbClr val="B46A00"/>
+            </a:solidFill>
+          </a:ln>
+        </p:spPr>
+        <p:style>
+          <a:lnRef idx="1">
+            <a:schemeClr val="accent1"/>
+          </a:lnRef>
+          <a:fillRef idx="3">
+            <a:schemeClr val="accent1"/>
+          </a:fillRef>
+          <a:effectRef idx="2">
+            <a:schemeClr val="accent1"/>
+          </a:effectRef>
+          <a:fontRef idx="minor">
+            <a:schemeClr val="lt1"/>
+          </a:fontRef>
+        </p:style>
+        <p:txBody>
+          <a:bodyPr rtlCol="0" anchor="ctr" wrap="square" lIns="101600" rIns="101600" tIns="76200" bIns="76200"/>
+          <a:lstStyle/>
+          <a:p>
+            <a:pPr algn="ctr">
+              <a:defRPr sz="2200" b="1">
+                <a:solidFill>
+                  <a:srgbClr val="B46A00"/>
+                </a:solidFill>
+                <a:latin typeface="Calibri"/>
+              </a:defRPr>
+            </a:pPr>
+            <a:r>
+              <a:t>FA-3 uses FEWER registers but spills LESS</a:t>
+            </a:r>
+          </a:p>
+        </p:txBody>
+      </p:sp>
+      <p:sp>
+        <p:nvSpPr>
+          <p:cNvPr id="11" name="TextBox 10"/>
+          <p:cNvSpPr txBox="1"/>
+          <p:nvPr/>
+        </p:nvSpPr>
+        <p:spPr>
+          <a:xfrm>
+            <a:off x="914400" y="5120640"/>
+            <a:ext cx="10332720" cy="914400"/>
+          </a:xfrm>
+          <a:prstGeom prst="rect">
+            <a:avLst/>
+          </a:prstGeom>
+          <a:noFill/>
+        </p:spPr>
+        <p:txBody>
+          <a:bodyPr wrap="square">
+            <a:spAutoFit/>
+          </a:bodyPr>
+          <a:lstStyle/>
+          <a:p>
+            <a:pPr algn="ctr">
+              <a:spcAft>
+                <a:spcPts val="480"/>
+              </a:spcAft>
+              <a:defRPr sz="1600" b="0">
+                <a:solidFill>
+                  <a:srgbClr val="555555"/>
+                </a:solidFill>
+                <a:latin typeface="Calibri"/>
+              </a:defRPr>
+            </a:pPr>
+            <a:r>
+              <a:t>How?  TMA offloads data movement from registers → hardware DMA engine.</a:t>
+            </a:r>
+            <a:br/>
+            <a:r>
+              <a:t>SMEM used aggressively (196 KB vs 63 KB) — data lives in shared memory, not registers.</a:t>
+            </a:r>
+          </a:p>
+        </p:txBody>
+      </p:sp>
+      <p:sp>
+        <p:nvSpPr>
+          <p:cNvPr id="12" name="TextBox 11"/>
+          <p:cNvSpPr txBox="1"/>
+          <p:nvPr/>
+        </p:nvSpPr>
+        <p:spPr>
+          <a:xfrm>
+            <a:off x="11155680" y="6400800"/>
+            <a:ext cx="914400" cy="365760"/>
+          </a:xfrm>
+          <a:prstGeom prst="rect">
+            <a:avLst/>
+          </a:prstGeom>
+          <a:noFill/>
+        </p:spPr>
+        <p:txBody>
+          <a:bodyPr wrap="square">
+            <a:spAutoFit/>
+          </a:bodyPr>
+          <a:lstStyle/>
+          <a:p>
             <a:pPr algn="r">
               <a:spcAft>
                 <a:spcPts val="330"/>
@@ -11533,7 +12174,7 @@
               </a:defRPr>
             </a:pPr>
             <a:r>
-              <a:t>22/33</a:t>
+              <a:t>22/36</a:t>
             </a:r>
           </a:p>
         </p:txBody>
@@ -11552,7 +12193,7 @@
     <p:bg>
       <p:bgPr>
         <a:solidFill>
-          <a:srgbClr val="F8F9FA"/>
+          <a:srgbClr val="FFFFFF"/>
         </a:solidFill>
         <a:effectLst/>
       </p:bgPr>
@@ -11566,59 +12207,20 @@
       <p:grpSpPr/>
       <p:sp>
         <p:nvSpPr>
-          <p:cNvPr id="2" name="TextBox 1"/>
-          <p:cNvSpPr txBox="1"/>
-          <p:nvPr/>
-        </p:nvSpPr>
-        <p:spPr>
-          <a:xfrm>
-            <a:off x="731520" y="457200"/>
-            <a:ext cx="2743200" cy="457200"/>
-          </a:xfrm>
-          <a:prstGeom prst="rect">
-            <a:avLst/>
-          </a:prstGeom>
-          <a:noFill/>
-        </p:spPr>
-        <p:txBody>
-          <a:bodyPr wrap="square">
-            <a:spAutoFit/>
-          </a:bodyPr>
-          <a:lstStyle/>
-          <a:p>
-            <a:pPr algn="l">
-              <a:spcAft>
-                <a:spcPts val="480"/>
-              </a:spcAft>
-              <a:defRPr sz="1600" b="1">
-                <a:solidFill>
-                  <a:srgbClr val="B46A00"/>
-                </a:solidFill>
-                <a:latin typeface="Calibri"/>
-              </a:defRPr>
-            </a:pPr>
-            <a:r>
-              <a:t>KERNEL 3</a:t>
-            </a:r>
-          </a:p>
-        </p:txBody>
-      </p:sp>
-      <p:sp>
-        <p:nvSpPr>
-          <p:cNvPr id="3" name="Rectangle 2"/>
+          <p:cNvPr id="2" name="Rectangle 1"/>
           <p:cNvSpPr/>
           <p:nvPr/>
         </p:nvSpPr>
         <p:spPr>
           <a:xfrm>
-            <a:off x="0" y="0"/>
-            <a:ext cx="109728" cy="6858000"/>
+            <a:off x="548640" y="274320"/>
+            <a:ext cx="109728" cy="502920"/>
           </a:xfrm>
           <a:prstGeom prst="rect">
             <a:avLst/>
           </a:prstGeom>
           <a:solidFill>
-            <a:srgbClr val="B46A00"/>
+            <a:srgbClr val="0E6EB8"/>
           </a:solidFill>
           <a:ln>
             <a:noFill/>
@@ -11648,14 +12250,14 @@
       </p:sp>
       <p:sp>
         <p:nvSpPr>
-          <p:cNvPr id="4" name="TextBox 3"/>
+          <p:cNvPr id="3" name="TextBox 2"/>
           <p:cNvSpPr txBox="1"/>
           <p:nvPr/>
         </p:nvSpPr>
         <p:spPr>
           <a:xfrm>
-            <a:off x="914400" y="1828800"/>
-            <a:ext cx="10332720" cy="1097280"/>
+            <a:off x="822960" y="228600"/>
+            <a:ext cx="10058400" cy="640080"/>
           </a:xfrm>
           <a:prstGeom prst="rect">
             <a:avLst/>
@@ -11670,80 +12272,41 @@
           <a:p>
             <a:pPr algn="l">
               <a:spcAft>
-                <a:spcPts val="1200"/>
-              </a:spcAft>
-              <a:defRPr sz="4000" b="1">
-                <a:solidFill>
-                  <a:srgbClr val="1A1A2E"/>
-                </a:solidFill>
-                <a:latin typeface="Calibri"/>
-              </a:defRPr>
-            </a:pPr>
-            <a:r>
-              <a:t>SonicMoE: IO-Aware MoE Kernels</a:t>
-            </a:r>
-          </a:p>
-        </p:txBody>
-      </p:sp>
-      <p:sp>
-        <p:nvSpPr>
-          <p:cNvPr id="5" name="TextBox 4"/>
-          <p:cNvSpPr txBox="1"/>
-          <p:nvPr/>
-        </p:nvSpPr>
-        <p:spPr>
-          <a:xfrm>
-            <a:off x="914400" y="3200400"/>
-            <a:ext cx="10332720" cy="457200"/>
-          </a:xfrm>
-          <a:prstGeom prst="rect">
-            <a:avLst/>
-          </a:prstGeom>
-          <a:noFill/>
-        </p:spPr>
-        <p:txBody>
-          <a:bodyPr wrap="square">
-            <a:spAutoFit/>
-          </a:bodyPr>
-          <a:lstStyle/>
-          <a:p>
-            <a:pPr algn="l">
-              <a:spcAft>
-                <a:spcPts val="540"/>
-              </a:spcAft>
-              <a:defRPr sz="1800" b="0">
-                <a:solidFill>
-                  <a:srgbClr val="555555"/>
-                </a:solidFill>
-                <a:latin typeface="Calibri"/>
-              </a:defRPr>
-            </a:pPr>
-            <a:r>
-              <a:t>github.com/Dao-AILab/sonic-moe  (Tri Dao, Princeton / Together AI)</a:t>
-            </a:r>
-          </a:p>
-        </p:txBody>
-      </p:sp>
-      <p:sp>
-        <p:nvSpPr>
-          <p:cNvPr id="6" name="Rounded Rectangle 5"/>
+                <a:spcPts val="960"/>
+              </a:spcAft>
+              <a:defRPr sz="3200" b="1">
+                <a:solidFill>
+                  <a:srgbClr val="0E6EB8"/>
+                </a:solidFill>
+                <a:latin typeface="Calibri"/>
+              </a:defRPr>
+            </a:pPr>
+            <a:r>
+              <a:t>FA-3 — NCU: Speed of Light Comparison</a:t>
+            </a:r>
+          </a:p>
+        </p:txBody>
+      </p:sp>
+      <p:sp>
+        <p:nvSpPr>
+          <p:cNvPr id="4" name="Rectangle 3"/>
           <p:cNvSpPr/>
           <p:nvPr/>
         </p:nvSpPr>
         <p:spPr>
           <a:xfrm>
-            <a:off x="914400" y="4389120"/>
-            <a:ext cx="7315200" cy="731520"/>
-          </a:xfrm>
-          <a:prstGeom prst="roundRect">
+            <a:off x="457200" y="1280160"/>
+            <a:ext cx="5486400" cy="2560320"/>
+          </a:xfrm>
+          <a:prstGeom prst="rect">
             <a:avLst/>
           </a:prstGeom>
           <a:solidFill>
-            <a:srgbClr val="F0F4F8"/>
+            <a:srgbClr val="E8EEF4"/>
           </a:solidFill>
-          <a:ln w="19050">
+          <a:ln w="25400">
             <a:solidFill>
-              <a:srgbClr val="B46A00"/>
+              <a:srgbClr val="777777"/>
             </a:solidFill>
           </a:ln>
         </p:spPr>
@@ -11762,33 +12325,88 @@
           </a:fontRef>
         </p:style>
         <p:txBody>
-          <a:bodyPr rtlCol="0" anchor="ctr" wrap="square" lIns="101600" rIns="101600" tIns="76200" bIns="76200"/>
+          <a:bodyPr rtlCol="0" anchor="ctr" wrap="square"/>
           <a:lstStyle/>
           <a:p>
             <a:pPr algn="ctr">
-              <a:defRPr sz="2200" b="1">
-                <a:solidFill>
-                  <a:srgbClr val="B46A00"/>
-                </a:solidFill>
-                <a:latin typeface="Calibri"/>
-              </a:defRPr>
-            </a:pPr>
-            <a:r>
-              <a:t>45% less activation memory, 1.86x faster than ScatterMoE</a:t>
-            </a:r>
-          </a:p>
-        </p:txBody>
-      </p:sp>
-      <p:sp>
-        <p:nvSpPr>
-          <p:cNvPr id="7" name="TextBox 6"/>
+              <a:defRPr sz="2400" b="1">
+                <a:solidFill>
+                  <a:srgbClr val="777777"/>
+                </a:solidFill>
+                <a:latin typeface="Calibri"/>
+              </a:defRPr>
+            </a:pPr>
+            <a:r>
+              <a:t>[SCREENSHOT: NCU FA-2 Speed of Light]</a:t>
+            </a:r>
+          </a:p>
+        </p:txBody>
+      </p:sp>
+      <p:sp>
+        <p:nvSpPr>
+          <p:cNvPr id="5" name="Rectangle 4"/>
+          <p:cNvSpPr/>
+          <p:nvPr/>
+        </p:nvSpPr>
+        <p:spPr>
+          <a:xfrm>
+            <a:off x="6217920" y="1280160"/>
+            <a:ext cx="5486400" cy="2560320"/>
+          </a:xfrm>
+          <a:prstGeom prst="rect">
+            <a:avLst/>
+          </a:prstGeom>
+          <a:solidFill>
+            <a:srgbClr val="E8EEF4"/>
+          </a:solidFill>
+          <a:ln w="25400">
+            <a:solidFill>
+              <a:srgbClr val="777777"/>
+            </a:solidFill>
+          </a:ln>
+        </p:spPr>
+        <p:style>
+          <a:lnRef idx="1">
+            <a:schemeClr val="accent1"/>
+          </a:lnRef>
+          <a:fillRef idx="3">
+            <a:schemeClr val="accent1"/>
+          </a:fillRef>
+          <a:effectRef idx="2">
+            <a:schemeClr val="accent1"/>
+          </a:effectRef>
+          <a:fontRef idx="minor">
+            <a:schemeClr val="lt1"/>
+          </a:fontRef>
+        </p:style>
+        <p:txBody>
+          <a:bodyPr rtlCol="0" anchor="ctr" wrap="square"/>
+          <a:lstStyle/>
+          <a:p>
+            <a:pPr algn="ctr">
+              <a:defRPr sz="2400" b="1">
+                <a:solidFill>
+                  <a:srgbClr val="777777"/>
+                </a:solidFill>
+                <a:latin typeface="Calibri"/>
+              </a:defRPr>
+            </a:pPr>
+            <a:r>
+              <a:t>[SCREENSHOT: NCU FA-3 Speed of Light]</a:t>
+            </a:r>
+          </a:p>
+        </p:txBody>
+      </p:sp>
+      <p:sp>
+        <p:nvSpPr>
+          <p:cNvPr id="6" name="TextBox 5"/>
           <p:cNvSpPr txBox="1"/>
           <p:nvPr/>
         </p:nvSpPr>
         <p:spPr>
           <a:xfrm>
-            <a:off x="11155680" y="6400800"/>
-            <a:ext cx="914400" cy="365760"/>
+            <a:off x="457200" y="4023360"/>
+            <a:ext cx="5486400" cy="274320"/>
           </a:xfrm>
           <a:prstGeom prst="rect">
             <a:avLst/>
@@ -11801,6 +12419,661 @@
           </a:bodyPr>
           <a:lstStyle/>
           <a:p>
+            <a:pPr algn="ctr">
+              <a:spcAft>
+                <a:spcPts val="450"/>
+              </a:spcAft>
+              <a:defRPr sz="1500" b="1">
+                <a:solidFill>
+                  <a:srgbClr val="0E6EB8"/>
+                </a:solidFill>
+                <a:latin typeface="Calibri"/>
+              </a:defRPr>
+            </a:pPr>
+            <a:r>
+              <a:t>FA-2: 28.6% compute, 30.4% memory</a:t>
+            </a:r>
+          </a:p>
+        </p:txBody>
+      </p:sp>
+      <p:sp>
+        <p:nvSpPr>
+          <p:cNvPr id="7" name="TextBox 6"/>
+          <p:cNvSpPr txBox="1"/>
+          <p:nvPr/>
+        </p:nvSpPr>
+        <p:spPr>
+          <a:xfrm>
+            <a:off x="6217920" y="4023360"/>
+            <a:ext cx="5486400" cy="274320"/>
+          </a:xfrm>
+          <a:prstGeom prst="rect">
+            <a:avLst/>
+          </a:prstGeom>
+          <a:noFill/>
+        </p:spPr>
+        <p:txBody>
+          <a:bodyPr wrap="square">
+            <a:spAutoFit/>
+          </a:bodyPr>
+          <a:lstStyle/>
+          <a:p>
+            <a:pPr algn="ctr">
+              <a:spcAft>
+                <a:spcPts val="450"/>
+              </a:spcAft>
+              <a:defRPr sz="1500" b="1">
+                <a:solidFill>
+                  <a:srgbClr val="057A55"/>
+                </a:solidFill>
+                <a:latin typeface="Calibri"/>
+              </a:defRPr>
+            </a:pPr>
+            <a:r>
+              <a:t>FA-3: 41.8% compute, 35.6% memory</a:t>
+            </a:r>
+          </a:p>
+        </p:txBody>
+      </p:sp>
+      <p:graphicFrame>
+        <p:nvGraphicFramePr>
+          <p:cNvPr id="8" name="Table 7"/>
+          <p:cNvGraphicFramePr>
+            <a:graphicFrameLocks noGrp="1"/>
+          </p:cNvGraphicFramePr>
+          <p:nvPr/>
+        </p:nvGraphicFramePr>
+        <p:xfrm>
+          <a:off x="2286000" y="4480560"/>
+          <a:ext cx="7589520" cy="2082800"/>
+        </p:xfrm>
+        <a:graphic>
+          <a:graphicData uri="http://schemas.openxmlformats.org/drawingml/2006/table">
+            <a:tbl>
+              <a:tblPr firstRow="1" bandRow="1">
+                <a:tableStyleId>{5C22544A-7EE6-4342-B048-85BDC9FD1C3A}</a:tableStyleId>
+              </a:tblPr>
+              <a:tblGrid>
+                <a:gridCol w="3017520"/>
+                <a:gridCol w="2286000"/>
+                <a:gridCol w="2286000"/>
+              </a:tblGrid>
+              <a:tr h="457200">
+                <a:tc>
+                  <a:txBody>
+                    <a:bodyPr lIns="76200" rIns="76200"/>
+                    <a:lstStyle/>
+                    <a:p>
+                      <a:pPr algn="ctr">
+                        <a:defRPr sz="1400" b="1">
+                          <a:solidFill>
+                            <a:srgbClr val="FFFFFF"/>
+                          </a:solidFill>
+                          <a:latin typeface="Calibri"/>
+                        </a:defRPr>
+                      </a:pPr>
+                      <a:r>
+                        <a:t>Metric</a:t>
+                      </a:r>
+                    </a:p>
+                  </a:txBody>
+                  <a:tcPr anchor="ctr">
+                    <a:solidFill>
+                      <a:srgbClr val="0E6EB8"/>
+                    </a:solidFill>
+                    <a:lnL w="0">
+                      <a:noFill/>
+                    </a:lnL>
+                    <a:lnR w="0">
+                      <a:noFill/>
+                    </a:lnR>
+                    <a:lnT w="0">
+                      <a:noFill/>
+                    </a:lnT>
+                    <a:lnB w="0">
+                      <a:noFill/>
+                    </a:lnB>
+                  </a:tcPr>
+                </a:tc>
+                <a:tc>
+                  <a:txBody>
+                    <a:bodyPr lIns="76200" rIns="76200"/>
+                    <a:lstStyle/>
+                    <a:p>
+                      <a:pPr algn="ctr">
+                        <a:defRPr sz="1400" b="1">
+                          <a:solidFill>
+                            <a:srgbClr val="FFFFFF"/>
+                          </a:solidFill>
+                          <a:latin typeface="Calibri"/>
+                        </a:defRPr>
+                      </a:pPr>
+                      <a:r>
+                        <a:t>FA-2</a:t>
+                      </a:r>
+                    </a:p>
+                  </a:txBody>
+                  <a:tcPr anchor="ctr">
+                    <a:solidFill>
+                      <a:srgbClr val="0E6EB8"/>
+                    </a:solidFill>
+                    <a:lnL w="0">
+                      <a:noFill/>
+                    </a:lnL>
+                    <a:lnR w="0">
+                      <a:noFill/>
+                    </a:lnR>
+                    <a:lnT w="0">
+                      <a:noFill/>
+                    </a:lnT>
+                    <a:lnB w="0">
+                      <a:noFill/>
+                    </a:lnB>
+                  </a:tcPr>
+                </a:tc>
+                <a:tc>
+                  <a:txBody>
+                    <a:bodyPr lIns="76200" rIns="76200"/>
+                    <a:lstStyle/>
+                    <a:p>
+                      <a:pPr algn="ctr">
+                        <a:defRPr sz="1400" b="1">
+                          <a:solidFill>
+                            <a:srgbClr val="FFFFFF"/>
+                          </a:solidFill>
+                          <a:latin typeface="Calibri"/>
+                        </a:defRPr>
+                      </a:pPr>
+                      <a:r>
+                        <a:t>FA-3</a:t>
+                      </a:r>
+                    </a:p>
+                  </a:txBody>
+                  <a:tcPr anchor="ctr">
+                    <a:solidFill>
+                      <a:srgbClr val="0E6EB8"/>
+                    </a:solidFill>
+                    <a:lnL w="0">
+                      <a:noFill/>
+                    </a:lnL>
+                    <a:lnR w="0">
+                      <a:noFill/>
+                    </a:lnR>
+                    <a:lnT w="0">
+                      <a:noFill/>
+                    </a:lnT>
+                    <a:lnB w="0">
+                      <a:noFill/>
+                    </a:lnB>
+                  </a:tcPr>
+                </a:tc>
+              </a:tr>
+              <a:tr h="406400">
+                <a:tc>
+                  <a:txBody>
+                    <a:bodyPr lIns="76200" rIns="76200"/>
+                    <a:lstStyle/>
+                    <a:p>
+                      <a:pPr algn="ctr">
+                        <a:defRPr sz="1300" b="0">
+                          <a:solidFill>
+                            <a:srgbClr val="1A1A2E"/>
+                          </a:solidFill>
+                          <a:latin typeface="Calibri"/>
+                        </a:defRPr>
+                      </a:pPr>
+                      <a:r>
+                        <a:t>Duration (NCU)</a:t>
+                      </a:r>
+                    </a:p>
+                  </a:txBody>
+                  <a:tcPr anchor="ctr">
+                    <a:solidFill>
+                      <a:srgbClr val="F0F4F8"/>
+                    </a:solidFill>
+                    <a:lnL w="0">
+                      <a:noFill/>
+                    </a:lnL>
+                    <a:lnR w="0">
+                      <a:noFill/>
+                    </a:lnR>
+                    <a:lnT w="0">
+                      <a:noFill/>
+                    </a:lnT>
+                    <a:lnB w="0">
+                      <a:noFill/>
+                    </a:lnB>
+                  </a:tcPr>
+                </a:tc>
+                <a:tc>
+                  <a:txBody>
+                    <a:bodyPr lIns="76200" rIns="76200"/>
+                    <a:lstStyle/>
+                    <a:p>
+                      <a:pPr algn="ctr">
+                        <a:defRPr sz="1300" b="0">
+                          <a:solidFill>
+                            <a:srgbClr val="1A1A2E"/>
+                          </a:solidFill>
+                          <a:latin typeface="Calibri"/>
+                        </a:defRPr>
+                      </a:pPr>
+                      <a:r>
+                        <a:t>76.90 µs</a:t>
+                      </a:r>
+                    </a:p>
+                  </a:txBody>
+                  <a:tcPr anchor="ctr">
+                    <a:solidFill>
+                      <a:srgbClr val="F0F4F8"/>
+                    </a:solidFill>
+                    <a:lnL w="0">
+                      <a:noFill/>
+                    </a:lnL>
+                    <a:lnR w="0">
+                      <a:noFill/>
+                    </a:lnR>
+                    <a:lnT w="0">
+                      <a:noFill/>
+                    </a:lnT>
+                    <a:lnB w="0">
+                      <a:noFill/>
+                    </a:lnB>
+                  </a:tcPr>
+                </a:tc>
+                <a:tc>
+                  <a:txBody>
+                    <a:bodyPr lIns="76200" rIns="76200"/>
+                    <a:lstStyle/>
+                    <a:p>
+                      <a:pPr algn="ctr">
+                        <a:defRPr sz="1300" b="0">
+                          <a:solidFill>
+                            <a:srgbClr val="1A1A2E"/>
+                          </a:solidFill>
+                          <a:latin typeface="Calibri"/>
+                        </a:defRPr>
+                      </a:pPr>
+                      <a:r>
+                        <a:t>35.46 µs</a:t>
+                      </a:r>
+                    </a:p>
+                  </a:txBody>
+                  <a:tcPr anchor="ctr">
+                    <a:solidFill>
+                      <a:srgbClr val="F0F4F8"/>
+                    </a:solidFill>
+                    <a:lnL w="0">
+                      <a:noFill/>
+                    </a:lnL>
+                    <a:lnR w="0">
+                      <a:noFill/>
+                    </a:lnR>
+                    <a:lnT w="0">
+                      <a:noFill/>
+                    </a:lnT>
+                    <a:lnB w="0">
+                      <a:noFill/>
+                    </a:lnB>
+                  </a:tcPr>
+                </a:tc>
+              </a:tr>
+              <a:tr h="406400">
+                <a:tc>
+                  <a:txBody>
+                    <a:bodyPr lIns="76200" rIns="76200"/>
+                    <a:lstStyle/>
+                    <a:p>
+                      <a:pPr algn="ctr">
+                        <a:defRPr sz="1300" b="0">
+                          <a:solidFill>
+                            <a:srgbClr val="1A1A2E"/>
+                          </a:solidFill>
+                          <a:latin typeface="Calibri"/>
+                        </a:defRPr>
+                      </a:pPr>
+                      <a:r>
+                        <a:t>Compute Throughput</a:t>
+                      </a:r>
+                    </a:p>
+                  </a:txBody>
+                  <a:tcPr anchor="ctr">
+                    <a:solidFill>
+                      <a:srgbClr val="E8EEF4"/>
+                    </a:solidFill>
+                    <a:lnL w="0">
+                      <a:noFill/>
+                    </a:lnL>
+                    <a:lnR w="0">
+                      <a:noFill/>
+                    </a:lnR>
+                    <a:lnT w="0">
+                      <a:noFill/>
+                    </a:lnT>
+                    <a:lnB w="0">
+                      <a:noFill/>
+                    </a:lnB>
+                  </a:tcPr>
+                </a:tc>
+                <a:tc>
+                  <a:txBody>
+                    <a:bodyPr lIns="76200" rIns="76200"/>
+                    <a:lstStyle/>
+                    <a:p>
+                      <a:pPr algn="ctr">
+                        <a:defRPr sz="1300" b="0">
+                          <a:solidFill>
+                            <a:srgbClr val="1A1A2E"/>
+                          </a:solidFill>
+                          <a:latin typeface="Calibri"/>
+                        </a:defRPr>
+                      </a:pPr>
+                      <a:r>
+                        <a:t>28.56%</a:t>
+                      </a:r>
+                    </a:p>
+                  </a:txBody>
+                  <a:tcPr anchor="ctr">
+                    <a:solidFill>
+                      <a:srgbClr val="E8EEF4"/>
+                    </a:solidFill>
+                    <a:lnL w="0">
+                      <a:noFill/>
+                    </a:lnL>
+                    <a:lnR w="0">
+                      <a:noFill/>
+                    </a:lnR>
+                    <a:lnT w="0">
+                      <a:noFill/>
+                    </a:lnT>
+                    <a:lnB w="0">
+                      <a:noFill/>
+                    </a:lnB>
+                  </a:tcPr>
+                </a:tc>
+                <a:tc>
+                  <a:txBody>
+                    <a:bodyPr lIns="76200" rIns="76200"/>
+                    <a:lstStyle/>
+                    <a:p>
+                      <a:pPr algn="ctr">
+                        <a:defRPr sz="1300" b="0">
+                          <a:solidFill>
+                            <a:srgbClr val="1A1A2E"/>
+                          </a:solidFill>
+                          <a:latin typeface="Calibri"/>
+                        </a:defRPr>
+                      </a:pPr>
+                      <a:r>
+                        <a:t>41.80%</a:t>
+                      </a:r>
+                    </a:p>
+                  </a:txBody>
+                  <a:tcPr anchor="ctr">
+                    <a:solidFill>
+                      <a:srgbClr val="E8EEF4"/>
+                    </a:solidFill>
+                    <a:lnL w="0">
+                      <a:noFill/>
+                    </a:lnL>
+                    <a:lnR w="0">
+                      <a:noFill/>
+                    </a:lnR>
+                    <a:lnT w="0">
+                      <a:noFill/>
+                    </a:lnT>
+                    <a:lnB w="0">
+                      <a:noFill/>
+                    </a:lnB>
+                  </a:tcPr>
+                </a:tc>
+              </a:tr>
+              <a:tr h="406400">
+                <a:tc>
+                  <a:txBody>
+                    <a:bodyPr lIns="76200" rIns="76200"/>
+                    <a:lstStyle/>
+                    <a:p>
+                      <a:pPr algn="ctr">
+                        <a:defRPr sz="1300" b="0">
+                          <a:solidFill>
+                            <a:srgbClr val="1A1A2E"/>
+                          </a:solidFill>
+                          <a:latin typeface="Calibri"/>
+                        </a:defRPr>
+                      </a:pPr>
+                      <a:r>
+                        <a:t>Memory Throughput</a:t>
+                      </a:r>
+                    </a:p>
+                  </a:txBody>
+                  <a:tcPr anchor="ctr">
+                    <a:solidFill>
+                      <a:srgbClr val="F0F4F8"/>
+                    </a:solidFill>
+                    <a:lnL w="0">
+                      <a:noFill/>
+                    </a:lnL>
+                    <a:lnR w="0">
+                      <a:noFill/>
+                    </a:lnR>
+                    <a:lnT w="0">
+                      <a:noFill/>
+                    </a:lnT>
+                    <a:lnB w="0">
+                      <a:noFill/>
+                    </a:lnB>
+                  </a:tcPr>
+                </a:tc>
+                <a:tc>
+                  <a:txBody>
+                    <a:bodyPr lIns="76200" rIns="76200"/>
+                    <a:lstStyle/>
+                    <a:p>
+                      <a:pPr algn="ctr">
+                        <a:defRPr sz="1300" b="0">
+                          <a:solidFill>
+                            <a:srgbClr val="1A1A2E"/>
+                          </a:solidFill>
+                          <a:latin typeface="Calibri"/>
+                        </a:defRPr>
+                      </a:pPr>
+                      <a:r>
+                        <a:t>30.35%</a:t>
+                      </a:r>
+                    </a:p>
+                  </a:txBody>
+                  <a:tcPr anchor="ctr">
+                    <a:solidFill>
+                      <a:srgbClr val="F0F4F8"/>
+                    </a:solidFill>
+                    <a:lnL w="0">
+                      <a:noFill/>
+                    </a:lnL>
+                    <a:lnR w="0">
+                      <a:noFill/>
+                    </a:lnR>
+                    <a:lnT w="0">
+                      <a:noFill/>
+                    </a:lnT>
+                    <a:lnB w="0">
+                      <a:noFill/>
+                    </a:lnB>
+                  </a:tcPr>
+                </a:tc>
+                <a:tc>
+                  <a:txBody>
+                    <a:bodyPr lIns="76200" rIns="76200"/>
+                    <a:lstStyle/>
+                    <a:p>
+                      <a:pPr algn="ctr">
+                        <a:defRPr sz="1300" b="0">
+                          <a:solidFill>
+                            <a:srgbClr val="1A1A2E"/>
+                          </a:solidFill>
+                          <a:latin typeface="Calibri"/>
+                        </a:defRPr>
+                      </a:pPr>
+                      <a:r>
+                        <a:t>35.60%</a:t>
+                      </a:r>
+                    </a:p>
+                  </a:txBody>
+                  <a:tcPr anchor="ctr">
+                    <a:solidFill>
+                      <a:srgbClr val="F0F4F8"/>
+                    </a:solidFill>
+                    <a:lnL w="0">
+                      <a:noFill/>
+                    </a:lnL>
+                    <a:lnR w="0">
+                      <a:noFill/>
+                    </a:lnR>
+                    <a:lnT w="0">
+                      <a:noFill/>
+                    </a:lnT>
+                    <a:lnB w="0">
+                      <a:noFill/>
+                    </a:lnB>
+                  </a:tcPr>
+                </a:tc>
+              </a:tr>
+              <a:tr h="406400">
+                <a:tc>
+                  <a:txBody>
+                    <a:bodyPr lIns="76200" rIns="76200"/>
+                    <a:lstStyle/>
+                    <a:p>
+                      <a:pPr algn="ctr">
+                        <a:defRPr sz="1300" b="0">
+                          <a:solidFill>
+                            <a:srgbClr val="1A1A2E"/>
+                          </a:solidFill>
+                          <a:latin typeface="Calibri"/>
+                        </a:defRPr>
+                      </a:pPr>
+                      <a:r>
+                        <a:t>Achieved Occupancy</a:t>
+                      </a:r>
+                    </a:p>
+                  </a:txBody>
+                  <a:tcPr anchor="ctr">
+                    <a:solidFill>
+                      <a:srgbClr val="E8EEF4"/>
+                    </a:solidFill>
+                    <a:lnL w="0">
+                      <a:noFill/>
+                    </a:lnL>
+                    <a:lnR w="0">
+                      <a:noFill/>
+                    </a:lnR>
+                    <a:lnT w="0">
+                      <a:noFill/>
+                    </a:lnT>
+                    <a:lnB w="0">
+                      <a:noFill/>
+                    </a:lnB>
+                  </a:tcPr>
+                </a:tc>
+                <a:tc>
+                  <a:txBody>
+                    <a:bodyPr lIns="76200" rIns="76200"/>
+                    <a:lstStyle/>
+                    <a:p>
+                      <a:pPr algn="ctr">
+                        <a:defRPr sz="1300" b="0">
+                          <a:solidFill>
+                            <a:srgbClr val="1A1A2E"/>
+                          </a:solidFill>
+                          <a:latin typeface="Calibri"/>
+                        </a:defRPr>
+                      </a:pPr>
+                      <a:r>
+                        <a:t>1.18%</a:t>
+                      </a:r>
+                    </a:p>
+                  </a:txBody>
+                  <a:tcPr anchor="ctr">
+                    <a:solidFill>
+                      <a:srgbClr val="E8EEF4"/>
+                    </a:solidFill>
+                    <a:lnL w="0">
+                      <a:noFill/>
+                    </a:lnL>
+                    <a:lnR w="0">
+                      <a:noFill/>
+                    </a:lnR>
+                    <a:lnT w="0">
+                      <a:noFill/>
+                    </a:lnT>
+                    <a:lnB w="0">
+                      <a:noFill/>
+                    </a:lnB>
+                  </a:tcPr>
+                </a:tc>
+                <a:tc>
+                  <a:txBody>
+                    <a:bodyPr lIns="76200" rIns="76200"/>
+                    <a:lstStyle/>
+                    <a:p>
+                      <a:pPr algn="ctr">
+                        <a:defRPr sz="1300" b="0">
+                          <a:solidFill>
+                            <a:srgbClr val="1A1A2E"/>
+                          </a:solidFill>
+                          <a:latin typeface="Calibri"/>
+                        </a:defRPr>
+                      </a:pPr>
+                      <a:r>
+                        <a:t>13.10%</a:t>
+                      </a:r>
+                    </a:p>
+                  </a:txBody>
+                  <a:tcPr anchor="ctr">
+                    <a:solidFill>
+                      <a:srgbClr val="E8EEF4"/>
+                    </a:solidFill>
+                    <a:lnL w="0">
+                      <a:noFill/>
+                    </a:lnL>
+                    <a:lnR w="0">
+                      <a:noFill/>
+                    </a:lnR>
+                    <a:lnT w="0">
+                      <a:noFill/>
+                    </a:lnT>
+                    <a:lnB w="0">
+                      <a:noFill/>
+                    </a:lnB>
+                  </a:tcPr>
+                </a:tc>
+              </a:tr>
+            </a:tbl>
+          </a:graphicData>
+        </a:graphic>
+      </p:graphicFrame>
+      <p:sp>
+        <p:nvSpPr>
+          <p:cNvPr id="9" name="TextBox 8"/>
+          <p:cNvSpPr txBox="1"/>
+          <p:nvPr/>
+        </p:nvSpPr>
+        <p:spPr>
+          <a:xfrm>
+            <a:off x="11155680" y="6400800"/>
+            <a:ext cx="914400" cy="365760"/>
+          </a:xfrm>
+          <a:prstGeom prst="rect">
+            <a:avLst/>
+          </a:prstGeom>
+          <a:noFill/>
+        </p:spPr>
+        <p:txBody>
+          <a:bodyPr wrap="square">
+            <a:spAutoFit/>
+          </a:bodyPr>
+          <a:lstStyle/>
+          <a:p>
             <a:pPr algn="r">
               <a:spcAft>
                 <a:spcPts val="330"/>
@@ -11813,7 +13086,7 @@
               </a:defRPr>
             </a:pPr>
             <a:r>
-              <a:t>23/33</a:t>
+              <a:t>23/36</a:t>
             </a:r>
           </a:p>
         </p:txBody>
@@ -11921,7 +13194,7 @@
               </a:defRPr>
             </a:pPr>
             <a:r>
-              <a:t>Why MoE Kernels Are Hard</a:t>
+              <a:t>FA-3 — NCU: Memory Architecture</a:t>
             </a:r>
           </a:p>
         </p:txBody>
@@ -11934,8 +13207,8 @@
         </p:nvSpPr>
         <p:spPr>
           <a:xfrm>
-            <a:off x="822960" y="1371600"/>
-            <a:ext cx="10058400" cy="2743200"/>
+            <a:off x="548640" y="1097280"/>
+            <a:ext cx="1828800" cy="365760"/>
           </a:xfrm>
           <a:prstGeom prst="rect">
             <a:avLst/>
@@ -11950,9 +13223,48 @@
           <a:p>
             <a:pPr algn="l">
               <a:spcAft>
+                <a:spcPts val="600"/>
+              </a:spcAft>
+              <a:defRPr sz="2000" b="1">
+                <a:solidFill>
+                  <a:srgbClr val="0E6EB8"/>
+                </a:solidFill>
+                <a:latin typeface="Calibri"/>
+              </a:defRPr>
+            </a:pPr>
+            <a:r>
+              <a:t>FA-2 Data Path</a:t>
+            </a:r>
+          </a:p>
+        </p:txBody>
+      </p:sp>
+      <p:sp>
+        <p:nvSpPr>
+          <p:cNvPr id="5" name="TextBox 4"/>
+          <p:cNvSpPr txBox="1"/>
+          <p:nvPr/>
+        </p:nvSpPr>
+        <p:spPr>
+          <a:xfrm>
+            <a:off x="548640" y="1554480"/>
+            <a:ext cx="5303520" cy="2743200"/>
+          </a:xfrm>
+          <a:prstGeom prst="rect">
+            <a:avLst/>
+          </a:prstGeom>
+          <a:noFill/>
+        </p:spPr>
+        <p:txBody>
+          <a:bodyPr wrap="square">
+            <a:spAutoFit/>
+          </a:bodyPr>
+          <a:lstStyle/>
+          <a:p>
+            <a:pPr algn="l">
+              <a:spcAft>
                 <a:spcPts val="800"/>
               </a:spcAft>
-              <a:defRPr sz="2000">
+              <a:defRPr sz="1500">
                 <a:solidFill>
                   <a:srgbClr val="1A1A2E"/>
                 </a:solidFill>
@@ -11964,7 +13276,7 @@
               <a:buChar char="•"/>
             </a:pPr>
             <a:r>
-              <a:t>Each expert processes a variable number of tokens (varlen-M Grouped GEMM)</a:t>
+              <a:t>HBM → legacy ld.global → Registers → SMEM</a:t>
             </a:r>
           </a:p>
           <a:p>
@@ -11972,7 +13284,7 @@
               <a:spcAft>
                 <a:spcPts val="800"/>
               </a:spcAft>
-              <a:defRPr sz="2000">
+              <a:defRPr sz="1500">
                 <a:solidFill>
                   <a:srgbClr val="1A1A2E"/>
                 </a:solidFill>
@@ -11984,7 +13296,7 @@
               <a:buChar char="•"/>
             </a:pPr>
             <a:r>
-              <a:t>Fine-grained MoEs: small expert size → IO-bound, not compute-bound</a:t>
+              <a:t>49.96K global load instructions</a:t>
             </a:r>
           </a:p>
           <a:p>
@@ -11992,7 +13304,7 @@
               <a:spcAft>
                 <a:spcPts val="800"/>
               </a:spcAft>
-              <a:defRPr sz="2000">
+              <a:defRPr sz="1500">
                 <a:solidFill>
                   <a:srgbClr val="1A1A2E"/>
                 </a:solidFill>
@@ -12004,21 +13316,306 @@
               <a:buChar char="•"/>
             </a:pPr>
             <a:r>
-              <a:t>Standard approach: gather tokens → pad → GEMM → scatter back</a:t>
-            </a:r>
-          </a:p>
-        </p:txBody>
-      </p:sp>
-      <p:sp>
-        <p:nvSpPr>
-          <p:cNvPr id="5" name="Rounded Rectangle 4"/>
+              <a:t>0 TMA instructions</a:t>
+            </a:r>
+          </a:p>
+          <a:p>
+            <a:pPr algn="l">
+              <a:spcAft>
+                <a:spcPts val="800"/>
+              </a:spcAft>
+              <a:defRPr sz="1500">
+                <a:solidFill>
+                  <a:srgbClr val="1A1A2E"/>
+                </a:solidFill>
+                <a:latin typeface="Calibri"/>
+              </a:defRPr>
+              <a:buClr>
+                <a:srgbClr val="0E6EB8"/>
+              </a:buClr>
+              <a:buChar char="•"/>
+            </a:pPr>
+            <a:r>
+              <a:t>9.04% L1/TEX hit rate (cache thrashing)</a:t>
+            </a:r>
+          </a:p>
+          <a:p>
+            <a:pPr algn="l">
+              <a:spcAft>
+                <a:spcPts val="800"/>
+              </a:spcAft>
+              <a:defRPr sz="1500">
+                <a:solidFill>
+                  <a:srgbClr val="1A1A2E"/>
+                </a:solidFill>
+                <a:latin typeface="Calibri"/>
+              </a:defRPr>
+              <a:buClr>
+                <a:srgbClr val="0E6EB8"/>
+              </a:buClr>
+              <a:buChar char="•"/>
+            </a:pPr>
+            <a:r>
+              <a:t>63.54 KB dynamic SMEM per block</a:t>
+            </a:r>
+          </a:p>
+          <a:p>
+            <a:pPr algn="l">
+              <a:spcAft>
+                <a:spcPts val="800"/>
+              </a:spcAft>
+              <a:defRPr sz="1500">
+                <a:solidFill>
+                  <a:srgbClr val="1A1A2E"/>
+                </a:solidFill>
+                <a:latin typeface="Calibri"/>
+              </a:defRPr>
+              <a:buClr>
+                <a:srgbClr val="0E6EB8"/>
+              </a:buClr>
+              <a:buChar char="•"/>
+            </a:pPr>
+            <a:r>
+              <a:t>Register-heavy: 255/255 used</a:t>
+            </a:r>
+          </a:p>
+        </p:txBody>
+      </p:sp>
+      <p:sp>
+        <p:nvSpPr>
+          <p:cNvPr id="6" name="TextBox 5"/>
+          <p:cNvSpPr txBox="1"/>
+          <p:nvPr/>
+        </p:nvSpPr>
+        <p:spPr>
+          <a:xfrm>
+            <a:off x="6400800" y="1097280"/>
+            <a:ext cx="2743200" cy="365760"/>
+          </a:xfrm>
+          <a:prstGeom prst="rect">
+            <a:avLst/>
+          </a:prstGeom>
+          <a:noFill/>
+        </p:spPr>
+        <p:txBody>
+          <a:bodyPr wrap="square">
+            <a:spAutoFit/>
+          </a:bodyPr>
+          <a:lstStyle/>
+          <a:p>
+            <a:pPr algn="l">
+              <a:spcAft>
+                <a:spcPts val="600"/>
+              </a:spcAft>
+              <a:defRPr sz="2000" b="1">
+                <a:solidFill>
+                  <a:srgbClr val="057A55"/>
+                </a:solidFill>
+                <a:latin typeface="Calibri"/>
+              </a:defRPr>
+            </a:pPr>
+            <a:r>
+              <a:t>FA-3 Data Path</a:t>
+            </a:r>
+          </a:p>
+        </p:txBody>
+      </p:sp>
+      <p:sp>
+        <p:nvSpPr>
+          <p:cNvPr id="7" name="TextBox 6"/>
+          <p:cNvSpPr txBox="1"/>
+          <p:nvPr/>
+        </p:nvSpPr>
+        <p:spPr>
+          <a:xfrm>
+            <a:off x="6400800" y="1554480"/>
+            <a:ext cx="5303520" cy="2743200"/>
+          </a:xfrm>
+          <a:prstGeom prst="rect">
+            <a:avLst/>
+          </a:prstGeom>
+          <a:noFill/>
+        </p:spPr>
+        <p:txBody>
+          <a:bodyPr wrap="square">
+            <a:spAutoFit/>
+          </a:bodyPr>
+          <a:lstStyle/>
+          <a:p>
+            <a:pPr algn="l">
+              <a:spcAft>
+                <a:spcPts val="800"/>
+              </a:spcAft>
+              <a:defRPr sz="1500">
+                <a:solidFill>
+                  <a:srgbClr val="1A1A2E"/>
+                </a:solidFill>
+                <a:latin typeface="Calibri"/>
+              </a:defRPr>
+              <a:buClr>
+                <a:srgbClr val="057A55"/>
+              </a:buClr>
+              <a:buChar char="•"/>
+            </a:pPr>
+            <a:r>
+              <a:t>HBM → TMA → SMEM (bypasses registers!)</a:t>
+            </a:r>
+          </a:p>
+          <a:p>
+            <a:pPr algn="l">
+              <a:spcAft>
+                <a:spcPts val="800"/>
+              </a:spcAft>
+              <a:defRPr sz="1500">
+                <a:solidFill>
+                  <a:srgbClr val="1A1A2E"/>
+                </a:solidFill>
+                <a:latin typeface="Calibri"/>
+              </a:defRPr>
+              <a:buClr>
+                <a:srgbClr val="057A55"/>
+              </a:buClr>
+              <a:buChar char="•"/>
+            </a:pPr>
+            <a:r>
+              <a:t>8.70K global load instructions (6x fewer)</a:t>
+            </a:r>
+          </a:p>
+          <a:p>
+            <a:pPr algn="l">
+              <a:spcAft>
+                <a:spcPts val="800"/>
+              </a:spcAft>
+              <a:defRPr sz="1500">
+                <a:solidFill>
+                  <a:srgbClr val="1A1A2E"/>
+                </a:solidFill>
+                <a:latin typeface="Calibri"/>
+              </a:defRPr>
+              <a:buClr>
+                <a:srgbClr val="057A55"/>
+              </a:buClr>
+              <a:buChar char="•"/>
+            </a:pPr>
+            <a:r>
+              <a:t>7.17K TMA instructions</a:t>
+            </a:r>
+          </a:p>
+          <a:p>
+            <a:pPr algn="l">
+              <a:spcAft>
+                <a:spcPts val="800"/>
+              </a:spcAft>
+              <a:defRPr sz="1500">
+                <a:solidFill>
+                  <a:srgbClr val="1A1A2E"/>
+                </a:solidFill>
+                <a:latin typeface="Calibri"/>
+              </a:defRPr>
+              <a:buClr>
+                <a:srgbClr val="057A55"/>
+              </a:buClr>
+              <a:buChar char="•"/>
+            </a:pPr>
+            <a:r>
+              <a:t>67.29% L1/TEX hit rate (7x better)</a:t>
+            </a:r>
+          </a:p>
+          <a:p>
+            <a:pPr algn="l">
+              <a:spcAft>
+                <a:spcPts val="800"/>
+              </a:spcAft>
+              <a:defRPr sz="1500">
+                <a:solidFill>
+                  <a:srgbClr val="1A1A2E"/>
+                </a:solidFill>
+                <a:latin typeface="Calibri"/>
+              </a:defRPr>
+              <a:buClr>
+                <a:srgbClr val="057A55"/>
+              </a:buClr>
+              <a:buChar char="•"/>
+            </a:pPr>
+            <a:r>
+              <a:t>196.91 KB dynamic SMEM per block (3x more)</a:t>
+            </a:r>
+          </a:p>
+          <a:p>
+            <a:pPr algn="l">
+              <a:spcAft>
+                <a:spcPts val="800"/>
+              </a:spcAft>
+              <a:defRPr sz="1500">
+                <a:solidFill>
+                  <a:srgbClr val="1A1A2E"/>
+                </a:solidFill>
+                <a:latin typeface="Calibri"/>
+              </a:defRPr>
+              <a:buClr>
+                <a:srgbClr val="057A55"/>
+              </a:buClr>
+              <a:buChar char="•"/>
+            </a:pPr>
+            <a:r>
+              <a:t>Register-light: 168/255 used</a:t>
+            </a:r>
+          </a:p>
+        </p:txBody>
+      </p:sp>
+      <p:sp>
+        <p:nvSpPr>
+          <p:cNvPr id="8" name="Rectangle 7"/>
           <p:cNvSpPr/>
           <p:nvPr/>
         </p:nvSpPr>
         <p:spPr>
           <a:xfrm>
-            <a:off x="914400" y="4206240"/>
-            <a:ext cx="1280160" cy="640080"/>
+            <a:off x="6035040" y="1097280"/>
+            <a:ext cx="27432" cy="4114800"/>
+          </a:xfrm>
+          <a:prstGeom prst="rect">
+            <a:avLst/>
+          </a:prstGeom>
+          <a:solidFill>
+            <a:srgbClr val="777777"/>
+          </a:solidFill>
+          <a:ln>
+            <a:noFill/>
+          </a:ln>
+        </p:spPr>
+        <p:style>
+          <a:lnRef idx="1">
+            <a:schemeClr val="accent1"/>
+          </a:lnRef>
+          <a:fillRef idx="3">
+            <a:schemeClr val="accent1"/>
+          </a:fillRef>
+          <a:effectRef idx="2">
+            <a:schemeClr val="accent1"/>
+          </a:effectRef>
+          <a:fontRef idx="minor">
+            <a:schemeClr val="lt1"/>
+          </a:fontRef>
+        </p:style>
+        <p:txBody>
+          <a:bodyPr rtlCol="0" anchor="ctr"/>
+          <a:lstStyle/>
+          <a:p>
+            <a:pPr algn="ctr"/>
+          </a:p>
+        </p:txBody>
+      </p:sp>
+      <p:sp>
+        <p:nvSpPr>
+          <p:cNvPr id="9" name="Rounded Rectangle 8"/>
+          <p:cNvSpPr/>
+          <p:nvPr/>
+        </p:nvSpPr>
+        <p:spPr>
+          <a:xfrm>
+            <a:off x="1828800" y="5029200"/>
+            <a:ext cx="8503920" cy="914400"/>
           </a:xfrm>
           <a:prstGeom prst="roundRect">
             <a:avLst/>
@@ -12028,7 +13625,7 @@
           </a:solidFill>
           <a:ln w="19050">
             <a:solidFill>
-              <a:srgbClr val="B46A00"/>
+              <a:srgbClr val="057A55"/>
             </a:solidFill>
           </a:ln>
         </p:spPr>
@@ -12051,29 +13648,29 @@
           <a:lstStyle/>
           <a:p>
             <a:pPr algn="ctr">
-              <a:defRPr sz="1600" b="1">
-                <a:solidFill>
-                  <a:srgbClr val="1A1A2E"/>
-                </a:solidFill>
-                <a:latin typeface="Calibri"/>
-              </a:defRPr>
-            </a:pPr>
-            <a:r>
-              <a:t>Gather</a:t>
-            </a:r>
-          </a:p>
-        </p:txBody>
-      </p:sp>
-      <p:sp>
-        <p:nvSpPr>
-          <p:cNvPr id="6" name="TextBox 5"/>
+              <a:defRPr sz="1800" b="1">
+                <a:solidFill>
+                  <a:srgbClr val="057A55"/>
+                </a:solidFill>
+                <a:latin typeface="Calibri"/>
+              </a:defRPr>
+            </a:pPr>
+            <a:r>
+              <a:t>TMA bypasses registers entirely — hardware DMA loads 2D tiles from HBM to SMEM</a:t>
+            </a:r>
+          </a:p>
+        </p:txBody>
+      </p:sp>
+      <p:sp>
+        <p:nvSpPr>
+          <p:cNvPr id="10" name="TextBox 9"/>
           <p:cNvSpPr txBox="1"/>
           <p:nvPr/>
         </p:nvSpPr>
         <p:spPr>
           <a:xfrm>
-            <a:off x="2377440" y="4297680"/>
-            <a:ext cx="457200" cy="457200"/>
+            <a:off x="11155680" y="6400800"/>
+            <a:ext cx="914400" cy="365760"/>
           </a:xfrm>
           <a:prstGeom prst="rect">
             <a:avLst/>
@@ -12086,327 +13683,6 @@
           </a:bodyPr>
           <a:lstStyle/>
           <a:p>
-            <a:pPr algn="ctr">
-              <a:spcAft>
-                <a:spcPts val="840"/>
-              </a:spcAft>
-              <a:defRPr sz="2800" b="1">
-                <a:solidFill>
-                  <a:srgbClr val="B46A00"/>
-                </a:solidFill>
-                <a:latin typeface="Calibri"/>
-              </a:defRPr>
-            </a:pPr>
-            <a:r>
-              <a:t>→</a:t>
-            </a:r>
-          </a:p>
-        </p:txBody>
-      </p:sp>
-      <p:sp>
-        <p:nvSpPr>
-          <p:cNvPr id="7" name="Rounded Rectangle 6"/>
-          <p:cNvSpPr/>
-          <p:nvPr/>
-        </p:nvSpPr>
-        <p:spPr>
-          <a:xfrm>
-            <a:off x="3840480" y="4206240"/>
-            <a:ext cx="1280160" cy="640080"/>
-          </a:xfrm>
-          <a:prstGeom prst="roundRect">
-            <a:avLst/>
-          </a:prstGeom>
-          <a:solidFill>
-            <a:srgbClr val="F0F4F8"/>
-          </a:solidFill>
-          <a:ln w="19050">
-            <a:solidFill>
-              <a:srgbClr val="B46A00"/>
-            </a:solidFill>
-          </a:ln>
-        </p:spPr>
-        <p:style>
-          <a:lnRef idx="1">
-            <a:schemeClr val="accent1"/>
-          </a:lnRef>
-          <a:fillRef idx="3">
-            <a:schemeClr val="accent1"/>
-          </a:fillRef>
-          <a:effectRef idx="2">
-            <a:schemeClr val="accent1"/>
-          </a:effectRef>
-          <a:fontRef idx="minor">
-            <a:schemeClr val="lt1"/>
-          </a:fontRef>
-        </p:style>
-        <p:txBody>
-          <a:bodyPr rtlCol="0" anchor="ctr" wrap="square" lIns="101600" rIns="101600" tIns="76200" bIns="76200"/>
-          <a:lstStyle/>
-          <a:p>
-            <a:pPr algn="ctr">
-              <a:defRPr sz="1600" b="1">
-                <a:solidFill>
-                  <a:srgbClr val="1A1A2E"/>
-                </a:solidFill>
-                <a:latin typeface="Calibri"/>
-              </a:defRPr>
-            </a:pPr>
-            <a:r>
-              <a:t>Pad</a:t>
-            </a:r>
-          </a:p>
-        </p:txBody>
-      </p:sp>
-      <p:sp>
-        <p:nvSpPr>
-          <p:cNvPr id="8" name="TextBox 7"/>
-          <p:cNvSpPr txBox="1"/>
-          <p:nvPr/>
-        </p:nvSpPr>
-        <p:spPr>
-          <a:xfrm>
-            <a:off x="5303520" y="4297680"/>
-            <a:ext cx="457200" cy="457200"/>
-          </a:xfrm>
-          <a:prstGeom prst="rect">
-            <a:avLst/>
-          </a:prstGeom>
-          <a:noFill/>
-        </p:spPr>
-        <p:txBody>
-          <a:bodyPr wrap="square">
-            <a:spAutoFit/>
-          </a:bodyPr>
-          <a:lstStyle/>
-          <a:p>
-            <a:pPr algn="ctr">
-              <a:spcAft>
-                <a:spcPts val="840"/>
-              </a:spcAft>
-              <a:defRPr sz="2800" b="1">
-                <a:solidFill>
-                  <a:srgbClr val="B46A00"/>
-                </a:solidFill>
-                <a:latin typeface="Calibri"/>
-              </a:defRPr>
-            </a:pPr>
-            <a:r>
-              <a:t>→</a:t>
-            </a:r>
-          </a:p>
-        </p:txBody>
-      </p:sp>
-      <p:sp>
-        <p:nvSpPr>
-          <p:cNvPr id="9" name="Rounded Rectangle 8"/>
-          <p:cNvSpPr/>
-          <p:nvPr/>
-        </p:nvSpPr>
-        <p:spPr>
-          <a:xfrm>
-            <a:off x="6766560" y="4206240"/>
-            <a:ext cx="1280160" cy="640080"/>
-          </a:xfrm>
-          <a:prstGeom prst="roundRect">
-            <a:avLst/>
-          </a:prstGeom>
-          <a:solidFill>
-            <a:srgbClr val="F0F4F8"/>
-          </a:solidFill>
-          <a:ln w="19050">
-            <a:solidFill>
-              <a:srgbClr val="B46A00"/>
-            </a:solidFill>
-          </a:ln>
-        </p:spPr>
-        <p:style>
-          <a:lnRef idx="1">
-            <a:schemeClr val="accent1"/>
-          </a:lnRef>
-          <a:fillRef idx="3">
-            <a:schemeClr val="accent1"/>
-          </a:fillRef>
-          <a:effectRef idx="2">
-            <a:schemeClr val="accent1"/>
-          </a:effectRef>
-          <a:fontRef idx="minor">
-            <a:schemeClr val="lt1"/>
-          </a:fontRef>
-        </p:style>
-        <p:txBody>
-          <a:bodyPr rtlCol="0" anchor="ctr" wrap="square" lIns="101600" rIns="101600" tIns="76200" bIns="76200"/>
-          <a:lstStyle/>
-          <a:p>
-            <a:pPr algn="ctr">
-              <a:defRPr sz="1600" b="1">
-                <a:solidFill>
-                  <a:srgbClr val="1A1A2E"/>
-                </a:solidFill>
-                <a:latin typeface="Calibri"/>
-              </a:defRPr>
-            </a:pPr>
-            <a:r>
-              <a:t>GEMM</a:t>
-            </a:r>
-          </a:p>
-        </p:txBody>
-      </p:sp>
-      <p:sp>
-        <p:nvSpPr>
-          <p:cNvPr id="10" name="TextBox 9"/>
-          <p:cNvSpPr txBox="1"/>
-          <p:nvPr/>
-        </p:nvSpPr>
-        <p:spPr>
-          <a:xfrm>
-            <a:off x="8229600" y="4297680"/>
-            <a:ext cx="457200" cy="457200"/>
-          </a:xfrm>
-          <a:prstGeom prst="rect">
-            <a:avLst/>
-          </a:prstGeom>
-          <a:noFill/>
-        </p:spPr>
-        <p:txBody>
-          <a:bodyPr wrap="square">
-            <a:spAutoFit/>
-          </a:bodyPr>
-          <a:lstStyle/>
-          <a:p>
-            <a:pPr algn="ctr">
-              <a:spcAft>
-                <a:spcPts val="840"/>
-              </a:spcAft>
-              <a:defRPr sz="2800" b="1">
-                <a:solidFill>
-                  <a:srgbClr val="B46A00"/>
-                </a:solidFill>
-                <a:latin typeface="Calibri"/>
-              </a:defRPr>
-            </a:pPr>
-            <a:r>
-              <a:t>→</a:t>
-            </a:r>
-          </a:p>
-        </p:txBody>
-      </p:sp>
-      <p:sp>
-        <p:nvSpPr>
-          <p:cNvPr id="11" name="Rounded Rectangle 10"/>
-          <p:cNvSpPr/>
-          <p:nvPr/>
-        </p:nvSpPr>
-        <p:spPr>
-          <a:xfrm>
-            <a:off x="9692640" y="4206240"/>
-            <a:ext cx="1280160" cy="640080"/>
-          </a:xfrm>
-          <a:prstGeom prst="roundRect">
-            <a:avLst/>
-          </a:prstGeom>
-          <a:solidFill>
-            <a:srgbClr val="F0F4F8"/>
-          </a:solidFill>
-          <a:ln w="19050">
-            <a:solidFill>
-              <a:srgbClr val="B46A00"/>
-            </a:solidFill>
-          </a:ln>
-        </p:spPr>
-        <p:style>
-          <a:lnRef idx="1">
-            <a:schemeClr val="accent1"/>
-          </a:lnRef>
-          <a:fillRef idx="3">
-            <a:schemeClr val="accent1"/>
-          </a:fillRef>
-          <a:effectRef idx="2">
-            <a:schemeClr val="accent1"/>
-          </a:effectRef>
-          <a:fontRef idx="minor">
-            <a:schemeClr val="lt1"/>
-          </a:fontRef>
-        </p:style>
-        <p:txBody>
-          <a:bodyPr rtlCol="0" anchor="ctr" wrap="square" lIns="101600" rIns="101600" tIns="76200" bIns="76200"/>
-          <a:lstStyle/>
-          <a:p>
-            <a:pPr algn="ctr">
-              <a:defRPr sz="1600" b="1">
-                <a:solidFill>
-                  <a:srgbClr val="1A1A2E"/>
-                </a:solidFill>
-                <a:latin typeface="Calibri"/>
-              </a:defRPr>
-            </a:pPr>
-            <a:r>
-              <a:t>Scatter</a:t>
-            </a:r>
-          </a:p>
-        </p:txBody>
-      </p:sp>
-      <p:sp>
-        <p:nvSpPr>
-          <p:cNvPr id="12" name="TextBox 11"/>
-          <p:cNvSpPr txBox="1"/>
-          <p:nvPr/>
-        </p:nvSpPr>
-        <p:spPr>
-          <a:xfrm>
-            <a:off x="1371600" y="5303520"/>
-            <a:ext cx="9418320" cy="548640"/>
-          </a:xfrm>
-          <a:prstGeom prst="rect">
-            <a:avLst/>
-          </a:prstGeom>
-          <a:noFill/>
-        </p:spPr>
-        <p:txBody>
-          <a:bodyPr wrap="square">
-            <a:spAutoFit/>
-          </a:bodyPr>
-          <a:lstStyle/>
-          <a:p>
-            <a:pPr algn="ctr">
-              <a:spcAft>
-                <a:spcPts val="600"/>
-              </a:spcAft>
-              <a:defRPr sz="2000" b="1">
-                <a:solidFill>
-                  <a:srgbClr val="B46A00"/>
-                </a:solidFill>
-                <a:latin typeface="Calibri"/>
-              </a:defRPr>
-            </a:pPr>
-            <a:r>
-              <a:t>"The IO cost scales linearly with expert granularity"</a:t>
-            </a:r>
-          </a:p>
-        </p:txBody>
-      </p:sp>
-      <p:sp>
-        <p:nvSpPr>
-          <p:cNvPr id="13" name="TextBox 12"/>
-          <p:cNvSpPr txBox="1"/>
-          <p:nvPr/>
-        </p:nvSpPr>
-        <p:spPr>
-          <a:xfrm>
-            <a:off x="11155680" y="6400800"/>
-            <a:ext cx="914400" cy="365760"/>
-          </a:xfrm>
-          <a:prstGeom prst="rect">
-            <a:avLst/>
-          </a:prstGeom>
-          <a:noFill/>
-        </p:spPr>
-        <p:txBody>
-          <a:bodyPr wrap="square">
-            <a:spAutoFit/>
-          </a:bodyPr>
-          <a:lstStyle/>
-          <a:p>
             <a:pPr algn="r">
               <a:spcAft>
                 <a:spcPts val="330"/>
@@ -12419,7 +13695,7 @@
               </a:defRPr>
             </a:pPr>
             <a:r>
-              <a:t>24/33</a:t>
+              <a:t>24/36</a:t>
             </a:r>
           </a:p>
         </p:txBody>
@@ -12527,64 +13803,1248 @@
               </a:defRPr>
             </a:pPr>
             <a:r>
-              <a:t>SonicMoE’s Key Innovations</a:t>
-            </a:r>
-          </a:p>
-        </p:txBody>
-      </p:sp>
-      <p:sp>
-        <p:nvSpPr>
-          <p:cNvPr id="4" name="Rounded Rectangle 3"/>
-          <p:cNvSpPr/>
-          <p:nvPr/>
-        </p:nvSpPr>
-        <p:spPr>
-          <a:xfrm>
-            <a:off x="822960" y="1463040"/>
-            <a:ext cx="548640" cy="548640"/>
-          </a:xfrm>
-          <a:prstGeom prst="roundRect">
-            <a:avLst/>
-          </a:prstGeom>
-          <a:solidFill>
-            <a:srgbClr val="057A55"/>
-          </a:solidFill>
-          <a:ln>
-            <a:noFill/>
-          </a:ln>
-        </p:spPr>
-        <p:style>
-          <a:lnRef idx="1">
-            <a:schemeClr val="accent1"/>
-          </a:lnRef>
-          <a:fillRef idx="3">
-            <a:schemeClr val="accent1"/>
-          </a:fillRef>
-          <a:effectRef idx="2">
-            <a:schemeClr val="accent1"/>
-          </a:effectRef>
-          <a:fontRef idx="minor">
-            <a:schemeClr val="lt1"/>
-          </a:fontRef>
-        </p:style>
-        <p:txBody>
-          <a:bodyPr rtlCol="0" anchor="ctr" wrap="square" lIns="101600" rIns="101600" tIns="76200" bIns="76200"/>
-          <a:lstStyle/>
-          <a:p>
-            <a:pPr algn="ctr">
-              <a:defRPr sz="2000" b="1">
-                <a:solidFill>
-                  <a:srgbClr val="1A1A2E"/>
-                </a:solidFill>
-                <a:latin typeface="Calibri"/>
-              </a:defRPr>
-            </a:pPr>
-            <a:r>
-              <a:t>1</a:t>
-            </a:r>
-          </a:p>
-        </p:txBody>
-      </p:sp>
+              <a:t>FA-3 — NCU Comparison (Verified on H200)</a:t>
+            </a:r>
+          </a:p>
+        </p:txBody>
+      </p:sp>
+      <p:graphicFrame>
+        <p:nvGraphicFramePr>
+          <p:cNvPr id="4" name="Table 3"/>
+          <p:cNvGraphicFramePr>
+            <a:graphicFrameLocks noGrp="1"/>
+          </p:cNvGraphicFramePr>
+          <p:nvPr/>
+        </p:nvGraphicFramePr>
+        <p:xfrm>
+          <a:off x="914400" y="1097280"/>
+          <a:ext cx="10332720" cy="4521200"/>
+        </p:xfrm>
+        <a:graphic>
+          <a:graphicData uri="http://schemas.openxmlformats.org/drawingml/2006/table">
+            <a:tbl>
+              <a:tblPr firstRow="1" bandRow="1">
+                <a:tableStyleId>{5C22544A-7EE6-4342-B048-85BDC9FD1C3A}</a:tableStyleId>
+              </a:tblPr>
+              <a:tblGrid>
+                <a:gridCol w="3200400"/>
+                <a:gridCol w="3566160"/>
+                <a:gridCol w="3566160"/>
+              </a:tblGrid>
+              <a:tr h="457200">
+                <a:tc>
+                  <a:txBody>
+                    <a:bodyPr lIns="76200" rIns="76200"/>
+                    <a:lstStyle/>
+                    <a:p>
+                      <a:pPr algn="ctr">
+                        <a:defRPr sz="1400" b="1">
+                          <a:solidFill>
+                            <a:srgbClr val="FFFFFF"/>
+                          </a:solidFill>
+                          <a:latin typeface="Calibri"/>
+                        </a:defRPr>
+                      </a:pPr>
+                      <a:r>
+                        <a:t>Metric</a:t>
+                      </a:r>
+                    </a:p>
+                  </a:txBody>
+                  <a:tcPr anchor="ctr">
+                    <a:solidFill>
+                      <a:srgbClr val="0E6EB8"/>
+                    </a:solidFill>
+                    <a:lnL w="0">
+                      <a:noFill/>
+                    </a:lnL>
+                    <a:lnR w="0">
+                      <a:noFill/>
+                    </a:lnR>
+                    <a:lnT w="0">
+                      <a:noFill/>
+                    </a:lnT>
+                    <a:lnB w="0">
+                      <a:noFill/>
+                    </a:lnB>
+                  </a:tcPr>
+                </a:tc>
+                <a:tc>
+                  <a:txBody>
+                    <a:bodyPr lIns="76200" rIns="76200"/>
+                    <a:lstStyle/>
+                    <a:p>
+                      <a:pPr algn="ctr">
+                        <a:defRPr sz="1400" b="1">
+                          <a:solidFill>
+                            <a:srgbClr val="FFFFFF"/>
+                          </a:solidFill>
+                          <a:latin typeface="Calibri"/>
+                        </a:defRPr>
+                      </a:pPr>
+                      <a:r>
+                        <a:t>FA-2 (flash_fwd_kernel)</a:t>
+                      </a:r>
+                    </a:p>
+                  </a:txBody>
+                  <a:tcPr anchor="ctr">
+                    <a:solidFill>
+                      <a:srgbClr val="0E6EB8"/>
+                    </a:solidFill>
+                    <a:lnL w="0">
+                      <a:noFill/>
+                    </a:lnL>
+                    <a:lnR w="0">
+                      <a:noFill/>
+                    </a:lnR>
+                    <a:lnT w="0">
+                      <a:noFill/>
+                    </a:lnT>
+                    <a:lnB w="0">
+                      <a:noFill/>
+                    </a:lnB>
+                  </a:tcPr>
+                </a:tc>
+                <a:tc>
+                  <a:txBody>
+                    <a:bodyPr lIns="76200" rIns="76200"/>
+                    <a:lstStyle/>
+                    <a:p>
+                      <a:pPr algn="ctr">
+                        <a:defRPr sz="1400" b="1">
+                          <a:solidFill>
+                            <a:srgbClr val="FFFFFF"/>
+                          </a:solidFill>
+                          <a:latin typeface="Calibri"/>
+                        </a:defRPr>
+                      </a:pPr>
+                      <a:r>
+                        <a:t>FA-3 (device_kernel)</a:t>
+                      </a:r>
+                    </a:p>
+                  </a:txBody>
+                  <a:tcPr anchor="ctr">
+                    <a:solidFill>
+                      <a:srgbClr val="0E6EB8"/>
+                    </a:solidFill>
+                    <a:lnL w="0">
+                      <a:noFill/>
+                    </a:lnL>
+                    <a:lnR w="0">
+                      <a:noFill/>
+                    </a:lnR>
+                    <a:lnT w="0">
+                      <a:noFill/>
+                    </a:lnT>
+                    <a:lnB w="0">
+                      <a:noFill/>
+                    </a:lnB>
+                  </a:tcPr>
+                </a:tc>
+              </a:tr>
+              <a:tr h="406400">
+                <a:tc>
+                  <a:txBody>
+                    <a:bodyPr lIns="76200" rIns="76200"/>
+                    <a:lstStyle/>
+                    <a:p>
+                      <a:pPr algn="ctr">
+                        <a:defRPr sz="1300" b="0">
+                          <a:solidFill>
+                            <a:srgbClr val="1A1A2E"/>
+                          </a:solidFill>
+                          <a:latin typeface="Calibri"/>
+                        </a:defRPr>
+                      </a:pPr>
+                      <a:r>
+                        <a:t>Duration</a:t>
+                      </a:r>
+                    </a:p>
+                  </a:txBody>
+                  <a:tcPr anchor="ctr">
+                    <a:solidFill>
+                      <a:srgbClr val="F0F4F8"/>
+                    </a:solidFill>
+                    <a:lnL w="0">
+                      <a:noFill/>
+                    </a:lnL>
+                    <a:lnR w="0">
+                      <a:noFill/>
+                    </a:lnR>
+                    <a:lnT w="0">
+                      <a:noFill/>
+                    </a:lnT>
+                    <a:lnB w="0">
+                      <a:noFill/>
+                    </a:lnB>
+                  </a:tcPr>
+                </a:tc>
+                <a:tc>
+                  <a:txBody>
+                    <a:bodyPr lIns="76200" rIns="76200"/>
+                    <a:lstStyle/>
+                    <a:p>
+                      <a:pPr algn="ctr">
+                        <a:defRPr sz="1300" b="0">
+                          <a:solidFill>
+                            <a:srgbClr val="1A1A2E"/>
+                          </a:solidFill>
+                          <a:latin typeface="Calibri"/>
+                        </a:defRPr>
+                      </a:pPr>
+                      <a:r>
+                        <a:t>76.90 µs</a:t>
+                      </a:r>
+                    </a:p>
+                  </a:txBody>
+                  <a:tcPr anchor="ctr">
+                    <a:solidFill>
+                      <a:srgbClr val="F0F4F8"/>
+                    </a:solidFill>
+                    <a:lnL w="0">
+                      <a:noFill/>
+                    </a:lnL>
+                    <a:lnR w="0">
+                      <a:noFill/>
+                    </a:lnR>
+                    <a:lnT w="0">
+                      <a:noFill/>
+                    </a:lnT>
+                    <a:lnB w="0">
+                      <a:noFill/>
+                    </a:lnB>
+                  </a:tcPr>
+                </a:tc>
+                <a:tc>
+                  <a:txBody>
+                    <a:bodyPr lIns="76200" rIns="76200"/>
+                    <a:lstStyle/>
+                    <a:p>
+                      <a:pPr algn="ctr">
+                        <a:defRPr sz="1300" b="0">
+                          <a:solidFill>
+                            <a:srgbClr val="1A1A2E"/>
+                          </a:solidFill>
+                          <a:latin typeface="Calibri"/>
+                        </a:defRPr>
+                      </a:pPr>
+                      <a:r>
+                        <a:t>35.46 µs</a:t>
+                      </a:r>
+                    </a:p>
+                  </a:txBody>
+                  <a:tcPr anchor="ctr">
+                    <a:solidFill>
+                      <a:srgbClr val="F0F4F8"/>
+                    </a:solidFill>
+                    <a:lnL w="0">
+                      <a:noFill/>
+                    </a:lnL>
+                    <a:lnR w="0">
+                      <a:noFill/>
+                    </a:lnR>
+                    <a:lnT w="0">
+                      <a:noFill/>
+                    </a:lnT>
+                    <a:lnB w="0">
+                      <a:noFill/>
+                    </a:lnB>
+                  </a:tcPr>
+                </a:tc>
+              </a:tr>
+              <a:tr h="406400">
+                <a:tc>
+                  <a:txBody>
+                    <a:bodyPr lIns="76200" rIns="76200"/>
+                    <a:lstStyle/>
+                    <a:p>
+                      <a:pPr algn="ctr">
+                        <a:defRPr sz="1300" b="0">
+                          <a:solidFill>
+                            <a:srgbClr val="1A1A2E"/>
+                          </a:solidFill>
+                          <a:latin typeface="Calibri"/>
+                        </a:defRPr>
+                      </a:pPr>
+                      <a:r>
+                        <a:t>Compute Throughput</a:t>
+                      </a:r>
+                    </a:p>
+                  </a:txBody>
+                  <a:tcPr anchor="ctr">
+                    <a:solidFill>
+                      <a:srgbClr val="E8EEF4"/>
+                    </a:solidFill>
+                    <a:lnL w="0">
+                      <a:noFill/>
+                    </a:lnL>
+                    <a:lnR w="0">
+                      <a:noFill/>
+                    </a:lnR>
+                    <a:lnT w="0">
+                      <a:noFill/>
+                    </a:lnT>
+                    <a:lnB w="0">
+                      <a:noFill/>
+                    </a:lnB>
+                  </a:tcPr>
+                </a:tc>
+                <a:tc>
+                  <a:txBody>
+                    <a:bodyPr lIns="76200" rIns="76200"/>
+                    <a:lstStyle/>
+                    <a:p>
+                      <a:pPr algn="ctr">
+                        <a:defRPr sz="1300" b="0">
+                          <a:solidFill>
+                            <a:srgbClr val="1A1A2E"/>
+                          </a:solidFill>
+                          <a:latin typeface="Calibri"/>
+                        </a:defRPr>
+                      </a:pPr>
+                      <a:r>
+                        <a:t>28.56%</a:t>
+                      </a:r>
+                    </a:p>
+                  </a:txBody>
+                  <a:tcPr anchor="ctr">
+                    <a:solidFill>
+                      <a:srgbClr val="E8EEF4"/>
+                    </a:solidFill>
+                    <a:lnL w="0">
+                      <a:noFill/>
+                    </a:lnL>
+                    <a:lnR w="0">
+                      <a:noFill/>
+                    </a:lnR>
+                    <a:lnT w="0">
+                      <a:noFill/>
+                    </a:lnT>
+                    <a:lnB w="0">
+                      <a:noFill/>
+                    </a:lnB>
+                  </a:tcPr>
+                </a:tc>
+                <a:tc>
+                  <a:txBody>
+                    <a:bodyPr lIns="76200" rIns="76200"/>
+                    <a:lstStyle/>
+                    <a:p>
+                      <a:pPr algn="ctr">
+                        <a:defRPr sz="1300" b="0">
+                          <a:solidFill>
+                            <a:srgbClr val="1A1A2E"/>
+                          </a:solidFill>
+                          <a:latin typeface="Calibri"/>
+                        </a:defRPr>
+                      </a:pPr>
+                      <a:r>
+                        <a:t>41.80%</a:t>
+                      </a:r>
+                    </a:p>
+                  </a:txBody>
+                  <a:tcPr anchor="ctr">
+                    <a:solidFill>
+                      <a:srgbClr val="E8EEF4"/>
+                    </a:solidFill>
+                    <a:lnL w="0">
+                      <a:noFill/>
+                    </a:lnL>
+                    <a:lnR w="0">
+                      <a:noFill/>
+                    </a:lnR>
+                    <a:lnT w="0">
+                      <a:noFill/>
+                    </a:lnT>
+                    <a:lnB w="0">
+                      <a:noFill/>
+                    </a:lnB>
+                  </a:tcPr>
+                </a:tc>
+              </a:tr>
+              <a:tr h="406400">
+                <a:tc>
+                  <a:txBody>
+                    <a:bodyPr lIns="76200" rIns="76200"/>
+                    <a:lstStyle/>
+                    <a:p>
+                      <a:pPr algn="ctr">
+                        <a:defRPr sz="1300" b="0">
+                          <a:solidFill>
+                            <a:srgbClr val="1A1A2E"/>
+                          </a:solidFill>
+                          <a:latin typeface="Calibri"/>
+                        </a:defRPr>
+                      </a:pPr>
+                      <a:r>
+                        <a:t>Registers/Thread</a:t>
+                      </a:r>
+                    </a:p>
+                  </a:txBody>
+                  <a:tcPr anchor="ctr">
+                    <a:solidFill>
+                      <a:srgbClr val="F0F4F8"/>
+                    </a:solidFill>
+                    <a:lnL w="0">
+                      <a:noFill/>
+                    </a:lnL>
+                    <a:lnR w="0">
+                      <a:noFill/>
+                    </a:lnR>
+                    <a:lnT w="0">
+                      <a:noFill/>
+                    </a:lnT>
+                    <a:lnB w="0">
+                      <a:noFill/>
+                    </a:lnB>
+                  </a:tcPr>
+                </a:tc>
+                <a:tc>
+                  <a:txBody>
+                    <a:bodyPr lIns="76200" rIns="76200"/>
+                    <a:lstStyle/>
+                    <a:p>
+                      <a:pPr algn="ctr">
+                        <a:defRPr sz="1300" b="0">
+                          <a:solidFill>
+                            <a:srgbClr val="1A1A2E"/>
+                          </a:solidFill>
+                          <a:latin typeface="Calibri"/>
+                        </a:defRPr>
+                      </a:pPr>
+                      <a:r>
+                        <a:t>255 (max!)</a:t>
+                      </a:r>
+                    </a:p>
+                  </a:txBody>
+                  <a:tcPr anchor="ctr">
+                    <a:solidFill>
+                      <a:srgbClr val="F0F4F8"/>
+                    </a:solidFill>
+                    <a:lnL w="0">
+                      <a:noFill/>
+                    </a:lnL>
+                    <a:lnR w="0">
+                      <a:noFill/>
+                    </a:lnR>
+                    <a:lnT w="0">
+                      <a:noFill/>
+                    </a:lnT>
+                    <a:lnB w="0">
+                      <a:noFill/>
+                    </a:lnB>
+                  </a:tcPr>
+                </a:tc>
+                <a:tc>
+                  <a:txBody>
+                    <a:bodyPr lIns="76200" rIns="76200"/>
+                    <a:lstStyle/>
+                    <a:p>
+                      <a:pPr algn="ctr">
+                        <a:defRPr sz="1300" b="0">
+                          <a:solidFill>
+                            <a:srgbClr val="1A1A2E"/>
+                          </a:solidFill>
+                          <a:latin typeface="Calibri"/>
+                        </a:defRPr>
+                      </a:pPr>
+                      <a:r>
+                        <a:t>168</a:t>
+                      </a:r>
+                    </a:p>
+                  </a:txBody>
+                  <a:tcPr anchor="ctr">
+                    <a:solidFill>
+                      <a:srgbClr val="F0F4F8"/>
+                    </a:solidFill>
+                    <a:lnL w="0">
+                      <a:noFill/>
+                    </a:lnL>
+                    <a:lnR w="0">
+                      <a:noFill/>
+                    </a:lnR>
+                    <a:lnT w="0">
+                      <a:noFill/>
+                    </a:lnT>
+                    <a:lnB w="0">
+                      <a:noFill/>
+                    </a:lnB>
+                  </a:tcPr>
+                </a:tc>
+              </a:tr>
+              <a:tr h="406400">
+                <a:tc>
+                  <a:txBody>
+                    <a:bodyPr lIns="76200" rIns="76200"/>
+                    <a:lstStyle/>
+                    <a:p>
+                      <a:pPr algn="ctr">
+                        <a:defRPr sz="1300" b="0">
+                          <a:solidFill>
+                            <a:srgbClr val="1A1A2E"/>
+                          </a:solidFill>
+                          <a:latin typeface="Calibri"/>
+                        </a:defRPr>
+                      </a:pPr>
+                      <a:r>
+                        <a:t>Block Size</a:t>
+                      </a:r>
+                    </a:p>
+                  </a:txBody>
+                  <a:tcPr anchor="ctr">
+                    <a:solidFill>
+                      <a:srgbClr val="E8EEF4"/>
+                    </a:solidFill>
+                    <a:lnL w="0">
+                      <a:noFill/>
+                    </a:lnL>
+                    <a:lnR w="0">
+                      <a:noFill/>
+                    </a:lnR>
+                    <a:lnT w="0">
+                      <a:noFill/>
+                    </a:lnT>
+                    <a:lnB w="0">
+                      <a:noFill/>
+                    </a:lnB>
+                  </a:tcPr>
+                </a:tc>
+                <a:tc>
+                  <a:txBody>
+                    <a:bodyPr lIns="76200" rIns="76200"/>
+                    <a:lstStyle/>
+                    <a:p>
+                      <a:pPr algn="ctr">
+                        <a:defRPr sz="1300" b="0">
+                          <a:solidFill>
+                            <a:srgbClr val="1A1A2E"/>
+                          </a:solidFill>
+                          <a:latin typeface="Calibri"/>
+                        </a:defRPr>
+                      </a:pPr>
+                      <a:r>
+                        <a:t>128 (4 warps)</a:t>
+                      </a:r>
+                    </a:p>
+                  </a:txBody>
+                  <a:tcPr anchor="ctr">
+                    <a:solidFill>
+                      <a:srgbClr val="E8EEF4"/>
+                    </a:solidFill>
+                    <a:lnL w="0">
+                      <a:noFill/>
+                    </a:lnL>
+                    <a:lnR w="0">
+                      <a:noFill/>
+                    </a:lnR>
+                    <a:lnT w="0">
+                      <a:noFill/>
+                    </a:lnT>
+                    <a:lnB w="0">
+                      <a:noFill/>
+                    </a:lnB>
+                  </a:tcPr>
+                </a:tc>
+                <a:tc>
+                  <a:txBody>
+                    <a:bodyPr lIns="76200" rIns="76200"/>
+                    <a:lstStyle/>
+                    <a:p>
+                      <a:pPr algn="ctr">
+                        <a:defRPr sz="1300" b="0">
+                          <a:solidFill>
+                            <a:srgbClr val="1A1A2E"/>
+                          </a:solidFill>
+                          <a:latin typeface="Calibri"/>
+                        </a:defRPr>
+                      </a:pPr>
+                      <a:r>
+                        <a:t>384 (12 warps)</a:t>
+                      </a:r>
+                    </a:p>
+                  </a:txBody>
+                  <a:tcPr anchor="ctr">
+                    <a:solidFill>
+                      <a:srgbClr val="E8EEF4"/>
+                    </a:solidFill>
+                    <a:lnL w="0">
+                      <a:noFill/>
+                    </a:lnL>
+                    <a:lnR w="0">
+                      <a:noFill/>
+                    </a:lnR>
+                    <a:lnT w="0">
+                      <a:noFill/>
+                    </a:lnT>
+                    <a:lnB w="0">
+                      <a:noFill/>
+                    </a:lnB>
+                  </a:tcPr>
+                </a:tc>
+              </a:tr>
+              <a:tr h="406400">
+                <a:tc>
+                  <a:txBody>
+                    <a:bodyPr lIns="76200" rIns="76200"/>
+                    <a:lstStyle/>
+                    <a:p>
+                      <a:pPr algn="ctr">
+                        <a:defRPr sz="1300" b="0">
+                          <a:solidFill>
+                            <a:srgbClr val="1A1A2E"/>
+                          </a:solidFill>
+                          <a:latin typeface="Calibri"/>
+                        </a:defRPr>
+                      </a:pPr>
+                      <a:r>
+                        <a:t>Dynamic SMEM/Block</a:t>
+                      </a:r>
+                    </a:p>
+                  </a:txBody>
+                  <a:tcPr anchor="ctr">
+                    <a:solidFill>
+                      <a:srgbClr val="F0F4F8"/>
+                    </a:solidFill>
+                    <a:lnL w="0">
+                      <a:noFill/>
+                    </a:lnL>
+                    <a:lnR w="0">
+                      <a:noFill/>
+                    </a:lnR>
+                    <a:lnT w="0">
+                      <a:noFill/>
+                    </a:lnT>
+                    <a:lnB w="0">
+                      <a:noFill/>
+                    </a:lnB>
+                  </a:tcPr>
+                </a:tc>
+                <a:tc>
+                  <a:txBody>
+                    <a:bodyPr lIns="76200" rIns="76200"/>
+                    <a:lstStyle/>
+                    <a:p>
+                      <a:pPr algn="ctr">
+                        <a:defRPr sz="1300" b="0">
+                          <a:solidFill>
+                            <a:srgbClr val="1A1A2E"/>
+                          </a:solidFill>
+                          <a:latin typeface="Calibri"/>
+                        </a:defRPr>
+                      </a:pPr>
+                      <a:r>
+                        <a:t>63.54 KB</a:t>
+                      </a:r>
+                    </a:p>
+                  </a:txBody>
+                  <a:tcPr anchor="ctr">
+                    <a:solidFill>
+                      <a:srgbClr val="F0F4F8"/>
+                    </a:solidFill>
+                    <a:lnL w="0">
+                      <a:noFill/>
+                    </a:lnL>
+                    <a:lnR w="0">
+                      <a:noFill/>
+                    </a:lnR>
+                    <a:lnT w="0">
+                      <a:noFill/>
+                    </a:lnT>
+                    <a:lnB w="0">
+                      <a:noFill/>
+                    </a:lnB>
+                  </a:tcPr>
+                </a:tc>
+                <a:tc>
+                  <a:txBody>
+                    <a:bodyPr lIns="76200" rIns="76200"/>
+                    <a:lstStyle/>
+                    <a:p>
+                      <a:pPr algn="ctr">
+                        <a:defRPr sz="1300" b="0">
+                          <a:solidFill>
+                            <a:srgbClr val="1A1A2E"/>
+                          </a:solidFill>
+                          <a:latin typeface="Calibri"/>
+                        </a:defRPr>
+                      </a:pPr>
+                      <a:r>
+                        <a:t>196.91 KB</a:t>
+                      </a:r>
+                    </a:p>
+                  </a:txBody>
+                  <a:tcPr anchor="ctr">
+                    <a:solidFill>
+                      <a:srgbClr val="F0F4F8"/>
+                    </a:solidFill>
+                    <a:lnL w="0">
+                      <a:noFill/>
+                    </a:lnL>
+                    <a:lnR w="0">
+                      <a:noFill/>
+                    </a:lnR>
+                    <a:lnT w="0">
+                      <a:noFill/>
+                    </a:lnT>
+                    <a:lnB w="0">
+                      <a:noFill/>
+                    </a:lnB>
+                  </a:tcPr>
+                </a:tc>
+              </a:tr>
+              <a:tr h="406400">
+                <a:tc>
+                  <a:txBody>
+                    <a:bodyPr lIns="76200" rIns="76200"/>
+                    <a:lstStyle/>
+                    <a:p>
+                      <a:pPr algn="ctr">
+                        <a:defRPr sz="1300" b="0">
+                          <a:solidFill>
+                            <a:srgbClr val="1A1A2E"/>
+                          </a:solidFill>
+                          <a:latin typeface="Calibri"/>
+                        </a:defRPr>
+                      </a:pPr>
+                      <a:r>
+                        <a:t>TMA Instructions</a:t>
+                      </a:r>
+                    </a:p>
+                  </a:txBody>
+                  <a:tcPr anchor="ctr">
+                    <a:solidFill>
+                      <a:srgbClr val="E8EEF4"/>
+                    </a:solidFill>
+                    <a:lnL w="0">
+                      <a:noFill/>
+                    </a:lnL>
+                    <a:lnR w="0">
+                      <a:noFill/>
+                    </a:lnR>
+                    <a:lnT w="0">
+                      <a:noFill/>
+                    </a:lnT>
+                    <a:lnB w="0">
+                      <a:noFill/>
+                    </a:lnB>
+                  </a:tcPr>
+                </a:tc>
+                <a:tc>
+                  <a:txBody>
+                    <a:bodyPr lIns="76200" rIns="76200"/>
+                    <a:lstStyle/>
+                    <a:p>
+                      <a:pPr algn="ctr">
+                        <a:defRPr sz="1300" b="0">
+                          <a:solidFill>
+                            <a:srgbClr val="1A1A2E"/>
+                          </a:solidFill>
+                          <a:latin typeface="Calibri"/>
+                        </a:defRPr>
+                      </a:pPr>
+                      <a:r>
+                        <a:t>0</a:t>
+                      </a:r>
+                    </a:p>
+                  </a:txBody>
+                  <a:tcPr anchor="ctr">
+                    <a:solidFill>
+                      <a:srgbClr val="E8EEF4"/>
+                    </a:solidFill>
+                    <a:lnL w="0">
+                      <a:noFill/>
+                    </a:lnL>
+                    <a:lnR w="0">
+                      <a:noFill/>
+                    </a:lnR>
+                    <a:lnT w="0">
+                      <a:noFill/>
+                    </a:lnT>
+                    <a:lnB w="0">
+                      <a:noFill/>
+                    </a:lnB>
+                  </a:tcPr>
+                </a:tc>
+                <a:tc>
+                  <a:txBody>
+                    <a:bodyPr lIns="76200" rIns="76200"/>
+                    <a:lstStyle/>
+                    <a:p>
+                      <a:pPr algn="ctr">
+                        <a:defRPr sz="1300" b="0">
+                          <a:solidFill>
+                            <a:srgbClr val="1A1A2E"/>
+                          </a:solidFill>
+                          <a:latin typeface="Calibri"/>
+                        </a:defRPr>
+                      </a:pPr>
+                      <a:r>
+                        <a:t>7,170</a:t>
+                      </a:r>
+                    </a:p>
+                  </a:txBody>
+                  <a:tcPr anchor="ctr">
+                    <a:solidFill>
+                      <a:srgbClr val="E8EEF4"/>
+                    </a:solidFill>
+                    <a:lnL w="0">
+                      <a:noFill/>
+                    </a:lnL>
+                    <a:lnR w="0">
+                      <a:noFill/>
+                    </a:lnR>
+                    <a:lnT w="0">
+                      <a:noFill/>
+                    </a:lnT>
+                    <a:lnB w="0">
+                      <a:noFill/>
+                    </a:lnB>
+                  </a:tcPr>
+                </a:tc>
+              </a:tr>
+              <a:tr h="406400">
+                <a:tc>
+                  <a:txBody>
+                    <a:bodyPr lIns="76200" rIns="76200"/>
+                    <a:lstStyle/>
+                    <a:p>
+                      <a:pPr algn="ctr">
+                        <a:defRPr sz="1300" b="0">
+                          <a:solidFill>
+                            <a:srgbClr val="1A1A2E"/>
+                          </a:solidFill>
+                          <a:latin typeface="Calibri"/>
+                        </a:defRPr>
+                      </a:pPr>
+                      <a:r>
+                        <a:t>Local Mem Loads</a:t>
+                      </a:r>
+                    </a:p>
+                  </a:txBody>
+                  <a:tcPr anchor="ctr">
+                    <a:solidFill>
+                      <a:srgbClr val="F0F4F8"/>
+                    </a:solidFill>
+                    <a:lnL w="0">
+                      <a:noFill/>
+                    </a:lnL>
+                    <a:lnR w="0">
+                      <a:noFill/>
+                    </a:lnR>
+                    <a:lnT w="0">
+                      <a:noFill/>
+                    </a:lnT>
+                    <a:lnB w="0">
+                      <a:noFill/>
+                    </a:lnB>
+                  </a:tcPr>
+                </a:tc>
+                <a:tc>
+                  <a:txBody>
+                    <a:bodyPr lIns="76200" rIns="76200"/>
+                    <a:lstStyle/>
+                    <a:p>
+                      <a:pPr algn="ctr">
+                        <a:defRPr sz="1300" b="0">
+                          <a:solidFill>
+                            <a:srgbClr val="1A1A2E"/>
+                          </a:solidFill>
+                          <a:latin typeface="Calibri"/>
+                        </a:defRPr>
+                      </a:pPr>
+                      <a:r>
+                        <a:t>211,970 (spills!)</a:t>
+                      </a:r>
+                    </a:p>
+                  </a:txBody>
+                  <a:tcPr anchor="ctr">
+                    <a:solidFill>
+                      <a:srgbClr val="F0F4F8"/>
+                    </a:solidFill>
+                    <a:lnL w="0">
+                      <a:noFill/>
+                    </a:lnL>
+                    <a:lnR w="0">
+                      <a:noFill/>
+                    </a:lnR>
+                    <a:lnT w="0">
+                      <a:noFill/>
+                    </a:lnT>
+                    <a:lnB w="0">
+                      <a:noFill/>
+                    </a:lnB>
+                  </a:tcPr>
+                </a:tc>
+                <a:tc>
+                  <a:txBody>
+                    <a:bodyPr lIns="76200" rIns="76200"/>
+                    <a:lstStyle/>
+                    <a:p>
+                      <a:pPr algn="ctr">
+                        <a:defRPr sz="1300" b="0">
+                          <a:solidFill>
+                            <a:srgbClr val="1A1A2E"/>
+                          </a:solidFill>
+                          <a:latin typeface="Calibri"/>
+                        </a:defRPr>
+                      </a:pPr>
+                      <a:r>
+                        <a:t>0</a:t>
+                      </a:r>
+                    </a:p>
+                  </a:txBody>
+                  <a:tcPr anchor="ctr">
+                    <a:solidFill>
+                      <a:srgbClr val="F0F4F8"/>
+                    </a:solidFill>
+                    <a:lnL w="0">
+                      <a:noFill/>
+                    </a:lnL>
+                    <a:lnR w="0">
+                      <a:noFill/>
+                    </a:lnR>
+                    <a:lnT w="0">
+                      <a:noFill/>
+                    </a:lnT>
+                    <a:lnB w="0">
+                      <a:noFill/>
+                    </a:lnB>
+                  </a:tcPr>
+                </a:tc>
+              </a:tr>
+              <a:tr h="406400">
+                <a:tc>
+                  <a:txBody>
+                    <a:bodyPr lIns="76200" rIns="76200"/>
+                    <a:lstStyle/>
+                    <a:p>
+                      <a:pPr algn="ctr">
+                        <a:defRPr sz="1300" b="0">
+                          <a:solidFill>
+                            <a:srgbClr val="1A1A2E"/>
+                          </a:solidFill>
+                          <a:latin typeface="Calibri"/>
+                        </a:defRPr>
+                      </a:pPr>
+                      <a:r>
+                        <a:t>L1/TEX Hit Rate</a:t>
+                      </a:r>
+                    </a:p>
+                  </a:txBody>
+                  <a:tcPr anchor="ctr">
+                    <a:solidFill>
+                      <a:srgbClr val="E8EEF4"/>
+                    </a:solidFill>
+                    <a:lnL w="0">
+                      <a:noFill/>
+                    </a:lnL>
+                    <a:lnR w="0">
+                      <a:noFill/>
+                    </a:lnR>
+                    <a:lnT w="0">
+                      <a:noFill/>
+                    </a:lnT>
+                    <a:lnB w="0">
+                      <a:noFill/>
+                    </a:lnB>
+                  </a:tcPr>
+                </a:tc>
+                <a:tc>
+                  <a:txBody>
+                    <a:bodyPr lIns="76200" rIns="76200"/>
+                    <a:lstStyle/>
+                    <a:p>
+                      <a:pPr algn="ctr">
+                        <a:defRPr sz="1300" b="0">
+                          <a:solidFill>
+                            <a:srgbClr val="1A1A2E"/>
+                          </a:solidFill>
+                          <a:latin typeface="Calibri"/>
+                        </a:defRPr>
+                      </a:pPr>
+                      <a:r>
+                        <a:t>9.04%</a:t>
+                      </a:r>
+                    </a:p>
+                  </a:txBody>
+                  <a:tcPr anchor="ctr">
+                    <a:solidFill>
+                      <a:srgbClr val="E8EEF4"/>
+                    </a:solidFill>
+                    <a:lnL w="0">
+                      <a:noFill/>
+                    </a:lnL>
+                    <a:lnR w="0">
+                      <a:noFill/>
+                    </a:lnR>
+                    <a:lnT w="0">
+                      <a:noFill/>
+                    </a:lnT>
+                    <a:lnB w="0">
+                      <a:noFill/>
+                    </a:lnB>
+                  </a:tcPr>
+                </a:tc>
+                <a:tc>
+                  <a:txBody>
+                    <a:bodyPr lIns="76200" rIns="76200"/>
+                    <a:lstStyle/>
+                    <a:p>
+                      <a:pPr algn="ctr">
+                        <a:defRPr sz="1300" b="0">
+                          <a:solidFill>
+                            <a:srgbClr val="1A1A2E"/>
+                          </a:solidFill>
+                          <a:latin typeface="Calibri"/>
+                        </a:defRPr>
+                      </a:pPr>
+                      <a:r>
+                        <a:t>67.29%</a:t>
+                      </a:r>
+                    </a:p>
+                  </a:txBody>
+                  <a:tcPr anchor="ctr">
+                    <a:solidFill>
+                      <a:srgbClr val="E8EEF4"/>
+                    </a:solidFill>
+                    <a:lnL w="0">
+                      <a:noFill/>
+                    </a:lnL>
+                    <a:lnR w="0">
+                      <a:noFill/>
+                    </a:lnR>
+                    <a:lnT w="0">
+                      <a:noFill/>
+                    </a:lnT>
+                    <a:lnB w="0">
+                      <a:noFill/>
+                    </a:lnB>
+                  </a:tcPr>
+                </a:tc>
+              </a:tr>
+              <a:tr h="406400">
+                <a:tc>
+                  <a:txBody>
+                    <a:bodyPr lIns="76200" rIns="76200"/>
+                    <a:lstStyle/>
+                    <a:p>
+                      <a:pPr algn="ctr">
+                        <a:defRPr sz="1300" b="0">
+                          <a:solidFill>
+                            <a:srgbClr val="1A1A2E"/>
+                          </a:solidFill>
+                          <a:latin typeface="Calibri"/>
+                        </a:defRPr>
+                      </a:pPr>
+                      <a:r>
+                        <a:t>Achieved Occupancy</a:t>
+                      </a:r>
+                    </a:p>
+                  </a:txBody>
+                  <a:tcPr anchor="ctr">
+                    <a:solidFill>
+                      <a:srgbClr val="F0F4F8"/>
+                    </a:solidFill>
+                    <a:lnL w="0">
+                      <a:noFill/>
+                    </a:lnL>
+                    <a:lnR w="0">
+                      <a:noFill/>
+                    </a:lnR>
+                    <a:lnT w="0">
+                      <a:noFill/>
+                    </a:lnT>
+                    <a:lnB w="0">
+                      <a:noFill/>
+                    </a:lnB>
+                  </a:tcPr>
+                </a:tc>
+                <a:tc>
+                  <a:txBody>
+                    <a:bodyPr lIns="76200" rIns="76200"/>
+                    <a:lstStyle/>
+                    <a:p>
+                      <a:pPr algn="ctr">
+                        <a:defRPr sz="1300" b="0">
+                          <a:solidFill>
+                            <a:srgbClr val="1A1A2E"/>
+                          </a:solidFill>
+                          <a:latin typeface="Calibri"/>
+                        </a:defRPr>
+                      </a:pPr>
+                      <a:r>
+                        <a:t>1.18%</a:t>
+                      </a:r>
+                    </a:p>
+                  </a:txBody>
+                  <a:tcPr anchor="ctr">
+                    <a:solidFill>
+                      <a:srgbClr val="F0F4F8"/>
+                    </a:solidFill>
+                    <a:lnL w="0">
+                      <a:noFill/>
+                    </a:lnL>
+                    <a:lnR w="0">
+                      <a:noFill/>
+                    </a:lnR>
+                    <a:lnT w="0">
+                      <a:noFill/>
+                    </a:lnT>
+                    <a:lnB w="0">
+                      <a:noFill/>
+                    </a:lnB>
+                  </a:tcPr>
+                </a:tc>
+                <a:tc>
+                  <a:txBody>
+                    <a:bodyPr lIns="76200" rIns="76200"/>
+                    <a:lstStyle/>
+                    <a:p>
+                      <a:pPr algn="ctr">
+                        <a:defRPr sz="1300" b="0">
+                          <a:solidFill>
+                            <a:srgbClr val="1A1A2E"/>
+                          </a:solidFill>
+                          <a:latin typeface="Calibri"/>
+                        </a:defRPr>
+                      </a:pPr>
+                      <a:r>
+                        <a:t>13.10%</a:t>
+                      </a:r>
+                    </a:p>
+                  </a:txBody>
+                  <a:tcPr anchor="ctr">
+                    <a:solidFill>
+                      <a:srgbClr val="F0F4F8"/>
+                    </a:solidFill>
+                    <a:lnL w="0">
+                      <a:noFill/>
+                    </a:lnL>
+                    <a:lnR w="0">
+                      <a:noFill/>
+                    </a:lnR>
+                    <a:lnT w="0">
+                      <a:noFill/>
+                    </a:lnT>
+                    <a:lnB w="0">
+                      <a:noFill/>
+                    </a:lnB>
+                  </a:tcPr>
+                </a:tc>
+              </a:tr>
+              <a:tr h="406400">
+                <a:tc>
+                  <a:txBody>
+                    <a:bodyPr lIns="76200" rIns="76200"/>
+                    <a:lstStyle/>
+                    <a:p>
+                      <a:pPr algn="ctr">
+                        <a:defRPr sz="1300" b="0">
+                          <a:solidFill>
+                            <a:srgbClr val="1A1A2E"/>
+                          </a:solidFill>
+                          <a:latin typeface="Calibri"/>
+                        </a:defRPr>
+                      </a:pPr>
+                      <a:r>
+                        <a:t>Theor. Occupancy</a:t>
+                      </a:r>
+                    </a:p>
+                  </a:txBody>
+                  <a:tcPr anchor="ctr">
+                    <a:solidFill>
+                      <a:srgbClr val="E8EEF4"/>
+                    </a:solidFill>
+                    <a:lnL w="0">
+                      <a:noFill/>
+                    </a:lnL>
+                    <a:lnR w="0">
+                      <a:noFill/>
+                    </a:lnR>
+                    <a:lnT w="0">
+                      <a:noFill/>
+                    </a:lnT>
+                    <a:lnB w="0">
+                      <a:noFill/>
+                    </a:lnB>
+                  </a:tcPr>
+                </a:tc>
+                <a:tc>
+                  <a:txBody>
+                    <a:bodyPr lIns="76200" rIns="76200"/>
+                    <a:lstStyle/>
+                    <a:p>
+                      <a:pPr algn="ctr">
+                        <a:defRPr sz="1300" b="0">
+                          <a:solidFill>
+                            <a:srgbClr val="1A1A2E"/>
+                          </a:solidFill>
+                          <a:latin typeface="Calibri"/>
+                        </a:defRPr>
+                      </a:pPr>
+                      <a:r>
+                        <a:t>12.50%</a:t>
+                      </a:r>
+                    </a:p>
+                  </a:txBody>
+                  <a:tcPr anchor="ctr">
+                    <a:solidFill>
+                      <a:srgbClr val="E8EEF4"/>
+                    </a:solidFill>
+                    <a:lnL w="0">
+                      <a:noFill/>
+                    </a:lnL>
+                    <a:lnR w="0">
+                      <a:noFill/>
+                    </a:lnR>
+                    <a:lnT w="0">
+                      <a:noFill/>
+                    </a:lnT>
+                    <a:lnB w="0">
+                      <a:noFill/>
+                    </a:lnB>
+                  </a:tcPr>
+                </a:tc>
+                <a:tc>
+                  <a:txBody>
+                    <a:bodyPr lIns="76200" rIns="76200"/>
+                    <a:lstStyle/>
+                    <a:p>
+                      <a:pPr algn="ctr">
+                        <a:defRPr sz="1300" b="0">
+                          <a:solidFill>
+                            <a:srgbClr val="1A1A2E"/>
+                          </a:solidFill>
+                          <a:latin typeface="Calibri"/>
+                        </a:defRPr>
+                      </a:pPr>
+                      <a:r>
+                        <a:t>18.75%</a:t>
+                      </a:r>
+                    </a:p>
+                  </a:txBody>
+                  <a:tcPr anchor="ctr">
+                    <a:solidFill>
+                      <a:srgbClr val="E8EEF4"/>
+                    </a:solidFill>
+                    <a:lnL w="0">
+                      <a:noFill/>
+                    </a:lnL>
+                    <a:lnR w="0">
+                      <a:noFill/>
+                    </a:lnR>
+                    <a:lnT w="0">
+                      <a:noFill/>
+                    </a:lnT>
+                    <a:lnB w="0">
+                      <a:noFill/>
+                    </a:lnB>
+                  </a:tcPr>
+                </a:tc>
+              </a:tr>
+            </a:tbl>
+          </a:graphicData>
+        </a:graphic>
+      </p:graphicFrame>
       <p:sp>
         <p:nvSpPr>
           <p:cNvPr id="5" name="TextBox 4"/>
@@ -12593,8 +15053,8 @@
         </p:nvSpPr>
         <p:spPr>
           <a:xfrm>
-            <a:off x="1645920" y="1463040"/>
-            <a:ext cx="3657600" cy="457200"/>
+            <a:off x="914400" y="5943600"/>
+            <a:ext cx="10332720" cy="457200"/>
           </a:xfrm>
           <a:prstGeom prst="rect">
             <a:avLst/>
@@ -12607,11 +15067,11 @@
           </a:bodyPr>
           <a:lstStyle/>
           <a:p>
-            <a:pPr algn="l">
-              <a:spcAft>
-                <a:spcPts val="660"/>
-              </a:spcAft>
-              <a:defRPr sz="2200" b="1">
+            <a:pPr algn="ctr">
+              <a:spcAft>
+                <a:spcPts val="540"/>
+              </a:spcAft>
+              <a:defRPr sz="1800" b="1">
                 <a:solidFill>
                   <a:srgbClr val="057A55"/>
                 </a:solidFill>
@@ -12619,7 +15079,7 @@
               </a:defRPr>
             </a:pPr>
             <a:r>
-              <a:t>Gather Fusion</a:t>
+              <a:t>FA-3: 2.17x faster, 11x better occupancy, zero register spills</a:t>
             </a:r>
           </a:p>
         </p:txBody>
@@ -12632,8 +15092,8 @@
         </p:nvSpPr>
         <p:spPr>
           <a:xfrm>
-            <a:off x="1645920" y="1920240"/>
-            <a:ext cx="9144000" cy="457200"/>
+            <a:off x="11155680" y="6400800"/>
+            <a:ext cx="914400" cy="365760"/>
           </a:xfrm>
           <a:prstGeom prst="rect">
             <a:avLst/>
@@ -12646,362 +15106,6 @@
           </a:bodyPr>
           <a:lstStyle/>
           <a:p>
-            <a:pPr algn="l">
-              <a:spcAft>
-                <a:spcPts val="509"/>
-              </a:spcAft>
-              <a:defRPr sz="1700" b="0">
-                <a:solidFill>
-                  <a:srgbClr val="1A1A2E"/>
-                </a:solidFill>
-                <a:latin typeface="Calibri"/>
-              </a:defRPr>
-            </a:pPr>
-            <a:r>
-              <a:t>Token gather fused with GEMM prologue (no separate kernel)</a:t>
-            </a:r>
-          </a:p>
-        </p:txBody>
-      </p:sp>
-      <p:sp>
-        <p:nvSpPr>
-          <p:cNvPr id="7" name="Rounded Rectangle 6"/>
-          <p:cNvSpPr/>
-          <p:nvPr/>
-        </p:nvSpPr>
-        <p:spPr>
-          <a:xfrm>
-            <a:off x="822960" y="2834640"/>
-            <a:ext cx="548640" cy="548640"/>
-          </a:xfrm>
-          <a:prstGeom prst="roundRect">
-            <a:avLst/>
-          </a:prstGeom>
-          <a:solidFill>
-            <a:srgbClr val="0E6EB8"/>
-          </a:solidFill>
-          <a:ln>
-            <a:noFill/>
-          </a:ln>
-        </p:spPr>
-        <p:style>
-          <a:lnRef idx="1">
-            <a:schemeClr val="accent1"/>
-          </a:lnRef>
-          <a:fillRef idx="3">
-            <a:schemeClr val="accent1"/>
-          </a:fillRef>
-          <a:effectRef idx="2">
-            <a:schemeClr val="accent1"/>
-          </a:effectRef>
-          <a:fontRef idx="minor">
-            <a:schemeClr val="lt1"/>
-          </a:fontRef>
-        </p:style>
-        <p:txBody>
-          <a:bodyPr rtlCol="0" anchor="ctr" wrap="square" lIns="101600" rIns="101600" tIns="76200" bIns="76200"/>
-          <a:lstStyle/>
-          <a:p>
-            <a:pPr algn="ctr">
-              <a:defRPr sz="2000" b="1">
-                <a:solidFill>
-                  <a:srgbClr val="1A1A2E"/>
-                </a:solidFill>
-                <a:latin typeface="Calibri"/>
-              </a:defRPr>
-            </a:pPr>
-            <a:r>
-              <a:t>2</a:t>
-            </a:r>
-          </a:p>
-        </p:txBody>
-      </p:sp>
-      <p:sp>
-        <p:nvSpPr>
-          <p:cNvPr id="8" name="TextBox 7"/>
-          <p:cNvSpPr txBox="1"/>
-          <p:nvPr/>
-        </p:nvSpPr>
-        <p:spPr>
-          <a:xfrm>
-            <a:off x="1645920" y="2834640"/>
-            <a:ext cx="3657600" cy="457200"/>
-          </a:xfrm>
-          <a:prstGeom prst="rect">
-            <a:avLst/>
-          </a:prstGeom>
-          <a:noFill/>
-        </p:spPr>
-        <p:txBody>
-          <a:bodyPr wrap="square">
-            <a:spAutoFit/>
-          </a:bodyPr>
-          <a:lstStyle/>
-          <a:p>
-            <a:pPr algn="l">
-              <a:spcAft>
-                <a:spcPts val="660"/>
-              </a:spcAft>
-              <a:defRPr sz="2200" b="1">
-                <a:solidFill>
-                  <a:srgbClr val="0E6EB8"/>
-                </a:solidFill>
-                <a:latin typeface="Calibri"/>
-              </a:defRPr>
-            </a:pPr>
-            <a:r>
-              <a:t>Ping-Pong Scheduling</a:t>
-            </a:r>
-          </a:p>
-        </p:txBody>
-      </p:sp>
-      <p:sp>
-        <p:nvSpPr>
-          <p:cNvPr id="9" name="TextBox 8"/>
-          <p:cNvSpPr txBox="1"/>
-          <p:nvPr/>
-        </p:nvSpPr>
-        <p:spPr>
-          <a:xfrm>
-            <a:off x="1645920" y="3291840"/>
-            <a:ext cx="9144000" cy="457200"/>
-          </a:xfrm>
-          <a:prstGeom prst="rect">
-            <a:avLst/>
-          </a:prstGeom>
-          <a:noFill/>
-        </p:spPr>
-        <p:txBody>
-          <a:bodyPr wrap="square">
-            <a:spAutoFit/>
-          </a:bodyPr>
-          <a:lstStyle/>
-          <a:p>
-            <a:pPr algn="l">
-              <a:spcAft>
-                <a:spcPts val="509"/>
-              </a:spcAft>
-              <a:defRPr sz="1700" b="0">
-                <a:solidFill>
-                  <a:srgbClr val="1A1A2E"/>
-                </a:solidFill>
-                <a:latin typeface="Calibri"/>
-              </a:defRPr>
-            </a:pPr>
-            <a:r>
-              <a:t>Overlap epilogue IO with next tile’s MMA</a:t>
-            </a:r>
-          </a:p>
-        </p:txBody>
-      </p:sp>
-      <p:sp>
-        <p:nvSpPr>
-          <p:cNvPr id="10" name="Rounded Rectangle 9"/>
-          <p:cNvSpPr/>
-          <p:nvPr/>
-        </p:nvSpPr>
-        <p:spPr>
-          <a:xfrm>
-            <a:off x="822960" y="4206240"/>
-            <a:ext cx="548640" cy="548640"/>
-          </a:xfrm>
-          <a:prstGeom prst="roundRect">
-            <a:avLst/>
-          </a:prstGeom>
-          <a:solidFill>
-            <a:srgbClr val="B46A00"/>
-          </a:solidFill>
-          <a:ln>
-            <a:noFill/>
-          </a:ln>
-        </p:spPr>
-        <p:style>
-          <a:lnRef idx="1">
-            <a:schemeClr val="accent1"/>
-          </a:lnRef>
-          <a:fillRef idx="3">
-            <a:schemeClr val="accent1"/>
-          </a:fillRef>
-          <a:effectRef idx="2">
-            <a:schemeClr val="accent1"/>
-          </a:effectRef>
-          <a:fontRef idx="minor">
-            <a:schemeClr val="lt1"/>
-          </a:fontRef>
-        </p:style>
-        <p:txBody>
-          <a:bodyPr rtlCol="0" anchor="ctr" wrap="square" lIns="101600" rIns="101600" tIns="76200" bIns="76200"/>
-          <a:lstStyle/>
-          <a:p>
-            <a:pPr algn="ctr">
-              <a:defRPr sz="2000" b="1">
-                <a:solidFill>
-                  <a:srgbClr val="1A1A2E"/>
-                </a:solidFill>
-                <a:latin typeface="Calibri"/>
-              </a:defRPr>
-            </a:pPr>
-            <a:r>
-              <a:t>3</a:t>
-            </a:r>
-          </a:p>
-        </p:txBody>
-      </p:sp>
-      <p:sp>
-        <p:nvSpPr>
-          <p:cNvPr id="11" name="TextBox 10"/>
-          <p:cNvSpPr txBox="1"/>
-          <p:nvPr/>
-        </p:nvSpPr>
-        <p:spPr>
-          <a:xfrm>
-            <a:off x="1645920" y="4206240"/>
-            <a:ext cx="3657600" cy="457200"/>
-          </a:xfrm>
-          <a:prstGeom prst="rect">
-            <a:avLst/>
-          </a:prstGeom>
-          <a:noFill/>
-        </p:spPr>
-        <p:txBody>
-          <a:bodyPr wrap="square">
-            <a:spAutoFit/>
-          </a:bodyPr>
-          <a:lstStyle/>
-          <a:p>
-            <a:pPr algn="l">
-              <a:spcAft>
-                <a:spcPts val="660"/>
-              </a:spcAft>
-              <a:defRPr sz="2200" b="1">
-                <a:solidFill>
-                  <a:srgbClr val="B46A00"/>
-                </a:solidFill>
-                <a:latin typeface="Calibri"/>
-              </a:defRPr>
-            </a:pPr>
-            <a:r>
-              <a:t>Epilogue Fusion</a:t>
-            </a:r>
-          </a:p>
-        </p:txBody>
-      </p:sp>
-      <p:sp>
-        <p:nvSpPr>
-          <p:cNvPr id="12" name="TextBox 11"/>
-          <p:cNvSpPr txBox="1"/>
-          <p:nvPr/>
-        </p:nvSpPr>
-        <p:spPr>
-          <a:xfrm>
-            <a:off x="1645920" y="4663440"/>
-            <a:ext cx="9144000" cy="457200"/>
-          </a:xfrm>
-          <a:prstGeom prst="rect">
-            <a:avLst/>
-          </a:prstGeom>
-          <a:noFill/>
-        </p:spPr>
-        <p:txBody>
-          <a:bodyPr wrap="square">
-            <a:spAutoFit/>
-          </a:bodyPr>
-          <a:lstStyle/>
-          <a:p>
-            <a:pPr algn="l">
-              <a:spcAft>
-                <a:spcPts val="509"/>
-              </a:spcAft>
-              <a:defRPr sz="1700" b="0">
-                <a:solidFill>
-                  <a:srgbClr val="1A1A2E"/>
-                </a:solidFill>
-                <a:latin typeface="Calibri"/>
-              </a:defRPr>
-            </a:pPr>
-            <a:r>
-              <a:t>SwiGLU + dS + A′ computed in GEMM epilogue</a:t>
-            </a:r>
-          </a:p>
-        </p:txBody>
-      </p:sp>
-      <p:sp>
-        <p:nvSpPr>
-          <p:cNvPr id="13" name="Rounded Rectangle 12"/>
-          <p:cNvSpPr/>
-          <p:nvPr/>
-        </p:nvSpPr>
-        <p:spPr>
-          <a:xfrm>
-            <a:off x="2743200" y="5212080"/>
-            <a:ext cx="6675120" cy="731520"/>
-          </a:xfrm>
-          <a:prstGeom prst="roundRect">
-            <a:avLst/>
-          </a:prstGeom>
-          <a:solidFill>
-            <a:srgbClr val="F0F4F8"/>
-          </a:solidFill>
-          <a:ln w="19050">
-            <a:solidFill>
-              <a:srgbClr val="057A55"/>
-            </a:solidFill>
-          </a:ln>
-        </p:spPr>
-        <p:style>
-          <a:lnRef idx="1">
-            <a:schemeClr val="accent1"/>
-          </a:lnRef>
-          <a:fillRef idx="3">
-            <a:schemeClr val="accent1"/>
-          </a:fillRef>
-          <a:effectRef idx="2">
-            <a:schemeClr val="accent1"/>
-          </a:effectRef>
-          <a:fontRef idx="minor">
-            <a:schemeClr val="lt1"/>
-          </a:fontRef>
-        </p:style>
-        <p:txBody>
-          <a:bodyPr rtlCol="0" anchor="ctr" wrap="square" lIns="101600" rIns="101600" tIns="76200" bIns="76200"/>
-          <a:lstStyle/>
-          <a:p>
-            <a:pPr algn="ctr">
-              <a:defRPr sz="2200" b="1">
-                <a:solidFill>
-                  <a:srgbClr val="057A55"/>
-                </a:solidFill>
-                <a:latin typeface="Calibri"/>
-              </a:defRPr>
-            </a:pPr>
-            <a:r>
-              <a:t>Result: IO is hidden behind compute</a:t>
-            </a:r>
-          </a:p>
-        </p:txBody>
-      </p:sp>
-      <p:sp>
-        <p:nvSpPr>
-          <p:cNvPr id="14" name="TextBox 13"/>
-          <p:cNvSpPr txBox="1"/>
-          <p:nvPr/>
-        </p:nvSpPr>
-        <p:spPr>
-          <a:xfrm>
-            <a:off x="11155680" y="6400800"/>
-            <a:ext cx="914400" cy="365760"/>
-          </a:xfrm>
-          <a:prstGeom prst="rect">
-            <a:avLst/>
-          </a:prstGeom>
-          <a:noFill/>
-        </p:spPr>
-        <p:txBody>
-          <a:bodyPr wrap="square">
-            <a:spAutoFit/>
-          </a:bodyPr>
-          <a:lstStyle/>
-          <a:p>
             <a:pPr algn="r">
               <a:spcAft>
                 <a:spcPts val="330"/>
@@ -13014,7 +15118,7 @@
               </a:defRPr>
             </a:pPr>
             <a:r>
-              <a:t>25/33</a:t>
+              <a:t>25/36</a:t>
             </a:r>
           </a:p>
         </p:txBody>
@@ -13033,7 +15137,7 @@
     <p:bg>
       <p:bgPr>
         <a:solidFill>
-          <a:srgbClr val="FFFFFF"/>
+          <a:srgbClr val="F8F9FA"/>
         </a:solidFill>
         <a:effectLst/>
       </p:bgPr>
@@ -13047,20 +15151,59 @@
       <p:grpSpPr/>
       <p:sp>
         <p:nvSpPr>
-          <p:cNvPr id="2" name="Rectangle 1"/>
+          <p:cNvPr id="2" name="TextBox 1"/>
+          <p:cNvSpPr txBox="1"/>
+          <p:nvPr/>
+        </p:nvSpPr>
+        <p:spPr>
+          <a:xfrm>
+            <a:off x="731520" y="457200"/>
+            <a:ext cx="2743200" cy="457200"/>
+          </a:xfrm>
+          <a:prstGeom prst="rect">
+            <a:avLst/>
+          </a:prstGeom>
+          <a:noFill/>
+        </p:spPr>
+        <p:txBody>
+          <a:bodyPr wrap="square">
+            <a:spAutoFit/>
+          </a:bodyPr>
+          <a:lstStyle/>
+          <a:p>
+            <a:pPr algn="l">
+              <a:spcAft>
+                <a:spcPts val="480"/>
+              </a:spcAft>
+              <a:defRPr sz="1600" b="1">
+                <a:solidFill>
+                  <a:srgbClr val="B46A00"/>
+                </a:solidFill>
+                <a:latin typeface="Calibri"/>
+              </a:defRPr>
+            </a:pPr>
+            <a:r>
+              <a:t>KERNEL 3</a:t>
+            </a:r>
+          </a:p>
+        </p:txBody>
+      </p:sp>
+      <p:sp>
+        <p:nvSpPr>
+          <p:cNvPr id="3" name="Rectangle 2"/>
           <p:cNvSpPr/>
           <p:nvPr/>
         </p:nvSpPr>
         <p:spPr>
           <a:xfrm>
-            <a:off x="548640" y="274320"/>
-            <a:ext cx="109728" cy="502920"/>
+            <a:off x="0" y="0"/>
+            <a:ext cx="109728" cy="6858000"/>
           </a:xfrm>
           <a:prstGeom prst="rect">
             <a:avLst/>
           </a:prstGeom>
           <a:solidFill>
-            <a:srgbClr val="0E6EB8"/>
+            <a:srgbClr val="B46A00"/>
           </a:solidFill>
           <a:ln>
             <a:noFill/>
@@ -13090,14 +15233,14 @@
       </p:sp>
       <p:sp>
         <p:nvSpPr>
-          <p:cNvPr id="3" name="TextBox 2"/>
+          <p:cNvPr id="4" name="TextBox 3"/>
           <p:cNvSpPr txBox="1"/>
           <p:nvPr/>
         </p:nvSpPr>
         <p:spPr>
           <a:xfrm>
-            <a:off x="822960" y="228600"/>
-            <a:ext cx="10058400" cy="640080"/>
+            <a:off x="914400" y="1828800"/>
+            <a:ext cx="10332720" cy="1097280"/>
           </a:xfrm>
           <a:prstGeom prst="rect">
             <a:avLst/>
@@ -13112,31 +15255,31 @@
           <a:p>
             <a:pPr algn="l">
               <a:spcAft>
-                <a:spcPts val="960"/>
-              </a:spcAft>
-              <a:defRPr sz="3200" b="1">
-                <a:solidFill>
-                  <a:srgbClr val="0E6EB8"/>
-                </a:solidFill>
-                <a:latin typeface="Calibri"/>
-              </a:defRPr>
-            </a:pPr>
-            <a:r>
-              <a:t>SonicMoE — Profiler Results</a:t>
-            </a:r>
-          </a:p>
-        </p:txBody>
-      </p:sp>
-      <p:sp>
-        <p:nvSpPr>
-          <p:cNvPr id="4" name="TextBox 3"/>
+                <a:spcPts val="1200"/>
+              </a:spcAft>
+              <a:defRPr sz="4000" b="1">
+                <a:solidFill>
+                  <a:srgbClr val="1A1A2E"/>
+                </a:solidFill>
+                <a:latin typeface="Calibri"/>
+              </a:defRPr>
+            </a:pPr>
+            <a:r>
+              <a:t>SonicMoE: IO-Aware MoE Kernels</a:t>
+            </a:r>
+          </a:p>
+        </p:txBody>
+      </p:sp>
+      <p:sp>
+        <p:nvSpPr>
+          <p:cNvPr id="5" name="TextBox 4"/>
           <p:cNvSpPr txBox="1"/>
           <p:nvPr/>
         </p:nvSpPr>
         <p:spPr>
           <a:xfrm>
-            <a:off x="822960" y="1371600"/>
-            <a:ext cx="10058400" cy="457200"/>
+            <a:off x="914400" y="3200400"/>
+            <a:ext cx="10332720" cy="457200"/>
           </a:xfrm>
           <a:prstGeom prst="rect">
             <a:avLst/>
@@ -13161,21 +15304,21 @@
               </a:defRPr>
             </a:pPr>
             <a:r>
-              <a:t>Configuration: E=128, K=8, d=1536, n=256 (7B MoE)</a:t>
-            </a:r>
-          </a:p>
-        </p:txBody>
-      </p:sp>
-      <p:sp>
-        <p:nvSpPr>
-          <p:cNvPr id="5" name="Rounded Rectangle 4"/>
+              <a:t>github.com/Dao-AILab/sonic-moe  (Tri Dao, Princeton / Together AI)</a:t>
+            </a:r>
+          </a:p>
+        </p:txBody>
+      </p:sp>
+      <p:sp>
+        <p:nvSpPr>
+          <p:cNvPr id="6" name="Rounded Rectangle 5"/>
           <p:cNvSpPr/>
           <p:nvPr/>
         </p:nvSpPr>
         <p:spPr>
           <a:xfrm>
-            <a:off x="822960" y="2103120"/>
-            <a:ext cx="3657600" cy="731520"/>
+            <a:off x="914400" y="4389120"/>
+            <a:ext cx="7315200" cy="731520"/>
           </a:xfrm>
           <a:prstGeom prst="roundRect">
             <a:avLst/>
@@ -13208,7 +15351,7 @@
           <a:lstStyle/>
           <a:p>
             <a:pPr algn="ctr">
-              <a:defRPr sz="2400" b="1">
+              <a:defRPr sz="2200" b="1">
                 <a:solidFill>
                   <a:srgbClr val="B46A00"/>
                 </a:solidFill>
@@ -13216,21 +15359,21 @@
               </a:defRPr>
             </a:pPr>
             <a:r>
-              <a:t>35 TFLOPS on H200</a:t>
-            </a:r>
-          </a:p>
-        </p:txBody>
-      </p:sp>
-      <p:sp>
-        <p:nvSpPr>
-          <p:cNvPr id="6" name="TextBox 5"/>
+              <a:t>45% less activation memory, 1.86x faster than ScatterMoE</a:t>
+            </a:r>
+          </a:p>
+        </p:txBody>
+      </p:sp>
+      <p:sp>
+        <p:nvSpPr>
+          <p:cNvPr id="7" name="TextBox 6"/>
           <p:cNvSpPr txBox="1"/>
           <p:nvPr/>
         </p:nvSpPr>
         <p:spPr>
           <a:xfrm>
-            <a:off x="822960" y="3291840"/>
-            <a:ext cx="10058400" cy="365760"/>
+            <a:off x="11155680" y="6400800"/>
+            <a:ext cx="914400" cy="365760"/>
           </a:xfrm>
           <a:prstGeom prst="rect">
             <a:avLst/>
@@ -13243,147 +15386,6 @@
           </a:bodyPr>
           <a:lstStyle/>
           <a:p>
-            <a:pPr algn="l">
-              <a:spcAft>
-                <a:spcPts val="540"/>
-              </a:spcAft>
-              <a:defRPr sz="1800" b="1">
-                <a:solidFill>
-                  <a:srgbClr val="0E6EB8"/>
-                </a:solidFill>
-                <a:latin typeface="Calibri"/>
-              </a:defRPr>
-            </a:pPr>
-            <a:r>
-              <a:t>Key Kernels:</a:t>
-            </a:r>
-          </a:p>
-        </p:txBody>
-      </p:sp>
-      <p:sp>
-        <p:nvSpPr>
-          <p:cNvPr id="7" name="TextBox 6"/>
-          <p:cNvSpPr txBox="1"/>
-          <p:nvPr/>
-        </p:nvSpPr>
-        <p:spPr>
-          <a:xfrm>
-            <a:off x="822960" y="3749039"/>
-            <a:ext cx="10058400" cy="1371600"/>
-          </a:xfrm>
-          <a:prstGeom prst="rect">
-            <a:avLst/>
-          </a:prstGeom>
-          <a:noFill/>
-        </p:spPr>
-        <p:txBody>
-          <a:bodyPr wrap="square">
-            <a:spAutoFit/>
-          </a:bodyPr>
-          <a:lstStyle/>
-          <a:p>
-            <a:pPr algn="l">
-              <a:spcAft>
-                <a:spcPts val="800"/>
-              </a:spcAft>
-              <a:defRPr sz="1700">
-                <a:solidFill>
-                  <a:srgbClr val="1A1A2E"/>
-                </a:solidFill>
-                <a:latin typeface="Calibri"/>
-              </a:defRPr>
-              <a:buClr>
-                <a:srgbClr val="0E6EB8"/>
-              </a:buClr>
-              <a:buChar char="•"/>
-            </a:pPr>
-            <a:r>
-              <a:t>quackgemm_actGemmGatedSm90  (up projection + SwiGLU fused)</a:t>
-            </a:r>
-          </a:p>
-          <a:p>
-            <a:pPr algn="l">
-              <a:spcAft>
-                <a:spcPts val="800"/>
-              </a:spcAft>
-              <a:defRPr sz="1700">
-                <a:solidFill>
-                  <a:srgbClr val="1A1A2E"/>
-                </a:solidFill>
-                <a:latin typeface="Calibri"/>
-              </a:defRPr>
-              <a:buClr>
-                <a:srgbClr val="0E6EB8"/>
-              </a:buClr>
-              <a:buChar char="•"/>
-            </a:pPr>
-            <a:r>
-              <a:t>quackgemm_default_epiGemmDefaultSm90  (down projection)</a:t>
-            </a:r>
-          </a:p>
-        </p:txBody>
-      </p:sp>
-      <p:sp>
-        <p:nvSpPr>
-          <p:cNvPr id="8" name="TextBox 7"/>
-          <p:cNvSpPr txBox="1"/>
-          <p:nvPr/>
-        </p:nvSpPr>
-        <p:spPr>
-          <a:xfrm>
-            <a:off x="1371600" y="5303520"/>
-            <a:ext cx="9418320" cy="548640"/>
-          </a:xfrm>
-          <a:prstGeom prst="rect">
-            <a:avLst/>
-          </a:prstGeom>
-          <a:noFill/>
-        </p:spPr>
-        <p:txBody>
-          <a:bodyPr wrap="square">
-            <a:spAutoFit/>
-          </a:bodyPr>
-          <a:lstStyle/>
-          <a:p>
-            <a:pPr algn="ctr">
-              <a:spcAft>
-                <a:spcPts val="570"/>
-              </a:spcAft>
-              <a:defRPr sz="1900" b="1">
-                <a:solidFill>
-                  <a:srgbClr val="B46A00"/>
-                </a:solidFill>
-                <a:latin typeface="Calibri"/>
-              </a:defRPr>
-            </a:pPr>
-            <a:r>
-              <a:t>"Two GEMM kernels with fused activation — that’s the entire MoE forward"</a:t>
-            </a:r>
-          </a:p>
-        </p:txBody>
-      </p:sp>
-      <p:sp>
-        <p:nvSpPr>
-          <p:cNvPr id="9" name="TextBox 8"/>
-          <p:cNvSpPr txBox="1"/>
-          <p:nvPr/>
-        </p:nvSpPr>
-        <p:spPr>
-          <a:xfrm>
-            <a:off x="11155680" y="6400800"/>
-            <a:ext cx="914400" cy="365760"/>
-          </a:xfrm>
-          <a:prstGeom prst="rect">
-            <a:avLst/>
-          </a:prstGeom>
-          <a:noFill/>
-        </p:spPr>
-        <p:txBody>
-          <a:bodyPr wrap="square">
-            <a:spAutoFit/>
-          </a:bodyPr>
-          <a:lstStyle/>
-          <a:p>
             <a:pPr algn="r">
               <a:spcAft>
                 <a:spcPts val="330"/>
@@ -13396,7 +15398,7 @@
               </a:defRPr>
             </a:pPr>
             <a:r>
-              <a:t>26/33</a:t>
+              <a:t>26/36</a:t>
             </a:r>
           </a:p>
         </p:txBody>
@@ -13504,21 +15506,104 @@
               </a:defRPr>
             </a:pPr>
             <a:r>
-              <a:t>SonicMoE — Perfetto Trace</a:t>
-            </a:r>
-          </a:p>
-        </p:txBody>
-      </p:sp>
-      <p:sp>
-        <p:nvSpPr>
-          <p:cNvPr id="4" name="Rounded Rectangle 3"/>
+              <a:t>Why MoE Kernels Are Hard</a:t>
+            </a:r>
+          </a:p>
+        </p:txBody>
+      </p:sp>
+      <p:sp>
+        <p:nvSpPr>
+          <p:cNvPr id="4" name="TextBox 3"/>
+          <p:cNvSpPr txBox="1"/>
+          <p:nvPr/>
+        </p:nvSpPr>
+        <p:spPr>
+          <a:xfrm>
+            <a:off x="822960" y="1371600"/>
+            <a:ext cx="10058400" cy="2743200"/>
+          </a:xfrm>
+          <a:prstGeom prst="rect">
+            <a:avLst/>
+          </a:prstGeom>
+          <a:noFill/>
+        </p:spPr>
+        <p:txBody>
+          <a:bodyPr wrap="square">
+            <a:spAutoFit/>
+          </a:bodyPr>
+          <a:lstStyle/>
+          <a:p>
+            <a:pPr algn="l">
+              <a:spcAft>
+                <a:spcPts val="800"/>
+              </a:spcAft>
+              <a:defRPr sz="2000">
+                <a:solidFill>
+                  <a:srgbClr val="1A1A2E"/>
+                </a:solidFill>
+                <a:latin typeface="Calibri"/>
+              </a:defRPr>
+              <a:buClr>
+                <a:srgbClr val="0E6EB8"/>
+              </a:buClr>
+              <a:buChar char="•"/>
+            </a:pPr>
+            <a:r>
+              <a:t>Each expert processes a variable number of tokens (varlen-M Grouped GEMM)</a:t>
+            </a:r>
+          </a:p>
+          <a:p>
+            <a:pPr algn="l">
+              <a:spcAft>
+                <a:spcPts val="800"/>
+              </a:spcAft>
+              <a:defRPr sz="2000">
+                <a:solidFill>
+                  <a:srgbClr val="1A1A2E"/>
+                </a:solidFill>
+                <a:latin typeface="Calibri"/>
+              </a:defRPr>
+              <a:buClr>
+                <a:srgbClr val="0E6EB8"/>
+              </a:buClr>
+              <a:buChar char="•"/>
+            </a:pPr>
+            <a:r>
+              <a:t>Fine-grained MoEs: small expert size → IO-bound, not compute-bound</a:t>
+            </a:r>
+          </a:p>
+          <a:p>
+            <a:pPr algn="l">
+              <a:spcAft>
+                <a:spcPts val="800"/>
+              </a:spcAft>
+              <a:defRPr sz="2000">
+                <a:solidFill>
+                  <a:srgbClr val="1A1A2E"/>
+                </a:solidFill>
+                <a:latin typeface="Calibri"/>
+              </a:defRPr>
+              <a:buClr>
+                <a:srgbClr val="0E6EB8"/>
+              </a:buClr>
+              <a:buChar char="•"/>
+            </a:pPr>
+            <a:r>
+              <a:t>Standard approach: gather tokens → pad → GEMM → scatter back</a:t>
+            </a:r>
+          </a:p>
+        </p:txBody>
+      </p:sp>
+      <p:sp>
+        <p:nvSpPr>
+          <p:cNvPr id="5" name="Rounded Rectangle 4"/>
           <p:cNvSpPr/>
           <p:nvPr/>
         </p:nvSpPr>
         <p:spPr>
           <a:xfrm>
-            <a:off x="1828800" y="2286000"/>
-            <a:ext cx="8534095" cy="3200400"/>
+            <a:off x="914400" y="4206240"/>
+            <a:ext cx="1280160" cy="640080"/>
           </a:xfrm>
           <a:prstGeom prst="roundRect">
             <a:avLst/>
@@ -13526,9 +15611,9 @@
           <a:solidFill>
             <a:srgbClr val="F0F4F8"/>
           </a:solidFill>
-          <a:ln w="25400">
+          <a:ln w="19050">
             <a:solidFill>
-              <a:srgbClr val="0E6EB8"/>
+              <a:srgbClr val="B46A00"/>
             </a:solidFill>
           </a:ln>
         </p:spPr>
@@ -13547,41 +15632,33 @@
           </a:fontRef>
         </p:style>
         <p:txBody>
-          <a:bodyPr rtlCol="0" anchor="ctr" wrap="square" tIns="1097280"/>
+          <a:bodyPr rtlCol="0" anchor="ctr" wrap="square" lIns="101600" rIns="101600" tIns="76200" bIns="76200"/>
           <a:lstStyle/>
           <a:p>
             <a:pPr algn="ctr">
-              <a:spcAft>
-                <a:spcPts val="0"/>
-              </a:spcAft>
-              <a:defRPr sz="3200" b="1">
-                <a:solidFill>
-                  <a:srgbClr val="0E6EB8"/>
-                </a:solidFill>
-                <a:latin typeface="Calibri"/>
-              </a:defRPr>
-            </a:pPr>
-            <a:r>
-              <a:t>[LIVE DEMO — Perfetto UI]</a:t>
-            </a:r>
-            <a:br/>
-            <a:br/>
-            <a:r>
-              <a:t>sonicmoe_forward annotation, two GEMM kernels, routing overhead</a:t>
-            </a:r>
-          </a:p>
-        </p:txBody>
-      </p:sp>
-      <p:sp>
-        <p:nvSpPr>
-          <p:cNvPr id="5" name="TextBox 4"/>
+              <a:defRPr sz="1600" b="1">
+                <a:solidFill>
+                  <a:srgbClr val="1A1A2E"/>
+                </a:solidFill>
+                <a:latin typeface="Calibri"/>
+              </a:defRPr>
+            </a:pPr>
+            <a:r>
+              <a:t>Gather</a:t>
+            </a:r>
+          </a:p>
+        </p:txBody>
+      </p:sp>
+      <p:sp>
+        <p:nvSpPr>
+          <p:cNvPr id="6" name="TextBox 5"/>
           <p:cNvSpPr txBox="1"/>
           <p:nvPr/>
         </p:nvSpPr>
         <p:spPr>
           <a:xfrm>
-            <a:off x="11155680" y="6400800"/>
-            <a:ext cx="914400" cy="365760"/>
+            <a:off x="2377440" y="4297680"/>
+            <a:ext cx="457200" cy="457200"/>
           </a:xfrm>
           <a:prstGeom prst="rect">
             <a:avLst/>
@@ -13594,6 +15671,327 @@
           </a:bodyPr>
           <a:lstStyle/>
           <a:p>
+            <a:pPr algn="ctr">
+              <a:spcAft>
+                <a:spcPts val="840"/>
+              </a:spcAft>
+              <a:defRPr sz="2800" b="1">
+                <a:solidFill>
+                  <a:srgbClr val="B46A00"/>
+                </a:solidFill>
+                <a:latin typeface="Calibri"/>
+              </a:defRPr>
+            </a:pPr>
+            <a:r>
+              <a:t>→</a:t>
+            </a:r>
+          </a:p>
+        </p:txBody>
+      </p:sp>
+      <p:sp>
+        <p:nvSpPr>
+          <p:cNvPr id="7" name="Rounded Rectangle 6"/>
+          <p:cNvSpPr/>
+          <p:nvPr/>
+        </p:nvSpPr>
+        <p:spPr>
+          <a:xfrm>
+            <a:off x="3840480" y="4206240"/>
+            <a:ext cx="1280160" cy="640080"/>
+          </a:xfrm>
+          <a:prstGeom prst="roundRect">
+            <a:avLst/>
+          </a:prstGeom>
+          <a:solidFill>
+            <a:srgbClr val="F0F4F8"/>
+          </a:solidFill>
+          <a:ln w="19050">
+            <a:solidFill>
+              <a:srgbClr val="B46A00"/>
+            </a:solidFill>
+          </a:ln>
+        </p:spPr>
+        <p:style>
+          <a:lnRef idx="1">
+            <a:schemeClr val="accent1"/>
+          </a:lnRef>
+          <a:fillRef idx="3">
+            <a:schemeClr val="accent1"/>
+          </a:fillRef>
+          <a:effectRef idx="2">
+            <a:schemeClr val="accent1"/>
+          </a:effectRef>
+          <a:fontRef idx="minor">
+            <a:schemeClr val="lt1"/>
+          </a:fontRef>
+        </p:style>
+        <p:txBody>
+          <a:bodyPr rtlCol="0" anchor="ctr" wrap="square" lIns="101600" rIns="101600" tIns="76200" bIns="76200"/>
+          <a:lstStyle/>
+          <a:p>
+            <a:pPr algn="ctr">
+              <a:defRPr sz="1600" b="1">
+                <a:solidFill>
+                  <a:srgbClr val="1A1A2E"/>
+                </a:solidFill>
+                <a:latin typeface="Calibri"/>
+              </a:defRPr>
+            </a:pPr>
+            <a:r>
+              <a:t>Pad</a:t>
+            </a:r>
+          </a:p>
+        </p:txBody>
+      </p:sp>
+      <p:sp>
+        <p:nvSpPr>
+          <p:cNvPr id="8" name="TextBox 7"/>
+          <p:cNvSpPr txBox="1"/>
+          <p:nvPr/>
+        </p:nvSpPr>
+        <p:spPr>
+          <a:xfrm>
+            <a:off x="5303520" y="4297680"/>
+            <a:ext cx="457200" cy="457200"/>
+          </a:xfrm>
+          <a:prstGeom prst="rect">
+            <a:avLst/>
+          </a:prstGeom>
+          <a:noFill/>
+        </p:spPr>
+        <p:txBody>
+          <a:bodyPr wrap="square">
+            <a:spAutoFit/>
+          </a:bodyPr>
+          <a:lstStyle/>
+          <a:p>
+            <a:pPr algn="ctr">
+              <a:spcAft>
+                <a:spcPts val="840"/>
+              </a:spcAft>
+              <a:defRPr sz="2800" b="1">
+                <a:solidFill>
+                  <a:srgbClr val="B46A00"/>
+                </a:solidFill>
+                <a:latin typeface="Calibri"/>
+              </a:defRPr>
+            </a:pPr>
+            <a:r>
+              <a:t>→</a:t>
+            </a:r>
+          </a:p>
+        </p:txBody>
+      </p:sp>
+      <p:sp>
+        <p:nvSpPr>
+          <p:cNvPr id="9" name="Rounded Rectangle 8"/>
+          <p:cNvSpPr/>
+          <p:nvPr/>
+        </p:nvSpPr>
+        <p:spPr>
+          <a:xfrm>
+            <a:off x="6766560" y="4206240"/>
+            <a:ext cx="1280160" cy="640080"/>
+          </a:xfrm>
+          <a:prstGeom prst="roundRect">
+            <a:avLst/>
+          </a:prstGeom>
+          <a:solidFill>
+            <a:srgbClr val="F0F4F8"/>
+          </a:solidFill>
+          <a:ln w="19050">
+            <a:solidFill>
+              <a:srgbClr val="B46A00"/>
+            </a:solidFill>
+          </a:ln>
+        </p:spPr>
+        <p:style>
+          <a:lnRef idx="1">
+            <a:schemeClr val="accent1"/>
+          </a:lnRef>
+          <a:fillRef idx="3">
+            <a:schemeClr val="accent1"/>
+          </a:fillRef>
+          <a:effectRef idx="2">
+            <a:schemeClr val="accent1"/>
+          </a:effectRef>
+          <a:fontRef idx="minor">
+            <a:schemeClr val="lt1"/>
+          </a:fontRef>
+        </p:style>
+        <p:txBody>
+          <a:bodyPr rtlCol="0" anchor="ctr" wrap="square" lIns="101600" rIns="101600" tIns="76200" bIns="76200"/>
+          <a:lstStyle/>
+          <a:p>
+            <a:pPr algn="ctr">
+              <a:defRPr sz="1600" b="1">
+                <a:solidFill>
+                  <a:srgbClr val="1A1A2E"/>
+                </a:solidFill>
+                <a:latin typeface="Calibri"/>
+              </a:defRPr>
+            </a:pPr>
+            <a:r>
+              <a:t>GEMM</a:t>
+            </a:r>
+          </a:p>
+        </p:txBody>
+      </p:sp>
+      <p:sp>
+        <p:nvSpPr>
+          <p:cNvPr id="10" name="TextBox 9"/>
+          <p:cNvSpPr txBox="1"/>
+          <p:nvPr/>
+        </p:nvSpPr>
+        <p:spPr>
+          <a:xfrm>
+            <a:off x="8229600" y="4297680"/>
+            <a:ext cx="457200" cy="457200"/>
+          </a:xfrm>
+          <a:prstGeom prst="rect">
+            <a:avLst/>
+          </a:prstGeom>
+          <a:noFill/>
+        </p:spPr>
+        <p:txBody>
+          <a:bodyPr wrap="square">
+            <a:spAutoFit/>
+          </a:bodyPr>
+          <a:lstStyle/>
+          <a:p>
+            <a:pPr algn="ctr">
+              <a:spcAft>
+                <a:spcPts val="840"/>
+              </a:spcAft>
+              <a:defRPr sz="2800" b="1">
+                <a:solidFill>
+                  <a:srgbClr val="B46A00"/>
+                </a:solidFill>
+                <a:latin typeface="Calibri"/>
+              </a:defRPr>
+            </a:pPr>
+            <a:r>
+              <a:t>→</a:t>
+            </a:r>
+          </a:p>
+        </p:txBody>
+      </p:sp>
+      <p:sp>
+        <p:nvSpPr>
+          <p:cNvPr id="11" name="Rounded Rectangle 10"/>
+          <p:cNvSpPr/>
+          <p:nvPr/>
+        </p:nvSpPr>
+        <p:spPr>
+          <a:xfrm>
+            <a:off x="9692640" y="4206240"/>
+            <a:ext cx="1280160" cy="640080"/>
+          </a:xfrm>
+          <a:prstGeom prst="roundRect">
+            <a:avLst/>
+          </a:prstGeom>
+          <a:solidFill>
+            <a:srgbClr val="F0F4F8"/>
+          </a:solidFill>
+          <a:ln w="19050">
+            <a:solidFill>
+              <a:srgbClr val="B46A00"/>
+            </a:solidFill>
+          </a:ln>
+        </p:spPr>
+        <p:style>
+          <a:lnRef idx="1">
+            <a:schemeClr val="accent1"/>
+          </a:lnRef>
+          <a:fillRef idx="3">
+            <a:schemeClr val="accent1"/>
+          </a:fillRef>
+          <a:effectRef idx="2">
+            <a:schemeClr val="accent1"/>
+          </a:effectRef>
+          <a:fontRef idx="minor">
+            <a:schemeClr val="lt1"/>
+          </a:fontRef>
+        </p:style>
+        <p:txBody>
+          <a:bodyPr rtlCol="0" anchor="ctr" wrap="square" lIns="101600" rIns="101600" tIns="76200" bIns="76200"/>
+          <a:lstStyle/>
+          <a:p>
+            <a:pPr algn="ctr">
+              <a:defRPr sz="1600" b="1">
+                <a:solidFill>
+                  <a:srgbClr val="1A1A2E"/>
+                </a:solidFill>
+                <a:latin typeface="Calibri"/>
+              </a:defRPr>
+            </a:pPr>
+            <a:r>
+              <a:t>Scatter</a:t>
+            </a:r>
+          </a:p>
+        </p:txBody>
+      </p:sp>
+      <p:sp>
+        <p:nvSpPr>
+          <p:cNvPr id="12" name="TextBox 11"/>
+          <p:cNvSpPr txBox="1"/>
+          <p:nvPr/>
+        </p:nvSpPr>
+        <p:spPr>
+          <a:xfrm>
+            <a:off x="1371600" y="5303520"/>
+            <a:ext cx="9418320" cy="548640"/>
+          </a:xfrm>
+          <a:prstGeom prst="rect">
+            <a:avLst/>
+          </a:prstGeom>
+          <a:noFill/>
+        </p:spPr>
+        <p:txBody>
+          <a:bodyPr wrap="square">
+            <a:spAutoFit/>
+          </a:bodyPr>
+          <a:lstStyle/>
+          <a:p>
+            <a:pPr algn="ctr">
+              <a:spcAft>
+                <a:spcPts val="600"/>
+              </a:spcAft>
+              <a:defRPr sz="2000" b="1">
+                <a:solidFill>
+                  <a:srgbClr val="B46A00"/>
+                </a:solidFill>
+                <a:latin typeface="Calibri"/>
+              </a:defRPr>
+            </a:pPr>
+            <a:r>
+              <a:t>"The IO cost scales linearly with expert granularity"</a:t>
+            </a:r>
+          </a:p>
+        </p:txBody>
+      </p:sp>
+      <p:sp>
+        <p:nvSpPr>
+          <p:cNvPr id="13" name="TextBox 12"/>
+          <p:cNvSpPr txBox="1"/>
+          <p:nvPr/>
+        </p:nvSpPr>
+        <p:spPr>
+          <a:xfrm>
+            <a:off x="11155680" y="6400800"/>
+            <a:ext cx="914400" cy="365760"/>
+          </a:xfrm>
+          <a:prstGeom prst="rect">
+            <a:avLst/>
+          </a:prstGeom>
+          <a:noFill/>
+        </p:spPr>
+        <p:txBody>
+          <a:bodyPr wrap="square">
+            <a:spAutoFit/>
+          </a:bodyPr>
+          <a:lstStyle/>
+          <a:p>
             <a:pPr algn="r">
               <a:spcAft>
                 <a:spcPts val="330"/>
@@ -13606,7 +16004,7 @@
               </a:defRPr>
             </a:pPr>
             <a:r>
-              <a:t>27/33</a:t>
+              <a:t>27/36</a:t>
             </a:r>
           </a:p>
         </p:txBody>
@@ -13714,32 +16112,30 @@
               </a:defRPr>
             </a:pPr>
             <a:r>
-              <a:t>SonicMoE — NCU Details</a:t>
-            </a:r>
-          </a:p>
-        </p:txBody>
-      </p:sp>
-      <p:sp>
-        <p:nvSpPr>
-          <p:cNvPr id="4" name="Rectangle 3"/>
+              <a:t>SonicMoE’s Key Innovations</a:t>
+            </a:r>
+          </a:p>
+        </p:txBody>
+      </p:sp>
+      <p:sp>
+        <p:nvSpPr>
+          <p:cNvPr id="4" name="Rounded Rectangle 3"/>
           <p:cNvSpPr/>
           <p:nvPr/>
         </p:nvSpPr>
         <p:spPr>
           <a:xfrm>
-            <a:off x="1371600" y="1371600"/>
-            <a:ext cx="9418320" cy="4114800"/>
-          </a:xfrm>
-          <a:prstGeom prst="rect">
+            <a:off x="822960" y="1463040"/>
+            <a:ext cx="548640" cy="548640"/>
+          </a:xfrm>
+          <a:prstGeom prst="roundRect">
             <a:avLst/>
           </a:prstGeom>
           <a:solidFill>
-            <a:srgbClr val="E8EEF4"/>
+            <a:srgbClr val="057A55"/>
           </a:solidFill>
-          <a:ln w="25400">
-            <a:solidFill>
-              <a:srgbClr val="777777"/>
-            </a:solidFill>
+          <a:ln>
+            <a:noFill/>
           </a:ln>
         </p:spPr>
         <p:style>
@@ -13757,19 +16153,19 @@
           </a:fontRef>
         </p:style>
         <p:txBody>
-          <a:bodyPr rtlCol="0" anchor="ctr" wrap="square"/>
+          <a:bodyPr rtlCol="0" anchor="ctr" wrap="square" lIns="101600" rIns="101600" tIns="76200" bIns="76200"/>
           <a:lstStyle/>
           <a:p>
             <a:pPr algn="ctr">
-              <a:defRPr sz="2400" b="1">
-                <a:solidFill>
-                  <a:srgbClr val="777777"/>
-                </a:solidFill>
-                <a:latin typeface="Calibri"/>
-              </a:defRPr>
-            </a:pPr>
-            <a:r>
-              <a:t>[SCREENSHOT: NCU SonicMoE kernel]</a:t>
+              <a:defRPr sz="2000" b="1">
+                <a:solidFill>
+                  <a:srgbClr val="1A1A2E"/>
+                </a:solidFill>
+                <a:latin typeface="Calibri"/>
+              </a:defRPr>
+            </a:pPr>
+            <a:r>
+              <a:t>1</a:t>
             </a:r>
           </a:p>
         </p:txBody>
@@ -13782,8 +16178,8 @@
         </p:nvSpPr>
         <p:spPr>
           <a:xfrm>
-            <a:off x="914400" y="5760720"/>
-            <a:ext cx="10332720" cy="457200"/>
+            <a:off x="1645920" y="1463040"/>
+            <a:ext cx="3657600" cy="457200"/>
           </a:xfrm>
           <a:prstGeom prst="rect">
             <a:avLst/>
@@ -13796,19 +16192,19 @@
           </a:bodyPr>
           <a:lstStyle/>
           <a:p>
-            <a:pPr algn="ctr">
-              <a:spcAft>
-                <a:spcPts val="480"/>
-              </a:spcAft>
-              <a:defRPr sz="1600" b="0">
-                <a:solidFill>
-                  <a:srgbClr val="555555"/>
-                </a:solidFill>
-                <a:latin typeface="Calibri"/>
-              </a:defRPr>
-            </a:pPr>
-            <a:r>
-              <a:t>quackgemm kernel: occupancy, memory throughput, warp stall breakdown</a:t>
+            <a:pPr algn="l">
+              <a:spcAft>
+                <a:spcPts val="660"/>
+              </a:spcAft>
+              <a:defRPr sz="2200" b="1">
+                <a:solidFill>
+                  <a:srgbClr val="057A55"/>
+                </a:solidFill>
+                <a:latin typeface="Calibri"/>
+              </a:defRPr>
+            </a:pPr>
+            <a:r>
+              <a:t>Gather Fusion</a:t>
             </a:r>
           </a:p>
         </p:txBody>
@@ -13821,8 +16217,8 @@
         </p:nvSpPr>
         <p:spPr>
           <a:xfrm>
-            <a:off x="11155680" y="6400800"/>
-            <a:ext cx="914400" cy="365760"/>
+            <a:off x="1645920" y="1920240"/>
+            <a:ext cx="9144000" cy="457200"/>
           </a:xfrm>
           <a:prstGeom prst="rect">
             <a:avLst/>
@@ -13835,6 +16231,362 @@
           </a:bodyPr>
           <a:lstStyle/>
           <a:p>
+            <a:pPr algn="l">
+              <a:spcAft>
+                <a:spcPts val="509"/>
+              </a:spcAft>
+              <a:defRPr sz="1700" b="0">
+                <a:solidFill>
+                  <a:srgbClr val="1A1A2E"/>
+                </a:solidFill>
+                <a:latin typeface="Calibri"/>
+              </a:defRPr>
+            </a:pPr>
+            <a:r>
+              <a:t>Token gather fused with GEMM prologue (no separate kernel)</a:t>
+            </a:r>
+          </a:p>
+        </p:txBody>
+      </p:sp>
+      <p:sp>
+        <p:nvSpPr>
+          <p:cNvPr id="7" name="Rounded Rectangle 6"/>
+          <p:cNvSpPr/>
+          <p:nvPr/>
+        </p:nvSpPr>
+        <p:spPr>
+          <a:xfrm>
+            <a:off x="822960" y="2834640"/>
+            <a:ext cx="548640" cy="548640"/>
+          </a:xfrm>
+          <a:prstGeom prst="roundRect">
+            <a:avLst/>
+          </a:prstGeom>
+          <a:solidFill>
+            <a:srgbClr val="0E6EB8"/>
+          </a:solidFill>
+          <a:ln>
+            <a:noFill/>
+          </a:ln>
+        </p:spPr>
+        <p:style>
+          <a:lnRef idx="1">
+            <a:schemeClr val="accent1"/>
+          </a:lnRef>
+          <a:fillRef idx="3">
+            <a:schemeClr val="accent1"/>
+          </a:fillRef>
+          <a:effectRef idx="2">
+            <a:schemeClr val="accent1"/>
+          </a:effectRef>
+          <a:fontRef idx="minor">
+            <a:schemeClr val="lt1"/>
+          </a:fontRef>
+        </p:style>
+        <p:txBody>
+          <a:bodyPr rtlCol="0" anchor="ctr" wrap="square" lIns="101600" rIns="101600" tIns="76200" bIns="76200"/>
+          <a:lstStyle/>
+          <a:p>
+            <a:pPr algn="ctr">
+              <a:defRPr sz="2000" b="1">
+                <a:solidFill>
+                  <a:srgbClr val="1A1A2E"/>
+                </a:solidFill>
+                <a:latin typeface="Calibri"/>
+              </a:defRPr>
+            </a:pPr>
+            <a:r>
+              <a:t>2</a:t>
+            </a:r>
+          </a:p>
+        </p:txBody>
+      </p:sp>
+      <p:sp>
+        <p:nvSpPr>
+          <p:cNvPr id="8" name="TextBox 7"/>
+          <p:cNvSpPr txBox="1"/>
+          <p:nvPr/>
+        </p:nvSpPr>
+        <p:spPr>
+          <a:xfrm>
+            <a:off x="1645920" y="2834640"/>
+            <a:ext cx="3657600" cy="457200"/>
+          </a:xfrm>
+          <a:prstGeom prst="rect">
+            <a:avLst/>
+          </a:prstGeom>
+          <a:noFill/>
+        </p:spPr>
+        <p:txBody>
+          <a:bodyPr wrap="square">
+            <a:spAutoFit/>
+          </a:bodyPr>
+          <a:lstStyle/>
+          <a:p>
+            <a:pPr algn="l">
+              <a:spcAft>
+                <a:spcPts val="660"/>
+              </a:spcAft>
+              <a:defRPr sz="2200" b="1">
+                <a:solidFill>
+                  <a:srgbClr val="0E6EB8"/>
+                </a:solidFill>
+                <a:latin typeface="Calibri"/>
+              </a:defRPr>
+            </a:pPr>
+            <a:r>
+              <a:t>Ping-Pong Scheduling</a:t>
+            </a:r>
+          </a:p>
+        </p:txBody>
+      </p:sp>
+      <p:sp>
+        <p:nvSpPr>
+          <p:cNvPr id="9" name="TextBox 8"/>
+          <p:cNvSpPr txBox="1"/>
+          <p:nvPr/>
+        </p:nvSpPr>
+        <p:spPr>
+          <a:xfrm>
+            <a:off x="1645920" y="3291840"/>
+            <a:ext cx="9144000" cy="457200"/>
+          </a:xfrm>
+          <a:prstGeom prst="rect">
+            <a:avLst/>
+          </a:prstGeom>
+          <a:noFill/>
+        </p:spPr>
+        <p:txBody>
+          <a:bodyPr wrap="square">
+            <a:spAutoFit/>
+          </a:bodyPr>
+          <a:lstStyle/>
+          <a:p>
+            <a:pPr algn="l">
+              <a:spcAft>
+                <a:spcPts val="509"/>
+              </a:spcAft>
+              <a:defRPr sz="1700" b="0">
+                <a:solidFill>
+                  <a:srgbClr val="1A1A2E"/>
+                </a:solidFill>
+                <a:latin typeface="Calibri"/>
+              </a:defRPr>
+            </a:pPr>
+            <a:r>
+              <a:t>Overlap epilogue IO with next tile’s MMA</a:t>
+            </a:r>
+          </a:p>
+        </p:txBody>
+      </p:sp>
+      <p:sp>
+        <p:nvSpPr>
+          <p:cNvPr id="10" name="Rounded Rectangle 9"/>
+          <p:cNvSpPr/>
+          <p:nvPr/>
+        </p:nvSpPr>
+        <p:spPr>
+          <a:xfrm>
+            <a:off x="822960" y="4206240"/>
+            <a:ext cx="548640" cy="548640"/>
+          </a:xfrm>
+          <a:prstGeom prst="roundRect">
+            <a:avLst/>
+          </a:prstGeom>
+          <a:solidFill>
+            <a:srgbClr val="B46A00"/>
+          </a:solidFill>
+          <a:ln>
+            <a:noFill/>
+          </a:ln>
+        </p:spPr>
+        <p:style>
+          <a:lnRef idx="1">
+            <a:schemeClr val="accent1"/>
+          </a:lnRef>
+          <a:fillRef idx="3">
+            <a:schemeClr val="accent1"/>
+          </a:fillRef>
+          <a:effectRef idx="2">
+            <a:schemeClr val="accent1"/>
+          </a:effectRef>
+          <a:fontRef idx="minor">
+            <a:schemeClr val="lt1"/>
+          </a:fontRef>
+        </p:style>
+        <p:txBody>
+          <a:bodyPr rtlCol="0" anchor="ctr" wrap="square" lIns="101600" rIns="101600" tIns="76200" bIns="76200"/>
+          <a:lstStyle/>
+          <a:p>
+            <a:pPr algn="ctr">
+              <a:defRPr sz="2000" b="1">
+                <a:solidFill>
+                  <a:srgbClr val="1A1A2E"/>
+                </a:solidFill>
+                <a:latin typeface="Calibri"/>
+              </a:defRPr>
+            </a:pPr>
+            <a:r>
+              <a:t>3</a:t>
+            </a:r>
+          </a:p>
+        </p:txBody>
+      </p:sp>
+      <p:sp>
+        <p:nvSpPr>
+          <p:cNvPr id="11" name="TextBox 10"/>
+          <p:cNvSpPr txBox="1"/>
+          <p:nvPr/>
+        </p:nvSpPr>
+        <p:spPr>
+          <a:xfrm>
+            <a:off x="1645920" y="4206240"/>
+            <a:ext cx="3657600" cy="457200"/>
+          </a:xfrm>
+          <a:prstGeom prst="rect">
+            <a:avLst/>
+          </a:prstGeom>
+          <a:noFill/>
+        </p:spPr>
+        <p:txBody>
+          <a:bodyPr wrap="square">
+            <a:spAutoFit/>
+          </a:bodyPr>
+          <a:lstStyle/>
+          <a:p>
+            <a:pPr algn="l">
+              <a:spcAft>
+                <a:spcPts val="660"/>
+              </a:spcAft>
+              <a:defRPr sz="2200" b="1">
+                <a:solidFill>
+                  <a:srgbClr val="B46A00"/>
+                </a:solidFill>
+                <a:latin typeface="Calibri"/>
+              </a:defRPr>
+            </a:pPr>
+            <a:r>
+              <a:t>Epilogue Fusion</a:t>
+            </a:r>
+          </a:p>
+        </p:txBody>
+      </p:sp>
+      <p:sp>
+        <p:nvSpPr>
+          <p:cNvPr id="12" name="TextBox 11"/>
+          <p:cNvSpPr txBox="1"/>
+          <p:nvPr/>
+        </p:nvSpPr>
+        <p:spPr>
+          <a:xfrm>
+            <a:off x="1645920" y="4663440"/>
+            <a:ext cx="9144000" cy="457200"/>
+          </a:xfrm>
+          <a:prstGeom prst="rect">
+            <a:avLst/>
+          </a:prstGeom>
+          <a:noFill/>
+        </p:spPr>
+        <p:txBody>
+          <a:bodyPr wrap="square">
+            <a:spAutoFit/>
+          </a:bodyPr>
+          <a:lstStyle/>
+          <a:p>
+            <a:pPr algn="l">
+              <a:spcAft>
+                <a:spcPts val="509"/>
+              </a:spcAft>
+              <a:defRPr sz="1700" b="0">
+                <a:solidFill>
+                  <a:srgbClr val="1A1A2E"/>
+                </a:solidFill>
+                <a:latin typeface="Calibri"/>
+              </a:defRPr>
+            </a:pPr>
+            <a:r>
+              <a:t>SwiGLU + dS + A′ computed in GEMM epilogue</a:t>
+            </a:r>
+          </a:p>
+        </p:txBody>
+      </p:sp>
+      <p:sp>
+        <p:nvSpPr>
+          <p:cNvPr id="13" name="Rounded Rectangle 12"/>
+          <p:cNvSpPr/>
+          <p:nvPr/>
+        </p:nvSpPr>
+        <p:spPr>
+          <a:xfrm>
+            <a:off x="2743200" y="5212080"/>
+            <a:ext cx="6675120" cy="731520"/>
+          </a:xfrm>
+          <a:prstGeom prst="roundRect">
+            <a:avLst/>
+          </a:prstGeom>
+          <a:solidFill>
+            <a:srgbClr val="F0F4F8"/>
+          </a:solidFill>
+          <a:ln w="19050">
+            <a:solidFill>
+              <a:srgbClr val="057A55"/>
+            </a:solidFill>
+          </a:ln>
+        </p:spPr>
+        <p:style>
+          <a:lnRef idx="1">
+            <a:schemeClr val="accent1"/>
+          </a:lnRef>
+          <a:fillRef idx="3">
+            <a:schemeClr val="accent1"/>
+          </a:fillRef>
+          <a:effectRef idx="2">
+            <a:schemeClr val="accent1"/>
+          </a:effectRef>
+          <a:fontRef idx="minor">
+            <a:schemeClr val="lt1"/>
+          </a:fontRef>
+        </p:style>
+        <p:txBody>
+          <a:bodyPr rtlCol="0" anchor="ctr" wrap="square" lIns="101600" rIns="101600" tIns="76200" bIns="76200"/>
+          <a:lstStyle/>
+          <a:p>
+            <a:pPr algn="ctr">
+              <a:defRPr sz="2200" b="1">
+                <a:solidFill>
+                  <a:srgbClr val="057A55"/>
+                </a:solidFill>
+                <a:latin typeface="Calibri"/>
+              </a:defRPr>
+            </a:pPr>
+            <a:r>
+              <a:t>Result: IO is hidden behind compute</a:t>
+            </a:r>
+          </a:p>
+        </p:txBody>
+      </p:sp>
+      <p:sp>
+        <p:nvSpPr>
+          <p:cNvPr id="14" name="TextBox 13"/>
+          <p:cNvSpPr txBox="1"/>
+          <p:nvPr/>
+        </p:nvSpPr>
+        <p:spPr>
+          <a:xfrm>
+            <a:off x="11155680" y="6400800"/>
+            <a:ext cx="914400" cy="365760"/>
+          </a:xfrm>
+          <a:prstGeom prst="rect">
+            <a:avLst/>
+          </a:prstGeom>
+          <a:noFill/>
+        </p:spPr>
+        <p:txBody>
+          <a:bodyPr wrap="square">
+            <a:spAutoFit/>
+          </a:bodyPr>
+          <a:lstStyle/>
+          <a:p>
             <a:pPr algn="r">
               <a:spcAft>
                 <a:spcPts val="330"/>
@@ -13847,7 +16599,7 @@
               </a:defRPr>
             </a:pPr>
             <a:r>
-              <a:t>28/33</a:t>
+              <a:t>28/36</a:t>
             </a:r>
           </a:p>
         </p:txBody>
@@ -13955,7 +16707,7 @@
               </a:defRPr>
             </a:pPr>
             <a:r>
-              <a:t>The Production Picture</a:t>
+              <a:t>SonicMoE — Profiler Results</a:t>
             </a:r>
           </a:p>
         </p:txBody>
@@ -13969,7 +16721,7 @@
         <p:spPr>
           <a:xfrm>
             <a:off x="822960" y="1371600"/>
-            <a:ext cx="10058400" cy="2286000"/>
+            <a:ext cx="10058400" cy="457200"/>
           </a:xfrm>
           <a:prstGeom prst="rect">
             <a:avLst/>
@@ -13984,41 +16736,17 @@
           <a:p>
             <a:pPr algn="l">
               <a:spcAft>
-                <a:spcPts val="800"/>
-              </a:spcAft>
-              <a:defRPr sz="2000">
-                <a:solidFill>
-                  <a:srgbClr val="1A1A2E"/>
-                </a:solidFill>
-                <a:latin typeface="Calibri"/>
-              </a:defRPr>
-              <a:buClr>
-                <a:srgbClr val="0E6EB8"/>
-              </a:buClr>
-              <a:buChar char="•"/>
-            </a:pPr>
-            <a:r>
-              <a:t>DGX Spark profiling: DeepGEMM accounts for 61.9% of GPU time in DeepSeek-V4-Flash inference</a:t>
-            </a:r>
-          </a:p>
-          <a:p>
-            <a:pPr algn="l">
-              <a:spcAft>
-                <a:spcPts val="800"/>
-              </a:spcAft>
-              <a:defRPr sz="2000">
-                <a:solidFill>
-                  <a:srgbClr val="1A1A2E"/>
-                </a:solidFill>
-                <a:latin typeface="Calibri"/>
-              </a:defRPr>
-              <a:buClr>
-                <a:srgbClr val="0E6EB8"/>
-              </a:buClr>
-              <a:buChar char="•"/>
-            </a:pPr>
-            <a:r>
-              <a:t>SonicMoE beats DeepGEMM by 43% on forward pass for fine-grained MoEs (from their paper)</a:t>
+                <a:spcPts val="540"/>
+              </a:spcAft>
+              <a:defRPr sz="1800" b="0">
+                <a:solidFill>
+                  <a:srgbClr val="555555"/>
+                </a:solidFill>
+                <a:latin typeface="Calibri"/>
+              </a:defRPr>
+            </a:pPr>
+            <a:r>
+              <a:t>Configuration: E=128, K=8, d=1536, n=256 (7B MoE)</a:t>
             </a:r>
           </a:p>
         </p:txBody>
@@ -14031,8 +16759,8 @@
         </p:nvSpPr>
         <p:spPr>
           <a:xfrm>
-            <a:off x="2286000" y="3840480"/>
-            <a:ext cx="7589520" cy="914400"/>
+            <a:off x="822960" y="2103120"/>
+            <a:ext cx="3657600" cy="731520"/>
           </a:xfrm>
           <a:prstGeom prst="roundRect">
             <a:avLst/>
@@ -14073,7 +16801,7 @@
               </a:defRPr>
             </a:pPr>
             <a:r>
-              <a:t>These GEMM kernels ARE the bottleneck in production</a:t>
+              <a:t>35 TFLOPS on H200</a:t>
             </a:r>
           </a:p>
         </p:txBody>
@@ -14086,8 +16814,8 @@
         </p:nvSpPr>
         <p:spPr>
           <a:xfrm>
-            <a:off x="11155680" y="6400800"/>
-            <a:ext cx="914400" cy="365760"/>
+            <a:off x="822960" y="3291840"/>
+            <a:ext cx="10058400" cy="365760"/>
           </a:xfrm>
           <a:prstGeom prst="rect">
             <a:avLst/>
@@ -14100,6 +16828,147 @@
           </a:bodyPr>
           <a:lstStyle/>
           <a:p>
+            <a:pPr algn="l">
+              <a:spcAft>
+                <a:spcPts val="540"/>
+              </a:spcAft>
+              <a:defRPr sz="1800" b="1">
+                <a:solidFill>
+                  <a:srgbClr val="0E6EB8"/>
+                </a:solidFill>
+                <a:latin typeface="Calibri"/>
+              </a:defRPr>
+            </a:pPr>
+            <a:r>
+              <a:t>Key Kernels:</a:t>
+            </a:r>
+          </a:p>
+        </p:txBody>
+      </p:sp>
+      <p:sp>
+        <p:nvSpPr>
+          <p:cNvPr id="7" name="TextBox 6"/>
+          <p:cNvSpPr txBox="1"/>
+          <p:nvPr/>
+        </p:nvSpPr>
+        <p:spPr>
+          <a:xfrm>
+            <a:off x="822960" y="3749039"/>
+            <a:ext cx="10058400" cy="1371600"/>
+          </a:xfrm>
+          <a:prstGeom prst="rect">
+            <a:avLst/>
+          </a:prstGeom>
+          <a:noFill/>
+        </p:spPr>
+        <p:txBody>
+          <a:bodyPr wrap="square">
+            <a:spAutoFit/>
+          </a:bodyPr>
+          <a:lstStyle/>
+          <a:p>
+            <a:pPr algn="l">
+              <a:spcAft>
+                <a:spcPts val="800"/>
+              </a:spcAft>
+              <a:defRPr sz="1700">
+                <a:solidFill>
+                  <a:srgbClr val="1A1A2E"/>
+                </a:solidFill>
+                <a:latin typeface="Calibri"/>
+              </a:defRPr>
+              <a:buClr>
+                <a:srgbClr val="0E6EB8"/>
+              </a:buClr>
+              <a:buChar char="•"/>
+            </a:pPr>
+            <a:r>
+              <a:t>quackgemm_actGemmGatedSm90  (up projection + SwiGLU fused)</a:t>
+            </a:r>
+          </a:p>
+          <a:p>
+            <a:pPr algn="l">
+              <a:spcAft>
+                <a:spcPts val="800"/>
+              </a:spcAft>
+              <a:defRPr sz="1700">
+                <a:solidFill>
+                  <a:srgbClr val="1A1A2E"/>
+                </a:solidFill>
+                <a:latin typeface="Calibri"/>
+              </a:defRPr>
+              <a:buClr>
+                <a:srgbClr val="0E6EB8"/>
+              </a:buClr>
+              <a:buChar char="•"/>
+            </a:pPr>
+            <a:r>
+              <a:t>quackgemm_default_epiGemmDefaultSm90  (down projection)</a:t>
+            </a:r>
+          </a:p>
+        </p:txBody>
+      </p:sp>
+      <p:sp>
+        <p:nvSpPr>
+          <p:cNvPr id="8" name="TextBox 7"/>
+          <p:cNvSpPr txBox="1"/>
+          <p:nvPr/>
+        </p:nvSpPr>
+        <p:spPr>
+          <a:xfrm>
+            <a:off x="1371600" y="5303520"/>
+            <a:ext cx="9418320" cy="548640"/>
+          </a:xfrm>
+          <a:prstGeom prst="rect">
+            <a:avLst/>
+          </a:prstGeom>
+          <a:noFill/>
+        </p:spPr>
+        <p:txBody>
+          <a:bodyPr wrap="square">
+            <a:spAutoFit/>
+          </a:bodyPr>
+          <a:lstStyle/>
+          <a:p>
+            <a:pPr algn="ctr">
+              <a:spcAft>
+                <a:spcPts val="570"/>
+              </a:spcAft>
+              <a:defRPr sz="1900" b="1">
+                <a:solidFill>
+                  <a:srgbClr val="B46A00"/>
+                </a:solidFill>
+                <a:latin typeface="Calibri"/>
+              </a:defRPr>
+            </a:pPr>
+            <a:r>
+              <a:t>"Two GEMM kernels with fused activation — that’s the entire MoE forward"</a:t>
+            </a:r>
+          </a:p>
+        </p:txBody>
+      </p:sp>
+      <p:sp>
+        <p:nvSpPr>
+          <p:cNvPr id="9" name="TextBox 8"/>
+          <p:cNvSpPr txBox="1"/>
+          <p:nvPr/>
+        </p:nvSpPr>
+        <p:spPr>
+          <a:xfrm>
+            <a:off x="11155680" y="6400800"/>
+            <a:ext cx="914400" cy="365760"/>
+          </a:xfrm>
+          <a:prstGeom prst="rect">
+            <a:avLst/>
+          </a:prstGeom>
+          <a:noFill/>
+        </p:spPr>
+        <p:txBody>
+          <a:bodyPr wrap="square">
+            <a:spAutoFit/>
+          </a:bodyPr>
+          <a:lstStyle/>
+          <a:p>
             <a:pPr algn="r">
               <a:spcAft>
                 <a:spcPts val="330"/>
@@ -14112,7 +16981,7 @@
               </a:defRPr>
             </a:pPr>
             <a:r>
-              <a:t>29/33</a:t>
+              <a:t>29/36</a:t>
             </a:r>
           </a:p>
         </p:txBody>
@@ -14725,7 +17594,7 @@
               </a:defRPr>
             </a:pPr>
             <a:r>
-              <a:t>3/33</a:t>
+              <a:t>3/36</a:t>
             </a:r>
           </a:p>
         </p:txBody>
@@ -14739,6 +17608,722 @@
 </file>
 
 <file path=ppt/slides/slide30.xml><?xml version="1.0" encoding="utf-8"?>
+<p:sld xmlns:a="http://schemas.openxmlformats.org/drawingml/2006/main" xmlns:p="http://schemas.openxmlformats.org/presentationml/2006/main" xmlns:r="http://schemas.openxmlformats.org/officeDocument/2006/relationships">
+  <p:cSld>
+    <p:bg>
+      <p:bgPr>
+        <a:solidFill>
+          <a:srgbClr val="FFFFFF"/>
+        </a:solidFill>
+        <a:effectLst/>
+      </p:bgPr>
+    </p:bg>
+    <p:spTree>
+      <p:nvGrpSpPr>
+        <p:cNvPr id="1" name=""/>
+        <p:cNvGrpSpPr/>
+        <p:nvPr/>
+      </p:nvGrpSpPr>
+      <p:grpSpPr/>
+      <p:sp>
+        <p:nvSpPr>
+          <p:cNvPr id="2" name="Rectangle 1"/>
+          <p:cNvSpPr/>
+          <p:nvPr/>
+        </p:nvSpPr>
+        <p:spPr>
+          <a:xfrm>
+            <a:off x="548640" y="274320"/>
+            <a:ext cx="109728" cy="502920"/>
+          </a:xfrm>
+          <a:prstGeom prst="rect">
+            <a:avLst/>
+          </a:prstGeom>
+          <a:solidFill>
+            <a:srgbClr val="0E6EB8"/>
+          </a:solidFill>
+          <a:ln>
+            <a:noFill/>
+          </a:ln>
+        </p:spPr>
+        <p:style>
+          <a:lnRef idx="1">
+            <a:schemeClr val="accent1"/>
+          </a:lnRef>
+          <a:fillRef idx="3">
+            <a:schemeClr val="accent1"/>
+          </a:fillRef>
+          <a:effectRef idx="2">
+            <a:schemeClr val="accent1"/>
+          </a:effectRef>
+          <a:fontRef idx="minor">
+            <a:schemeClr val="lt1"/>
+          </a:fontRef>
+        </p:style>
+        <p:txBody>
+          <a:bodyPr rtlCol="0" anchor="ctr"/>
+          <a:lstStyle/>
+          <a:p>
+            <a:pPr algn="ctr"/>
+          </a:p>
+        </p:txBody>
+      </p:sp>
+      <p:sp>
+        <p:nvSpPr>
+          <p:cNvPr id="3" name="TextBox 2"/>
+          <p:cNvSpPr txBox="1"/>
+          <p:nvPr/>
+        </p:nvSpPr>
+        <p:spPr>
+          <a:xfrm>
+            <a:off x="822960" y="228600"/>
+            <a:ext cx="10058400" cy="640080"/>
+          </a:xfrm>
+          <a:prstGeom prst="rect">
+            <a:avLst/>
+          </a:prstGeom>
+          <a:noFill/>
+        </p:spPr>
+        <p:txBody>
+          <a:bodyPr wrap="square">
+            <a:spAutoFit/>
+          </a:bodyPr>
+          <a:lstStyle/>
+          <a:p>
+            <a:pPr algn="l">
+              <a:spcAft>
+                <a:spcPts val="960"/>
+              </a:spcAft>
+              <a:defRPr sz="3200" b="1">
+                <a:solidFill>
+                  <a:srgbClr val="0E6EB8"/>
+                </a:solidFill>
+                <a:latin typeface="Calibri"/>
+              </a:defRPr>
+            </a:pPr>
+            <a:r>
+              <a:t>SonicMoE — Perfetto Trace</a:t>
+            </a:r>
+          </a:p>
+        </p:txBody>
+      </p:sp>
+      <p:sp>
+        <p:nvSpPr>
+          <p:cNvPr id="4" name="Rounded Rectangle 3"/>
+          <p:cNvSpPr/>
+          <p:nvPr/>
+        </p:nvSpPr>
+        <p:spPr>
+          <a:xfrm>
+            <a:off x="1828800" y="2286000"/>
+            <a:ext cx="8534095" cy="3200400"/>
+          </a:xfrm>
+          <a:prstGeom prst="roundRect">
+            <a:avLst/>
+          </a:prstGeom>
+          <a:solidFill>
+            <a:srgbClr val="F0F4F8"/>
+          </a:solidFill>
+          <a:ln w="25400">
+            <a:solidFill>
+              <a:srgbClr val="0E6EB8"/>
+            </a:solidFill>
+          </a:ln>
+        </p:spPr>
+        <p:style>
+          <a:lnRef idx="1">
+            <a:schemeClr val="accent1"/>
+          </a:lnRef>
+          <a:fillRef idx="3">
+            <a:schemeClr val="accent1"/>
+          </a:fillRef>
+          <a:effectRef idx="2">
+            <a:schemeClr val="accent1"/>
+          </a:effectRef>
+          <a:fontRef idx="minor">
+            <a:schemeClr val="lt1"/>
+          </a:fontRef>
+        </p:style>
+        <p:txBody>
+          <a:bodyPr rtlCol="0" anchor="ctr" wrap="square" tIns="1097280"/>
+          <a:lstStyle/>
+          <a:p>
+            <a:pPr algn="ctr">
+              <a:spcAft>
+                <a:spcPts val="0"/>
+              </a:spcAft>
+              <a:defRPr sz="3200" b="1">
+                <a:solidFill>
+                  <a:srgbClr val="0E6EB8"/>
+                </a:solidFill>
+                <a:latin typeface="Calibri"/>
+              </a:defRPr>
+            </a:pPr>
+            <a:r>
+              <a:t>[LIVE DEMO — Perfetto UI]</a:t>
+            </a:r>
+            <a:br/>
+            <a:br/>
+            <a:r>
+              <a:t>sonicmoe_forward annotation, two GEMM kernels, routing overhead</a:t>
+            </a:r>
+          </a:p>
+        </p:txBody>
+      </p:sp>
+      <p:sp>
+        <p:nvSpPr>
+          <p:cNvPr id="5" name="TextBox 4"/>
+          <p:cNvSpPr txBox="1"/>
+          <p:nvPr/>
+        </p:nvSpPr>
+        <p:spPr>
+          <a:xfrm>
+            <a:off x="11155680" y="6400800"/>
+            <a:ext cx="914400" cy="365760"/>
+          </a:xfrm>
+          <a:prstGeom prst="rect">
+            <a:avLst/>
+          </a:prstGeom>
+          <a:noFill/>
+        </p:spPr>
+        <p:txBody>
+          <a:bodyPr wrap="square">
+            <a:spAutoFit/>
+          </a:bodyPr>
+          <a:lstStyle/>
+          <a:p>
+            <a:pPr algn="r">
+              <a:spcAft>
+                <a:spcPts val="330"/>
+              </a:spcAft>
+              <a:defRPr sz="1100" b="0">
+                <a:solidFill>
+                  <a:srgbClr val="777777"/>
+                </a:solidFill>
+                <a:latin typeface="Calibri"/>
+              </a:defRPr>
+            </a:pPr>
+            <a:r>
+              <a:t>30/36</a:t>
+            </a:r>
+          </a:p>
+        </p:txBody>
+      </p:sp>
+    </p:spTree>
+  </p:cSld>
+  <p:clrMapOvr>
+    <a:masterClrMapping/>
+  </p:clrMapOvr>
+</p:sld>
+</file>
+
+<file path=ppt/slides/slide31.xml><?xml version="1.0" encoding="utf-8"?>
+<p:sld xmlns:a="http://schemas.openxmlformats.org/drawingml/2006/main" xmlns:p="http://schemas.openxmlformats.org/presentationml/2006/main" xmlns:r="http://schemas.openxmlformats.org/officeDocument/2006/relationships">
+  <p:cSld>
+    <p:bg>
+      <p:bgPr>
+        <a:solidFill>
+          <a:srgbClr val="FFFFFF"/>
+        </a:solidFill>
+        <a:effectLst/>
+      </p:bgPr>
+    </p:bg>
+    <p:spTree>
+      <p:nvGrpSpPr>
+        <p:cNvPr id="1" name=""/>
+        <p:cNvGrpSpPr/>
+        <p:nvPr/>
+      </p:nvGrpSpPr>
+      <p:grpSpPr/>
+      <p:sp>
+        <p:nvSpPr>
+          <p:cNvPr id="2" name="Rectangle 1"/>
+          <p:cNvSpPr/>
+          <p:nvPr/>
+        </p:nvSpPr>
+        <p:spPr>
+          <a:xfrm>
+            <a:off x="548640" y="274320"/>
+            <a:ext cx="109728" cy="502920"/>
+          </a:xfrm>
+          <a:prstGeom prst="rect">
+            <a:avLst/>
+          </a:prstGeom>
+          <a:solidFill>
+            <a:srgbClr val="0E6EB8"/>
+          </a:solidFill>
+          <a:ln>
+            <a:noFill/>
+          </a:ln>
+        </p:spPr>
+        <p:style>
+          <a:lnRef idx="1">
+            <a:schemeClr val="accent1"/>
+          </a:lnRef>
+          <a:fillRef idx="3">
+            <a:schemeClr val="accent1"/>
+          </a:fillRef>
+          <a:effectRef idx="2">
+            <a:schemeClr val="accent1"/>
+          </a:effectRef>
+          <a:fontRef idx="minor">
+            <a:schemeClr val="lt1"/>
+          </a:fontRef>
+        </p:style>
+        <p:txBody>
+          <a:bodyPr rtlCol="0" anchor="ctr"/>
+          <a:lstStyle/>
+          <a:p>
+            <a:pPr algn="ctr"/>
+          </a:p>
+        </p:txBody>
+      </p:sp>
+      <p:sp>
+        <p:nvSpPr>
+          <p:cNvPr id="3" name="TextBox 2"/>
+          <p:cNvSpPr txBox="1"/>
+          <p:nvPr/>
+        </p:nvSpPr>
+        <p:spPr>
+          <a:xfrm>
+            <a:off x="822960" y="228600"/>
+            <a:ext cx="10058400" cy="640080"/>
+          </a:xfrm>
+          <a:prstGeom prst="rect">
+            <a:avLst/>
+          </a:prstGeom>
+          <a:noFill/>
+        </p:spPr>
+        <p:txBody>
+          <a:bodyPr wrap="square">
+            <a:spAutoFit/>
+          </a:bodyPr>
+          <a:lstStyle/>
+          <a:p>
+            <a:pPr algn="l">
+              <a:spcAft>
+                <a:spcPts val="960"/>
+              </a:spcAft>
+              <a:defRPr sz="3200" b="1">
+                <a:solidFill>
+                  <a:srgbClr val="0E6EB8"/>
+                </a:solidFill>
+                <a:latin typeface="Calibri"/>
+              </a:defRPr>
+            </a:pPr>
+            <a:r>
+              <a:t>SonicMoE — NCU Details</a:t>
+            </a:r>
+          </a:p>
+        </p:txBody>
+      </p:sp>
+      <p:sp>
+        <p:nvSpPr>
+          <p:cNvPr id="4" name="Rectangle 3"/>
+          <p:cNvSpPr/>
+          <p:nvPr/>
+        </p:nvSpPr>
+        <p:spPr>
+          <a:xfrm>
+            <a:off x="1371600" y="1371600"/>
+            <a:ext cx="9418320" cy="4114800"/>
+          </a:xfrm>
+          <a:prstGeom prst="rect">
+            <a:avLst/>
+          </a:prstGeom>
+          <a:solidFill>
+            <a:srgbClr val="E8EEF4"/>
+          </a:solidFill>
+          <a:ln w="25400">
+            <a:solidFill>
+              <a:srgbClr val="777777"/>
+            </a:solidFill>
+          </a:ln>
+        </p:spPr>
+        <p:style>
+          <a:lnRef idx="1">
+            <a:schemeClr val="accent1"/>
+          </a:lnRef>
+          <a:fillRef idx="3">
+            <a:schemeClr val="accent1"/>
+          </a:fillRef>
+          <a:effectRef idx="2">
+            <a:schemeClr val="accent1"/>
+          </a:effectRef>
+          <a:fontRef idx="minor">
+            <a:schemeClr val="lt1"/>
+          </a:fontRef>
+        </p:style>
+        <p:txBody>
+          <a:bodyPr rtlCol="0" anchor="ctr" wrap="square"/>
+          <a:lstStyle/>
+          <a:p>
+            <a:pPr algn="ctr">
+              <a:defRPr sz="2400" b="1">
+                <a:solidFill>
+                  <a:srgbClr val="777777"/>
+                </a:solidFill>
+                <a:latin typeface="Calibri"/>
+              </a:defRPr>
+            </a:pPr>
+            <a:r>
+              <a:t>[SCREENSHOT: NCU SonicMoE kernel]</a:t>
+            </a:r>
+          </a:p>
+        </p:txBody>
+      </p:sp>
+      <p:sp>
+        <p:nvSpPr>
+          <p:cNvPr id="5" name="TextBox 4"/>
+          <p:cNvSpPr txBox="1"/>
+          <p:nvPr/>
+        </p:nvSpPr>
+        <p:spPr>
+          <a:xfrm>
+            <a:off x="914400" y="5760720"/>
+            <a:ext cx="10332720" cy="457200"/>
+          </a:xfrm>
+          <a:prstGeom prst="rect">
+            <a:avLst/>
+          </a:prstGeom>
+          <a:noFill/>
+        </p:spPr>
+        <p:txBody>
+          <a:bodyPr wrap="square">
+            <a:spAutoFit/>
+          </a:bodyPr>
+          <a:lstStyle/>
+          <a:p>
+            <a:pPr algn="ctr">
+              <a:spcAft>
+                <a:spcPts val="480"/>
+              </a:spcAft>
+              <a:defRPr sz="1600" b="0">
+                <a:solidFill>
+                  <a:srgbClr val="555555"/>
+                </a:solidFill>
+                <a:latin typeface="Calibri"/>
+              </a:defRPr>
+            </a:pPr>
+            <a:r>
+              <a:t>quackgemm kernel: occupancy, memory throughput, warp stall breakdown</a:t>
+            </a:r>
+          </a:p>
+        </p:txBody>
+      </p:sp>
+      <p:sp>
+        <p:nvSpPr>
+          <p:cNvPr id="6" name="TextBox 5"/>
+          <p:cNvSpPr txBox="1"/>
+          <p:nvPr/>
+        </p:nvSpPr>
+        <p:spPr>
+          <a:xfrm>
+            <a:off x="11155680" y="6400800"/>
+            <a:ext cx="914400" cy="365760"/>
+          </a:xfrm>
+          <a:prstGeom prst="rect">
+            <a:avLst/>
+          </a:prstGeom>
+          <a:noFill/>
+        </p:spPr>
+        <p:txBody>
+          <a:bodyPr wrap="square">
+            <a:spAutoFit/>
+          </a:bodyPr>
+          <a:lstStyle/>
+          <a:p>
+            <a:pPr algn="r">
+              <a:spcAft>
+                <a:spcPts val="330"/>
+              </a:spcAft>
+              <a:defRPr sz="1100" b="0">
+                <a:solidFill>
+                  <a:srgbClr val="777777"/>
+                </a:solidFill>
+                <a:latin typeface="Calibri"/>
+              </a:defRPr>
+            </a:pPr>
+            <a:r>
+              <a:t>31/36</a:t>
+            </a:r>
+          </a:p>
+        </p:txBody>
+      </p:sp>
+    </p:spTree>
+  </p:cSld>
+  <p:clrMapOvr>
+    <a:masterClrMapping/>
+  </p:clrMapOvr>
+</p:sld>
+</file>
+
+<file path=ppt/slides/slide32.xml><?xml version="1.0" encoding="utf-8"?>
+<p:sld xmlns:a="http://schemas.openxmlformats.org/drawingml/2006/main" xmlns:p="http://schemas.openxmlformats.org/presentationml/2006/main" xmlns:r="http://schemas.openxmlformats.org/officeDocument/2006/relationships">
+  <p:cSld>
+    <p:bg>
+      <p:bgPr>
+        <a:solidFill>
+          <a:srgbClr val="FFFFFF"/>
+        </a:solidFill>
+        <a:effectLst/>
+      </p:bgPr>
+    </p:bg>
+    <p:spTree>
+      <p:nvGrpSpPr>
+        <p:cNvPr id="1" name=""/>
+        <p:cNvGrpSpPr/>
+        <p:nvPr/>
+      </p:nvGrpSpPr>
+      <p:grpSpPr/>
+      <p:sp>
+        <p:nvSpPr>
+          <p:cNvPr id="2" name="Rectangle 1"/>
+          <p:cNvSpPr/>
+          <p:nvPr/>
+        </p:nvSpPr>
+        <p:spPr>
+          <a:xfrm>
+            <a:off x="548640" y="274320"/>
+            <a:ext cx="109728" cy="502920"/>
+          </a:xfrm>
+          <a:prstGeom prst="rect">
+            <a:avLst/>
+          </a:prstGeom>
+          <a:solidFill>
+            <a:srgbClr val="0E6EB8"/>
+          </a:solidFill>
+          <a:ln>
+            <a:noFill/>
+          </a:ln>
+        </p:spPr>
+        <p:style>
+          <a:lnRef idx="1">
+            <a:schemeClr val="accent1"/>
+          </a:lnRef>
+          <a:fillRef idx="3">
+            <a:schemeClr val="accent1"/>
+          </a:fillRef>
+          <a:effectRef idx="2">
+            <a:schemeClr val="accent1"/>
+          </a:effectRef>
+          <a:fontRef idx="minor">
+            <a:schemeClr val="lt1"/>
+          </a:fontRef>
+        </p:style>
+        <p:txBody>
+          <a:bodyPr rtlCol="0" anchor="ctr"/>
+          <a:lstStyle/>
+          <a:p>
+            <a:pPr algn="ctr"/>
+          </a:p>
+        </p:txBody>
+      </p:sp>
+      <p:sp>
+        <p:nvSpPr>
+          <p:cNvPr id="3" name="TextBox 2"/>
+          <p:cNvSpPr txBox="1"/>
+          <p:nvPr/>
+        </p:nvSpPr>
+        <p:spPr>
+          <a:xfrm>
+            <a:off x="822960" y="228600"/>
+            <a:ext cx="10058400" cy="640080"/>
+          </a:xfrm>
+          <a:prstGeom prst="rect">
+            <a:avLst/>
+          </a:prstGeom>
+          <a:noFill/>
+        </p:spPr>
+        <p:txBody>
+          <a:bodyPr wrap="square">
+            <a:spAutoFit/>
+          </a:bodyPr>
+          <a:lstStyle/>
+          <a:p>
+            <a:pPr algn="l">
+              <a:spcAft>
+                <a:spcPts val="960"/>
+              </a:spcAft>
+              <a:defRPr sz="3200" b="1">
+                <a:solidFill>
+                  <a:srgbClr val="0E6EB8"/>
+                </a:solidFill>
+                <a:latin typeface="Calibri"/>
+              </a:defRPr>
+            </a:pPr>
+            <a:r>
+              <a:t>The Production Picture</a:t>
+            </a:r>
+          </a:p>
+        </p:txBody>
+      </p:sp>
+      <p:sp>
+        <p:nvSpPr>
+          <p:cNvPr id="4" name="TextBox 3"/>
+          <p:cNvSpPr txBox="1"/>
+          <p:nvPr/>
+        </p:nvSpPr>
+        <p:spPr>
+          <a:xfrm>
+            <a:off x="822960" y="1371600"/>
+            <a:ext cx="10058400" cy="2286000"/>
+          </a:xfrm>
+          <a:prstGeom prst="rect">
+            <a:avLst/>
+          </a:prstGeom>
+          <a:noFill/>
+        </p:spPr>
+        <p:txBody>
+          <a:bodyPr wrap="square">
+            <a:spAutoFit/>
+          </a:bodyPr>
+          <a:lstStyle/>
+          <a:p>
+            <a:pPr algn="l">
+              <a:spcAft>
+                <a:spcPts val="800"/>
+              </a:spcAft>
+              <a:defRPr sz="2000">
+                <a:solidFill>
+                  <a:srgbClr val="1A1A2E"/>
+                </a:solidFill>
+                <a:latin typeface="Calibri"/>
+              </a:defRPr>
+              <a:buClr>
+                <a:srgbClr val="0E6EB8"/>
+              </a:buClr>
+              <a:buChar char="•"/>
+            </a:pPr>
+            <a:r>
+              <a:t>DGX Spark profiling: DeepGEMM accounts for 61.9% of GPU time in DeepSeek-V4-Flash inference</a:t>
+            </a:r>
+          </a:p>
+          <a:p>
+            <a:pPr algn="l">
+              <a:spcAft>
+                <a:spcPts val="800"/>
+              </a:spcAft>
+              <a:defRPr sz="2000">
+                <a:solidFill>
+                  <a:srgbClr val="1A1A2E"/>
+                </a:solidFill>
+                <a:latin typeface="Calibri"/>
+              </a:defRPr>
+              <a:buClr>
+                <a:srgbClr val="0E6EB8"/>
+              </a:buClr>
+              <a:buChar char="•"/>
+            </a:pPr>
+            <a:r>
+              <a:t>SonicMoE beats DeepGEMM by 43% on forward pass for fine-grained MoEs (from their paper)</a:t>
+            </a:r>
+          </a:p>
+        </p:txBody>
+      </p:sp>
+      <p:sp>
+        <p:nvSpPr>
+          <p:cNvPr id="5" name="Rounded Rectangle 4"/>
+          <p:cNvSpPr/>
+          <p:nvPr/>
+        </p:nvSpPr>
+        <p:spPr>
+          <a:xfrm>
+            <a:off x="2286000" y="3840480"/>
+            <a:ext cx="7589520" cy="914400"/>
+          </a:xfrm>
+          <a:prstGeom prst="roundRect">
+            <a:avLst/>
+          </a:prstGeom>
+          <a:solidFill>
+            <a:srgbClr val="F0F4F8"/>
+          </a:solidFill>
+          <a:ln w="19050">
+            <a:solidFill>
+              <a:srgbClr val="B46A00"/>
+            </a:solidFill>
+          </a:ln>
+        </p:spPr>
+        <p:style>
+          <a:lnRef idx="1">
+            <a:schemeClr val="accent1"/>
+          </a:lnRef>
+          <a:fillRef idx="3">
+            <a:schemeClr val="accent1"/>
+          </a:fillRef>
+          <a:effectRef idx="2">
+            <a:schemeClr val="accent1"/>
+          </a:effectRef>
+          <a:fontRef idx="minor">
+            <a:schemeClr val="lt1"/>
+          </a:fontRef>
+        </p:style>
+        <p:txBody>
+          <a:bodyPr rtlCol="0" anchor="ctr" wrap="square" lIns="101600" rIns="101600" tIns="76200" bIns="76200"/>
+          <a:lstStyle/>
+          <a:p>
+            <a:pPr algn="ctr">
+              <a:defRPr sz="2400" b="1">
+                <a:solidFill>
+                  <a:srgbClr val="B46A00"/>
+                </a:solidFill>
+                <a:latin typeface="Calibri"/>
+              </a:defRPr>
+            </a:pPr>
+            <a:r>
+              <a:t>These GEMM kernels ARE the bottleneck in production</a:t>
+            </a:r>
+          </a:p>
+        </p:txBody>
+      </p:sp>
+      <p:sp>
+        <p:nvSpPr>
+          <p:cNvPr id="6" name="TextBox 5"/>
+          <p:cNvSpPr txBox="1"/>
+          <p:nvPr/>
+        </p:nvSpPr>
+        <p:spPr>
+          <a:xfrm>
+            <a:off x="11155680" y="6400800"/>
+            <a:ext cx="914400" cy="365760"/>
+          </a:xfrm>
+          <a:prstGeom prst="rect">
+            <a:avLst/>
+          </a:prstGeom>
+          <a:noFill/>
+        </p:spPr>
+        <p:txBody>
+          <a:bodyPr wrap="square">
+            <a:spAutoFit/>
+          </a:bodyPr>
+          <a:lstStyle/>
+          <a:p>
+            <a:pPr algn="r">
+              <a:spcAft>
+                <a:spcPts val="330"/>
+              </a:spcAft>
+              <a:defRPr sz="1100" b="0">
+                <a:solidFill>
+                  <a:srgbClr val="777777"/>
+                </a:solidFill>
+                <a:latin typeface="Calibri"/>
+              </a:defRPr>
+            </a:pPr>
+            <a:r>
+              <a:t>32/36</a:t>
+            </a:r>
+          </a:p>
+        </p:txBody>
+      </p:sp>
+    </p:spTree>
+  </p:cSld>
+  <p:clrMapOvr>
+    <a:masterClrMapping/>
+  </p:clrMapOvr>
+</p:sld>
+</file>
+
+<file path=ppt/slides/slide33.xml><?xml version="1.0" encoding="utf-8"?>
 <p:sld xmlns:a="http://schemas.openxmlformats.org/drawingml/2006/main" xmlns:p="http://schemas.openxmlformats.org/presentationml/2006/main" xmlns:r="http://schemas.openxmlformats.org/officeDocument/2006/relationships">
   <p:cSld>
     <p:bg>
@@ -15484,7 +19069,7 @@
               </a:defRPr>
             </a:pPr>
             <a:r>
-              <a:t>30/33</a:t>
+              <a:t>33/36</a:t>
             </a:r>
           </a:p>
         </p:txBody>
@@ -15497,7 +19082,7 @@
 </p:sld>
 </file>
 
-<file path=ppt/slides/slide31.xml><?xml version="1.0" encoding="utf-8"?>
+<file path=ppt/slides/slide34.xml><?xml version="1.0" encoding="utf-8"?>
 <p:sld xmlns:a="http://schemas.openxmlformats.org/drawingml/2006/main" xmlns:p="http://schemas.openxmlformats.org/presentationml/2006/main" xmlns:r="http://schemas.openxmlformats.org/officeDocument/2006/relationships">
   <p:cSld>
     <p:bg>
@@ -16116,7 +19701,7 @@
               </a:defRPr>
             </a:pPr>
             <a:r>
-              <a:t>31/33</a:t>
+              <a:t>34/36</a:t>
             </a:r>
           </a:p>
         </p:txBody>
@@ -16129,7 +19714,7 @@
 </p:sld>
 </file>
 
-<file path=ppt/slides/slide32.xml><?xml version="1.0" encoding="utf-8"?>
+<file path=ppt/slides/slide35.xml><?xml version="1.0" encoding="utf-8"?>
 <p:sld xmlns:a="http://schemas.openxmlformats.org/drawingml/2006/main" xmlns:p="http://schemas.openxmlformats.org/presentationml/2006/main" xmlns:r="http://schemas.openxmlformats.org/officeDocument/2006/relationships">
   <p:cSld>
     <p:bg>
@@ -16735,7 +20320,7 @@
               </a:defRPr>
             </a:pPr>
             <a:r>
-              <a:t>32/33</a:t>
+              <a:t>35/36</a:t>
             </a:r>
           </a:p>
         </p:txBody>
@@ -16748,7 +20333,7 @@
 </p:sld>
 </file>
 
-<file path=ppt/slides/slide33.xml><?xml version="1.0" encoding="utf-8"?>
+<file path=ppt/slides/slide36.xml><?xml version="1.0" encoding="utf-8"?>
 <p:sld xmlns:a="http://schemas.openxmlformats.org/drawingml/2006/main" xmlns:p="http://schemas.openxmlformats.org/presentationml/2006/main" xmlns:r="http://schemas.openxmlformats.org/officeDocument/2006/relationships">
   <p:cSld>
     <p:bg>
@@ -17085,7 +20670,7 @@
               </a:defRPr>
             </a:pPr>
             <a:r>
-              <a:t>33/33</a:t>
+              <a:t>36/36</a:t>
             </a:r>
           </a:p>
         </p:txBody>
@@ -17365,7 +20950,7 @@
               </a:defRPr>
             </a:pPr>
             <a:r>
-              <a:t>4/33</a:t>
+              <a:t>4/36</a:t>
             </a:r>
           </a:p>
         </p:txBody>
@@ -17689,7 +21274,7 @@
               </a:defRPr>
             </a:pPr>
             <a:r>
-              <a:t>5/33</a:t>
+              <a:t>5/36</a:t>
             </a:r>
           </a:p>
         </p:txBody>
@@ -18182,7 +21767,7 @@
               </a:defRPr>
             </a:pPr>
             <a:r>
-              <a:t>6/33</a:t>
+              <a:t>6/36</a:t>
             </a:r>
           </a:p>
         </p:txBody>
@@ -18431,7 +22016,7 @@
               </a:defRPr>
             </a:pPr>
             <a:r>
-              <a:t>7/33</a:t>
+              <a:t>7/36</a:t>
             </a:r>
           </a:p>
         </p:txBody>
@@ -18698,7 +22283,7 @@
               </a:defRPr>
             </a:pPr>
             <a:r>
-              <a:t>8/33</a:t>
+              <a:t>8/36</a:t>
             </a:r>
           </a:p>
         </p:txBody>
@@ -18965,7 +22550,7 @@
               </a:defRPr>
             </a:pPr>
             <a:r>
-              <a:t>9/33</a:t>
+              <a:t>9/36</a:t>
             </a:r>
           </a:p>
         </p:txBody>

--- a/slides.pptx
+++ b/slides.pptx
@@ -41,6 +41,7 @@
     <p:sldId id="289" r:id="rId40"/>
     <p:sldId id="290" r:id="rId41"/>
     <p:sldId id="291" r:id="rId42"/>
+    <p:sldId id="292" r:id="rId43"/>
   </p:sldIdLst>
   <p:sldSz cx="12191695" cy="6858000" type="screen4x3"/>
   <p:notesSz cx="6858000" cy="9144000"/>
@@ -3544,7 +3545,7 @@
               </a:defRPr>
             </a:pPr>
             <a:r>
-              <a:t>1/36</a:t>
+              <a:t>1/37</a:t>
             </a:r>
           </a:p>
         </p:txBody>
@@ -4105,7 +4106,7 @@
               </a:defRPr>
             </a:pPr>
             <a:r>
-              <a:t>10/36</a:t>
+              <a:t>10/37</a:t>
             </a:r>
           </a:p>
         </p:txBody>
@@ -5092,7 +5093,7 @@
               </a:defRPr>
             </a:pPr>
             <a:r>
-              <a:t>11/36</a:t>
+              <a:t>11/37</a:t>
             </a:r>
           </a:p>
         </p:txBody>
@@ -5372,7 +5373,7 @@
               </a:defRPr>
             </a:pPr>
             <a:r>
-              <a:t>12/36</a:t>
+              <a:t>12/37</a:t>
             </a:r>
           </a:p>
         </p:txBody>
@@ -5613,7 +5614,7 @@
               </a:defRPr>
             </a:pPr>
             <a:r>
-              <a:t>13/36</a:t>
+              <a:t>13/37</a:t>
             </a:r>
           </a:p>
         </p:txBody>
@@ -6197,7 +6198,7 @@
               </a:defRPr>
             </a:pPr>
             <a:r>
-              <a:t>14/36</a:t>
+              <a:t>14/37</a:t>
             </a:r>
           </a:p>
         </p:txBody>
@@ -7400,7 +7401,7 @@
               </a:defRPr>
             </a:pPr>
             <a:r>
-              <a:t>15/36</a:t>
+              <a:t>15/37</a:t>
             </a:r>
           </a:p>
         </p:txBody>
@@ -7949,7 +7950,7 @@
               </a:defRPr>
             </a:pPr>
             <a:r>
-              <a:t>16/36</a:t>
+              <a:t>16/37</a:t>
             </a:r>
           </a:p>
         </p:txBody>
@@ -8229,7 +8230,7 @@
               </a:defRPr>
             </a:pPr>
             <a:r>
-              <a:t>17/36</a:t>
+              <a:t>17/37</a:t>
             </a:r>
           </a:p>
         </p:txBody>
@@ -8808,7 +8809,7 @@
               </a:defRPr>
             </a:pPr>
             <a:r>
-              <a:t>18/36</a:t>
+              <a:t>18/37</a:t>
             </a:r>
           </a:p>
         </p:txBody>
@@ -9752,7 +9753,7 @@
               </a:defRPr>
             </a:pPr>
             <a:r>
-              <a:t>19/36</a:t>
+              <a:t>19/37</a:t>
             </a:r>
           </a:p>
         </p:txBody>
@@ -10586,7 +10587,7 @@
               </a:defRPr>
             </a:pPr>
             <a:r>
-              <a:t>2/36</a:t>
+              <a:t>2/37</a:t>
             </a:r>
           </a:p>
         </p:txBody>
@@ -11287,7 +11288,7 @@
               </a:defRPr>
             </a:pPr>
             <a:r>
-              <a:t>20/36</a:t>
+              <a:t>20/37</a:t>
             </a:r>
           </a:p>
         </p:txBody>
@@ -11501,7 +11502,7 @@
               </a:defRPr>
             </a:pPr>
             <a:r>
-              <a:t>21/36</a:t>
+              <a:t>21/37</a:t>
             </a:r>
           </a:p>
         </p:txBody>
@@ -12174,7 +12175,7 @@
               </a:defRPr>
             </a:pPr>
             <a:r>
-              <a:t>22/36</a:t>
+              <a:t>22/37</a:t>
             </a:r>
           </a:p>
         </p:txBody>
@@ -13086,7 +13087,7 @@
               </a:defRPr>
             </a:pPr>
             <a:r>
-              <a:t>23/36</a:t>
+              <a:t>23/37</a:t>
             </a:r>
           </a:p>
         </p:txBody>
@@ -13695,7 +13696,7 @@
               </a:defRPr>
             </a:pPr>
             <a:r>
-              <a:t>24/36</a:t>
+              <a:t>24/37</a:t>
             </a:r>
           </a:p>
         </p:txBody>
@@ -15118,7 +15119,7 @@
               </a:defRPr>
             </a:pPr>
             <a:r>
-              <a:t>25/36</a:t>
+              <a:t>25/37</a:t>
             </a:r>
           </a:p>
         </p:txBody>
@@ -15359,7 +15360,7 @@
               </a:defRPr>
             </a:pPr>
             <a:r>
-              <a:t>45% less activation memory, 1.86x faster than ScatterMoE</a:t>
+              <a:t>1.82x faster than ScatterMoE on H200 (NCU verified)</a:t>
             </a:r>
           </a:p>
         </p:txBody>
@@ -15398,7 +15399,7 @@
               </a:defRPr>
             </a:pPr>
             <a:r>
-              <a:t>26/36</a:t>
+              <a:t>26/37</a:t>
             </a:r>
           </a:p>
         </p:txBody>
@@ -15506,7 +15507,7 @@
               </a:defRPr>
             </a:pPr>
             <a:r>
-              <a:t>Why MoE Kernels Are Hard</a:t>
+              <a:t>ScatterMoE vs SonicMoE — Architecture</a:t>
             </a:r>
           </a:p>
         </p:txBody>
@@ -15519,8 +15520,8 @@
         </p:nvSpPr>
         <p:spPr>
           <a:xfrm>
-            <a:off x="822960" y="1371600"/>
-            <a:ext cx="10058400" cy="2743200"/>
+            <a:off x="548640" y="1097280"/>
+            <a:ext cx="5029200" cy="365760"/>
           </a:xfrm>
           <a:prstGeom prst="rect">
             <a:avLst/>
@@ -15535,21 +15536,115 @@
           <a:p>
             <a:pPr algn="l">
               <a:spcAft>
+                <a:spcPts val="600"/>
+              </a:spcAft>
+              <a:defRPr sz="2000" b="1">
+                <a:solidFill>
+                  <a:srgbClr val="555555"/>
+                </a:solidFill>
+                <a:latin typeface="Calibri"/>
+              </a:defRPr>
+            </a:pPr>
+            <a:r>
+              <a:t>ScatterMoE</a:t>
+            </a:r>
+          </a:p>
+        </p:txBody>
+      </p:sp>
+      <p:sp>
+        <p:nvSpPr>
+          <p:cNvPr id="5" name="Rounded Rectangle 4"/>
+          <p:cNvSpPr/>
+          <p:nvPr/>
+        </p:nvSpPr>
+        <p:spPr>
+          <a:xfrm>
+            <a:off x="548640" y="1554480"/>
+            <a:ext cx="5029200" cy="640080"/>
+          </a:xfrm>
+          <a:prstGeom prst="roundRect">
+            <a:avLst/>
+          </a:prstGeom>
+          <a:solidFill>
+            <a:srgbClr val="F0F4F8"/>
+          </a:solidFill>
+          <a:ln w="19050">
+            <a:solidFill>
+              <a:srgbClr val="555555"/>
+            </a:solidFill>
+          </a:ln>
+        </p:spPr>
+        <p:style>
+          <a:lnRef idx="1">
+            <a:schemeClr val="accent1"/>
+          </a:lnRef>
+          <a:fillRef idx="3">
+            <a:schemeClr val="accent1"/>
+          </a:fillRef>
+          <a:effectRef idx="2">
+            <a:schemeClr val="accent1"/>
+          </a:effectRef>
+          <a:fontRef idx="minor">
+            <a:schemeClr val="lt1"/>
+          </a:fontRef>
+        </p:style>
+        <p:txBody>
+          <a:bodyPr rtlCol="0" anchor="ctr" wrap="square" lIns="101600" rIns="101600" tIns="76200" bIns="76200"/>
+          <a:lstStyle/>
+          <a:p>
+            <a:pPr algn="ctr">
+              <a:defRPr sz="1600" b="1">
+                <a:solidFill>
+                  <a:srgbClr val="1A1A2E"/>
+                </a:solidFill>
+                <a:latin typeface="Calibri"/>
+              </a:defRPr>
+            </a:pPr>
+            <a:r>
+              <a:t>Triton-compiled _scatter2scatter</a:t>
+            </a:r>
+          </a:p>
+        </p:txBody>
+      </p:sp>
+      <p:sp>
+        <p:nvSpPr>
+          <p:cNvPr id="6" name="TextBox 5"/>
+          <p:cNvSpPr txBox="1"/>
+          <p:nvPr/>
+        </p:nvSpPr>
+        <p:spPr>
+          <a:xfrm>
+            <a:off x="548640" y="2377440"/>
+            <a:ext cx="5029200" cy="2011680"/>
+          </a:xfrm>
+          <a:prstGeom prst="rect">
+            <a:avLst/>
+          </a:prstGeom>
+          <a:noFill/>
+        </p:spPr>
+        <p:txBody>
+          <a:bodyPr wrap="square">
+            <a:spAutoFit/>
+          </a:bodyPr>
+          <a:lstStyle/>
+          <a:p>
+            <a:pPr algn="l">
+              <a:spcAft>
                 <a:spcPts val="800"/>
               </a:spcAft>
-              <a:defRPr sz="2000">
+              <a:defRPr sz="1600">
                 <a:solidFill>
                   <a:srgbClr val="1A1A2E"/>
                 </a:solidFill>
                 <a:latin typeface="Calibri"/>
               </a:defRPr>
               <a:buClr>
-                <a:srgbClr val="0E6EB8"/>
+                <a:srgbClr val="555555"/>
               </a:buClr>
               <a:buChar char="•"/>
             </a:pPr>
             <a:r>
-              <a:t>Each expert processes a variable number of tokens (varlen-M Grouped GEMM)</a:t>
+              <a:t>5+ separate kernels per MoE step</a:t>
             </a:r>
           </a:p>
           <a:p>
@@ -15557,19 +15652,19 @@
               <a:spcAft>
                 <a:spcPts val="800"/>
               </a:spcAft>
-              <a:defRPr sz="2000">
+              <a:defRPr sz="1600">
                 <a:solidFill>
                   <a:srgbClr val="1A1A2E"/>
                 </a:solidFill>
                 <a:latin typeface="Calibri"/>
               </a:defRPr>
               <a:buClr>
-                <a:srgbClr val="0E6EB8"/>
+                <a:srgbClr val="555555"/>
               </a:buClr>
               <a:buChar char="•"/>
             </a:pPr>
             <a:r>
-              <a:t>Fine-grained MoEs: small expert size → IO-bound, not compute-bound</a:t>
+              <a:t>Legacy global loads (0 TMA)</a:t>
             </a:r>
           </a:p>
           <a:p>
@@ -15577,33 +15672,92 @@
               <a:spcAft>
                 <a:spcPts val="800"/>
               </a:spcAft>
-              <a:defRPr sz="2000">
+              <a:defRPr sz="1600">
                 <a:solidFill>
                   <a:srgbClr val="1A1A2E"/>
                 </a:solidFill>
                 <a:latin typeface="Calibri"/>
               </a:defRPr>
               <a:buClr>
-                <a:srgbClr val="0E6EB8"/>
+                <a:srgbClr val="555555"/>
               </a:buClr>
               <a:buChar char="•"/>
             </a:pPr>
             <a:r>
-              <a:t>Standard approach: gather tokens → pad → GEMM → scatter back</a:t>
-            </a:r>
-          </a:p>
-        </p:txBody>
-      </p:sp>
-      <p:sp>
-        <p:nvSpPr>
-          <p:cNvPr id="5" name="Rounded Rectangle 4"/>
+              <a:t>torch.compile overhead</a:t>
+            </a:r>
+          </a:p>
+          <a:p>
+            <a:pPr algn="l">
+              <a:spcAft>
+                <a:spcPts val="800"/>
+              </a:spcAft>
+              <a:defRPr sz="1600">
+                <a:solidFill>
+                  <a:srgbClr val="1A1A2E"/>
+                </a:solidFill>
+                <a:latin typeface="Calibri"/>
+              </a:defRPr>
+              <a:buClr>
+                <a:srgbClr val="555555"/>
+              </a:buClr>
+              <a:buChar char="•"/>
+            </a:pPr>
+            <a:r>
+              <a:t>GPU→CPU sync (aten::_local_scalar_dense)</a:t>
+            </a:r>
+          </a:p>
+        </p:txBody>
+      </p:sp>
+      <p:sp>
+        <p:nvSpPr>
+          <p:cNvPr id="7" name="TextBox 6"/>
+          <p:cNvSpPr txBox="1"/>
+          <p:nvPr/>
+        </p:nvSpPr>
+        <p:spPr>
+          <a:xfrm>
+            <a:off x="6400800" y="1097280"/>
+            <a:ext cx="5029200" cy="365760"/>
+          </a:xfrm>
+          <a:prstGeom prst="rect">
+            <a:avLst/>
+          </a:prstGeom>
+          <a:noFill/>
+        </p:spPr>
+        <p:txBody>
+          <a:bodyPr wrap="square">
+            <a:spAutoFit/>
+          </a:bodyPr>
+          <a:lstStyle/>
+          <a:p>
+            <a:pPr algn="l">
+              <a:spcAft>
+                <a:spcPts val="600"/>
+              </a:spcAft>
+              <a:defRPr sz="2000" b="1">
+                <a:solidFill>
+                  <a:srgbClr val="B46A00"/>
+                </a:solidFill>
+                <a:latin typeface="Calibri"/>
+              </a:defRPr>
+            </a:pPr>
+            <a:r>
+              <a:t>SonicMoE</a:t>
+            </a:r>
+          </a:p>
+        </p:txBody>
+      </p:sp>
+      <p:sp>
+        <p:nvSpPr>
+          <p:cNvPr id="8" name="Rounded Rectangle 7"/>
           <p:cNvSpPr/>
           <p:nvPr/>
         </p:nvSpPr>
         <p:spPr>
           <a:xfrm>
-            <a:off x="914400" y="4206240"/>
-            <a:ext cx="1280160" cy="640080"/>
+            <a:off x="6400800" y="1554480"/>
+            <a:ext cx="5029200" cy="640080"/>
           </a:xfrm>
           <a:prstGeom prst="roundRect">
             <a:avLst/>
@@ -15644,21 +15798,21 @@
               </a:defRPr>
             </a:pPr>
             <a:r>
-              <a:t>Gather</a:t>
-            </a:r>
-          </a:p>
-        </p:txBody>
-      </p:sp>
-      <p:sp>
-        <p:nvSpPr>
-          <p:cNvPr id="6" name="TextBox 5"/>
+              <a:t>CUTLASS 3.x quackgemm</a:t>
+            </a:r>
+          </a:p>
+        </p:txBody>
+      </p:sp>
+      <p:sp>
+        <p:nvSpPr>
+          <p:cNvPr id="9" name="TextBox 8"/>
           <p:cNvSpPr txBox="1"/>
           <p:nvPr/>
         </p:nvSpPr>
         <p:spPr>
           <a:xfrm>
-            <a:off x="2377440" y="4297680"/>
-            <a:ext cx="457200" cy="457200"/>
+            <a:off x="6400800" y="2377440"/>
+            <a:ext cx="5029200" cy="2011680"/>
           </a:xfrm>
           <a:prstGeom prst="rect">
             <a:avLst/>
@@ -15671,33 +15825,140 @@
           </a:bodyPr>
           <a:lstStyle/>
           <a:p>
-            <a:pPr algn="ctr">
-              <a:spcAft>
-                <a:spcPts val="840"/>
-              </a:spcAft>
-              <a:defRPr sz="2800" b="1">
-                <a:solidFill>
-                  <a:srgbClr val="B46A00"/>
-                </a:solidFill>
-                <a:latin typeface="Calibri"/>
-              </a:defRPr>
-            </a:pPr>
-            <a:r>
-              <a:t>→</a:t>
-            </a:r>
-          </a:p>
-        </p:txBody>
-      </p:sp>
-      <p:sp>
-        <p:nvSpPr>
-          <p:cNvPr id="7" name="Rounded Rectangle 6"/>
+            <a:pPr algn="l">
+              <a:spcAft>
+                <a:spcPts val="800"/>
+              </a:spcAft>
+              <a:defRPr sz="1600">
+                <a:solidFill>
+                  <a:srgbClr val="1A1A2E"/>
+                </a:solidFill>
+                <a:latin typeface="Calibri"/>
+              </a:defRPr>
+              <a:buClr>
+                <a:srgbClr val="B46A00"/>
+              </a:buClr>
+              <a:buChar char="•"/>
+            </a:pPr>
+            <a:r>
+              <a:t>2 fused GEMM kernels per step</a:t>
+            </a:r>
+          </a:p>
+          <a:p>
+            <a:pPr algn="l">
+              <a:spcAft>
+                <a:spcPts val="800"/>
+              </a:spcAft>
+              <a:defRPr sz="1600">
+                <a:solidFill>
+                  <a:srgbClr val="1A1A2E"/>
+                </a:solidFill>
+                <a:latin typeface="Calibri"/>
+              </a:defRPr>
+              <a:buClr>
+                <a:srgbClr val="B46A00"/>
+              </a:buClr>
+              <a:buChar char="•"/>
+            </a:pPr>
+            <a:r>
+              <a:t>30,720 TMA instructions</a:t>
+            </a:r>
+          </a:p>
+          <a:p>
+            <a:pPr algn="l">
+              <a:spcAft>
+                <a:spcPts val="800"/>
+              </a:spcAft>
+              <a:defRPr sz="1600">
+                <a:solidFill>
+                  <a:srgbClr val="1A1A2E"/>
+                </a:solidFill>
+                <a:latin typeface="Calibri"/>
+              </a:defRPr>
+              <a:buClr>
+                <a:srgbClr val="B46A00"/>
+              </a:buClr>
+              <a:buChar char="•"/>
+            </a:pPr>
+            <a:r>
+              <a:t>No torch.compile needed</a:t>
+            </a:r>
+          </a:p>
+          <a:p>
+            <a:pPr algn="l">
+              <a:spcAft>
+                <a:spcPts val="800"/>
+              </a:spcAft>
+              <a:defRPr sz="1600">
+                <a:solidFill>
+                  <a:srgbClr val="1A1A2E"/>
+                </a:solidFill>
+                <a:latin typeface="Calibri"/>
+              </a:defRPr>
+              <a:buClr>
+                <a:srgbClr val="B46A00"/>
+              </a:buClr>
+              <a:buChar char="•"/>
+            </a:pPr>
+            <a:r>
+              <a:t>No GPU→CPU sync points</a:t>
+            </a:r>
+          </a:p>
+        </p:txBody>
+      </p:sp>
+      <p:sp>
+        <p:nvSpPr>
+          <p:cNvPr id="10" name="Rectangle 9"/>
           <p:cNvSpPr/>
           <p:nvPr/>
         </p:nvSpPr>
         <p:spPr>
           <a:xfrm>
-            <a:off x="3840480" y="4206240"/>
-            <a:ext cx="1280160" cy="640080"/>
+            <a:off x="5989320" y="1097280"/>
+            <a:ext cx="27432" cy="3657600"/>
+          </a:xfrm>
+          <a:prstGeom prst="rect">
+            <a:avLst/>
+          </a:prstGeom>
+          <a:solidFill>
+            <a:srgbClr val="777777"/>
+          </a:solidFill>
+          <a:ln>
+            <a:noFill/>
+          </a:ln>
+        </p:spPr>
+        <p:style>
+          <a:lnRef idx="1">
+            <a:schemeClr val="accent1"/>
+          </a:lnRef>
+          <a:fillRef idx="3">
+            <a:schemeClr val="accent1"/>
+          </a:fillRef>
+          <a:effectRef idx="2">
+            <a:schemeClr val="accent1"/>
+          </a:effectRef>
+          <a:fontRef idx="minor">
+            <a:schemeClr val="lt1"/>
+          </a:fontRef>
+        </p:style>
+        <p:txBody>
+          <a:bodyPr rtlCol="0" anchor="ctr"/>
+          <a:lstStyle/>
+          <a:p>
+            <a:pPr algn="ctr"/>
+          </a:p>
+        </p:txBody>
+      </p:sp>
+      <p:sp>
+        <p:nvSpPr>
+          <p:cNvPr id="11" name="Rounded Rectangle 10"/>
+          <p:cNvSpPr/>
+          <p:nvPr/>
+        </p:nvSpPr>
+        <p:spPr>
+          <a:xfrm>
+            <a:off x="1371600" y="5029200"/>
+            <a:ext cx="9418320" cy="822960"/>
           </a:xfrm>
           <a:prstGeom prst="roundRect">
             <a:avLst/>
@@ -15730,29 +15991,29 @@
           <a:lstStyle/>
           <a:p>
             <a:pPr algn="ctr">
-              <a:defRPr sz="1600" b="1">
-                <a:solidFill>
-                  <a:srgbClr val="1A1A2E"/>
-                </a:solidFill>
-                <a:latin typeface="Calibri"/>
-              </a:defRPr>
-            </a:pPr>
-            <a:r>
-              <a:t>Pad</a:t>
-            </a:r>
-          </a:p>
-        </p:txBody>
-      </p:sp>
-      <p:sp>
-        <p:nvSpPr>
-          <p:cNvPr id="8" name="TextBox 7"/>
+              <a:defRPr sz="1800" b="1">
+                <a:solidFill>
+                  <a:srgbClr val="B46A00"/>
+                </a:solidFill>
+                <a:latin typeface="Calibri"/>
+              </a:defRPr>
+            </a:pPr>
+            <a:r>
+              <a:t>Gather → GEMM prologue.  SwiGLU → GEMM epilogue.  Scatter → epilogue store.</a:t>
+            </a:r>
+          </a:p>
+        </p:txBody>
+      </p:sp>
+      <p:sp>
+        <p:nvSpPr>
+          <p:cNvPr id="12" name="TextBox 11"/>
           <p:cNvSpPr txBox="1"/>
           <p:nvPr/>
         </p:nvSpPr>
         <p:spPr>
           <a:xfrm>
-            <a:off x="5303520" y="4297680"/>
-            <a:ext cx="457200" cy="457200"/>
+            <a:off x="11155680" y="6400800"/>
+            <a:ext cx="914400" cy="365760"/>
           </a:xfrm>
           <a:prstGeom prst="rect">
             <a:avLst/>
@@ -15765,233 +16026,6 @@
           </a:bodyPr>
           <a:lstStyle/>
           <a:p>
-            <a:pPr algn="ctr">
-              <a:spcAft>
-                <a:spcPts val="840"/>
-              </a:spcAft>
-              <a:defRPr sz="2800" b="1">
-                <a:solidFill>
-                  <a:srgbClr val="B46A00"/>
-                </a:solidFill>
-                <a:latin typeface="Calibri"/>
-              </a:defRPr>
-            </a:pPr>
-            <a:r>
-              <a:t>→</a:t>
-            </a:r>
-          </a:p>
-        </p:txBody>
-      </p:sp>
-      <p:sp>
-        <p:nvSpPr>
-          <p:cNvPr id="9" name="Rounded Rectangle 8"/>
-          <p:cNvSpPr/>
-          <p:nvPr/>
-        </p:nvSpPr>
-        <p:spPr>
-          <a:xfrm>
-            <a:off x="6766560" y="4206240"/>
-            <a:ext cx="1280160" cy="640080"/>
-          </a:xfrm>
-          <a:prstGeom prst="roundRect">
-            <a:avLst/>
-          </a:prstGeom>
-          <a:solidFill>
-            <a:srgbClr val="F0F4F8"/>
-          </a:solidFill>
-          <a:ln w="19050">
-            <a:solidFill>
-              <a:srgbClr val="B46A00"/>
-            </a:solidFill>
-          </a:ln>
-        </p:spPr>
-        <p:style>
-          <a:lnRef idx="1">
-            <a:schemeClr val="accent1"/>
-          </a:lnRef>
-          <a:fillRef idx="3">
-            <a:schemeClr val="accent1"/>
-          </a:fillRef>
-          <a:effectRef idx="2">
-            <a:schemeClr val="accent1"/>
-          </a:effectRef>
-          <a:fontRef idx="minor">
-            <a:schemeClr val="lt1"/>
-          </a:fontRef>
-        </p:style>
-        <p:txBody>
-          <a:bodyPr rtlCol="0" anchor="ctr" wrap="square" lIns="101600" rIns="101600" tIns="76200" bIns="76200"/>
-          <a:lstStyle/>
-          <a:p>
-            <a:pPr algn="ctr">
-              <a:defRPr sz="1600" b="1">
-                <a:solidFill>
-                  <a:srgbClr val="1A1A2E"/>
-                </a:solidFill>
-                <a:latin typeface="Calibri"/>
-              </a:defRPr>
-            </a:pPr>
-            <a:r>
-              <a:t>GEMM</a:t>
-            </a:r>
-          </a:p>
-        </p:txBody>
-      </p:sp>
-      <p:sp>
-        <p:nvSpPr>
-          <p:cNvPr id="10" name="TextBox 9"/>
-          <p:cNvSpPr txBox="1"/>
-          <p:nvPr/>
-        </p:nvSpPr>
-        <p:spPr>
-          <a:xfrm>
-            <a:off x="8229600" y="4297680"/>
-            <a:ext cx="457200" cy="457200"/>
-          </a:xfrm>
-          <a:prstGeom prst="rect">
-            <a:avLst/>
-          </a:prstGeom>
-          <a:noFill/>
-        </p:spPr>
-        <p:txBody>
-          <a:bodyPr wrap="square">
-            <a:spAutoFit/>
-          </a:bodyPr>
-          <a:lstStyle/>
-          <a:p>
-            <a:pPr algn="ctr">
-              <a:spcAft>
-                <a:spcPts val="840"/>
-              </a:spcAft>
-              <a:defRPr sz="2800" b="1">
-                <a:solidFill>
-                  <a:srgbClr val="B46A00"/>
-                </a:solidFill>
-                <a:latin typeface="Calibri"/>
-              </a:defRPr>
-            </a:pPr>
-            <a:r>
-              <a:t>→</a:t>
-            </a:r>
-          </a:p>
-        </p:txBody>
-      </p:sp>
-      <p:sp>
-        <p:nvSpPr>
-          <p:cNvPr id="11" name="Rounded Rectangle 10"/>
-          <p:cNvSpPr/>
-          <p:nvPr/>
-        </p:nvSpPr>
-        <p:spPr>
-          <a:xfrm>
-            <a:off x="9692640" y="4206240"/>
-            <a:ext cx="1280160" cy="640080"/>
-          </a:xfrm>
-          <a:prstGeom prst="roundRect">
-            <a:avLst/>
-          </a:prstGeom>
-          <a:solidFill>
-            <a:srgbClr val="F0F4F8"/>
-          </a:solidFill>
-          <a:ln w="19050">
-            <a:solidFill>
-              <a:srgbClr val="B46A00"/>
-            </a:solidFill>
-          </a:ln>
-        </p:spPr>
-        <p:style>
-          <a:lnRef idx="1">
-            <a:schemeClr val="accent1"/>
-          </a:lnRef>
-          <a:fillRef idx="3">
-            <a:schemeClr val="accent1"/>
-          </a:fillRef>
-          <a:effectRef idx="2">
-            <a:schemeClr val="accent1"/>
-          </a:effectRef>
-          <a:fontRef idx="minor">
-            <a:schemeClr val="lt1"/>
-          </a:fontRef>
-        </p:style>
-        <p:txBody>
-          <a:bodyPr rtlCol="0" anchor="ctr" wrap="square" lIns="101600" rIns="101600" tIns="76200" bIns="76200"/>
-          <a:lstStyle/>
-          <a:p>
-            <a:pPr algn="ctr">
-              <a:defRPr sz="1600" b="1">
-                <a:solidFill>
-                  <a:srgbClr val="1A1A2E"/>
-                </a:solidFill>
-                <a:latin typeface="Calibri"/>
-              </a:defRPr>
-            </a:pPr>
-            <a:r>
-              <a:t>Scatter</a:t>
-            </a:r>
-          </a:p>
-        </p:txBody>
-      </p:sp>
-      <p:sp>
-        <p:nvSpPr>
-          <p:cNvPr id="12" name="TextBox 11"/>
-          <p:cNvSpPr txBox="1"/>
-          <p:nvPr/>
-        </p:nvSpPr>
-        <p:spPr>
-          <a:xfrm>
-            <a:off x="1371600" y="5303520"/>
-            <a:ext cx="9418320" cy="548640"/>
-          </a:xfrm>
-          <a:prstGeom prst="rect">
-            <a:avLst/>
-          </a:prstGeom>
-          <a:noFill/>
-        </p:spPr>
-        <p:txBody>
-          <a:bodyPr wrap="square">
-            <a:spAutoFit/>
-          </a:bodyPr>
-          <a:lstStyle/>
-          <a:p>
-            <a:pPr algn="ctr">
-              <a:spcAft>
-                <a:spcPts val="600"/>
-              </a:spcAft>
-              <a:defRPr sz="2000" b="1">
-                <a:solidFill>
-                  <a:srgbClr val="B46A00"/>
-                </a:solidFill>
-                <a:latin typeface="Calibri"/>
-              </a:defRPr>
-            </a:pPr>
-            <a:r>
-              <a:t>"The IO cost scales linearly with expert granularity"</a:t>
-            </a:r>
-          </a:p>
-        </p:txBody>
-      </p:sp>
-      <p:sp>
-        <p:nvSpPr>
-          <p:cNvPr id="13" name="TextBox 12"/>
-          <p:cNvSpPr txBox="1"/>
-          <p:nvPr/>
-        </p:nvSpPr>
-        <p:spPr>
-          <a:xfrm>
-            <a:off x="11155680" y="6400800"/>
-            <a:ext cx="914400" cy="365760"/>
-          </a:xfrm>
-          <a:prstGeom prst="rect">
-            <a:avLst/>
-          </a:prstGeom>
-          <a:noFill/>
-        </p:spPr>
-        <p:txBody>
-          <a:bodyPr wrap="square">
-            <a:spAutoFit/>
-          </a:bodyPr>
-          <a:lstStyle/>
-          <a:p>
             <a:pPr algn="r">
               <a:spcAft>
                 <a:spcPts val="330"/>
@@ -16004,7 +16038,7 @@
               </a:defRPr>
             </a:pPr>
             <a:r>
-              <a:t>27/36</a:t>
+              <a:t>27/37</a:t>
             </a:r>
           </a:p>
         </p:txBody>
@@ -16112,7 +16146,7 @@
               </a:defRPr>
             </a:pPr>
             <a:r>
-              <a:t>SonicMoE’s Key Innovations</a:t>
+              <a:t>SonicMoE — Perfetto Trace</a:t>
             </a:r>
           </a:p>
         </p:txBody>
@@ -16125,17 +16159,19 @@
         </p:nvSpPr>
         <p:spPr>
           <a:xfrm>
-            <a:off x="822960" y="1463040"/>
-            <a:ext cx="548640" cy="548640"/>
+            <a:off x="1828800" y="2286000"/>
+            <a:ext cx="8534095" cy="3200400"/>
           </a:xfrm>
           <a:prstGeom prst="roundRect">
             <a:avLst/>
           </a:prstGeom>
           <a:solidFill>
-            <a:srgbClr val="057A55"/>
+            <a:srgbClr val="F0F4F8"/>
           </a:solidFill>
-          <a:ln>
-            <a:noFill/>
+          <a:ln w="25400">
+            <a:solidFill>
+              <a:srgbClr val="0E6EB8"/>
+            </a:solidFill>
           </a:ln>
         </p:spPr>
         <p:style>
@@ -16153,19 +16189,27 @@
           </a:fontRef>
         </p:style>
         <p:txBody>
-          <a:bodyPr rtlCol="0" anchor="ctr" wrap="square" lIns="101600" rIns="101600" tIns="76200" bIns="76200"/>
+          <a:bodyPr rtlCol="0" anchor="ctr" wrap="square" tIns="1097280"/>
           <a:lstStyle/>
           <a:p>
             <a:pPr algn="ctr">
-              <a:defRPr sz="2000" b="1">
-                <a:solidFill>
-                  <a:srgbClr val="1A1A2E"/>
-                </a:solidFill>
-                <a:latin typeface="Calibri"/>
-              </a:defRPr>
-            </a:pPr>
-            <a:r>
-              <a:t>1</a:t>
+              <a:spcAft>
+                <a:spcPts val="0"/>
+              </a:spcAft>
+              <a:defRPr sz="3200" b="1">
+                <a:solidFill>
+                  <a:srgbClr val="0E6EB8"/>
+                </a:solidFill>
+                <a:latin typeface="Calibri"/>
+              </a:defRPr>
+            </a:pPr>
+            <a:r>
+              <a:t>[LIVE DEMO — Perfetto UI]</a:t>
+            </a:r>
+            <a:br/>
+            <a:br/>
+            <a:r>
+              <a:t>SonicMoE vs ScatterMoE trace comparison</a:t>
             </a:r>
           </a:p>
         </p:txBody>
@@ -16178,8 +16222,8 @@
         </p:nvSpPr>
         <p:spPr>
           <a:xfrm>
-            <a:off x="1645920" y="1463040"/>
-            <a:ext cx="3657600" cy="457200"/>
+            <a:off x="822960" y="5486400"/>
+            <a:ext cx="10515600" cy="365760"/>
           </a:xfrm>
           <a:prstGeom prst="rect">
             <a:avLst/>
@@ -16194,17 +16238,43 @@
           <a:p>
             <a:pPr algn="l">
               <a:spcAft>
-                <a:spcPts val="660"/>
-              </a:spcAft>
-              <a:defRPr sz="2200" b="1">
-                <a:solidFill>
-                  <a:srgbClr val="057A55"/>
-                </a:solidFill>
-                <a:latin typeface="Calibri"/>
-              </a:defRPr>
-            </a:pPr>
-            <a:r>
-              <a:t>Gather Fusion</a:t>
+                <a:spcPts val="420"/>
+              </a:spcAft>
+              <a:defRPr sz="1400" b="0">
+                <a:solidFill>
+                  <a:srgbClr val="1A1A2E"/>
+                </a:solidFill>
+                <a:latin typeface="Consolas"/>
+              </a:defRPr>
+            </a:pPr>
+            <a:r>
+              <a:t>CPU: sonicmoe_forward → TC_Softmax_TopK_Router → _UpProjection → _DownProjection</a:t>
+            </a:r>
+          </a:p>
+          <a:p>
+            <a:pPr algn="l">
+              <a:defRPr sz="1400" b="0">
+                <a:solidFill>
+                  <a:srgbClr val="1A1A2E"/>
+                </a:solidFill>
+                <a:latin typeface="Consolas"/>
+              </a:defRPr>
+            </a:pPr>
+            <a:r>
+              <a:t>GPU: 2 dominant blocks — quackgemm_actGemmGatedSm90 + quackgemm_default_epiGemmDefaultSm90</a:t>
+            </a:r>
+          </a:p>
+          <a:p>
+            <a:pPr algn="l">
+              <a:defRPr sz="1400" b="1">
+                <a:solidFill>
+                  <a:srgbClr val="B46A00"/>
+                </a:solidFill>
+                <a:latin typeface="Calibri"/>
+              </a:defRPr>
+            </a:pPr>
+            <a:r>
+              <a:t>Compare: ScatterMoE shows 6+ small blocks.  SonicMoE shows 2 large blocks.</a:t>
             </a:r>
           </a:p>
         </p:txBody>
@@ -16217,8 +16287,8 @@
         </p:nvSpPr>
         <p:spPr>
           <a:xfrm>
-            <a:off x="1645920" y="1920240"/>
-            <a:ext cx="9144000" cy="457200"/>
+            <a:off x="11155680" y="6400800"/>
+            <a:ext cx="914400" cy="365760"/>
           </a:xfrm>
           <a:prstGeom prst="rect">
             <a:avLst/>
@@ -16231,362 +16301,6 @@
           </a:bodyPr>
           <a:lstStyle/>
           <a:p>
-            <a:pPr algn="l">
-              <a:spcAft>
-                <a:spcPts val="509"/>
-              </a:spcAft>
-              <a:defRPr sz="1700" b="0">
-                <a:solidFill>
-                  <a:srgbClr val="1A1A2E"/>
-                </a:solidFill>
-                <a:latin typeface="Calibri"/>
-              </a:defRPr>
-            </a:pPr>
-            <a:r>
-              <a:t>Token gather fused with GEMM prologue (no separate kernel)</a:t>
-            </a:r>
-          </a:p>
-        </p:txBody>
-      </p:sp>
-      <p:sp>
-        <p:nvSpPr>
-          <p:cNvPr id="7" name="Rounded Rectangle 6"/>
-          <p:cNvSpPr/>
-          <p:nvPr/>
-        </p:nvSpPr>
-        <p:spPr>
-          <a:xfrm>
-            <a:off x="822960" y="2834640"/>
-            <a:ext cx="548640" cy="548640"/>
-          </a:xfrm>
-          <a:prstGeom prst="roundRect">
-            <a:avLst/>
-          </a:prstGeom>
-          <a:solidFill>
-            <a:srgbClr val="0E6EB8"/>
-          </a:solidFill>
-          <a:ln>
-            <a:noFill/>
-          </a:ln>
-        </p:spPr>
-        <p:style>
-          <a:lnRef idx="1">
-            <a:schemeClr val="accent1"/>
-          </a:lnRef>
-          <a:fillRef idx="3">
-            <a:schemeClr val="accent1"/>
-          </a:fillRef>
-          <a:effectRef idx="2">
-            <a:schemeClr val="accent1"/>
-          </a:effectRef>
-          <a:fontRef idx="minor">
-            <a:schemeClr val="lt1"/>
-          </a:fontRef>
-        </p:style>
-        <p:txBody>
-          <a:bodyPr rtlCol="0" anchor="ctr" wrap="square" lIns="101600" rIns="101600" tIns="76200" bIns="76200"/>
-          <a:lstStyle/>
-          <a:p>
-            <a:pPr algn="ctr">
-              <a:defRPr sz="2000" b="1">
-                <a:solidFill>
-                  <a:srgbClr val="1A1A2E"/>
-                </a:solidFill>
-                <a:latin typeface="Calibri"/>
-              </a:defRPr>
-            </a:pPr>
-            <a:r>
-              <a:t>2</a:t>
-            </a:r>
-          </a:p>
-        </p:txBody>
-      </p:sp>
-      <p:sp>
-        <p:nvSpPr>
-          <p:cNvPr id="8" name="TextBox 7"/>
-          <p:cNvSpPr txBox="1"/>
-          <p:nvPr/>
-        </p:nvSpPr>
-        <p:spPr>
-          <a:xfrm>
-            <a:off x="1645920" y="2834640"/>
-            <a:ext cx="3657600" cy="457200"/>
-          </a:xfrm>
-          <a:prstGeom prst="rect">
-            <a:avLst/>
-          </a:prstGeom>
-          <a:noFill/>
-        </p:spPr>
-        <p:txBody>
-          <a:bodyPr wrap="square">
-            <a:spAutoFit/>
-          </a:bodyPr>
-          <a:lstStyle/>
-          <a:p>
-            <a:pPr algn="l">
-              <a:spcAft>
-                <a:spcPts val="660"/>
-              </a:spcAft>
-              <a:defRPr sz="2200" b="1">
-                <a:solidFill>
-                  <a:srgbClr val="0E6EB8"/>
-                </a:solidFill>
-                <a:latin typeface="Calibri"/>
-              </a:defRPr>
-            </a:pPr>
-            <a:r>
-              <a:t>Ping-Pong Scheduling</a:t>
-            </a:r>
-          </a:p>
-        </p:txBody>
-      </p:sp>
-      <p:sp>
-        <p:nvSpPr>
-          <p:cNvPr id="9" name="TextBox 8"/>
-          <p:cNvSpPr txBox="1"/>
-          <p:nvPr/>
-        </p:nvSpPr>
-        <p:spPr>
-          <a:xfrm>
-            <a:off x="1645920" y="3291840"/>
-            <a:ext cx="9144000" cy="457200"/>
-          </a:xfrm>
-          <a:prstGeom prst="rect">
-            <a:avLst/>
-          </a:prstGeom>
-          <a:noFill/>
-        </p:spPr>
-        <p:txBody>
-          <a:bodyPr wrap="square">
-            <a:spAutoFit/>
-          </a:bodyPr>
-          <a:lstStyle/>
-          <a:p>
-            <a:pPr algn="l">
-              <a:spcAft>
-                <a:spcPts val="509"/>
-              </a:spcAft>
-              <a:defRPr sz="1700" b="0">
-                <a:solidFill>
-                  <a:srgbClr val="1A1A2E"/>
-                </a:solidFill>
-                <a:latin typeface="Calibri"/>
-              </a:defRPr>
-            </a:pPr>
-            <a:r>
-              <a:t>Overlap epilogue IO with next tile’s MMA</a:t>
-            </a:r>
-          </a:p>
-        </p:txBody>
-      </p:sp>
-      <p:sp>
-        <p:nvSpPr>
-          <p:cNvPr id="10" name="Rounded Rectangle 9"/>
-          <p:cNvSpPr/>
-          <p:nvPr/>
-        </p:nvSpPr>
-        <p:spPr>
-          <a:xfrm>
-            <a:off x="822960" y="4206240"/>
-            <a:ext cx="548640" cy="548640"/>
-          </a:xfrm>
-          <a:prstGeom prst="roundRect">
-            <a:avLst/>
-          </a:prstGeom>
-          <a:solidFill>
-            <a:srgbClr val="B46A00"/>
-          </a:solidFill>
-          <a:ln>
-            <a:noFill/>
-          </a:ln>
-        </p:spPr>
-        <p:style>
-          <a:lnRef idx="1">
-            <a:schemeClr val="accent1"/>
-          </a:lnRef>
-          <a:fillRef idx="3">
-            <a:schemeClr val="accent1"/>
-          </a:fillRef>
-          <a:effectRef idx="2">
-            <a:schemeClr val="accent1"/>
-          </a:effectRef>
-          <a:fontRef idx="minor">
-            <a:schemeClr val="lt1"/>
-          </a:fontRef>
-        </p:style>
-        <p:txBody>
-          <a:bodyPr rtlCol="0" anchor="ctr" wrap="square" lIns="101600" rIns="101600" tIns="76200" bIns="76200"/>
-          <a:lstStyle/>
-          <a:p>
-            <a:pPr algn="ctr">
-              <a:defRPr sz="2000" b="1">
-                <a:solidFill>
-                  <a:srgbClr val="1A1A2E"/>
-                </a:solidFill>
-                <a:latin typeface="Calibri"/>
-              </a:defRPr>
-            </a:pPr>
-            <a:r>
-              <a:t>3</a:t>
-            </a:r>
-          </a:p>
-        </p:txBody>
-      </p:sp>
-      <p:sp>
-        <p:nvSpPr>
-          <p:cNvPr id="11" name="TextBox 10"/>
-          <p:cNvSpPr txBox="1"/>
-          <p:nvPr/>
-        </p:nvSpPr>
-        <p:spPr>
-          <a:xfrm>
-            <a:off x="1645920" y="4206240"/>
-            <a:ext cx="3657600" cy="457200"/>
-          </a:xfrm>
-          <a:prstGeom prst="rect">
-            <a:avLst/>
-          </a:prstGeom>
-          <a:noFill/>
-        </p:spPr>
-        <p:txBody>
-          <a:bodyPr wrap="square">
-            <a:spAutoFit/>
-          </a:bodyPr>
-          <a:lstStyle/>
-          <a:p>
-            <a:pPr algn="l">
-              <a:spcAft>
-                <a:spcPts val="660"/>
-              </a:spcAft>
-              <a:defRPr sz="2200" b="1">
-                <a:solidFill>
-                  <a:srgbClr val="B46A00"/>
-                </a:solidFill>
-                <a:latin typeface="Calibri"/>
-              </a:defRPr>
-            </a:pPr>
-            <a:r>
-              <a:t>Epilogue Fusion</a:t>
-            </a:r>
-          </a:p>
-        </p:txBody>
-      </p:sp>
-      <p:sp>
-        <p:nvSpPr>
-          <p:cNvPr id="12" name="TextBox 11"/>
-          <p:cNvSpPr txBox="1"/>
-          <p:nvPr/>
-        </p:nvSpPr>
-        <p:spPr>
-          <a:xfrm>
-            <a:off x="1645920" y="4663440"/>
-            <a:ext cx="9144000" cy="457200"/>
-          </a:xfrm>
-          <a:prstGeom prst="rect">
-            <a:avLst/>
-          </a:prstGeom>
-          <a:noFill/>
-        </p:spPr>
-        <p:txBody>
-          <a:bodyPr wrap="square">
-            <a:spAutoFit/>
-          </a:bodyPr>
-          <a:lstStyle/>
-          <a:p>
-            <a:pPr algn="l">
-              <a:spcAft>
-                <a:spcPts val="509"/>
-              </a:spcAft>
-              <a:defRPr sz="1700" b="0">
-                <a:solidFill>
-                  <a:srgbClr val="1A1A2E"/>
-                </a:solidFill>
-                <a:latin typeface="Calibri"/>
-              </a:defRPr>
-            </a:pPr>
-            <a:r>
-              <a:t>SwiGLU + dS + A′ computed in GEMM epilogue</a:t>
-            </a:r>
-          </a:p>
-        </p:txBody>
-      </p:sp>
-      <p:sp>
-        <p:nvSpPr>
-          <p:cNvPr id="13" name="Rounded Rectangle 12"/>
-          <p:cNvSpPr/>
-          <p:nvPr/>
-        </p:nvSpPr>
-        <p:spPr>
-          <a:xfrm>
-            <a:off x="2743200" y="5212080"/>
-            <a:ext cx="6675120" cy="731520"/>
-          </a:xfrm>
-          <a:prstGeom prst="roundRect">
-            <a:avLst/>
-          </a:prstGeom>
-          <a:solidFill>
-            <a:srgbClr val="F0F4F8"/>
-          </a:solidFill>
-          <a:ln w="19050">
-            <a:solidFill>
-              <a:srgbClr val="057A55"/>
-            </a:solidFill>
-          </a:ln>
-        </p:spPr>
-        <p:style>
-          <a:lnRef idx="1">
-            <a:schemeClr val="accent1"/>
-          </a:lnRef>
-          <a:fillRef idx="3">
-            <a:schemeClr val="accent1"/>
-          </a:fillRef>
-          <a:effectRef idx="2">
-            <a:schemeClr val="accent1"/>
-          </a:effectRef>
-          <a:fontRef idx="minor">
-            <a:schemeClr val="lt1"/>
-          </a:fontRef>
-        </p:style>
-        <p:txBody>
-          <a:bodyPr rtlCol="0" anchor="ctr" wrap="square" lIns="101600" rIns="101600" tIns="76200" bIns="76200"/>
-          <a:lstStyle/>
-          <a:p>
-            <a:pPr algn="ctr">
-              <a:defRPr sz="2200" b="1">
-                <a:solidFill>
-                  <a:srgbClr val="057A55"/>
-                </a:solidFill>
-                <a:latin typeface="Calibri"/>
-              </a:defRPr>
-            </a:pPr>
-            <a:r>
-              <a:t>Result: IO is hidden behind compute</a:t>
-            </a:r>
-          </a:p>
-        </p:txBody>
-      </p:sp>
-      <p:sp>
-        <p:nvSpPr>
-          <p:cNvPr id="14" name="TextBox 13"/>
-          <p:cNvSpPr txBox="1"/>
-          <p:nvPr/>
-        </p:nvSpPr>
-        <p:spPr>
-          <a:xfrm>
-            <a:off x="11155680" y="6400800"/>
-            <a:ext cx="914400" cy="365760"/>
-          </a:xfrm>
-          <a:prstGeom prst="rect">
-            <a:avLst/>
-          </a:prstGeom>
-          <a:noFill/>
-        </p:spPr>
-        <p:txBody>
-          <a:bodyPr wrap="square">
-            <a:spAutoFit/>
-          </a:bodyPr>
-          <a:lstStyle/>
-          <a:p>
             <a:pPr algn="r">
               <a:spcAft>
                 <a:spcPts val="330"/>
@@ -16599,7 +16313,7 @@
               </a:defRPr>
             </a:pPr>
             <a:r>
-              <a:t>28/36</a:t>
+              <a:t>28/37</a:t>
             </a:r>
           </a:p>
         </p:txBody>
@@ -16707,21 +16421,1258 @@
               </a:defRPr>
             </a:pPr>
             <a:r>
-              <a:t>SonicMoE — Profiler Results</a:t>
-            </a:r>
-          </a:p>
-        </p:txBody>
-      </p:sp>
-      <p:sp>
-        <p:nvSpPr>
-          <p:cNvPr id="4" name="TextBox 3"/>
+              <a:t>SonicMoE — NCU Comparison (Verified on H200)</a:t>
+            </a:r>
+          </a:p>
+        </p:txBody>
+      </p:sp>
+      <p:graphicFrame>
+        <p:nvGraphicFramePr>
+          <p:cNvPr id="4" name="Table 3"/>
+          <p:cNvGraphicFramePr>
+            <a:graphicFrameLocks noGrp="1"/>
+          </p:cNvGraphicFramePr>
+          <p:nvPr/>
+        </p:nvGraphicFramePr>
+        <p:xfrm>
+          <a:off x="914400" y="1097280"/>
+          <a:ext cx="10332720" cy="4521200"/>
+        </p:xfrm>
+        <a:graphic>
+          <a:graphicData uri="http://schemas.openxmlformats.org/drawingml/2006/table">
+            <a:tbl>
+              <a:tblPr firstRow="1" bandRow="1">
+                <a:tableStyleId>{5C22544A-7EE6-4342-B048-85BDC9FD1C3A}</a:tableStyleId>
+              </a:tblPr>
+              <a:tblGrid>
+                <a:gridCol w="3017520"/>
+                <a:gridCol w="3657600"/>
+                <a:gridCol w="3657600"/>
+              </a:tblGrid>
+              <a:tr h="457200">
+                <a:tc>
+                  <a:txBody>
+                    <a:bodyPr lIns="76200" rIns="76200"/>
+                    <a:lstStyle/>
+                    <a:p>
+                      <a:pPr algn="ctr">
+                        <a:defRPr sz="1400" b="1">
+                          <a:solidFill>
+                            <a:srgbClr val="FFFFFF"/>
+                          </a:solidFill>
+                          <a:latin typeface="Calibri"/>
+                        </a:defRPr>
+                      </a:pPr>
+                      <a:r>
+                        <a:t>Metric</a:t>
+                      </a:r>
+                    </a:p>
+                  </a:txBody>
+                  <a:tcPr anchor="ctr">
+                    <a:solidFill>
+                      <a:srgbClr val="0E6EB8"/>
+                    </a:solidFill>
+                    <a:lnL w="0">
+                      <a:noFill/>
+                    </a:lnL>
+                    <a:lnR w="0">
+                      <a:noFill/>
+                    </a:lnR>
+                    <a:lnT w="0">
+                      <a:noFill/>
+                    </a:lnT>
+                    <a:lnB w="0">
+                      <a:noFill/>
+                    </a:lnB>
+                  </a:tcPr>
+                </a:tc>
+                <a:tc>
+                  <a:txBody>
+                    <a:bodyPr lIns="76200" rIns="76200"/>
+                    <a:lstStyle/>
+                    <a:p>
+                      <a:pPr algn="ctr">
+                        <a:defRPr sz="1400" b="1">
+                          <a:solidFill>
+                            <a:srgbClr val="FFFFFF"/>
+                          </a:solidFill>
+                          <a:latin typeface="Calibri"/>
+                        </a:defRPr>
+                      </a:pPr>
+                      <a:r>
+                        <a:t>ScatterMoE (_scatter2scatter)</a:t>
+                      </a:r>
+                    </a:p>
+                  </a:txBody>
+                  <a:tcPr anchor="ctr">
+                    <a:solidFill>
+                      <a:srgbClr val="0E6EB8"/>
+                    </a:solidFill>
+                    <a:lnL w="0">
+                      <a:noFill/>
+                    </a:lnL>
+                    <a:lnR w="0">
+                      <a:noFill/>
+                    </a:lnR>
+                    <a:lnT w="0">
+                      <a:noFill/>
+                    </a:lnT>
+                    <a:lnB w="0">
+                      <a:noFill/>
+                    </a:lnB>
+                  </a:tcPr>
+                </a:tc>
+                <a:tc>
+                  <a:txBody>
+                    <a:bodyPr lIns="76200" rIns="76200"/>
+                    <a:lstStyle/>
+                    <a:p>
+                      <a:pPr algn="ctr">
+                        <a:defRPr sz="1400" b="1">
+                          <a:solidFill>
+                            <a:srgbClr val="FFFFFF"/>
+                          </a:solidFill>
+                          <a:latin typeface="Calibri"/>
+                        </a:defRPr>
+                      </a:pPr>
+                      <a:r>
+                        <a:t>SonicMoE (quackgemm)</a:t>
+                      </a:r>
+                    </a:p>
+                  </a:txBody>
+                  <a:tcPr anchor="ctr">
+                    <a:solidFill>
+                      <a:srgbClr val="0E6EB8"/>
+                    </a:solidFill>
+                    <a:lnL w="0">
+                      <a:noFill/>
+                    </a:lnL>
+                    <a:lnR w="0">
+                      <a:noFill/>
+                    </a:lnR>
+                    <a:lnT w="0">
+                      <a:noFill/>
+                    </a:lnT>
+                    <a:lnB w="0">
+                      <a:noFill/>
+                    </a:lnB>
+                  </a:tcPr>
+                </a:tc>
+              </a:tr>
+              <a:tr h="406400">
+                <a:tc>
+                  <a:txBody>
+                    <a:bodyPr lIns="76200" rIns="76200"/>
+                    <a:lstStyle/>
+                    <a:p>
+                      <a:pPr algn="ctr">
+                        <a:defRPr sz="1300" b="0">
+                          <a:solidFill>
+                            <a:srgbClr val="1A1A2E"/>
+                          </a:solidFill>
+                          <a:latin typeface="Calibri"/>
+                        </a:defRPr>
+                      </a:pPr>
+                      <a:r>
+                        <a:t>Duration</a:t>
+                      </a:r>
+                    </a:p>
+                  </a:txBody>
+                  <a:tcPr anchor="ctr">
+                    <a:solidFill>
+                      <a:srgbClr val="F0F4F8"/>
+                    </a:solidFill>
+                    <a:lnL w="0">
+                      <a:noFill/>
+                    </a:lnL>
+                    <a:lnR w="0">
+                      <a:noFill/>
+                    </a:lnR>
+                    <a:lnT w="0">
+                      <a:noFill/>
+                    </a:lnT>
+                    <a:lnB w="0">
+                      <a:noFill/>
+                    </a:lnB>
+                  </a:tcPr>
+                </a:tc>
+                <a:tc>
+                  <a:txBody>
+                    <a:bodyPr lIns="76200" rIns="76200"/>
+                    <a:lstStyle/>
+                    <a:p>
+                      <a:pPr algn="ctr">
+                        <a:defRPr sz="1300" b="0">
+                          <a:solidFill>
+                            <a:srgbClr val="1A1A2E"/>
+                          </a:solidFill>
+                          <a:latin typeface="Calibri"/>
+                        </a:defRPr>
+                      </a:pPr>
+                      <a:r>
+                        <a:t>90.21 µs</a:t>
+                      </a:r>
+                    </a:p>
+                  </a:txBody>
+                  <a:tcPr anchor="ctr">
+                    <a:solidFill>
+                      <a:srgbClr val="F0F4F8"/>
+                    </a:solidFill>
+                    <a:lnL w="0">
+                      <a:noFill/>
+                    </a:lnL>
+                    <a:lnR w="0">
+                      <a:noFill/>
+                    </a:lnR>
+                    <a:lnT w="0">
+                      <a:noFill/>
+                    </a:lnT>
+                    <a:lnB w="0">
+                      <a:noFill/>
+                    </a:lnB>
+                  </a:tcPr>
+                </a:tc>
+                <a:tc>
+                  <a:txBody>
+                    <a:bodyPr lIns="76200" rIns="76200"/>
+                    <a:lstStyle/>
+                    <a:p>
+                      <a:pPr algn="ctr">
+                        <a:defRPr sz="1300" b="0">
+                          <a:solidFill>
+                            <a:srgbClr val="1A1A2E"/>
+                          </a:solidFill>
+                          <a:latin typeface="Calibri"/>
+                        </a:defRPr>
+                      </a:pPr>
+                      <a:r>
+                        <a:t>49.47 µs</a:t>
+                      </a:r>
+                    </a:p>
+                  </a:txBody>
+                  <a:tcPr anchor="ctr">
+                    <a:solidFill>
+                      <a:srgbClr val="F0F4F8"/>
+                    </a:solidFill>
+                    <a:lnL w="0">
+                      <a:noFill/>
+                    </a:lnL>
+                    <a:lnR w="0">
+                      <a:noFill/>
+                    </a:lnR>
+                    <a:lnT w="0">
+                      <a:noFill/>
+                    </a:lnT>
+                    <a:lnB w="0">
+                      <a:noFill/>
+                    </a:lnB>
+                  </a:tcPr>
+                </a:tc>
+              </a:tr>
+              <a:tr h="406400">
+                <a:tc>
+                  <a:txBody>
+                    <a:bodyPr lIns="76200" rIns="76200"/>
+                    <a:lstStyle/>
+                    <a:p>
+                      <a:pPr algn="ctr">
+                        <a:defRPr sz="1300" b="0">
+                          <a:solidFill>
+                            <a:srgbClr val="1A1A2E"/>
+                          </a:solidFill>
+                          <a:latin typeface="Calibri"/>
+                        </a:defRPr>
+                      </a:pPr>
+                      <a:r>
+                        <a:t>NCU Verdict</a:t>
+                      </a:r>
+                    </a:p>
+                  </a:txBody>
+                  <a:tcPr anchor="ctr">
+                    <a:solidFill>
+                      <a:srgbClr val="E8EEF4"/>
+                    </a:solidFill>
+                    <a:lnL w="0">
+                      <a:noFill/>
+                    </a:lnL>
+                    <a:lnR w="0">
+                      <a:noFill/>
+                    </a:lnR>
+                    <a:lnT w="0">
+                      <a:noFill/>
+                    </a:lnT>
+                    <a:lnB w="0">
+                      <a:noFill/>
+                    </a:lnB>
+                  </a:tcPr>
+                </a:tc>
+                <a:tc>
+                  <a:txBody>
+                    <a:bodyPr lIns="76200" rIns="76200"/>
+                    <a:lstStyle/>
+                    <a:p>
+                      <a:pPr algn="ctr">
+                        <a:defRPr sz="1300" b="0">
+                          <a:solidFill>
+                            <a:srgbClr val="1A1A2E"/>
+                          </a:solidFill>
+                          <a:latin typeface="Calibri"/>
+                        </a:defRPr>
+                      </a:pPr>
+                      <a:r>
+                        <a:t>"Latency Issue"</a:t>
+                      </a:r>
+                    </a:p>
+                  </a:txBody>
+                  <a:tcPr anchor="ctr">
+                    <a:solidFill>
+                      <a:srgbClr val="E8EEF4"/>
+                    </a:solidFill>
+                    <a:lnL w="0">
+                      <a:noFill/>
+                    </a:lnL>
+                    <a:lnR w="0">
+                      <a:noFill/>
+                    </a:lnR>
+                    <a:lnT w="0">
+                      <a:noFill/>
+                    </a:lnT>
+                    <a:lnB w="0">
+                      <a:noFill/>
+                    </a:lnB>
+                  </a:tcPr>
+                </a:tc>
+                <a:tc>
+                  <a:txBody>
+                    <a:bodyPr lIns="76200" rIns="76200"/>
+                    <a:lstStyle/>
+                    <a:p>
+                      <a:pPr algn="ctr">
+                        <a:defRPr sz="1300" b="0">
+                          <a:solidFill>
+                            <a:srgbClr val="1A1A2E"/>
+                          </a:solidFill>
+                          <a:latin typeface="Calibri"/>
+                        </a:defRPr>
+                      </a:pPr>
+                      <a:r>
+                        <a:t>"Balanced Throughput"</a:t>
+                      </a:r>
+                    </a:p>
+                  </a:txBody>
+                  <a:tcPr anchor="ctr">
+                    <a:solidFill>
+                      <a:srgbClr val="E8EEF4"/>
+                    </a:solidFill>
+                    <a:lnL w="0">
+                      <a:noFill/>
+                    </a:lnL>
+                    <a:lnR w="0">
+                      <a:noFill/>
+                    </a:lnR>
+                    <a:lnT w="0">
+                      <a:noFill/>
+                    </a:lnT>
+                    <a:lnB w="0">
+                      <a:noFill/>
+                    </a:lnB>
+                  </a:tcPr>
+                </a:tc>
+              </a:tr>
+              <a:tr h="406400">
+                <a:tc>
+                  <a:txBody>
+                    <a:bodyPr lIns="76200" rIns="76200"/>
+                    <a:lstStyle/>
+                    <a:p>
+                      <a:pPr algn="ctr">
+                        <a:defRPr sz="1300" b="0">
+                          <a:solidFill>
+                            <a:srgbClr val="1A1A2E"/>
+                          </a:solidFill>
+                          <a:latin typeface="Calibri"/>
+                        </a:defRPr>
+                      </a:pPr>
+                      <a:r>
+                        <a:t>Compute Throughput</a:t>
+                      </a:r>
+                    </a:p>
+                  </a:txBody>
+                  <a:tcPr anchor="ctr">
+                    <a:solidFill>
+                      <a:srgbClr val="F0F4F8"/>
+                    </a:solidFill>
+                    <a:lnL w="0">
+                      <a:noFill/>
+                    </a:lnL>
+                    <a:lnR w="0">
+                      <a:noFill/>
+                    </a:lnR>
+                    <a:lnT w="0">
+                      <a:noFill/>
+                    </a:lnT>
+                    <a:lnB w="0">
+                      <a:noFill/>
+                    </a:lnB>
+                  </a:tcPr>
+                </a:tc>
+                <a:tc>
+                  <a:txBody>
+                    <a:bodyPr lIns="76200" rIns="76200"/>
+                    <a:lstStyle/>
+                    <a:p>
+                      <a:pPr algn="ctr">
+                        <a:defRPr sz="1300" b="0">
+                          <a:solidFill>
+                            <a:srgbClr val="1A1A2E"/>
+                          </a:solidFill>
+                          <a:latin typeface="Calibri"/>
+                        </a:defRPr>
+                      </a:pPr>
+                      <a:r>
+                        <a:t>29.65%</a:t>
+                      </a:r>
+                    </a:p>
+                  </a:txBody>
+                  <a:tcPr anchor="ctr">
+                    <a:solidFill>
+                      <a:srgbClr val="F0F4F8"/>
+                    </a:solidFill>
+                    <a:lnL w="0">
+                      <a:noFill/>
+                    </a:lnL>
+                    <a:lnR w="0">
+                      <a:noFill/>
+                    </a:lnR>
+                    <a:lnT w="0">
+                      <a:noFill/>
+                    </a:lnT>
+                    <a:lnB w="0">
+                      <a:noFill/>
+                    </a:lnB>
+                  </a:tcPr>
+                </a:tc>
+                <a:tc>
+                  <a:txBody>
+                    <a:bodyPr lIns="76200" rIns="76200"/>
+                    <a:lstStyle/>
+                    <a:p>
+                      <a:pPr algn="ctr">
+                        <a:defRPr sz="1300" b="0">
+                          <a:solidFill>
+                            <a:srgbClr val="1A1A2E"/>
+                          </a:solidFill>
+                          <a:latin typeface="Calibri"/>
+                        </a:defRPr>
+                      </a:pPr>
+                      <a:r>
+                        <a:t>53.21%</a:t>
+                      </a:r>
+                    </a:p>
+                  </a:txBody>
+                  <a:tcPr anchor="ctr">
+                    <a:solidFill>
+                      <a:srgbClr val="F0F4F8"/>
+                    </a:solidFill>
+                    <a:lnL w="0">
+                      <a:noFill/>
+                    </a:lnL>
+                    <a:lnR w="0">
+                      <a:noFill/>
+                    </a:lnR>
+                    <a:lnT w="0">
+                      <a:noFill/>
+                    </a:lnT>
+                    <a:lnB w="0">
+                      <a:noFill/>
+                    </a:lnB>
+                  </a:tcPr>
+                </a:tc>
+              </a:tr>
+              <a:tr h="406400">
+                <a:tc>
+                  <a:txBody>
+                    <a:bodyPr lIns="76200" rIns="76200"/>
+                    <a:lstStyle/>
+                    <a:p>
+                      <a:pPr algn="ctr">
+                        <a:defRPr sz="1300" b="0">
+                          <a:solidFill>
+                            <a:srgbClr val="1A1A2E"/>
+                          </a:solidFill>
+                          <a:latin typeface="Calibri"/>
+                        </a:defRPr>
+                      </a:pPr>
+                      <a:r>
+                        <a:t>Memory Throughput</a:t>
+                      </a:r>
+                    </a:p>
+                  </a:txBody>
+                  <a:tcPr anchor="ctr">
+                    <a:solidFill>
+                      <a:srgbClr val="E8EEF4"/>
+                    </a:solidFill>
+                    <a:lnL w="0">
+                      <a:noFill/>
+                    </a:lnL>
+                    <a:lnR w="0">
+                      <a:noFill/>
+                    </a:lnR>
+                    <a:lnT w="0">
+                      <a:noFill/>
+                    </a:lnT>
+                    <a:lnB w="0">
+                      <a:noFill/>
+                    </a:lnB>
+                  </a:tcPr>
+                </a:tc>
+                <a:tc>
+                  <a:txBody>
+                    <a:bodyPr lIns="76200" rIns="76200"/>
+                    <a:lstStyle/>
+                    <a:p>
+                      <a:pPr algn="ctr">
+                        <a:defRPr sz="1300" b="0">
+                          <a:solidFill>
+                            <a:srgbClr val="1A1A2E"/>
+                          </a:solidFill>
+                          <a:latin typeface="Calibri"/>
+                        </a:defRPr>
+                      </a:pPr>
+                      <a:r>
+                        <a:t>59.34%</a:t>
+                      </a:r>
+                    </a:p>
+                  </a:txBody>
+                  <a:tcPr anchor="ctr">
+                    <a:solidFill>
+                      <a:srgbClr val="E8EEF4"/>
+                    </a:solidFill>
+                    <a:lnL w="0">
+                      <a:noFill/>
+                    </a:lnL>
+                    <a:lnR w="0">
+                      <a:noFill/>
+                    </a:lnR>
+                    <a:lnT w="0">
+                      <a:noFill/>
+                    </a:lnT>
+                    <a:lnB w="0">
+                      <a:noFill/>
+                    </a:lnB>
+                  </a:tcPr>
+                </a:tc>
+                <a:tc>
+                  <a:txBody>
+                    <a:bodyPr lIns="76200" rIns="76200"/>
+                    <a:lstStyle/>
+                    <a:p>
+                      <a:pPr algn="ctr">
+                        <a:defRPr sz="1300" b="0">
+                          <a:solidFill>
+                            <a:srgbClr val="1A1A2E"/>
+                          </a:solidFill>
+                          <a:latin typeface="Calibri"/>
+                        </a:defRPr>
+                      </a:pPr>
+                      <a:r>
+                        <a:t>60.76%</a:t>
+                      </a:r>
+                    </a:p>
+                  </a:txBody>
+                  <a:tcPr anchor="ctr">
+                    <a:solidFill>
+                      <a:srgbClr val="E8EEF4"/>
+                    </a:solidFill>
+                    <a:lnL w="0">
+                      <a:noFill/>
+                    </a:lnL>
+                    <a:lnR w="0">
+                      <a:noFill/>
+                    </a:lnR>
+                    <a:lnT w="0">
+                      <a:noFill/>
+                    </a:lnT>
+                    <a:lnB w="0">
+                      <a:noFill/>
+                    </a:lnB>
+                  </a:tcPr>
+                </a:tc>
+              </a:tr>
+              <a:tr h="406400">
+                <a:tc>
+                  <a:txBody>
+                    <a:bodyPr lIns="76200" rIns="76200"/>
+                    <a:lstStyle/>
+                    <a:p>
+                      <a:pPr algn="ctr">
+                        <a:defRPr sz="1300" b="0">
+                          <a:solidFill>
+                            <a:srgbClr val="1A1A2E"/>
+                          </a:solidFill>
+                          <a:latin typeface="Calibri"/>
+                        </a:defRPr>
+                      </a:pPr>
+                      <a:r>
+                        <a:t>Registers/Thread</a:t>
+                      </a:r>
+                    </a:p>
+                  </a:txBody>
+                  <a:tcPr anchor="ctr">
+                    <a:solidFill>
+                      <a:srgbClr val="F0F4F8"/>
+                    </a:solidFill>
+                    <a:lnL w="0">
+                      <a:noFill/>
+                    </a:lnL>
+                    <a:lnR w="0">
+                      <a:noFill/>
+                    </a:lnR>
+                    <a:lnT w="0">
+                      <a:noFill/>
+                    </a:lnT>
+                    <a:lnB w="0">
+                      <a:noFill/>
+                    </a:lnB>
+                  </a:tcPr>
+                </a:tc>
+                <a:tc>
+                  <a:txBody>
+                    <a:bodyPr lIns="76200" rIns="76200"/>
+                    <a:lstStyle/>
+                    <a:p>
+                      <a:pPr algn="ctr">
+                        <a:defRPr sz="1300" b="0">
+                          <a:solidFill>
+                            <a:srgbClr val="1A1A2E"/>
+                          </a:solidFill>
+                          <a:latin typeface="Calibri"/>
+                        </a:defRPr>
+                      </a:pPr>
+                      <a:r>
+                        <a:t>114</a:t>
+                      </a:r>
+                    </a:p>
+                  </a:txBody>
+                  <a:tcPr anchor="ctr">
+                    <a:solidFill>
+                      <a:srgbClr val="F0F4F8"/>
+                    </a:solidFill>
+                    <a:lnL w="0">
+                      <a:noFill/>
+                    </a:lnL>
+                    <a:lnR w="0">
+                      <a:noFill/>
+                    </a:lnR>
+                    <a:lnT w="0">
+                      <a:noFill/>
+                    </a:lnT>
+                    <a:lnB w="0">
+                      <a:noFill/>
+                    </a:lnB>
+                  </a:tcPr>
+                </a:tc>
+                <a:tc>
+                  <a:txBody>
+                    <a:bodyPr lIns="76200" rIns="76200"/>
+                    <a:lstStyle/>
+                    <a:p>
+                      <a:pPr algn="ctr">
+                        <a:defRPr sz="1300" b="0">
+                          <a:solidFill>
+                            <a:srgbClr val="1A1A2E"/>
+                          </a:solidFill>
+                          <a:latin typeface="Calibri"/>
+                        </a:defRPr>
+                      </a:pPr>
+                      <a:r>
+                        <a:t>168</a:t>
+                      </a:r>
+                    </a:p>
+                  </a:txBody>
+                  <a:tcPr anchor="ctr">
+                    <a:solidFill>
+                      <a:srgbClr val="F0F4F8"/>
+                    </a:solidFill>
+                    <a:lnL w="0">
+                      <a:noFill/>
+                    </a:lnL>
+                    <a:lnR w="0">
+                      <a:noFill/>
+                    </a:lnR>
+                    <a:lnT w="0">
+                      <a:noFill/>
+                    </a:lnT>
+                    <a:lnB w="0">
+                      <a:noFill/>
+                    </a:lnB>
+                  </a:tcPr>
+                </a:tc>
+              </a:tr>
+              <a:tr h="406400">
+                <a:tc>
+                  <a:txBody>
+                    <a:bodyPr lIns="76200" rIns="76200"/>
+                    <a:lstStyle/>
+                    <a:p>
+                      <a:pPr algn="ctr">
+                        <a:defRPr sz="1300" b="0">
+                          <a:solidFill>
+                            <a:srgbClr val="1A1A2E"/>
+                          </a:solidFill>
+                          <a:latin typeface="Calibri"/>
+                        </a:defRPr>
+                      </a:pPr>
+                      <a:r>
+                        <a:t>Block Size</a:t>
+                      </a:r>
+                    </a:p>
+                  </a:txBody>
+                  <a:tcPr anchor="ctr">
+                    <a:solidFill>
+                      <a:srgbClr val="E8EEF4"/>
+                    </a:solidFill>
+                    <a:lnL w="0">
+                      <a:noFill/>
+                    </a:lnL>
+                    <a:lnR w="0">
+                      <a:noFill/>
+                    </a:lnR>
+                    <a:lnT w="0">
+                      <a:noFill/>
+                    </a:lnT>
+                    <a:lnB w="0">
+                      <a:noFill/>
+                    </a:lnB>
+                  </a:tcPr>
+                </a:tc>
+                <a:tc>
+                  <a:txBody>
+                    <a:bodyPr lIns="76200" rIns="76200"/>
+                    <a:lstStyle/>
+                    <a:p>
+                      <a:pPr algn="ctr">
+                        <a:defRPr sz="1300" b="0">
+                          <a:solidFill>
+                            <a:srgbClr val="1A1A2E"/>
+                          </a:solidFill>
+                          <a:latin typeface="Calibri"/>
+                        </a:defRPr>
+                      </a:pPr>
+                      <a:r>
+                        <a:t>128 (4 warps)</a:t>
+                      </a:r>
+                    </a:p>
+                  </a:txBody>
+                  <a:tcPr anchor="ctr">
+                    <a:solidFill>
+                      <a:srgbClr val="E8EEF4"/>
+                    </a:solidFill>
+                    <a:lnL w="0">
+                      <a:noFill/>
+                    </a:lnL>
+                    <a:lnR w="0">
+                      <a:noFill/>
+                    </a:lnR>
+                    <a:lnT w="0">
+                      <a:noFill/>
+                    </a:lnT>
+                    <a:lnB w="0">
+                      <a:noFill/>
+                    </a:lnB>
+                  </a:tcPr>
+                </a:tc>
+                <a:tc>
+                  <a:txBody>
+                    <a:bodyPr lIns="76200" rIns="76200"/>
+                    <a:lstStyle/>
+                    <a:p>
+                      <a:pPr algn="ctr">
+                        <a:defRPr sz="1300" b="0">
+                          <a:solidFill>
+                            <a:srgbClr val="1A1A2E"/>
+                          </a:solidFill>
+                          <a:latin typeface="Calibri"/>
+                        </a:defRPr>
+                      </a:pPr>
+                      <a:r>
+                        <a:t>384 (12 warps)</a:t>
+                      </a:r>
+                    </a:p>
+                  </a:txBody>
+                  <a:tcPr anchor="ctr">
+                    <a:solidFill>
+                      <a:srgbClr val="E8EEF4"/>
+                    </a:solidFill>
+                    <a:lnL w="0">
+                      <a:noFill/>
+                    </a:lnL>
+                    <a:lnR w="0">
+                      <a:noFill/>
+                    </a:lnR>
+                    <a:lnT w="0">
+                      <a:noFill/>
+                    </a:lnT>
+                    <a:lnB w="0">
+                      <a:noFill/>
+                    </a:lnB>
+                  </a:tcPr>
+                </a:tc>
+              </a:tr>
+              <a:tr h="406400">
+                <a:tc>
+                  <a:txBody>
+                    <a:bodyPr lIns="76200" rIns="76200"/>
+                    <a:lstStyle/>
+                    <a:p>
+                      <a:pPr algn="ctr">
+                        <a:defRPr sz="1300" b="0">
+                          <a:solidFill>
+                            <a:srgbClr val="1A1A2E"/>
+                          </a:solidFill>
+                          <a:latin typeface="Calibri"/>
+                        </a:defRPr>
+                      </a:pPr>
+                      <a:r>
+                        <a:t>TMA Instructions</a:t>
+                      </a:r>
+                    </a:p>
+                  </a:txBody>
+                  <a:tcPr anchor="ctr">
+                    <a:solidFill>
+                      <a:srgbClr val="F0F4F8"/>
+                    </a:solidFill>
+                    <a:lnL w="0">
+                      <a:noFill/>
+                    </a:lnL>
+                    <a:lnR w="0">
+                      <a:noFill/>
+                    </a:lnR>
+                    <a:lnT w="0">
+                      <a:noFill/>
+                    </a:lnT>
+                    <a:lnB w="0">
+                      <a:noFill/>
+                    </a:lnB>
+                  </a:tcPr>
+                </a:tc>
+                <a:tc>
+                  <a:txBody>
+                    <a:bodyPr lIns="76200" rIns="76200"/>
+                    <a:lstStyle/>
+                    <a:p>
+                      <a:pPr algn="ctr">
+                        <a:defRPr sz="1300" b="0">
+                          <a:solidFill>
+                            <a:srgbClr val="1A1A2E"/>
+                          </a:solidFill>
+                          <a:latin typeface="Calibri"/>
+                        </a:defRPr>
+                      </a:pPr>
+                      <a:r>
+                        <a:t>0</a:t>
+                      </a:r>
+                    </a:p>
+                  </a:txBody>
+                  <a:tcPr anchor="ctr">
+                    <a:solidFill>
+                      <a:srgbClr val="F0F4F8"/>
+                    </a:solidFill>
+                    <a:lnL w="0">
+                      <a:noFill/>
+                    </a:lnL>
+                    <a:lnR w="0">
+                      <a:noFill/>
+                    </a:lnR>
+                    <a:lnT w="0">
+                      <a:noFill/>
+                    </a:lnT>
+                    <a:lnB w="0">
+                      <a:noFill/>
+                    </a:lnB>
+                  </a:tcPr>
+                </a:tc>
+                <a:tc>
+                  <a:txBody>
+                    <a:bodyPr lIns="76200" rIns="76200"/>
+                    <a:lstStyle/>
+                    <a:p>
+                      <a:pPr algn="ctr">
+                        <a:defRPr sz="1300" b="0">
+                          <a:solidFill>
+                            <a:srgbClr val="1A1A2E"/>
+                          </a:solidFill>
+                          <a:latin typeface="Calibri"/>
+                        </a:defRPr>
+                      </a:pPr>
+                      <a:r>
+                        <a:t>30,720</a:t>
+                      </a:r>
+                    </a:p>
+                  </a:txBody>
+                  <a:tcPr anchor="ctr">
+                    <a:solidFill>
+                      <a:srgbClr val="F0F4F8"/>
+                    </a:solidFill>
+                    <a:lnL w="0">
+                      <a:noFill/>
+                    </a:lnL>
+                    <a:lnR w="0">
+                      <a:noFill/>
+                    </a:lnR>
+                    <a:lnT w="0">
+                      <a:noFill/>
+                    </a:lnT>
+                    <a:lnB w="0">
+                      <a:noFill/>
+                    </a:lnB>
+                  </a:tcPr>
+                </a:tc>
+              </a:tr>
+              <a:tr h="406400">
+                <a:tc>
+                  <a:txBody>
+                    <a:bodyPr lIns="76200" rIns="76200"/>
+                    <a:lstStyle/>
+                    <a:p>
+                      <a:pPr algn="ctr">
+                        <a:defRPr sz="1300" b="0">
+                          <a:solidFill>
+                            <a:srgbClr val="1A1A2E"/>
+                          </a:solidFill>
+                          <a:latin typeface="Calibri"/>
+                        </a:defRPr>
+                      </a:pPr>
+                      <a:r>
+                        <a:t>Global Load Insts</a:t>
+                      </a:r>
+                    </a:p>
+                  </a:txBody>
+                  <a:tcPr anchor="ctr">
+                    <a:solidFill>
+                      <a:srgbClr val="E8EEF4"/>
+                    </a:solidFill>
+                    <a:lnL w="0">
+                      <a:noFill/>
+                    </a:lnL>
+                    <a:lnR w="0">
+                      <a:noFill/>
+                    </a:lnR>
+                    <a:lnT w="0">
+                      <a:noFill/>
+                    </a:lnT>
+                    <a:lnB w="0">
+                      <a:noFill/>
+                    </a:lnB>
+                  </a:tcPr>
+                </a:tc>
+                <a:tc>
+                  <a:txBody>
+                    <a:bodyPr lIns="76200" rIns="76200"/>
+                    <a:lstStyle/>
+                    <a:p>
+                      <a:pPr algn="ctr">
+                        <a:defRPr sz="1300" b="0">
+                          <a:solidFill>
+                            <a:srgbClr val="1A1A2E"/>
+                          </a:solidFill>
+                          <a:latin typeface="Calibri"/>
+                        </a:defRPr>
+                      </a:pPr>
+                      <a:r>
+                        <a:t>110,390</a:t>
+                      </a:r>
+                    </a:p>
+                  </a:txBody>
+                  <a:tcPr anchor="ctr">
+                    <a:solidFill>
+                      <a:srgbClr val="E8EEF4"/>
+                    </a:solidFill>
+                    <a:lnL w="0">
+                      <a:noFill/>
+                    </a:lnL>
+                    <a:lnR w="0">
+                      <a:noFill/>
+                    </a:lnR>
+                    <a:lnT w="0">
+                      <a:noFill/>
+                    </a:lnT>
+                    <a:lnB w="0">
+                      <a:noFill/>
+                    </a:lnB>
+                  </a:tcPr>
+                </a:tc>
+                <a:tc>
+                  <a:txBody>
+                    <a:bodyPr lIns="76200" rIns="76200"/>
+                    <a:lstStyle/>
+                    <a:p>
+                      <a:pPr algn="ctr">
+                        <a:defRPr sz="1300" b="0">
+                          <a:solidFill>
+                            <a:srgbClr val="1A1A2E"/>
+                          </a:solidFill>
+                          <a:latin typeface="Calibri"/>
+                        </a:defRPr>
+                      </a:pPr>
+                      <a:r>
+                        <a:t>15,780</a:t>
+                      </a:r>
+                    </a:p>
+                  </a:txBody>
+                  <a:tcPr anchor="ctr">
+                    <a:solidFill>
+                      <a:srgbClr val="E8EEF4"/>
+                    </a:solidFill>
+                    <a:lnL w="0">
+                      <a:noFill/>
+                    </a:lnL>
+                    <a:lnR w="0">
+                      <a:noFill/>
+                    </a:lnR>
+                    <a:lnT w="0">
+                      <a:noFill/>
+                    </a:lnT>
+                    <a:lnB w="0">
+                      <a:noFill/>
+                    </a:lnB>
+                  </a:tcPr>
+                </a:tc>
+              </a:tr>
+              <a:tr h="406400">
+                <a:tc>
+                  <a:txBody>
+                    <a:bodyPr lIns="76200" rIns="76200"/>
+                    <a:lstStyle/>
+                    <a:p>
+                      <a:pPr algn="ctr">
+                        <a:defRPr sz="1300" b="0">
+                          <a:solidFill>
+                            <a:srgbClr val="1A1A2E"/>
+                          </a:solidFill>
+                          <a:latin typeface="Calibri"/>
+                        </a:defRPr>
+                      </a:pPr>
+                      <a:r>
+                        <a:t>Achieved Occupancy</a:t>
+                      </a:r>
+                    </a:p>
+                  </a:txBody>
+                  <a:tcPr anchor="ctr">
+                    <a:solidFill>
+                      <a:srgbClr val="F0F4F8"/>
+                    </a:solidFill>
+                    <a:lnL w="0">
+                      <a:noFill/>
+                    </a:lnL>
+                    <a:lnR w="0">
+                      <a:noFill/>
+                    </a:lnR>
+                    <a:lnT w="0">
+                      <a:noFill/>
+                    </a:lnT>
+                    <a:lnB w="0">
+                      <a:noFill/>
+                    </a:lnB>
+                  </a:tcPr>
+                </a:tc>
+                <a:tc>
+                  <a:txBody>
+                    <a:bodyPr lIns="76200" rIns="76200"/>
+                    <a:lstStyle/>
+                    <a:p>
+                      <a:pPr algn="ctr">
+                        <a:defRPr sz="1300" b="0">
+                          <a:solidFill>
+                            <a:srgbClr val="1A1A2E"/>
+                          </a:solidFill>
+                          <a:latin typeface="Calibri"/>
+                        </a:defRPr>
+                      </a:pPr>
+                      <a:r>
+                        <a:t>12.10%</a:t>
+                      </a:r>
+                    </a:p>
+                  </a:txBody>
+                  <a:tcPr anchor="ctr">
+                    <a:solidFill>
+                      <a:srgbClr val="F0F4F8"/>
+                    </a:solidFill>
+                    <a:lnL w="0">
+                      <a:noFill/>
+                    </a:lnL>
+                    <a:lnR w="0">
+                      <a:noFill/>
+                    </a:lnR>
+                    <a:lnT w="0">
+                      <a:noFill/>
+                    </a:lnT>
+                    <a:lnB w="0">
+                      <a:noFill/>
+                    </a:lnB>
+                  </a:tcPr>
+                </a:tc>
+                <a:tc>
+                  <a:txBody>
+                    <a:bodyPr lIns="76200" rIns="76200"/>
+                    <a:lstStyle/>
+                    <a:p>
+                      <a:pPr algn="ctr">
+                        <a:defRPr sz="1300" b="0">
+                          <a:solidFill>
+                            <a:srgbClr val="1A1A2E"/>
+                          </a:solidFill>
+                          <a:latin typeface="Calibri"/>
+                        </a:defRPr>
+                      </a:pPr>
+                      <a:r>
+                        <a:t>19.78%</a:t>
+                      </a:r>
+                    </a:p>
+                  </a:txBody>
+                  <a:tcPr anchor="ctr">
+                    <a:solidFill>
+                      <a:srgbClr val="F0F4F8"/>
+                    </a:solidFill>
+                    <a:lnL w="0">
+                      <a:noFill/>
+                    </a:lnL>
+                    <a:lnR w="0">
+                      <a:noFill/>
+                    </a:lnR>
+                    <a:lnT w="0">
+                      <a:noFill/>
+                    </a:lnT>
+                    <a:lnB w="0">
+                      <a:noFill/>
+                    </a:lnB>
+                  </a:tcPr>
+                </a:tc>
+              </a:tr>
+              <a:tr h="406400">
+                <a:tc>
+                  <a:txBody>
+                    <a:bodyPr lIns="76200" rIns="76200"/>
+                    <a:lstStyle/>
+                    <a:p>
+                      <a:pPr algn="ctr">
+                        <a:defRPr sz="1300" b="0">
+                          <a:solidFill>
+                            <a:srgbClr val="1A1A2E"/>
+                          </a:solidFill>
+                          <a:latin typeface="Calibri"/>
+                        </a:defRPr>
+                      </a:pPr>
+                      <a:r>
+                        <a:t>Theor. Occupancy</a:t>
+                      </a:r>
+                    </a:p>
+                  </a:txBody>
+                  <a:tcPr anchor="ctr">
+                    <a:solidFill>
+                      <a:srgbClr val="E8EEF4"/>
+                    </a:solidFill>
+                    <a:lnL w="0">
+                      <a:noFill/>
+                    </a:lnL>
+                    <a:lnR w="0">
+                      <a:noFill/>
+                    </a:lnR>
+                    <a:lnT w="0">
+                      <a:noFill/>
+                    </a:lnT>
+                    <a:lnB w="0">
+                      <a:noFill/>
+                    </a:lnB>
+                  </a:tcPr>
+                </a:tc>
+                <a:tc>
+                  <a:txBody>
+                    <a:bodyPr lIns="76200" rIns="76200"/>
+                    <a:lstStyle/>
+                    <a:p>
+                      <a:pPr algn="ctr">
+                        <a:defRPr sz="1300" b="0">
+                          <a:solidFill>
+                            <a:srgbClr val="1A1A2E"/>
+                          </a:solidFill>
+                          <a:latin typeface="Calibri"/>
+                        </a:defRPr>
+                      </a:pPr>
+                      <a:r>
+                        <a:t>11.50%</a:t>
+                      </a:r>
+                    </a:p>
+                  </a:txBody>
+                  <a:tcPr anchor="ctr">
+                    <a:solidFill>
+                      <a:srgbClr val="E8EEF4"/>
+                    </a:solidFill>
+                    <a:lnL w="0">
+                      <a:noFill/>
+                    </a:lnL>
+                    <a:lnR w="0">
+                      <a:noFill/>
+                    </a:lnR>
+                    <a:lnT w="0">
+                      <a:noFill/>
+                    </a:lnT>
+                    <a:lnB w="0">
+                      <a:noFill/>
+                    </a:lnB>
+                  </a:tcPr>
+                </a:tc>
+                <a:tc>
+                  <a:txBody>
+                    <a:bodyPr lIns="76200" rIns="76200"/>
+                    <a:lstStyle/>
+                    <a:p>
+                      <a:pPr algn="ctr">
+                        <a:defRPr sz="1300" b="0">
+                          <a:solidFill>
+                            <a:srgbClr val="1A1A2E"/>
+                          </a:solidFill>
+                          <a:latin typeface="Calibri"/>
+                        </a:defRPr>
+                      </a:pPr>
+                      <a:r>
+                        <a:t>18.75%</a:t>
+                      </a:r>
+                    </a:p>
+                  </a:txBody>
+                  <a:tcPr anchor="ctr">
+                    <a:solidFill>
+                      <a:srgbClr val="E8EEF4"/>
+                    </a:solidFill>
+                    <a:lnL w="0">
+                      <a:noFill/>
+                    </a:lnL>
+                    <a:lnR w="0">
+                      <a:noFill/>
+                    </a:lnR>
+                    <a:lnT w="0">
+                      <a:noFill/>
+                    </a:lnT>
+                    <a:lnB w="0">
+                      <a:noFill/>
+                    </a:lnB>
+                  </a:tcPr>
+                </a:tc>
+              </a:tr>
+            </a:tbl>
+          </a:graphicData>
+        </a:graphic>
+      </p:graphicFrame>
+      <p:sp>
+        <p:nvSpPr>
+          <p:cNvPr id="5" name="TextBox 4"/>
           <p:cNvSpPr txBox="1"/>
           <p:nvPr/>
         </p:nvSpPr>
         <p:spPr>
           <a:xfrm>
-            <a:off x="822960" y="1371600"/>
-            <a:ext cx="10058400" cy="457200"/>
+            <a:off x="914400" y="5943600"/>
+            <a:ext cx="10332720" cy="457200"/>
           </a:xfrm>
           <a:prstGeom prst="rect">
             <a:avLst/>
@@ -16734,66 +17685,11 @@
           </a:bodyPr>
           <a:lstStyle/>
           <a:p>
-            <a:pPr algn="l">
+            <a:pPr algn="ctr">
               <a:spcAft>
                 <a:spcPts val="540"/>
               </a:spcAft>
-              <a:defRPr sz="1800" b="0">
-                <a:solidFill>
-                  <a:srgbClr val="555555"/>
-                </a:solidFill>
-                <a:latin typeface="Calibri"/>
-              </a:defRPr>
-            </a:pPr>
-            <a:r>
-              <a:t>Configuration: E=128, K=8, d=1536, n=256 (7B MoE)</a:t>
-            </a:r>
-          </a:p>
-        </p:txBody>
-      </p:sp>
-      <p:sp>
-        <p:nvSpPr>
-          <p:cNvPr id="5" name="Rounded Rectangle 4"/>
-          <p:cNvSpPr/>
-          <p:nvPr/>
-        </p:nvSpPr>
-        <p:spPr>
-          <a:xfrm>
-            <a:off x="822960" y="2103120"/>
-            <a:ext cx="3657600" cy="731520"/>
-          </a:xfrm>
-          <a:prstGeom prst="roundRect">
-            <a:avLst/>
-          </a:prstGeom>
-          <a:solidFill>
-            <a:srgbClr val="F0F4F8"/>
-          </a:solidFill>
-          <a:ln w="19050">
-            <a:solidFill>
-              <a:srgbClr val="B46A00"/>
-            </a:solidFill>
-          </a:ln>
-        </p:spPr>
-        <p:style>
-          <a:lnRef idx="1">
-            <a:schemeClr val="accent1"/>
-          </a:lnRef>
-          <a:fillRef idx="3">
-            <a:schemeClr val="accent1"/>
-          </a:fillRef>
-          <a:effectRef idx="2">
-            <a:schemeClr val="accent1"/>
-          </a:effectRef>
-          <a:fontRef idx="minor">
-            <a:schemeClr val="lt1"/>
-          </a:fontRef>
-        </p:style>
-        <p:txBody>
-          <a:bodyPr rtlCol="0" anchor="ctr" wrap="square" lIns="101600" rIns="101600" tIns="76200" bIns="76200"/>
-          <a:lstStyle/>
-          <a:p>
-            <a:pPr algn="ctr">
-              <a:defRPr sz="2400" b="1">
+              <a:defRPr sz="1800" b="1">
                 <a:solidFill>
                   <a:srgbClr val="B46A00"/>
                 </a:solidFill>
@@ -16801,7 +17697,7 @@
               </a:defRPr>
             </a:pPr>
             <a:r>
-              <a:t>35 TFLOPS on H200</a:t>
+              <a:t>Latency Issue → Balanced Throughput: the single most important diagnostic shift</a:t>
             </a:r>
           </a:p>
         </p:txBody>
@@ -16814,8 +17710,8 @@
         </p:nvSpPr>
         <p:spPr>
           <a:xfrm>
-            <a:off x="822960" y="3291840"/>
-            <a:ext cx="10058400" cy="365760"/>
+            <a:off x="11155680" y="6400800"/>
+            <a:ext cx="914400" cy="365760"/>
           </a:xfrm>
           <a:prstGeom prst="rect">
             <a:avLst/>
@@ -16828,147 +17724,6 @@
           </a:bodyPr>
           <a:lstStyle/>
           <a:p>
-            <a:pPr algn="l">
-              <a:spcAft>
-                <a:spcPts val="540"/>
-              </a:spcAft>
-              <a:defRPr sz="1800" b="1">
-                <a:solidFill>
-                  <a:srgbClr val="0E6EB8"/>
-                </a:solidFill>
-                <a:latin typeface="Calibri"/>
-              </a:defRPr>
-            </a:pPr>
-            <a:r>
-              <a:t>Key Kernels:</a:t>
-            </a:r>
-          </a:p>
-        </p:txBody>
-      </p:sp>
-      <p:sp>
-        <p:nvSpPr>
-          <p:cNvPr id="7" name="TextBox 6"/>
-          <p:cNvSpPr txBox="1"/>
-          <p:nvPr/>
-        </p:nvSpPr>
-        <p:spPr>
-          <a:xfrm>
-            <a:off x="822960" y="3749039"/>
-            <a:ext cx="10058400" cy="1371600"/>
-          </a:xfrm>
-          <a:prstGeom prst="rect">
-            <a:avLst/>
-          </a:prstGeom>
-          <a:noFill/>
-        </p:spPr>
-        <p:txBody>
-          <a:bodyPr wrap="square">
-            <a:spAutoFit/>
-          </a:bodyPr>
-          <a:lstStyle/>
-          <a:p>
-            <a:pPr algn="l">
-              <a:spcAft>
-                <a:spcPts val="800"/>
-              </a:spcAft>
-              <a:defRPr sz="1700">
-                <a:solidFill>
-                  <a:srgbClr val="1A1A2E"/>
-                </a:solidFill>
-                <a:latin typeface="Calibri"/>
-              </a:defRPr>
-              <a:buClr>
-                <a:srgbClr val="0E6EB8"/>
-              </a:buClr>
-              <a:buChar char="•"/>
-            </a:pPr>
-            <a:r>
-              <a:t>quackgemm_actGemmGatedSm90  (up projection + SwiGLU fused)</a:t>
-            </a:r>
-          </a:p>
-          <a:p>
-            <a:pPr algn="l">
-              <a:spcAft>
-                <a:spcPts val="800"/>
-              </a:spcAft>
-              <a:defRPr sz="1700">
-                <a:solidFill>
-                  <a:srgbClr val="1A1A2E"/>
-                </a:solidFill>
-                <a:latin typeface="Calibri"/>
-              </a:defRPr>
-              <a:buClr>
-                <a:srgbClr val="0E6EB8"/>
-              </a:buClr>
-              <a:buChar char="•"/>
-            </a:pPr>
-            <a:r>
-              <a:t>quackgemm_default_epiGemmDefaultSm90  (down projection)</a:t>
-            </a:r>
-          </a:p>
-        </p:txBody>
-      </p:sp>
-      <p:sp>
-        <p:nvSpPr>
-          <p:cNvPr id="8" name="TextBox 7"/>
-          <p:cNvSpPr txBox="1"/>
-          <p:nvPr/>
-        </p:nvSpPr>
-        <p:spPr>
-          <a:xfrm>
-            <a:off x="1371600" y="5303520"/>
-            <a:ext cx="9418320" cy="548640"/>
-          </a:xfrm>
-          <a:prstGeom prst="rect">
-            <a:avLst/>
-          </a:prstGeom>
-          <a:noFill/>
-        </p:spPr>
-        <p:txBody>
-          <a:bodyPr wrap="square">
-            <a:spAutoFit/>
-          </a:bodyPr>
-          <a:lstStyle/>
-          <a:p>
-            <a:pPr algn="ctr">
-              <a:spcAft>
-                <a:spcPts val="570"/>
-              </a:spcAft>
-              <a:defRPr sz="1900" b="1">
-                <a:solidFill>
-                  <a:srgbClr val="B46A00"/>
-                </a:solidFill>
-                <a:latin typeface="Calibri"/>
-              </a:defRPr>
-            </a:pPr>
-            <a:r>
-              <a:t>"Two GEMM kernels with fused activation — that’s the entire MoE forward"</a:t>
-            </a:r>
-          </a:p>
-        </p:txBody>
-      </p:sp>
-      <p:sp>
-        <p:nvSpPr>
-          <p:cNvPr id="9" name="TextBox 8"/>
-          <p:cNvSpPr txBox="1"/>
-          <p:nvPr/>
-        </p:nvSpPr>
-        <p:spPr>
-          <a:xfrm>
-            <a:off x="11155680" y="6400800"/>
-            <a:ext cx="914400" cy="365760"/>
-          </a:xfrm>
-          <a:prstGeom prst="rect">
-            <a:avLst/>
-          </a:prstGeom>
-          <a:noFill/>
-        </p:spPr>
-        <p:txBody>
-          <a:bodyPr wrap="square">
-            <a:spAutoFit/>
-          </a:bodyPr>
-          <a:lstStyle/>
-          <a:p>
             <a:pPr algn="r">
               <a:spcAft>
                 <a:spcPts val="330"/>
@@ -16981,7 +17736,7 @@
               </a:defRPr>
             </a:pPr>
             <a:r>
-              <a:t>29/36</a:t>
+              <a:t>29/37</a:t>
             </a:r>
           </a:p>
         </p:txBody>
@@ -17594,7 +18349,7 @@
               </a:defRPr>
             </a:pPr>
             <a:r>
-              <a:t>3/36</a:t>
+              <a:t>3/37</a:t>
             </a:r>
           </a:p>
         </p:txBody>
@@ -17702,31 +18457,31 @@
               </a:defRPr>
             </a:pPr>
             <a:r>
-              <a:t>SonicMoE — Perfetto Trace</a:t>
-            </a:r>
-          </a:p>
-        </p:txBody>
-      </p:sp>
-      <p:sp>
-        <p:nvSpPr>
-          <p:cNvPr id="4" name="Rounded Rectangle 3"/>
+              <a:t>SonicMoE — NCU: Speed of Light</a:t>
+            </a:r>
+          </a:p>
+        </p:txBody>
+      </p:sp>
+      <p:sp>
+        <p:nvSpPr>
+          <p:cNvPr id="4" name="Rectangle 3"/>
           <p:cNvSpPr/>
           <p:nvPr/>
         </p:nvSpPr>
         <p:spPr>
           <a:xfrm>
-            <a:off x="1828800" y="2286000"/>
-            <a:ext cx="8534095" cy="3200400"/>
-          </a:xfrm>
-          <a:prstGeom prst="roundRect">
+            <a:off x="457200" y="1280160"/>
+            <a:ext cx="5486400" cy="2560320"/>
+          </a:xfrm>
+          <a:prstGeom prst="rect">
             <a:avLst/>
           </a:prstGeom>
           <a:solidFill>
-            <a:srgbClr val="F0F4F8"/>
+            <a:srgbClr val="E8EEF4"/>
           </a:solidFill>
           <a:ln w="25400">
             <a:solidFill>
-              <a:srgbClr val="0E6EB8"/>
+              <a:srgbClr val="777777"/>
             </a:solidFill>
           </a:ln>
         </p:spPr>
@@ -17745,41 +18500,88 @@
           </a:fontRef>
         </p:style>
         <p:txBody>
-          <a:bodyPr rtlCol="0" anchor="ctr" wrap="square" tIns="1097280"/>
+          <a:bodyPr rtlCol="0" anchor="ctr" wrap="square"/>
           <a:lstStyle/>
           <a:p>
             <a:pPr algn="ctr">
-              <a:spcAft>
-                <a:spcPts val="0"/>
-              </a:spcAft>
-              <a:defRPr sz="3200" b="1">
-                <a:solidFill>
-                  <a:srgbClr val="0E6EB8"/>
-                </a:solidFill>
-                <a:latin typeface="Calibri"/>
-              </a:defRPr>
-            </a:pPr>
-            <a:r>
-              <a:t>[LIVE DEMO — Perfetto UI]</a:t>
-            </a:r>
-            <a:br/>
-            <a:br/>
-            <a:r>
-              <a:t>sonicmoe_forward annotation, two GEMM kernels, routing overhead</a:t>
-            </a:r>
-          </a:p>
-        </p:txBody>
-      </p:sp>
-      <p:sp>
-        <p:nvSpPr>
-          <p:cNvPr id="5" name="TextBox 4"/>
+              <a:defRPr sz="2400" b="1">
+                <a:solidFill>
+                  <a:srgbClr val="777777"/>
+                </a:solidFill>
+                <a:latin typeface="Calibri"/>
+              </a:defRPr>
+            </a:pPr>
+            <a:r>
+              <a:t>[SCREENSHOT: NCU ScatterMoE Speed of Light]</a:t>
+            </a:r>
+          </a:p>
+        </p:txBody>
+      </p:sp>
+      <p:sp>
+        <p:nvSpPr>
+          <p:cNvPr id="5" name="Rectangle 4"/>
+          <p:cNvSpPr/>
+          <p:nvPr/>
+        </p:nvSpPr>
+        <p:spPr>
+          <a:xfrm>
+            <a:off x="6217920" y="1280160"/>
+            <a:ext cx="5486400" cy="2560320"/>
+          </a:xfrm>
+          <a:prstGeom prst="rect">
+            <a:avLst/>
+          </a:prstGeom>
+          <a:solidFill>
+            <a:srgbClr val="E8EEF4"/>
+          </a:solidFill>
+          <a:ln w="25400">
+            <a:solidFill>
+              <a:srgbClr val="777777"/>
+            </a:solidFill>
+          </a:ln>
+        </p:spPr>
+        <p:style>
+          <a:lnRef idx="1">
+            <a:schemeClr val="accent1"/>
+          </a:lnRef>
+          <a:fillRef idx="3">
+            <a:schemeClr val="accent1"/>
+          </a:fillRef>
+          <a:effectRef idx="2">
+            <a:schemeClr val="accent1"/>
+          </a:effectRef>
+          <a:fontRef idx="minor">
+            <a:schemeClr val="lt1"/>
+          </a:fontRef>
+        </p:style>
+        <p:txBody>
+          <a:bodyPr rtlCol="0" anchor="ctr" wrap="square"/>
+          <a:lstStyle/>
+          <a:p>
+            <a:pPr algn="ctr">
+              <a:defRPr sz="2400" b="1">
+                <a:solidFill>
+                  <a:srgbClr val="777777"/>
+                </a:solidFill>
+                <a:latin typeface="Calibri"/>
+              </a:defRPr>
+            </a:pPr>
+            <a:r>
+              <a:t>[SCREENSHOT: NCU SonicMoE Speed of Light]</a:t>
+            </a:r>
+          </a:p>
+        </p:txBody>
+      </p:sp>
+      <p:sp>
+        <p:nvSpPr>
+          <p:cNvPr id="6" name="TextBox 5"/>
           <p:cNvSpPr txBox="1"/>
           <p:nvPr/>
         </p:nvSpPr>
         <p:spPr>
           <a:xfrm>
-            <a:off x="11155680" y="6400800"/>
-            <a:ext cx="914400" cy="365760"/>
+            <a:off x="457200" y="4023360"/>
+            <a:ext cx="5486400" cy="274320"/>
           </a:xfrm>
           <a:prstGeom prst="rect">
             <a:avLst/>
@@ -17792,6 +18594,84 @@
           </a:bodyPr>
           <a:lstStyle/>
           <a:p>
+            <a:pPr algn="ctr">
+              <a:spcAft>
+                <a:spcPts val="450"/>
+              </a:spcAft>
+              <a:defRPr sz="1500" b="1">
+                <a:solidFill>
+                  <a:srgbClr val="555555"/>
+                </a:solidFill>
+                <a:latin typeface="Calibri"/>
+              </a:defRPr>
+            </a:pPr>
+            <a:r>
+              <a:t>ScatterMoE: 29.65% compute, 59.34% memory — Latency Issue</a:t>
+            </a:r>
+          </a:p>
+        </p:txBody>
+      </p:sp>
+      <p:sp>
+        <p:nvSpPr>
+          <p:cNvPr id="7" name="TextBox 6"/>
+          <p:cNvSpPr txBox="1"/>
+          <p:nvPr/>
+        </p:nvSpPr>
+        <p:spPr>
+          <a:xfrm>
+            <a:off x="6217920" y="4023360"/>
+            <a:ext cx="5486400" cy="274320"/>
+          </a:xfrm>
+          <a:prstGeom prst="rect">
+            <a:avLst/>
+          </a:prstGeom>
+          <a:noFill/>
+        </p:spPr>
+        <p:txBody>
+          <a:bodyPr wrap="square">
+            <a:spAutoFit/>
+          </a:bodyPr>
+          <a:lstStyle/>
+          <a:p>
+            <a:pPr algn="ctr">
+              <a:spcAft>
+                <a:spcPts val="450"/>
+              </a:spcAft>
+              <a:defRPr sz="1500" b="1">
+                <a:solidFill>
+                  <a:srgbClr val="B46A00"/>
+                </a:solidFill>
+                <a:latin typeface="Calibri"/>
+              </a:defRPr>
+            </a:pPr>
+            <a:r>
+              <a:t>SonicMoE: 53.21% compute, 60.76% memory — Balanced</a:t>
+            </a:r>
+          </a:p>
+        </p:txBody>
+      </p:sp>
+      <p:sp>
+        <p:nvSpPr>
+          <p:cNvPr id="8" name="TextBox 7"/>
+          <p:cNvSpPr txBox="1"/>
+          <p:nvPr/>
+        </p:nvSpPr>
+        <p:spPr>
+          <a:xfrm>
+            <a:off x="11155680" y="6400800"/>
+            <a:ext cx="914400" cy="365760"/>
+          </a:xfrm>
+          <a:prstGeom prst="rect">
+            <a:avLst/>
+          </a:prstGeom>
+          <a:noFill/>
+        </p:spPr>
+        <p:txBody>
+          <a:bodyPr wrap="square">
+            <a:spAutoFit/>
+          </a:bodyPr>
+          <a:lstStyle/>
+          <a:p>
             <a:pPr algn="r">
               <a:spcAft>
                 <a:spcPts val="330"/>
@@ -17804,7 +18684,7 @@
               </a:defRPr>
             </a:pPr>
             <a:r>
-              <a:t>30/36</a:t>
+              <a:t>30/37</a:t>
             </a:r>
           </a:p>
         </p:txBody>
@@ -17912,32 +18792,394 @@
               </a:defRPr>
             </a:pPr>
             <a:r>
-              <a:t>SonicMoE — NCU Details</a:t>
-            </a:r>
-          </a:p>
-        </p:txBody>
-      </p:sp>
-      <p:sp>
-        <p:nvSpPr>
-          <p:cNvPr id="4" name="Rectangle 3"/>
+              <a:t>SonicMoE — NCU: Memory &amp; TMA</a:t>
+            </a:r>
+          </a:p>
+        </p:txBody>
+      </p:sp>
+      <p:sp>
+        <p:nvSpPr>
+          <p:cNvPr id="4" name="TextBox 3"/>
+          <p:cNvSpPr txBox="1"/>
+          <p:nvPr/>
+        </p:nvSpPr>
+        <p:spPr>
+          <a:xfrm>
+            <a:off x="548640" y="1097280"/>
+            <a:ext cx="3657600" cy="365760"/>
+          </a:xfrm>
+          <a:prstGeom prst="rect">
+            <a:avLst/>
+          </a:prstGeom>
+          <a:noFill/>
+        </p:spPr>
+        <p:txBody>
+          <a:bodyPr wrap="square">
+            <a:spAutoFit/>
+          </a:bodyPr>
+          <a:lstStyle/>
+          <a:p>
+            <a:pPr algn="l">
+              <a:spcAft>
+                <a:spcPts val="600"/>
+              </a:spcAft>
+              <a:defRPr sz="2000" b="1">
+                <a:solidFill>
+                  <a:srgbClr val="555555"/>
+                </a:solidFill>
+                <a:latin typeface="Calibri"/>
+              </a:defRPr>
+            </a:pPr>
+            <a:r>
+              <a:t>ScatterMoE Data Path</a:t>
+            </a:r>
+          </a:p>
+        </p:txBody>
+      </p:sp>
+      <p:sp>
+        <p:nvSpPr>
+          <p:cNvPr id="5" name="TextBox 4"/>
+          <p:cNvSpPr txBox="1"/>
+          <p:nvPr/>
+        </p:nvSpPr>
+        <p:spPr>
+          <a:xfrm>
+            <a:off x="548640" y="1554480"/>
+            <a:ext cx="5303520" cy="2743200"/>
+          </a:xfrm>
+          <a:prstGeom prst="rect">
+            <a:avLst/>
+          </a:prstGeom>
+          <a:noFill/>
+        </p:spPr>
+        <p:txBody>
+          <a:bodyPr wrap="square">
+            <a:spAutoFit/>
+          </a:bodyPr>
+          <a:lstStyle/>
+          <a:p>
+            <a:pPr algn="l">
+              <a:spcAft>
+                <a:spcPts val="800"/>
+              </a:spcAft>
+              <a:defRPr sz="1500">
+                <a:solidFill>
+                  <a:srgbClr val="1A1A2E"/>
+                </a:solidFill>
+                <a:latin typeface="Calibri"/>
+              </a:defRPr>
+              <a:buClr>
+                <a:srgbClr val="555555"/>
+              </a:buClr>
+              <a:buChar char="•"/>
+            </a:pPr>
+            <a:r>
+              <a:t>HBM → legacy ld.global → SMEM</a:t>
+            </a:r>
+          </a:p>
+          <a:p>
+            <a:pPr algn="l">
+              <a:spcAft>
+                <a:spcPts val="800"/>
+              </a:spcAft>
+              <a:defRPr sz="1500">
+                <a:solidFill>
+                  <a:srgbClr val="1A1A2E"/>
+                </a:solidFill>
+                <a:latin typeface="Calibri"/>
+              </a:defRPr>
+              <a:buClr>
+                <a:srgbClr val="555555"/>
+              </a:buClr>
+              <a:buChar char="•"/>
+            </a:pPr>
+            <a:r>
+              <a:t>110,390 global load instructions</a:t>
+            </a:r>
+          </a:p>
+          <a:p>
+            <a:pPr algn="l">
+              <a:spcAft>
+                <a:spcPts val="800"/>
+              </a:spcAft>
+              <a:defRPr sz="1500">
+                <a:solidFill>
+                  <a:srgbClr val="1A1A2E"/>
+                </a:solidFill>
+                <a:latin typeface="Calibri"/>
+              </a:defRPr>
+              <a:buClr>
+                <a:srgbClr val="555555"/>
+              </a:buClr>
+              <a:buChar char="•"/>
+            </a:pPr>
+            <a:r>
+              <a:t>0 TMA instructions</a:t>
+            </a:r>
+          </a:p>
+          <a:p>
+            <a:pPr algn="l">
+              <a:spcAft>
+                <a:spcPts val="800"/>
+              </a:spcAft>
+              <a:defRPr sz="1500">
+                <a:solidFill>
+                  <a:srgbClr val="1A1A2E"/>
+                </a:solidFill>
+                <a:latin typeface="Calibri"/>
+              </a:defRPr>
+              <a:buClr>
+                <a:srgbClr val="555555"/>
+              </a:buClr>
+              <a:buChar char="•"/>
+            </a:pPr>
+            <a:r>
+              <a:t>0 DSMEM instructions</a:t>
+            </a:r>
+          </a:p>
+          <a:p>
+            <a:pPr algn="l">
+              <a:spcAft>
+                <a:spcPts val="800"/>
+              </a:spcAft>
+              <a:defRPr sz="1500">
+                <a:solidFill>
+                  <a:srgbClr val="1A1A2E"/>
+                </a:solidFill>
+                <a:latin typeface="Calibri"/>
+              </a:defRPr>
+              <a:buClr>
+                <a:srgbClr val="555555"/>
+              </a:buClr>
+              <a:buChar char="•"/>
+            </a:pPr>
+            <a:r>
+              <a:t>56.98% L2 hit rate</a:t>
+            </a:r>
+          </a:p>
+          <a:p>
+            <a:pPr algn="l">
+              <a:spcAft>
+                <a:spcPts val="800"/>
+              </a:spcAft>
+              <a:defRPr sz="1500">
+                <a:solidFill>
+                  <a:srgbClr val="1A1A2E"/>
+                </a:solidFill>
+                <a:latin typeface="Calibri"/>
+              </a:defRPr>
+              <a:buClr>
+                <a:srgbClr val="555555"/>
+              </a:buClr>
+              <a:buChar char="•"/>
+            </a:pPr>
+            <a:r>
+              <a:t>65.54 KB dynamic SMEM</a:t>
+            </a:r>
+          </a:p>
+        </p:txBody>
+      </p:sp>
+      <p:sp>
+        <p:nvSpPr>
+          <p:cNvPr id="6" name="TextBox 5"/>
+          <p:cNvSpPr txBox="1"/>
+          <p:nvPr/>
+        </p:nvSpPr>
+        <p:spPr>
+          <a:xfrm>
+            <a:off x="6400800" y="1097280"/>
+            <a:ext cx="3657600" cy="365760"/>
+          </a:xfrm>
+          <a:prstGeom prst="rect">
+            <a:avLst/>
+          </a:prstGeom>
+          <a:noFill/>
+        </p:spPr>
+        <p:txBody>
+          <a:bodyPr wrap="square">
+            <a:spAutoFit/>
+          </a:bodyPr>
+          <a:lstStyle/>
+          <a:p>
+            <a:pPr algn="l">
+              <a:spcAft>
+                <a:spcPts val="600"/>
+              </a:spcAft>
+              <a:defRPr sz="2000" b="1">
+                <a:solidFill>
+                  <a:srgbClr val="B46A00"/>
+                </a:solidFill>
+                <a:latin typeface="Calibri"/>
+              </a:defRPr>
+            </a:pPr>
+            <a:r>
+              <a:t>SonicMoE Data Path</a:t>
+            </a:r>
+          </a:p>
+        </p:txBody>
+      </p:sp>
+      <p:sp>
+        <p:nvSpPr>
+          <p:cNvPr id="7" name="TextBox 6"/>
+          <p:cNvSpPr txBox="1"/>
+          <p:nvPr/>
+        </p:nvSpPr>
+        <p:spPr>
+          <a:xfrm>
+            <a:off x="6400800" y="1554480"/>
+            <a:ext cx="5303520" cy="2743200"/>
+          </a:xfrm>
+          <a:prstGeom prst="rect">
+            <a:avLst/>
+          </a:prstGeom>
+          <a:noFill/>
+        </p:spPr>
+        <p:txBody>
+          <a:bodyPr wrap="square">
+            <a:spAutoFit/>
+          </a:bodyPr>
+          <a:lstStyle/>
+          <a:p>
+            <a:pPr algn="l">
+              <a:spcAft>
+                <a:spcPts val="800"/>
+              </a:spcAft>
+              <a:defRPr sz="1500">
+                <a:solidFill>
+                  <a:srgbClr val="1A1A2E"/>
+                </a:solidFill>
+                <a:latin typeface="Calibri"/>
+              </a:defRPr>
+              <a:buClr>
+                <a:srgbClr val="B46A00"/>
+              </a:buClr>
+              <a:buChar char="•"/>
+            </a:pPr>
+            <a:r>
+              <a:t>HBM → TMA → SMEM (hardware DMA!)</a:t>
+            </a:r>
+          </a:p>
+          <a:p>
+            <a:pPr algn="l">
+              <a:spcAft>
+                <a:spcPts val="800"/>
+              </a:spcAft>
+              <a:defRPr sz="1500">
+                <a:solidFill>
+                  <a:srgbClr val="1A1A2E"/>
+                </a:solidFill>
+                <a:latin typeface="Calibri"/>
+              </a:defRPr>
+              <a:buClr>
+                <a:srgbClr val="B46A00"/>
+              </a:buClr>
+              <a:buChar char="•"/>
+            </a:pPr>
+            <a:r>
+              <a:t>15,780 global loads (7x fewer)</a:t>
+            </a:r>
+          </a:p>
+          <a:p>
+            <a:pPr algn="l">
+              <a:spcAft>
+                <a:spcPts val="800"/>
+              </a:spcAft>
+              <a:defRPr sz="1500">
+                <a:solidFill>
+                  <a:srgbClr val="1A1A2E"/>
+                </a:solidFill>
+                <a:latin typeface="Calibri"/>
+              </a:defRPr>
+              <a:buClr>
+                <a:srgbClr val="B46A00"/>
+              </a:buClr>
+              <a:buChar char="•"/>
+            </a:pPr>
+            <a:r>
+              <a:t>30,720 TMA instructions</a:t>
+            </a:r>
+          </a:p>
+          <a:p>
+            <a:pPr algn="l">
+              <a:spcAft>
+                <a:spcPts val="800"/>
+              </a:spcAft>
+              <a:defRPr sz="1500">
+                <a:solidFill>
+                  <a:srgbClr val="1A1A2E"/>
+                </a:solidFill>
+                <a:latin typeface="Calibri"/>
+              </a:defRPr>
+              <a:buClr>
+                <a:srgbClr val="B46A00"/>
+              </a:buClr>
+              <a:buChar char="•"/>
+            </a:pPr>
+            <a:r>
+              <a:t>834 DSMEM instructions (inter-SM)</a:t>
+            </a:r>
+          </a:p>
+          <a:p>
+            <a:pPr algn="l">
+              <a:spcAft>
+                <a:spcPts val="800"/>
+              </a:spcAft>
+              <a:defRPr sz="1500">
+                <a:solidFill>
+                  <a:srgbClr val="1A1A2E"/>
+                </a:solidFill>
+                <a:latin typeface="Calibri"/>
+              </a:defRPr>
+              <a:buClr>
+                <a:srgbClr val="B46A00"/>
+              </a:buClr>
+              <a:buChar char="•"/>
+            </a:pPr>
+            <a:r>
+              <a:t>84.37% L1/TEX hit rate</a:t>
+            </a:r>
+          </a:p>
+          <a:p>
+            <a:pPr algn="l">
+              <a:spcAft>
+                <a:spcPts val="800"/>
+              </a:spcAft>
+              <a:defRPr sz="1500">
+                <a:solidFill>
+                  <a:srgbClr val="1A1A2E"/>
+                </a:solidFill>
+                <a:latin typeface="Calibri"/>
+              </a:defRPr>
+              <a:buClr>
+                <a:srgbClr val="B46A00"/>
+              </a:buClr>
+              <a:buChar char="•"/>
+            </a:pPr>
+            <a:r>
+              <a:t>231.40 KB dynamic SMEM (3.5x more)</a:t>
+            </a:r>
+          </a:p>
+        </p:txBody>
+      </p:sp>
+      <p:sp>
+        <p:nvSpPr>
+          <p:cNvPr id="8" name="Rectangle 7"/>
           <p:cNvSpPr/>
           <p:nvPr/>
         </p:nvSpPr>
         <p:spPr>
           <a:xfrm>
-            <a:off x="1371600" y="1371600"/>
-            <a:ext cx="9418320" cy="4114800"/>
+            <a:off x="6035040" y="1097280"/>
+            <a:ext cx="27432" cy="4114800"/>
           </a:xfrm>
           <a:prstGeom prst="rect">
             <a:avLst/>
           </a:prstGeom>
           <a:solidFill>
-            <a:srgbClr val="E8EEF4"/>
+            <a:srgbClr val="777777"/>
           </a:solidFill>
-          <a:ln w="25400">
-            <a:solidFill>
-              <a:srgbClr val="777777"/>
-            </a:solidFill>
+          <a:ln>
+            <a:noFill/>
           </a:ln>
         </p:spPr>
         <p:style>
@@ -17955,33 +19197,78 @@
           </a:fontRef>
         </p:style>
         <p:txBody>
-          <a:bodyPr rtlCol="0" anchor="ctr" wrap="square"/>
+          <a:bodyPr rtlCol="0" anchor="ctr"/>
+          <a:lstStyle/>
+          <a:p>
+            <a:pPr algn="ctr"/>
+          </a:p>
+        </p:txBody>
+      </p:sp>
+      <p:sp>
+        <p:nvSpPr>
+          <p:cNvPr id="9" name="Rounded Rectangle 8"/>
+          <p:cNvSpPr/>
+          <p:nvPr/>
+        </p:nvSpPr>
+        <p:spPr>
+          <a:xfrm>
+            <a:off x="1828800" y="5029200"/>
+            <a:ext cx="8503920" cy="914400"/>
+          </a:xfrm>
+          <a:prstGeom prst="roundRect">
+            <a:avLst/>
+          </a:prstGeom>
+          <a:solidFill>
+            <a:srgbClr val="F0F4F8"/>
+          </a:solidFill>
+          <a:ln w="19050">
+            <a:solidFill>
+              <a:srgbClr val="B46A00"/>
+            </a:solidFill>
+          </a:ln>
+        </p:spPr>
+        <p:style>
+          <a:lnRef idx="1">
+            <a:schemeClr val="accent1"/>
+          </a:lnRef>
+          <a:fillRef idx="3">
+            <a:schemeClr val="accent1"/>
+          </a:fillRef>
+          <a:effectRef idx="2">
+            <a:schemeClr val="accent1"/>
+          </a:effectRef>
+          <a:fontRef idx="minor">
+            <a:schemeClr val="lt1"/>
+          </a:fontRef>
+        </p:style>
+        <p:txBody>
+          <a:bodyPr rtlCol="0" anchor="ctr" wrap="square" lIns="101600" rIns="101600" tIns="76200" bIns="76200"/>
           <a:lstStyle/>
           <a:p>
             <a:pPr algn="ctr">
-              <a:defRPr sz="2400" b="1">
-                <a:solidFill>
-                  <a:srgbClr val="777777"/>
-                </a:solidFill>
-                <a:latin typeface="Calibri"/>
-              </a:defRPr>
-            </a:pPr>
-            <a:r>
-              <a:t>[SCREENSHOT: NCU SonicMoE kernel]</a:t>
-            </a:r>
-          </a:p>
-        </p:txBody>
-      </p:sp>
-      <p:sp>
-        <p:nvSpPr>
-          <p:cNvPr id="5" name="TextBox 4"/>
+              <a:defRPr sz="1800" b="1">
+                <a:solidFill>
+                  <a:srgbClr val="B46A00"/>
+                </a:solidFill>
+                <a:latin typeface="Calibri"/>
+              </a:defRPr>
+            </a:pPr>
+            <a:r>
+              <a:t>7x fewer global loads. TMA replaces legacy ld.global with hardware DMA.</a:t>
+            </a:r>
+          </a:p>
+        </p:txBody>
+      </p:sp>
+      <p:sp>
+        <p:nvSpPr>
+          <p:cNvPr id="10" name="TextBox 9"/>
           <p:cNvSpPr txBox="1"/>
           <p:nvPr/>
         </p:nvSpPr>
         <p:spPr>
           <a:xfrm>
-            <a:off x="914400" y="5760720"/>
-            <a:ext cx="10332720" cy="457200"/>
+            <a:off x="11155680" y="6400800"/>
+            <a:ext cx="914400" cy="365760"/>
           </a:xfrm>
           <a:prstGeom prst="rect">
             <a:avLst/>
@@ -17994,45 +19281,6 @@
           </a:bodyPr>
           <a:lstStyle/>
           <a:p>
-            <a:pPr algn="ctr">
-              <a:spcAft>
-                <a:spcPts val="480"/>
-              </a:spcAft>
-              <a:defRPr sz="1600" b="0">
-                <a:solidFill>
-                  <a:srgbClr val="555555"/>
-                </a:solidFill>
-                <a:latin typeface="Calibri"/>
-              </a:defRPr>
-            </a:pPr>
-            <a:r>
-              <a:t>quackgemm kernel: occupancy, memory throughput, warp stall breakdown</a:t>
-            </a:r>
-          </a:p>
-        </p:txBody>
-      </p:sp>
-      <p:sp>
-        <p:nvSpPr>
-          <p:cNvPr id="6" name="TextBox 5"/>
-          <p:cNvSpPr txBox="1"/>
-          <p:nvPr/>
-        </p:nvSpPr>
-        <p:spPr>
-          <a:xfrm>
-            <a:off x="11155680" y="6400800"/>
-            <a:ext cx="914400" cy="365760"/>
-          </a:xfrm>
-          <a:prstGeom prst="rect">
-            <a:avLst/>
-          </a:prstGeom>
-          <a:noFill/>
-        </p:spPr>
-        <p:txBody>
-          <a:bodyPr wrap="square">
-            <a:spAutoFit/>
-          </a:bodyPr>
-          <a:lstStyle/>
-          <a:p>
             <a:pPr algn="r">
               <a:spcAft>
                 <a:spcPts val="330"/>
@@ -18045,7 +19293,7 @@
               </a:defRPr>
             </a:pPr>
             <a:r>
-              <a:t>31/36</a:t>
+              <a:t>31/37</a:t>
             </a:r>
           </a:p>
         </p:txBody>
@@ -18153,95 +19401,30 @@
               </a:defRPr>
             </a:pPr>
             <a:r>
-              <a:t>The Production Picture</a:t>
-            </a:r>
-          </a:p>
-        </p:txBody>
-      </p:sp>
-      <p:sp>
-        <p:nvSpPr>
-          <p:cNvPr id="4" name="TextBox 3"/>
-          <p:cNvSpPr txBox="1"/>
-          <p:nvPr/>
-        </p:nvSpPr>
-        <p:spPr>
-          <a:xfrm>
-            <a:off x="822960" y="1371600"/>
-            <a:ext cx="10058400" cy="2286000"/>
-          </a:xfrm>
-          <a:prstGeom prst="rect">
-            <a:avLst/>
-          </a:prstGeom>
-          <a:noFill/>
-        </p:spPr>
-        <p:txBody>
-          <a:bodyPr wrap="square">
-            <a:spAutoFit/>
-          </a:bodyPr>
-          <a:lstStyle/>
-          <a:p>
-            <a:pPr algn="l">
-              <a:spcAft>
-                <a:spcPts val="800"/>
-              </a:spcAft>
-              <a:defRPr sz="2000">
-                <a:solidFill>
-                  <a:srgbClr val="1A1A2E"/>
-                </a:solidFill>
-                <a:latin typeface="Calibri"/>
-              </a:defRPr>
-              <a:buClr>
-                <a:srgbClr val="0E6EB8"/>
-              </a:buClr>
-              <a:buChar char="•"/>
-            </a:pPr>
-            <a:r>
-              <a:t>DGX Spark profiling: DeepGEMM accounts for 61.9% of GPU time in DeepSeek-V4-Flash inference</a:t>
-            </a:r>
-          </a:p>
-          <a:p>
-            <a:pPr algn="l">
-              <a:spcAft>
-                <a:spcPts val="800"/>
-              </a:spcAft>
-              <a:defRPr sz="2000">
-                <a:solidFill>
-                  <a:srgbClr val="1A1A2E"/>
-                </a:solidFill>
-                <a:latin typeface="Calibri"/>
-              </a:defRPr>
-              <a:buClr>
-                <a:srgbClr val="0E6EB8"/>
-              </a:buClr>
-              <a:buChar char="•"/>
-            </a:pPr>
-            <a:r>
-              <a:t>SonicMoE beats DeepGEMM by 43% on forward pass for fine-grained MoEs (from their paper)</a:t>
-            </a:r>
-          </a:p>
-        </p:txBody>
-      </p:sp>
-      <p:sp>
-        <p:nvSpPr>
-          <p:cNvPr id="5" name="Rounded Rectangle 4"/>
+              <a:t>SonicMoE — NCU Key Findings</a:t>
+            </a:r>
+          </a:p>
+        </p:txBody>
+      </p:sp>
+      <p:sp>
+        <p:nvSpPr>
+          <p:cNvPr id="4" name="Rectangle 3"/>
           <p:cNvSpPr/>
           <p:nvPr/>
         </p:nvSpPr>
         <p:spPr>
           <a:xfrm>
-            <a:off x="2286000" y="3840480"/>
-            <a:ext cx="7589520" cy="914400"/>
-          </a:xfrm>
-          <a:prstGeom prst="roundRect">
+            <a:off x="822960" y="1463040"/>
+            <a:ext cx="73152" cy="914400"/>
+          </a:xfrm>
+          <a:prstGeom prst="rect">
             <a:avLst/>
           </a:prstGeom>
           <a:solidFill>
-            <a:srgbClr val="F0F4F8"/>
+            <a:srgbClr val="057A55"/>
           </a:solidFill>
-          <a:ln w="19050">
-            <a:solidFill>
-              <a:srgbClr val="B46A00"/>
-            </a:solidFill>
+          <a:ln>
+            <a:noFill/>
           </a:ln>
         </p:spPr>
         <p:style>
@@ -18259,33 +19442,23 @@
           </a:fontRef>
         </p:style>
         <p:txBody>
-          <a:bodyPr rtlCol="0" anchor="ctr" wrap="square" lIns="101600" rIns="101600" tIns="76200" bIns="76200"/>
-          <a:lstStyle/>
-          <a:p>
-            <a:pPr algn="ctr">
-              <a:defRPr sz="2400" b="1">
-                <a:solidFill>
-                  <a:srgbClr val="B46A00"/>
-                </a:solidFill>
-                <a:latin typeface="Calibri"/>
-              </a:defRPr>
-            </a:pPr>
-            <a:r>
-              <a:t>These GEMM kernels ARE the bottleneck in production</a:t>
-            </a:r>
-          </a:p>
-        </p:txBody>
-      </p:sp>
-      <p:sp>
-        <p:nvSpPr>
-          <p:cNvPr id="6" name="TextBox 5"/>
+          <a:bodyPr rtlCol="0" anchor="ctr"/>
+          <a:lstStyle/>
+          <a:p>
+            <a:pPr algn="ctr"/>
+          </a:p>
+        </p:txBody>
+      </p:sp>
+      <p:sp>
+        <p:nvSpPr>
+          <p:cNvPr id="5" name="TextBox 4"/>
           <p:cNvSpPr txBox="1"/>
           <p:nvPr/>
         </p:nvSpPr>
         <p:spPr>
           <a:xfrm>
-            <a:off x="11155680" y="6400800"/>
-            <a:ext cx="914400" cy="365760"/>
+            <a:off x="1097280" y="1463040"/>
+            <a:ext cx="9601200" cy="457200"/>
           </a:xfrm>
           <a:prstGeom prst="rect">
             <a:avLst/>
@@ -18298,6 +19471,365 @@
           </a:bodyPr>
           <a:lstStyle/>
           <a:p>
+            <a:pPr algn="l">
+              <a:spcAft>
+                <a:spcPts val="660"/>
+              </a:spcAft>
+              <a:defRPr sz="2200" b="1">
+                <a:solidFill>
+                  <a:srgbClr val="057A55"/>
+                </a:solidFill>
+                <a:latin typeface="Calibri"/>
+              </a:defRPr>
+            </a:pPr>
+            <a:r>
+              <a:t>The Occupancy Paradox</a:t>
+            </a:r>
+          </a:p>
+        </p:txBody>
+      </p:sp>
+      <p:sp>
+        <p:nvSpPr>
+          <p:cNvPr id="6" name="TextBox 5"/>
+          <p:cNvSpPr txBox="1"/>
+          <p:nvPr/>
+        </p:nvSpPr>
+        <p:spPr>
+          <a:xfrm>
+            <a:off x="1097280" y="1920240"/>
+            <a:ext cx="9601200" cy="457200"/>
+          </a:xfrm>
+          <a:prstGeom prst="rect">
+            <a:avLst/>
+          </a:prstGeom>
+          <a:noFill/>
+        </p:spPr>
+        <p:txBody>
+          <a:bodyPr wrap="square">
+            <a:spAutoFit/>
+          </a:bodyPr>
+          <a:lstStyle/>
+          <a:p>
+            <a:pPr algn="l">
+              <a:spcAft>
+                <a:spcPts val="509"/>
+              </a:spcAft>
+              <a:defRPr sz="1700" b="0">
+                <a:solidFill>
+                  <a:srgbClr val="1A1A2E"/>
+                </a:solidFill>
+                <a:latin typeface="Calibri"/>
+              </a:defRPr>
+            </a:pPr>
+            <a:r>
+              <a:t>168 regs (47% more) + 231 KB SMEM (3.5x more) → 18.75% occupancy (63% better)</a:t>
+            </a:r>
+          </a:p>
+        </p:txBody>
+      </p:sp>
+      <p:sp>
+        <p:nvSpPr>
+          <p:cNvPr id="7" name="Rectangle 6"/>
+          <p:cNvSpPr/>
+          <p:nvPr/>
+        </p:nvSpPr>
+        <p:spPr>
+          <a:xfrm>
+            <a:off x="822960" y="2834640"/>
+            <a:ext cx="73152" cy="914400"/>
+          </a:xfrm>
+          <a:prstGeom prst="rect">
+            <a:avLst/>
+          </a:prstGeom>
+          <a:solidFill>
+            <a:srgbClr val="0E6EB8"/>
+          </a:solidFill>
+          <a:ln>
+            <a:noFill/>
+          </a:ln>
+        </p:spPr>
+        <p:style>
+          <a:lnRef idx="1">
+            <a:schemeClr val="accent1"/>
+          </a:lnRef>
+          <a:fillRef idx="3">
+            <a:schemeClr val="accent1"/>
+          </a:fillRef>
+          <a:effectRef idx="2">
+            <a:schemeClr val="accent1"/>
+          </a:effectRef>
+          <a:fontRef idx="minor">
+            <a:schemeClr val="lt1"/>
+          </a:fontRef>
+        </p:style>
+        <p:txBody>
+          <a:bodyPr rtlCol="0" anchor="ctr"/>
+          <a:lstStyle/>
+          <a:p>
+            <a:pPr algn="ctr"/>
+          </a:p>
+        </p:txBody>
+      </p:sp>
+      <p:sp>
+        <p:nvSpPr>
+          <p:cNvPr id="8" name="TextBox 7"/>
+          <p:cNvSpPr txBox="1"/>
+          <p:nvPr/>
+        </p:nvSpPr>
+        <p:spPr>
+          <a:xfrm>
+            <a:off x="1097280" y="2834640"/>
+            <a:ext cx="9601200" cy="457200"/>
+          </a:xfrm>
+          <a:prstGeom prst="rect">
+            <a:avLst/>
+          </a:prstGeom>
+          <a:noFill/>
+        </p:spPr>
+        <p:txBody>
+          <a:bodyPr wrap="square">
+            <a:spAutoFit/>
+          </a:bodyPr>
+          <a:lstStyle/>
+          <a:p>
+            <a:pPr algn="l">
+              <a:spcAft>
+                <a:spcPts val="660"/>
+              </a:spcAft>
+              <a:defRPr sz="2200" b="1">
+                <a:solidFill>
+                  <a:srgbClr val="0E6EB8"/>
+                </a:solidFill>
+                <a:latin typeface="Calibri"/>
+              </a:defRPr>
+            </a:pPr>
+            <a:r>
+              <a:t>TMA Dominance</a:t>
+            </a:r>
+          </a:p>
+        </p:txBody>
+      </p:sp>
+      <p:sp>
+        <p:nvSpPr>
+          <p:cNvPr id="9" name="TextBox 8"/>
+          <p:cNvSpPr txBox="1"/>
+          <p:nvPr/>
+        </p:nvSpPr>
+        <p:spPr>
+          <a:xfrm>
+            <a:off x="1097280" y="3291840"/>
+            <a:ext cx="9601200" cy="457200"/>
+          </a:xfrm>
+          <a:prstGeom prst="rect">
+            <a:avLst/>
+          </a:prstGeom>
+          <a:noFill/>
+        </p:spPr>
+        <p:txBody>
+          <a:bodyPr wrap="square">
+            <a:spAutoFit/>
+          </a:bodyPr>
+          <a:lstStyle/>
+          <a:p>
+            <a:pPr algn="l">
+              <a:spcAft>
+                <a:spcPts val="509"/>
+              </a:spcAft>
+              <a:defRPr sz="1700" b="0">
+                <a:solidFill>
+                  <a:srgbClr val="1A1A2E"/>
+                </a:solidFill>
+                <a:latin typeface="Calibri"/>
+              </a:defRPr>
+            </a:pPr>
+            <a:r>
+              <a:t>30,720 TMA instructions vs 0 — hardware DMA replaces legacy loads</a:t>
+            </a:r>
+          </a:p>
+        </p:txBody>
+      </p:sp>
+      <p:sp>
+        <p:nvSpPr>
+          <p:cNvPr id="10" name="Rectangle 9"/>
+          <p:cNvSpPr/>
+          <p:nvPr/>
+        </p:nvSpPr>
+        <p:spPr>
+          <a:xfrm>
+            <a:off x="822960" y="4206240"/>
+            <a:ext cx="73152" cy="914400"/>
+          </a:xfrm>
+          <a:prstGeom prst="rect">
+            <a:avLst/>
+          </a:prstGeom>
+          <a:solidFill>
+            <a:srgbClr val="B46A00"/>
+          </a:solidFill>
+          <a:ln>
+            <a:noFill/>
+          </a:ln>
+        </p:spPr>
+        <p:style>
+          <a:lnRef idx="1">
+            <a:schemeClr val="accent1"/>
+          </a:lnRef>
+          <a:fillRef idx="3">
+            <a:schemeClr val="accent1"/>
+          </a:fillRef>
+          <a:effectRef idx="2">
+            <a:schemeClr val="accent1"/>
+          </a:effectRef>
+          <a:fontRef idx="minor">
+            <a:schemeClr val="lt1"/>
+          </a:fontRef>
+        </p:style>
+        <p:txBody>
+          <a:bodyPr rtlCol="0" anchor="ctr"/>
+          <a:lstStyle/>
+          <a:p>
+            <a:pPr algn="ctr"/>
+          </a:p>
+        </p:txBody>
+      </p:sp>
+      <p:sp>
+        <p:nvSpPr>
+          <p:cNvPr id="11" name="TextBox 10"/>
+          <p:cNvSpPr txBox="1"/>
+          <p:nvPr/>
+        </p:nvSpPr>
+        <p:spPr>
+          <a:xfrm>
+            <a:off x="1097280" y="4206240"/>
+            <a:ext cx="9601200" cy="457200"/>
+          </a:xfrm>
+          <a:prstGeom prst="rect">
+            <a:avLst/>
+          </a:prstGeom>
+          <a:noFill/>
+        </p:spPr>
+        <p:txBody>
+          <a:bodyPr wrap="square">
+            <a:spAutoFit/>
+          </a:bodyPr>
+          <a:lstStyle/>
+          <a:p>
+            <a:pPr algn="l">
+              <a:spcAft>
+                <a:spcPts val="660"/>
+              </a:spcAft>
+              <a:defRPr sz="2200" b="1">
+                <a:solidFill>
+                  <a:srgbClr val="B46A00"/>
+                </a:solidFill>
+                <a:latin typeface="Calibri"/>
+              </a:defRPr>
+            </a:pPr>
+            <a:r>
+              <a:t>IO-Awareness</a:t>
+            </a:r>
+          </a:p>
+        </p:txBody>
+      </p:sp>
+      <p:sp>
+        <p:nvSpPr>
+          <p:cNvPr id="12" name="TextBox 11"/>
+          <p:cNvSpPr txBox="1"/>
+          <p:nvPr/>
+        </p:nvSpPr>
+        <p:spPr>
+          <a:xfrm>
+            <a:off x="1097280" y="4663440"/>
+            <a:ext cx="9601200" cy="457200"/>
+          </a:xfrm>
+          <a:prstGeom prst="rect">
+            <a:avLst/>
+          </a:prstGeom>
+          <a:noFill/>
+        </p:spPr>
+        <p:txBody>
+          <a:bodyPr wrap="square">
+            <a:spAutoFit/>
+          </a:bodyPr>
+          <a:lstStyle/>
+          <a:p>
+            <a:pPr algn="l">
+              <a:spcAft>
+                <a:spcPts val="509"/>
+              </a:spcAft>
+              <a:defRPr sz="1700" b="0">
+                <a:solidFill>
+                  <a:srgbClr val="1A1A2E"/>
+                </a:solidFill>
+                <a:latin typeface="Calibri"/>
+              </a:defRPr>
+            </a:pPr>
+            <a:r>
+              <a:t>5 HBM round-trips → 2.  Global loads: 110K → 15K (7x reduction)</a:t>
+            </a:r>
+          </a:p>
+        </p:txBody>
+      </p:sp>
+      <p:sp>
+        <p:nvSpPr>
+          <p:cNvPr id="13" name="TextBox 12"/>
+          <p:cNvSpPr txBox="1"/>
+          <p:nvPr/>
+        </p:nvSpPr>
+        <p:spPr>
+          <a:xfrm>
+            <a:off x="1371600" y="5486400"/>
+            <a:ext cx="9418320" cy="548640"/>
+          </a:xfrm>
+          <a:prstGeom prst="rect">
+            <a:avLst/>
+          </a:prstGeom>
+          <a:noFill/>
+        </p:spPr>
+        <p:txBody>
+          <a:bodyPr wrap="square">
+            <a:spAutoFit/>
+          </a:bodyPr>
+          <a:lstStyle/>
+          <a:p>
+            <a:pPr algn="ctr">
+              <a:spcAft>
+                <a:spcPts val="540"/>
+              </a:spcAft>
+              <a:defRPr sz="1800" b="1">
+                <a:solidFill>
+                  <a:srgbClr val="B46A00"/>
+                </a:solidFill>
+                <a:latin typeface="Calibri"/>
+              </a:defRPr>
+            </a:pPr>
+            <a:r>
+              <a:t>"From Latency Issue to Balanced Throughput — that's the profile of a healthy kernel"</a:t>
+            </a:r>
+          </a:p>
+        </p:txBody>
+      </p:sp>
+      <p:sp>
+        <p:nvSpPr>
+          <p:cNvPr id="14" name="TextBox 13"/>
+          <p:cNvSpPr txBox="1"/>
+          <p:nvPr/>
+        </p:nvSpPr>
+        <p:spPr>
+          <a:xfrm>
+            <a:off x="11155680" y="6400800"/>
+            <a:ext cx="914400" cy="365760"/>
+          </a:xfrm>
+          <a:prstGeom prst="rect">
+            <a:avLst/>
+          </a:prstGeom>
+          <a:noFill/>
+        </p:spPr>
+        <p:txBody>
+          <a:bodyPr wrap="square">
+            <a:spAutoFit/>
+          </a:bodyPr>
+          <a:lstStyle/>
+          <a:p>
             <a:pPr algn="r">
               <a:spcAft>
                 <a:spcPts val="330"/>
@@ -18310,7 +19842,7 @@
               </a:defRPr>
             </a:pPr>
             <a:r>
-              <a:t>32/36</a:t>
+              <a:t>32/37</a:t>
             </a:r>
           </a:p>
         </p:txBody>
@@ -18324,6 +19856,271 @@
 </file>
 
 <file path=ppt/slides/slide33.xml><?xml version="1.0" encoding="utf-8"?>
+<p:sld xmlns:a="http://schemas.openxmlformats.org/drawingml/2006/main" xmlns:p="http://schemas.openxmlformats.org/presentationml/2006/main" xmlns:r="http://schemas.openxmlformats.org/officeDocument/2006/relationships">
+  <p:cSld>
+    <p:bg>
+      <p:bgPr>
+        <a:solidFill>
+          <a:srgbClr val="FFFFFF"/>
+        </a:solidFill>
+        <a:effectLst/>
+      </p:bgPr>
+    </p:bg>
+    <p:spTree>
+      <p:nvGrpSpPr>
+        <p:cNvPr id="1" name=""/>
+        <p:cNvGrpSpPr/>
+        <p:nvPr/>
+      </p:nvGrpSpPr>
+      <p:grpSpPr/>
+      <p:sp>
+        <p:nvSpPr>
+          <p:cNvPr id="2" name="Rectangle 1"/>
+          <p:cNvSpPr/>
+          <p:nvPr/>
+        </p:nvSpPr>
+        <p:spPr>
+          <a:xfrm>
+            <a:off x="548640" y="274320"/>
+            <a:ext cx="109728" cy="502920"/>
+          </a:xfrm>
+          <a:prstGeom prst="rect">
+            <a:avLst/>
+          </a:prstGeom>
+          <a:solidFill>
+            <a:srgbClr val="0E6EB8"/>
+          </a:solidFill>
+          <a:ln>
+            <a:noFill/>
+          </a:ln>
+        </p:spPr>
+        <p:style>
+          <a:lnRef idx="1">
+            <a:schemeClr val="accent1"/>
+          </a:lnRef>
+          <a:fillRef idx="3">
+            <a:schemeClr val="accent1"/>
+          </a:fillRef>
+          <a:effectRef idx="2">
+            <a:schemeClr val="accent1"/>
+          </a:effectRef>
+          <a:fontRef idx="minor">
+            <a:schemeClr val="lt1"/>
+          </a:fontRef>
+        </p:style>
+        <p:txBody>
+          <a:bodyPr rtlCol="0" anchor="ctr"/>
+          <a:lstStyle/>
+          <a:p>
+            <a:pPr algn="ctr"/>
+          </a:p>
+        </p:txBody>
+      </p:sp>
+      <p:sp>
+        <p:nvSpPr>
+          <p:cNvPr id="3" name="TextBox 2"/>
+          <p:cNvSpPr txBox="1"/>
+          <p:nvPr/>
+        </p:nvSpPr>
+        <p:spPr>
+          <a:xfrm>
+            <a:off x="822960" y="228600"/>
+            <a:ext cx="10058400" cy="640080"/>
+          </a:xfrm>
+          <a:prstGeom prst="rect">
+            <a:avLst/>
+          </a:prstGeom>
+          <a:noFill/>
+        </p:spPr>
+        <p:txBody>
+          <a:bodyPr wrap="square">
+            <a:spAutoFit/>
+          </a:bodyPr>
+          <a:lstStyle/>
+          <a:p>
+            <a:pPr algn="l">
+              <a:spcAft>
+                <a:spcPts val="960"/>
+              </a:spcAft>
+              <a:defRPr sz="3200" b="1">
+                <a:solidFill>
+                  <a:srgbClr val="0E6EB8"/>
+                </a:solidFill>
+                <a:latin typeface="Calibri"/>
+              </a:defRPr>
+            </a:pPr>
+            <a:r>
+              <a:t>The Production Picture</a:t>
+            </a:r>
+          </a:p>
+        </p:txBody>
+      </p:sp>
+      <p:sp>
+        <p:nvSpPr>
+          <p:cNvPr id="4" name="TextBox 3"/>
+          <p:cNvSpPr txBox="1"/>
+          <p:nvPr/>
+        </p:nvSpPr>
+        <p:spPr>
+          <a:xfrm>
+            <a:off x="822960" y="1371600"/>
+            <a:ext cx="10058400" cy="2286000"/>
+          </a:xfrm>
+          <a:prstGeom prst="rect">
+            <a:avLst/>
+          </a:prstGeom>
+          <a:noFill/>
+        </p:spPr>
+        <p:txBody>
+          <a:bodyPr wrap="square">
+            <a:spAutoFit/>
+          </a:bodyPr>
+          <a:lstStyle/>
+          <a:p>
+            <a:pPr algn="l">
+              <a:spcAft>
+                <a:spcPts val="800"/>
+              </a:spcAft>
+              <a:defRPr sz="2000">
+                <a:solidFill>
+                  <a:srgbClr val="1A1A2E"/>
+                </a:solidFill>
+                <a:latin typeface="Calibri"/>
+              </a:defRPr>
+              <a:buClr>
+                <a:srgbClr val="0E6EB8"/>
+              </a:buClr>
+              <a:buChar char="•"/>
+            </a:pPr>
+            <a:r>
+              <a:t>DGX Spark profiling: DeepGEMM accounts for 61.9% of GPU time in DeepSeek-V4-Flash inference</a:t>
+            </a:r>
+          </a:p>
+          <a:p>
+            <a:pPr algn="l">
+              <a:spcAft>
+                <a:spcPts val="800"/>
+              </a:spcAft>
+              <a:defRPr sz="2000">
+                <a:solidFill>
+                  <a:srgbClr val="1A1A2E"/>
+                </a:solidFill>
+                <a:latin typeface="Calibri"/>
+              </a:defRPr>
+              <a:buClr>
+                <a:srgbClr val="0E6EB8"/>
+              </a:buClr>
+              <a:buChar char="•"/>
+            </a:pPr>
+            <a:r>
+              <a:t>SonicMoE beats DeepGEMM by 43% on forward pass for fine-grained MoEs (from their paper)</a:t>
+            </a:r>
+          </a:p>
+        </p:txBody>
+      </p:sp>
+      <p:sp>
+        <p:nvSpPr>
+          <p:cNvPr id="5" name="Rounded Rectangle 4"/>
+          <p:cNvSpPr/>
+          <p:nvPr/>
+        </p:nvSpPr>
+        <p:spPr>
+          <a:xfrm>
+            <a:off x="2286000" y="3840480"/>
+            <a:ext cx="7589520" cy="914400"/>
+          </a:xfrm>
+          <a:prstGeom prst="roundRect">
+            <a:avLst/>
+          </a:prstGeom>
+          <a:solidFill>
+            <a:srgbClr val="F0F4F8"/>
+          </a:solidFill>
+          <a:ln w="19050">
+            <a:solidFill>
+              <a:srgbClr val="B46A00"/>
+            </a:solidFill>
+          </a:ln>
+        </p:spPr>
+        <p:style>
+          <a:lnRef idx="1">
+            <a:schemeClr val="accent1"/>
+          </a:lnRef>
+          <a:fillRef idx="3">
+            <a:schemeClr val="accent1"/>
+          </a:fillRef>
+          <a:effectRef idx="2">
+            <a:schemeClr val="accent1"/>
+          </a:effectRef>
+          <a:fontRef idx="minor">
+            <a:schemeClr val="lt1"/>
+          </a:fontRef>
+        </p:style>
+        <p:txBody>
+          <a:bodyPr rtlCol="0" anchor="ctr" wrap="square" lIns="101600" rIns="101600" tIns="76200" bIns="76200"/>
+          <a:lstStyle/>
+          <a:p>
+            <a:pPr algn="ctr">
+              <a:defRPr sz="2400" b="1">
+                <a:solidFill>
+                  <a:srgbClr val="B46A00"/>
+                </a:solidFill>
+                <a:latin typeface="Calibri"/>
+              </a:defRPr>
+            </a:pPr>
+            <a:r>
+              <a:t>These GEMM kernels ARE the bottleneck in production</a:t>
+            </a:r>
+          </a:p>
+        </p:txBody>
+      </p:sp>
+      <p:sp>
+        <p:nvSpPr>
+          <p:cNvPr id="6" name="TextBox 5"/>
+          <p:cNvSpPr txBox="1"/>
+          <p:nvPr/>
+        </p:nvSpPr>
+        <p:spPr>
+          <a:xfrm>
+            <a:off x="11155680" y="6400800"/>
+            <a:ext cx="914400" cy="365760"/>
+          </a:xfrm>
+          <a:prstGeom prst="rect">
+            <a:avLst/>
+          </a:prstGeom>
+          <a:noFill/>
+        </p:spPr>
+        <p:txBody>
+          <a:bodyPr wrap="square">
+            <a:spAutoFit/>
+          </a:bodyPr>
+          <a:lstStyle/>
+          <a:p>
+            <a:pPr algn="r">
+              <a:spcAft>
+                <a:spcPts val="330"/>
+              </a:spcAft>
+              <a:defRPr sz="1100" b="0">
+                <a:solidFill>
+                  <a:srgbClr val="777777"/>
+                </a:solidFill>
+                <a:latin typeface="Calibri"/>
+              </a:defRPr>
+            </a:pPr>
+            <a:r>
+              <a:t>33/37</a:t>
+            </a:r>
+          </a:p>
+        </p:txBody>
+      </p:sp>
+    </p:spTree>
+  </p:cSld>
+  <p:clrMapOvr>
+    <a:masterClrMapping/>
+  </p:clrMapOvr>
+</p:sld>
+</file>
+
+<file path=ppt/slides/slide34.xml><?xml version="1.0" encoding="utf-8"?>
 <p:sld xmlns:a="http://schemas.openxmlformats.org/drawingml/2006/main" xmlns:p="http://schemas.openxmlformats.org/presentationml/2006/main" xmlns:r="http://schemas.openxmlformats.org/officeDocument/2006/relationships">
   <p:cSld>
     <p:bg>
@@ -18972,7 +20769,7 @@
                         </a:defRPr>
                       </a:pPr>
                       <a:r>
-                        <a:t>35 TFLOPS</a:t>
+                        <a:t>1.82x vs ScatterMoE</a:t>
                       </a:r>
                     </a:p>
                   </a:txBody>
@@ -19008,7 +20805,7 @@
                         </a:defRPr>
                       </a:pPr>
                       <a:r>
-                        <a:t>Gather fusion + ping-pong scheduling</a:t>
+                        <a:t>Latency → Balanced, TMA + gather fusion</a:t>
                       </a:r>
                     </a:p>
                   </a:txBody>
@@ -19069,639 +20866,7 @@
               </a:defRPr>
             </a:pPr>
             <a:r>
-              <a:t>33/36</a:t>
-            </a:r>
-          </a:p>
-        </p:txBody>
-      </p:sp>
-    </p:spTree>
-  </p:cSld>
-  <p:clrMapOvr>
-    <a:masterClrMapping/>
-  </p:clrMapOvr>
-</p:sld>
-</file>
-
-<file path=ppt/slides/slide34.xml><?xml version="1.0" encoding="utf-8"?>
-<p:sld xmlns:a="http://schemas.openxmlformats.org/drawingml/2006/main" xmlns:p="http://schemas.openxmlformats.org/presentationml/2006/main" xmlns:r="http://schemas.openxmlformats.org/officeDocument/2006/relationships">
-  <p:cSld>
-    <p:bg>
-      <p:bgPr>
-        <a:solidFill>
-          <a:srgbClr val="FFFFFF"/>
-        </a:solidFill>
-        <a:effectLst/>
-      </p:bgPr>
-    </p:bg>
-    <p:spTree>
-      <p:nvGrpSpPr>
-        <p:cNvPr id="1" name=""/>
-        <p:cNvGrpSpPr/>
-        <p:nvPr/>
-      </p:nvGrpSpPr>
-      <p:grpSpPr/>
-      <p:sp>
-        <p:nvSpPr>
-          <p:cNvPr id="2" name="Rectangle 1"/>
-          <p:cNvSpPr/>
-          <p:nvPr/>
-        </p:nvSpPr>
-        <p:spPr>
-          <a:xfrm>
-            <a:off x="548640" y="274320"/>
-            <a:ext cx="109728" cy="502920"/>
-          </a:xfrm>
-          <a:prstGeom prst="rect">
-            <a:avLst/>
-          </a:prstGeom>
-          <a:solidFill>
-            <a:srgbClr val="0E6EB8"/>
-          </a:solidFill>
-          <a:ln>
-            <a:noFill/>
-          </a:ln>
-        </p:spPr>
-        <p:style>
-          <a:lnRef idx="1">
-            <a:schemeClr val="accent1"/>
-          </a:lnRef>
-          <a:fillRef idx="3">
-            <a:schemeClr val="accent1"/>
-          </a:fillRef>
-          <a:effectRef idx="2">
-            <a:schemeClr val="accent1"/>
-          </a:effectRef>
-          <a:fontRef idx="minor">
-            <a:schemeClr val="lt1"/>
-          </a:fontRef>
-        </p:style>
-        <p:txBody>
-          <a:bodyPr rtlCol="0" anchor="ctr"/>
-          <a:lstStyle/>
-          <a:p>
-            <a:pPr algn="ctr"/>
-          </a:p>
-        </p:txBody>
-      </p:sp>
-      <p:sp>
-        <p:nvSpPr>
-          <p:cNvPr id="3" name="TextBox 2"/>
-          <p:cNvSpPr txBox="1"/>
-          <p:nvPr/>
-        </p:nvSpPr>
-        <p:spPr>
-          <a:xfrm>
-            <a:off x="822960" y="228600"/>
-            <a:ext cx="10058400" cy="640080"/>
-          </a:xfrm>
-          <a:prstGeom prst="rect">
-            <a:avLst/>
-          </a:prstGeom>
-          <a:noFill/>
-        </p:spPr>
-        <p:txBody>
-          <a:bodyPr wrap="square">
-            <a:spAutoFit/>
-          </a:bodyPr>
-          <a:lstStyle/>
-          <a:p>
-            <a:pPr algn="l">
-              <a:spcAft>
-                <a:spcPts val="960"/>
-              </a:spcAft>
-              <a:defRPr sz="3200" b="1">
-                <a:solidFill>
-                  <a:srgbClr val="0E6EB8"/>
-                </a:solidFill>
-                <a:latin typeface="Calibri"/>
-              </a:defRPr>
-            </a:pPr>
-            <a:r>
-              <a:t>Takeaways</a:t>
-            </a:r>
-          </a:p>
-        </p:txBody>
-      </p:sp>
-      <p:sp>
-        <p:nvSpPr>
-          <p:cNvPr id="4" name="Rounded Rectangle 3"/>
-          <p:cNvSpPr/>
-          <p:nvPr/>
-        </p:nvSpPr>
-        <p:spPr>
-          <a:xfrm>
-            <a:off x="822960" y="1371600"/>
-            <a:ext cx="548640" cy="548640"/>
-          </a:xfrm>
-          <a:prstGeom prst="roundRect">
-            <a:avLst/>
-          </a:prstGeom>
-          <a:solidFill>
-            <a:srgbClr val="0E6EB8"/>
-          </a:solidFill>
-          <a:ln>
-            <a:noFill/>
-          </a:ln>
-        </p:spPr>
-        <p:style>
-          <a:lnRef idx="1">
-            <a:schemeClr val="accent1"/>
-          </a:lnRef>
-          <a:fillRef idx="3">
-            <a:schemeClr val="accent1"/>
-          </a:fillRef>
-          <a:effectRef idx="2">
-            <a:schemeClr val="accent1"/>
-          </a:effectRef>
-          <a:fontRef idx="minor">
-            <a:schemeClr val="lt1"/>
-          </a:fontRef>
-        </p:style>
-        <p:txBody>
-          <a:bodyPr rtlCol="0" anchor="ctr" wrap="square" lIns="101600" rIns="101600" tIns="76200" bIns="76200"/>
-          <a:lstStyle/>
-          <a:p>
-            <a:pPr algn="ctr">
-              <a:defRPr sz="2000" b="1">
-                <a:solidFill>
-                  <a:srgbClr val="1A1A2E"/>
-                </a:solidFill>
-                <a:latin typeface="Calibri"/>
-              </a:defRPr>
-            </a:pPr>
-            <a:r>
-              <a:t>1</a:t>
-            </a:r>
-          </a:p>
-        </p:txBody>
-      </p:sp>
-      <p:sp>
-        <p:nvSpPr>
-          <p:cNvPr id="5" name="TextBox 4"/>
-          <p:cNvSpPr txBox="1"/>
-          <p:nvPr/>
-        </p:nvSpPr>
-        <p:spPr>
-          <a:xfrm>
-            <a:off x="1645920" y="1371600"/>
-            <a:ext cx="9601200" cy="457200"/>
-          </a:xfrm>
-          <a:prstGeom prst="rect">
-            <a:avLst/>
-          </a:prstGeom>
-          <a:noFill/>
-        </p:spPr>
-        <p:txBody>
-          <a:bodyPr wrap="square">
-            <a:spAutoFit/>
-          </a:bodyPr>
-          <a:lstStyle/>
-          <a:p>
-            <a:pPr algn="l">
-              <a:spcAft>
-                <a:spcPts val="660"/>
-              </a:spcAft>
-              <a:defRPr sz="2200" b="1">
-                <a:solidFill>
-                  <a:srgbClr val="0E6EB8"/>
-                </a:solidFill>
-                <a:latin typeface="Calibri"/>
-              </a:defRPr>
-            </a:pPr>
-            <a:r>
-              <a:t>torch.profiler tells you WHAT happened</a:t>
-            </a:r>
-          </a:p>
-        </p:txBody>
-      </p:sp>
-      <p:sp>
-        <p:nvSpPr>
-          <p:cNvPr id="6" name="TextBox 5"/>
-          <p:cNvSpPr txBox="1"/>
-          <p:nvPr/>
-        </p:nvSpPr>
-        <p:spPr>
-          <a:xfrm>
-            <a:off x="1645920" y="1828800"/>
-            <a:ext cx="9601200" cy="365760"/>
-          </a:xfrm>
-          <a:prstGeom prst="rect">
-            <a:avLst/>
-          </a:prstGeom>
-          <a:noFill/>
-        </p:spPr>
-        <p:txBody>
-          <a:bodyPr wrap="square">
-            <a:spAutoFit/>
-          </a:bodyPr>
-          <a:lstStyle/>
-          <a:p>
-            <a:pPr algn="l">
-              <a:spcAft>
-                <a:spcPts val="480"/>
-              </a:spcAft>
-              <a:defRPr sz="1600" b="0">
-                <a:solidFill>
-                  <a:srgbClr val="555555"/>
-                </a:solidFill>
-                <a:latin typeface="Calibri"/>
-              </a:defRPr>
-            </a:pPr>
-            <a:r>
-              <a:t>Open the trace in Perfetto</a:t>
-            </a:r>
-          </a:p>
-        </p:txBody>
-      </p:sp>
-      <p:sp>
-        <p:nvSpPr>
-          <p:cNvPr id="7" name="Rounded Rectangle 6"/>
-          <p:cNvSpPr/>
-          <p:nvPr/>
-        </p:nvSpPr>
-        <p:spPr>
-          <a:xfrm>
-            <a:off x="822960" y="2606040"/>
-            <a:ext cx="548640" cy="548640"/>
-          </a:xfrm>
-          <a:prstGeom prst="roundRect">
-            <a:avLst/>
-          </a:prstGeom>
-          <a:solidFill>
-            <a:srgbClr val="057A55"/>
-          </a:solidFill>
-          <a:ln>
-            <a:noFill/>
-          </a:ln>
-        </p:spPr>
-        <p:style>
-          <a:lnRef idx="1">
-            <a:schemeClr val="accent1"/>
-          </a:lnRef>
-          <a:fillRef idx="3">
-            <a:schemeClr val="accent1"/>
-          </a:fillRef>
-          <a:effectRef idx="2">
-            <a:schemeClr val="accent1"/>
-          </a:effectRef>
-          <a:fontRef idx="minor">
-            <a:schemeClr val="lt1"/>
-          </a:fontRef>
-        </p:style>
-        <p:txBody>
-          <a:bodyPr rtlCol="0" anchor="ctr" wrap="square" lIns="101600" rIns="101600" tIns="76200" bIns="76200"/>
-          <a:lstStyle/>
-          <a:p>
-            <a:pPr algn="ctr">
-              <a:defRPr sz="2000" b="1">
-                <a:solidFill>
-                  <a:srgbClr val="1A1A2E"/>
-                </a:solidFill>
-                <a:latin typeface="Calibri"/>
-              </a:defRPr>
-            </a:pPr>
-            <a:r>
-              <a:t>2</a:t>
-            </a:r>
-          </a:p>
-        </p:txBody>
-      </p:sp>
-      <p:sp>
-        <p:nvSpPr>
-          <p:cNvPr id="8" name="TextBox 7"/>
-          <p:cNvSpPr txBox="1"/>
-          <p:nvPr/>
-        </p:nvSpPr>
-        <p:spPr>
-          <a:xfrm>
-            <a:off x="1645920" y="2606040"/>
-            <a:ext cx="9601200" cy="457200"/>
-          </a:xfrm>
-          <a:prstGeom prst="rect">
-            <a:avLst/>
-          </a:prstGeom>
-          <a:noFill/>
-        </p:spPr>
-        <p:txBody>
-          <a:bodyPr wrap="square">
-            <a:spAutoFit/>
-          </a:bodyPr>
-          <a:lstStyle/>
-          <a:p>
-            <a:pPr algn="l">
-              <a:spcAft>
-                <a:spcPts val="660"/>
-              </a:spcAft>
-              <a:defRPr sz="2200" b="1">
-                <a:solidFill>
-                  <a:srgbClr val="057A55"/>
-                </a:solidFill>
-                <a:latin typeface="Calibri"/>
-              </a:defRPr>
-            </a:pPr>
-            <a:r>
-              <a:t>Nsight Compute tells you WHY</a:t>
-            </a:r>
-          </a:p>
-        </p:txBody>
-      </p:sp>
-      <p:sp>
-        <p:nvSpPr>
-          <p:cNvPr id="9" name="TextBox 8"/>
-          <p:cNvSpPr txBox="1"/>
-          <p:nvPr/>
-        </p:nvSpPr>
-        <p:spPr>
-          <a:xfrm>
-            <a:off x="1645920" y="3063240"/>
-            <a:ext cx="9601200" cy="365760"/>
-          </a:xfrm>
-          <a:prstGeom prst="rect">
-            <a:avLst/>
-          </a:prstGeom>
-          <a:noFill/>
-        </p:spPr>
-        <p:txBody>
-          <a:bodyPr wrap="square">
-            <a:spAutoFit/>
-          </a:bodyPr>
-          <a:lstStyle/>
-          <a:p>
-            <a:pPr algn="l">
-              <a:spcAft>
-                <a:spcPts val="480"/>
-              </a:spcAft>
-              <a:defRPr sz="1600" b="0">
-                <a:solidFill>
-                  <a:srgbClr val="555555"/>
-                </a:solidFill>
-                <a:latin typeface="Calibri"/>
-              </a:defRPr>
-            </a:pPr>
-            <a:r>
-              <a:t>Roofline, occupancy, memory throughput</a:t>
-            </a:r>
-          </a:p>
-        </p:txBody>
-      </p:sp>
-      <p:sp>
-        <p:nvSpPr>
-          <p:cNvPr id="10" name="Rounded Rectangle 9"/>
-          <p:cNvSpPr/>
-          <p:nvPr/>
-        </p:nvSpPr>
-        <p:spPr>
-          <a:xfrm>
-            <a:off x="822960" y="3840480"/>
-            <a:ext cx="548640" cy="548640"/>
-          </a:xfrm>
-          <a:prstGeom prst="roundRect">
-            <a:avLst/>
-          </a:prstGeom>
-          <a:solidFill>
-            <a:srgbClr val="B46A00"/>
-          </a:solidFill>
-          <a:ln>
-            <a:noFill/>
-          </a:ln>
-        </p:spPr>
-        <p:style>
-          <a:lnRef idx="1">
-            <a:schemeClr val="accent1"/>
-          </a:lnRef>
-          <a:fillRef idx="3">
-            <a:schemeClr val="accent1"/>
-          </a:fillRef>
-          <a:effectRef idx="2">
-            <a:schemeClr val="accent1"/>
-          </a:effectRef>
-          <a:fontRef idx="minor">
-            <a:schemeClr val="lt1"/>
-          </a:fontRef>
-        </p:style>
-        <p:txBody>
-          <a:bodyPr rtlCol="0" anchor="ctr" wrap="square" lIns="101600" rIns="101600" tIns="76200" bIns="76200"/>
-          <a:lstStyle/>
-          <a:p>
-            <a:pPr algn="ctr">
-              <a:defRPr sz="2000" b="1">
-                <a:solidFill>
-                  <a:srgbClr val="1A1A2E"/>
-                </a:solidFill>
-                <a:latin typeface="Calibri"/>
-              </a:defRPr>
-            </a:pPr>
-            <a:r>
-              <a:t>3</a:t>
-            </a:r>
-          </a:p>
-        </p:txBody>
-      </p:sp>
-      <p:sp>
-        <p:nvSpPr>
-          <p:cNvPr id="11" name="TextBox 10"/>
-          <p:cNvSpPr txBox="1"/>
-          <p:nvPr/>
-        </p:nvSpPr>
-        <p:spPr>
-          <a:xfrm>
-            <a:off x="1645920" y="3840480"/>
-            <a:ext cx="9601200" cy="457200"/>
-          </a:xfrm>
-          <a:prstGeom prst="rect">
-            <a:avLst/>
-          </a:prstGeom>
-          <a:noFill/>
-        </p:spPr>
-        <p:txBody>
-          <a:bodyPr wrap="square">
-            <a:spAutoFit/>
-          </a:bodyPr>
-          <a:lstStyle/>
-          <a:p>
-            <a:pPr algn="l">
-              <a:spcAft>
-                <a:spcPts val="660"/>
-              </a:spcAft>
-              <a:defRPr sz="2200" b="1">
-                <a:solidFill>
-                  <a:srgbClr val="B46A00"/>
-                </a:solidFill>
-                <a:latin typeface="Calibri"/>
-              </a:defRPr>
-            </a:pPr>
-            <a:r>
-              <a:t>Kernel names are fingerprints</a:t>
-            </a:r>
-          </a:p>
-        </p:txBody>
-      </p:sp>
-      <p:sp>
-        <p:nvSpPr>
-          <p:cNvPr id="12" name="TextBox 11"/>
-          <p:cNvSpPr txBox="1"/>
-          <p:nvPr/>
-        </p:nvSpPr>
-        <p:spPr>
-          <a:xfrm>
-            <a:off x="1645920" y="4297680"/>
-            <a:ext cx="9601200" cy="365760"/>
-          </a:xfrm>
-          <a:prstGeom prst="rect">
-            <a:avLst/>
-          </a:prstGeom>
-          <a:noFill/>
-        </p:spPr>
-        <p:txBody>
-          <a:bodyPr wrap="square">
-            <a:spAutoFit/>
-          </a:bodyPr>
-          <a:lstStyle/>
-          <a:p>
-            <a:pPr algn="l">
-              <a:spcAft>
-                <a:spcPts val="480"/>
-              </a:spcAft>
-              <a:defRPr sz="1600" b="0">
-                <a:solidFill>
-                  <a:srgbClr val="555555"/>
-                </a:solidFill>
-                <a:latin typeface="Calibri"/>
-              </a:defRPr>
-            </a:pPr>
-            <a:r>
-              <a:t>sm90, fp8, 1d2d, device_kernel, quackgemm</a:t>
-            </a:r>
-          </a:p>
-        </p:txBody>
-      </p:sp>
-      <p:sp>
-        <p:nvSpPr>
-          <p:cNvPr id="13" name="Rounded Rectangle 12"/>
-          <p:cNvSpPr/>
-          <p:nvPr/>
-        </p:nvSpPr>
-        <p:spPr>
-          <a:xfrm>
-            <a:off x="822960" y="5074920"/>
-            <a:ext cx="548640" cy="548640"/>
-          </a:xfrm>
-          <a:prstGeom prst="roundRect">
-            <a:avLst/>
-          </a:prstGeom>
-          <a:solidFill>
-            <a:srgbClr val="1A1A2E"/>
-          </a:solidFill>
-          <a:ln>
-            <a:noFill/>
-          </a:ln>
-        </p:spPr>
-        <p:style>
-          <a:lnRef idx="1">
-            <a:schemeClr val="accent1"/>
-          </a:lnRef>
-          <a:fillRef idx="3">
-            <a:schemeClr val="accent1"/>
-          </a:fillRef>
-          <a:effectRef idx="2">
-            <a:schemeClr val="accent1"/>
-          </a:effectRef>
-          <a:fontRef idx="minor">
-            <a:schemeClr val="lt1"/>
-          </a:fontRef>
-        </p:style>
-        <p:txBody>
-          <a:bodyPr rtlCol="0" anchor="ctr" wrap="square" lIns="101600" rIns="101600" tIns="76200" bIns="76200"/>
-          <a:lstStyle/>
-          <a:p>
-            <a:pPr algn="ctr">
-              <a:defRPr sz="2000" b="1">
-                <a:solidFill>
-                  <a:srgbClr val="1A1A2E"/>
-                </a:solidFill>
-                <a:latin typeface="Calibri"/>
-              </a:defRPr>
-            </a:pPr>
-            <a:r>
-              <a:t>4</a:t>
-            </a:r>
-          </a:p>
-        </p:txBody>
-      </p:sp>
-      <p:sp>
-        <p:nvSpPr>
-          <p:cNvPr id="14" name="TextBox 13"/>
-          <p:cNvSpPr txBox="1"/>
-          <p:nvPr/>
-        </p:nvSpPr>
-        <p:spPr>
-          <a:xfrm>
-            <a:off x="1645920" y="5074920"/>
-            <a:ext cx="9601200" cy="457200"/>
-          </a:xfrm>
-          <a:prstGeom prst="rect">
-            <a:avLst/>
-          </a:prstGeom>
-          <a:noFill/>
-        </p:spPr>
-        <p:txBody>
-          <a:bodyPr wrap="square">
-            <a:spAutoFit/>
-          </a:bodyPr>
-          <a:lstStyle/>
-          <a:p>
-            <a:pPr algn="l">
-              <a:spcAft>
-                <a:spcPts val="660"/>
-              </a:spcAft>
-              <a:defRPr sz="2200" b="1">
-                <a:solidFill>
-                  <a:srgbClr val="1A1A2E"/>
-                </a:solidFill>
-                <a:latin typeface="Calibri"/>
-              </a:defRPr>
-            </a:pPr>
-            <a:r>
-              <a:t>Profile first. Then optimize. Then profile again.</a:t>
-            </a:r>
-          </a:p>
-        </p:txBody>
-      </p:sp>
-      <p:sp>
-        <p:nvSpPr>
-          <p:cNvPr id="15" name="TextBox 14"/>
-          <p:cNvSpPr txBox="1"/>
-          <p:nvPr/>
-        </p:nvSpPr>
-        <p:spPr>
-          <a:xfrm>
-            <a:off x="11155680" y="6400800"/>
-            <a:ext cx="914400" cy="365760"/>
-          </a:xfrm>
-          <a:prstGeom prst="rect">
-            <a:avLst/>
-          </a:prstGeom>
-          <a:noFill/>
-        </p:spPr>
-        <p:txBody>
-          <a:bodyPr wrap="square">
-            <a:spAutoFit/>
-          </a:bodyPr>
-          <a:lstStyle/>
-          <a:p>
-            <a:pPr algn="r">
-              <a:spcAft>
-                <a:spcPts val="330"/>
-              </a:spcAft>
-              <a:defRPr sz="1100" b="0">
-                <a:solidFill>
-                  <a:srgbClr val="777777"/>
-                </a:solidFill>
-                <a:latin typeface="Calibri"/>
-              </a:defRPr>
-            </a:pPr>
-            <a:r>
-              <a:t>34/36</a:t>
+              <a:t>34/37</a:t>
             </a:r>
           </a:p>
         </p:txBody>
@@ -19809,413 +20974,23 @@
               </a:defRPr>
             </a:pPr>
             <a:r>
-              <a:t>Resources</a:t>
-            </a:r>
-          </a:p>
-        </p:txBody>
-      </p:sp>
-      <p:sp>
-        <p:nvSpPr>
-          <p:cNvPr id="4" name="TextBox 3"/>
-          <p:cNvSpPr txBox="1"/>
-          <p:nvPr/>
-        </p:nvSpPr>
-        <p:spPr>
-          <a:xfrm>
-            <a:off x="1097280" y="1371600"/>
-            <a:ext cx="3657600" cy="457200"/>
-          </a:xfrm>
-          <a:prstGeom prst="rect">
-            <a:avLst/>
-          </a:prstGeom>
-          <a:noFill/>
-        </p:spPr>
-        <p:txBody>
-          <a:bodyPr wrap="square">
-            <a:spAutoFit/>
-          </a:bodyPr>
-          <a:lstStyle/>
-          <a:p>
-            <a:pPr algn="l">
-              <a:spcAft>
-                <a:spcPts val="600"/>
-              </a:spcAft>
-              <a:defRPr sz="2000" b="1">
-                <a:solidFill>
-                  <a:srgbClr val="0E6EB8"/>
-                </a:solidFill>
-                <a:latin typeface="Calibri"/>
-              </a:defRPr>
-            </a:pPr>
-            <a:r>
-              <a:t>▶  Workshop Repo</a:t>
-            </a:r>
-          </a:p>
-        </p:txBody>
-      </p:sp>
-      <p:sp>
-        <p:nvSpPr>
-          <p:cNvPr id="5" name="TextBox 4"/>
-          <p:cNvSpPr txBox="1"/>
-          <p:nvPr/>
-        </p:nvSpPr>
-        <p:spPr>
-          <a:xfrm>
-            <a:off x="5029200" y="1371600"/>
-            <a:ext cx="6400800" cy="457200"/>
-          </a:xfrm>
-          <a:prstGeom prst="rect">
-            <a:avLst/>
-          </a:prstGeom>
-          <a:noFill/>
-        </p:spPr>
-        <p:txBody>
-          <a:bodyPr wrap="square">
-            <a:spAutoFit/>
-          </a:bodyPr>
-          <a:lstStyle/>
-          <a:p>
-            <a:pPr algn="l">
-              <a:spcAft>
-                <a:spcPts val="540"/>
-              </a:spcAft>
-              <a:defRPr sz="1800" b="0">
-                <a:solidFill>
-                  <a:srgbClr val="1A1A2E"/>
-                </a:solidFill>
-                <a:latin typeface="Calibri"/>
-              </a:defRPr>
-            </a:pPr>
-            <a:r>
-              <a:t>github.com/XAheli/torch-profiler</a:t>
-            </a:r>
-          </a:p>
-        </p:txBody>
-      </p:sp>
-      <p:sp>
-        <p:nvSpPr>
-          <p:cNvPr id="6" name="TextBox 5"/>
-          <p:cNvSpPr txBox="1"/>
-          <p:nvPr/>
-        </p:nvSpPr>
-        <p:spPr>
-          <a:xfrm>
-            <a:off x="1097280" y="2194560"/>
-            <a:ext cx="3657600" cy="457200"/>
-          </a:xfrm>
-          <a:prstGeom prst="rect">
-            <a:avLst/>
-          </a:prstGeom>
-          <a:noFill/>
-        </p:spPr>
-        <p:txBody>
-          <a:bodyPr wrap="square">
-            <a:spAutoFit/>
-          </a:bodyPr>
-          <a:lstStyle/>
-          <a:p>
-            <a:pPr algn="l">
-              <a:spcAft>
-                <a:spcPts val="600"/>
-              </a:spcAft>
-              <a:defRPr sz="2000" b="1">
-                <a:solidFill>
-                  <a:srgbClr val="0E6EB8"/>
-                </a:solidFill>
-                <a:latin typeface="Calibri"/>
-              </a:defRPr>
-            </a:pPr>
-            <a:r>
-              <a:t>▶  DeepGEMM</a:t>
-            </a:r>
-          </a:p>
-        </p:txBody>
-      </p:sp>
-      <p:sp>
-        <p:nvSpPr>
-          <p:cNvPr id="7" name="TextBox 6"/>
-          <p:cNvSpPr txBox="1"/>
-          <p:nvPr/>
-        </p:nvSpPr>
-        <p:spPr>
-          <a:xfrm>
-            <a:off x="5029200" y="2194560"/>
-            <a:ext cx="6400800" cy="457200"/>
-          </a:xfrm>
-          <a:prstGeom prst="rect">
-            <a:avLst/>
-          </a:prstGeom>
-          <a:noFill/>
-        </p:spPr>
-        <p:txBody>
-          <a:bodyPr wrap="square">
-            <a:spAutoFit/>
-          </a:bodyPr>
-          <a:lstStyle/>
-          <a:p>
-            <a:pPr algn="l">
-              <a:spcAft>
-                <a:spcPts val="540"/>
-              </a:spcAft>
-              <a:defRPr sz="1800" b="0">
-                <a:solidFill>
-                  <a:srgbClr val="1A1A2E"/>
-                </a:solidFill>
-                <a:latin typeface="Calibri"/>
-              </a:defRPr>
-            </a:pPr>
-            <a:r>
-              <a:t>github.com/deepseek-ai/DeepGEMM</a:t>
-            </a:r>
-          </a:p>
-        </p:txBody>
-      </p:sp>
-      <p:sp>
-        <p:nvSpPr>
-          <p:cNvPr id="8" name="TextBox 7"/>
-          <p:cNvSpPr txBox="1"/>
-          <p:nvPr/>
-        </p:nvSpPr>
-        <p:spPr>
-          <a:xfrm>
-            <a:off x="1097280" y="3017520"/>
-            <a:ext cx="3657600" cy="457200"/>
-          </a:xfrm>
-          <a:prstGeom prst="rect">
-            <a:avLst/>
-          </a:prstGeom>
-          <a:noFill/>
-        </p:spPr>
-        <p:txBody>
-          <a:bodyPr wrap="square">
-            <a:spAutoFit/>
-          </a:bodyPr>
-          <a:lstStyle/>
-          <a:p>
-            <a:pPr algn="l">
-              <a:spcAft>
-                <a:spcPts val="600"/>
-              </a:spcAft>
-              <a:defRPr sz="2000" b="1">
-                <a:solidFill>
-                  <a:srgbClr val="057A55"/>
-                </a:solidFill>
-                <a:latin typeface="Calibri"/>
-              </a:defRPr>
-            </a:pPr>
-            <a:r>
-              <a:t>▶  FlashAttention-3</a:t>
-            </a:r>
-          </a:p>
-        </p:txBody>
-      </p:sp>
-      <p:sp>
-        <p:nvSpPr>
-          <p:cNvPr id="9" name="TextBox 8"/>
-          <p:cNvSpPr txBox="1"/>
-          <p:nvPr/>
-        </p:nvSpPr>
-        <p:spPr>
-          <a:xfrm>
-            <a:off x="5029200" y="3017520"/>
-            <a:ext cx="6400800" cy="457200"/>
-          </a:xfrm>
-          <a:prstGeom prst="rect">
-            <a:avLst/>
-          </a:prstGeom>
-          <a:noFill/>
-        </p:spPr>
-        <p:txBody>
-          <a:bodyPr wrap="square">
-            <a:spAutoFit/>
-          </a:bodyPr>
-          <a:lstStyle/>
-          <a:p>
-            <a:pPr algn="l">
-              <a:spcAft>
-                <a:spcPts val="540"/>
-              </a:spcAft>
-              <a:defRPr sz="1800" b="0">
-                <a:solidFill>
-                  <a:srgbClr val="1A1A2E"/>
-                </a:solidFill>
-                <a:latin typeface="Calibri"/>
-              </a:defRPr>
-            </a:pPr>
-            <a:r>
-              <a:t>github.com/Dao-AILab/flash-attention</a:t>
-            </a:r>
-          </a:p>
-        </p:txBody>
-      </p:sp>
-      <p:sp>
-        <p:nvSpPr>
-          <p:cNvPr id="10" name="TextBox 9"/>
-          <p:cNvSpPr txBox="1"/>
-          <p:nvPr/>
-        </p:nvSpPr>
-        <p:spPr>
-          <a:xfrm>
-            <a:off x="1097280" y="3840480"/>
-            <a:ext cx="3657600" cy="457200"/>
-          </a:xfrm>
-          <a:prstGeom prst="rect">
-            <a:avLst/>
-          </a:prstGeom>
-          <a:noFill/>
-        </p:spPr>
-        <p:txBody>
-          <a:bodyPr wrap="square">
-            <a:spAutoFit/>
-          </a:bodyPr>
-          <a:lstStyle/>
-          <a:p>
-            <a:pPr algn="l">
-              <a:spcAft>
-                <a:spcPts val="600"/>
-              </a:spcAft>
-              <a:defRPr sz="2000" b="1">
-                <a:solidFill>
-                  <a:srgbClr val="B46A00"/>
-                </a:solidFill>
-                <a:latin typeface="Calibri"/>
-              </a:defRPr>
-            </a:pPr>
-            <a:r>
-              <a:t>▶  SonicMoE</a:t>
-            </a:r>
-          </a:p>
-        </p:txBody>
-      </p:sp>
-      <p:sp>
-        <p:nvSpPr>
-          <p:cNvPr id="11" name="TextBox 10"/>
-          <p:cNvSpPr txBox="1"/>
-          <p:nvPr/>
-        </p:nvSpPr>
-        <p:spPr>
-          <a:xfrm>
-            <a:off x="5029200" y="3840480"/>
-            <a:ext cx="6400800" cy="457200"/>
-          </a:xfrm>
-          <a:prstGeom prst="rect">
-            <a:avLst/>
-          </a:prstGeom>
-          <a:noFill/>
-        </p:spPr>
-        <p:txBody>
-          <a:bodyPr wrap="square">
-            <a:spAutoFit/>
-          </a:bodyPr>
-          <a:lstStyle/>
-          <a:p>
-            <a:pPr algn="l">
-              <a:spcAft>
-                <a:spcPts val="540"/>
-              </a:spcAft>
-              <a:defRPr sz="1800" b="0">
-                <a:solidFill>
-                  <a:srgbClr val="1A1A2E"/>
-                </a:solidFill>
-                <a:latin typeface="Calibri"/>
-              </a:defRPr>
-            </a:pPr>
-            <a:r>
-              <a:t>github.com/Dao-AILab/sonic-moe</a:t>
-            </a:r>
-          </a:p>
-        </p:txBody>
-      </p:sp>
-      <p:sp>
-        <p:nvSpPr>
-          <p:cNvPr id="12" name="TextBox 11"/>
-          <p:cNvSpPr txBox="1"/>
-          <p:nvPr/>
-        </p:nvSpPr>
-        <p:spPr>
-          <a:xfrm>
-            <a:off x="1097280" y="4663440"/>
-            <a:ext cx="3657600" cy="457200"/>
-          </a:xfrm>
-          <a:prstGeom prst="rect">
-            <a:avLst/>
-          </a:prstGeom>
-          <a:noFill/>
-        </p:spPr>
-        <p:txBody>
-          <a:bodyPr wrap="square">
-            <a:spAutoFit/>
-          </a:bodyPr>
-          <a:lstStyle/>
-          <a:p>
-            <a:pPr algn="l">
-              <a:spcAft>
-                <a:spcPts val="600"/>
-              </a:spcAft>
-              <a:defRPr sz="2000" b="1">
-                <a:solidFill>
-                  <a:srgbClr val="555555"/>
-                </a:solidFill>
-                <a:latin typeface="Calibri"/>
-              </a:defRPr>
-            </a:pPr>
-            <a:r>
-              <a:t>▶  Perfetto UI</a:t>
-            </a:r>
-          </a:p>
-        </p:txBody>
-      </p:sp>
-      <p:sp>
-        <p:nvSpPr>
-          <p:cNvPr id="13" name="TextBox 12"/>
-          <p:cNvSpPr txBox="1"/>
-          <p:nvPr/>
-        </p:nvSpPr>
-        <p:spPr>
-          <a:xfrm>
-            <a:off x="5029200" y="4663440"/>
-            <a:ext cx="6400800" cy="457200"/>
-          </a:xfrm>
-          <a:prstGeom prst="rect">
-            <a:avLst/>
-          </a:prstGeom>
-          <a:noFill/>
-        </p:spPr>
-        <p:txBody>
-          <a:bodyPr wrap="square">
-            <a:spAutoFit/>
-          </a:bodyPr>
-          <a:lstStyle/>
-          <a:p>
-            <a:pPr algn="l">
-              <a:spcAft>
-                <a:spcPts val="540"/>
-              </a:spcAft>
-              <a:defRPr sz="1800" b="0">
-                <a:solidFill>
-                  <a:srgbClr val="1A1A2E"/>
-                </a:solidFill>
-                <a:latin typeface="Calibri"/>
-              </a:defRPr>
-            </a:pPr>
-            <a:r>
-              <a:t>ui.perfetto.dev</a:t>
-            </a:r>
-          </a:p>
-        </p:txBody>
-      </p:sp>
-      <p:sp>
-        <p:nvSpPr>
-          <p:cNvPr id="14" name="Rectangle 13"/>
+              <a:t>Takeaways</a:t>
+            </a:r>
+          </a:p>
+        </p:txBody>
+      </p:sp>
+      <p:sp>
+        <p:nvSpPr>
+          <p:cNvPr id="4" name="Rounded Rectangle 3"/>
           <p:cNvSpPr/>
           <p:nvPr/>
         </p:nvSpPr>
         <p:spPr>
           <a:xfrm>
-            <a:off x="1097280" y="5669280"/>
-            <a:ext cx="10058400" cy="27432"/>
-          </a:xfrm>
-          <a:prstGeom prst="rect">
+            <a:off x="822960" y="1371600"/>
+            <a:ext cx="548640" cy="548640"/>
+          </a:xfrm>
+          <a:prstGeom prst="roundRect">
             <a:avLst/>
           </a:prstGeom>
           <a:solidFill>
@@ -20240,23 +21015,33 @@
           </a:fontRef>
         </p:style>
         <p:txBody>
-          <a:bodyPr rtlCol="0" anchor="ctr"/>
-          <a:lstStyle/>
-          <a:p>
-            <a:pPr algn="ctr"/>
-          </a:p>
-        </p:txBody>
-      </p:sp>
-      <p:sp>
-        <p:nvSpPr>
-          <p:cNvPr id="15" name="TextBox 14"/>
+          <a:bodyPr rtlCol="0" anchor="ctr" wrap="square" lIns="101600" rIns="101600" tIns="76200" bIns="76200"/>
+          <a:lstStyle/>
+          <a:p>
+            <a:pPr algn="ctr">
+              <a:defRPr sz="2000" b="1">
+                <a:solidFill>
+                  <a:srgbClr val="1A1A2E"/>
+                </a:solidFill>
+                <a:latin typeface="Calibri"/>
+              </a:defRPr>
+            </a:pPr>
+            <a:r>
+              <a:t>1</a:t>
+            </a:r>
+          </a:p>
+        </p:txBody>
+      </p:sp>
+      <p:sp>
+        <p:nvSpPr>
+          <p:cNvPr id="5" name="TextBox 4"/>
           <p:cNvSpPr txBox="1"/>
           <p:nvPr/>
         </p:nvSpPr>
         <p:spPr>
           <a:xfrm>
-            <a:off x="1097280" y="5852160"/>
-            <a:ext cx="10058400" cy="457200"/>
+            <a:off x="1645920" y="1371600"/>
+            <a:ext cx="9601200" cy="457200"/>
           </a:xfrm>
           <a:prstGeom prst="rect">
             <a:avLst/>
@@ -20269,33 +21054,33 @@
           </a:bodyPr>
           <a:lstStyle/>
           <a:p>
-            <a:pPr algn="ctr">
-              <a:spcAft>
-                <a:spcPts val="540"/>
-              </a:spcAft>
-              <a:defRPr sz="1800" b="0">
-                <a:solidFill>
-                  <a:srgbClr val="555555"/>
-                </a:solidFill>
-                <a:latin typeface="Calibri"/>
-              </a:defRPr>
-            </a:pPr>
-            <a:r>
-              <a:t>Aheli Poddar  |  Red Hat PyTorch Team</a:t>
-            </a:r>
-          </a:p>
-        </p:txBody>
-      </p:sp>
-      <p:sp>
-        <p:nvSpPr>
-          <p:cNvPr id="16" name="TextBox 15"/>
+            <a:pPr algn="l">
+              <a:spcAft>
+                <a:spcPts val="660"/>
+              </a:spcAft>
+              <a:defRPr sz="2200" b="1">
+                <a:solidFill>
+                  <a:srgbClr val="0E6EB8"/>
+                </a:solidFill>
+                <a:latin typeface="Calibri"/>
+              </a:defRPr>
+            </a:pPr>
+            <a:r>
+              <a:t>torch.profiler tells you WHAT happened</a:t>
+            </a:r>
+          </a:p>
+        </p:txBody>
+      </p:sp>
+      <p:sp>
+        <p:nvSpPr>
+          <p:cNvPr id="6" name="TextBox 5"/>
           <p:cNvSpPr txBox="1"/>
           <p:nvPr/>
         </p:nvSpPr>
         <p:spPr>
           <a:xfrm>
-            <a:off x="11155680" y="6400800"/>
-            <a:ext cx="914400" cy="365760"/>
+            <a:off x="1645920" y="1828800"/>
+            <a:ext cx="9601200" cy="365760"/>
           </a:xfrm>
           <a:prstGeom prst="rect">
             <a:avLst/>
@@ -20308,6 +21093,399 @@
           </a:bodyPr>
           <a:lstStyle/>
           <a:p>
+            <a:pPr algn="l">
+              <a:spcAft>
+                <a:spcPts val="480"/>
+              </a:spcAft>
+              <a:defRPr sz="1600" b="0">
+                <a:solidFill>
+                  <a:srgbClr val="555555"/>
+                </a:solidFill>
+                <a:latin typeface="Calibri"/>
+              </a:defRPr>
+            </a:pPr>
+            <a:r>
+              <a:t>Open the trace in Perfetto</a:t>
+            </a:r>
+          </a:p>
+        </p:txBody>
+      </p:sp>
+      <p:sp>
+        <p:nvSpPr>
+          <p:cNvPr id="7" name="Rounded Rectangle 6"/>
+          <p:cNvSpPr/>
+          <p:nvPr/>
+        </p:nvSpPr>
+        <p:spPr>
+          <a:xfrm>
+            <a:off x="822960" y="2606040"/>
+            <a:ext cx="548640" cy="548640"/>
+          </a:xfrm>
+          <a:prstGeom prst="roundRect">
+            <a:avLst/>
+          </a:prstGeom>
+          <a:solidFill>
+            <a:srgbClr val="057A55"/>
+          </a:solidFill>
+          <a:ln>
+            <a:noFill/>
+          </a:ln>
+        </p:spPr>
+        <p:style>
+          <a:lnRef idx="1">
+            <a:schemeClr val="accent1"/>
+          </a:lnRef>
+          <a:fillRef idx="3">
+            <a:schemeClr val="accent1"/>
+          </a:fillRef>
+          <a:effectRef idx="2">
+            <a:schemeClr val="accent1"/>
+          </a:effectRef>
+          <a:fontRef idx="minor">
+            <a:schemeClr val="lt1"/>
+          </a:fontRef>
+        </p:style>
+        <p:txBody>
+          <a:bodyPr rtlCol="0" anchor="ctr" wrap="square" lIns="101600" rIns="101600" tIns="76200" bIns="76200"/>
+          <a:lstStyle/>
+          <a:p>
+            <a:pPr algn="ctr">
+              <a:defRPr sz="2000" b="1">
+                <a:solidFill>
+                  <a:srgbClr val="1A1A2E"/>
+                </a:solidFill>
+                <a:latin typeface="Calibri"/>
+              </a:defRPr>
+            </a:pPr>
+            <a:r>
+              <a:t>2</a:t>
+            </a:r>
+          </a:p>
+        </p:txBody>
+      </p:sp>
+      <p:sp>
+        <p:nvSpPr>
+          <p:cNvPr id="8" name="TextBox 7"/>
+          <p:cNvSpPr txBox="1"/>
+          <p:nvPr/>
+        </p:nvSpPr>
+        <p:spPr>
+          <a:xfrm>
+            <a:off x="1645920" y="2606040"/>
+            <a:ext cx="9601200" cy="457200"/>
+          </a:xfrm>
+          <a:prstGeom prst="rect">
+            <a:avLst/>
+          </a:prstGeom>
+          <a:noFill/>
+        </p:spPr>
+        <p:txBody>
+          <a:bodyPr wrap="square">
+            <a:spAutoFit/>
+          </a:bodyPr>
+          <a:lstStyle/>
+          <a:p>
+            <a:pPr algn="l">
+              <a:spcAft>
+                <a:spcPts val="660"/>
+              </a:spcAft>
+              <a:defRPr sz="2200" b="1">
+                <a:solidFill>
+                  <a:srgbClr val="057A55"/>
+                </a:solidFill>
+                <a:latin typeface="Calibri"/>
+              </a:defRPr>
+            </a:pPr>
+            <a:r>
+              <a:t>Nsight Compute tells you WHY</a:t>
+            </a:r>
+          </a:p>
+        </p:txBody>
+      </p:sp>
+      <p:sp>
+        <p:nvSpPr>
+          <p:cNvPr id="9" name="TextBox 8"/>
+          <p:cNvSpPr txBox="1"/>
+          <p:nvPr/>
+        </p:nvSpPr>
+        <p:spPr>
+          <a:xfrm>
+            <a:off x="1645920" y="3063240"/>
+            <a:ext cx="9601200" cy="365760"/>
+          </a:xfrm>
+          <a:prstGeom prst="rect">
+            <a:avLst/>
+          </a:prstGeom>
+          <a:noFill/>
+        </p:spPr>
+        <p:txBody>
+          <a:bodyPr wrap="square">
+            <a:spAutoFit/>
+          </a:bodyPr>
+          <a:lstStyle/>
+          <a:p>
+            <a:pPr algn="l">
+              <a:spcAft>
+                <a:spcPts val="480"/>
+              </a:spcAft>
+              <a:defRPr sz="1600" b="0">
+                <a:solidFill>
+                  <a:srgbClr val="555555"/>
+                </a:solidFill>
+                <a:latin typeface="Calibri"/>
+              </a:defRPr>
+            </a:pPr>
+            <a:r>
+              <a:t>Roofline, occupancy, memory throughput</a:t>
+            </a:r>
+          </a:p>
+        </p:txBody>
+      </p:sp>
+      <p:sp>
+        <p:nvSpPr>
+          <p:cNvPr id="10" name="Rounded Rectangle 9"/>
+          <p:cNvSpPr/>
+          <p:nvPr/>
+        </p:nvSpPr>
+        <p:spPr>
+          <a:xfrm>
+            <a:off x="822960" y="3840480"/>
+            <a:ext cx="548640" cy="548640"/>
+          </a:xfrm>
+          <a:prstGeom prst="roundRect">
+            <a:avLst/>
+          </a:prstGeom>
+          <a:solidFill>
+            <a:srgbClr val="B46A00"/>
+          </a:solidFill>
+          <a:ln>
+            <a:noFill/>
+          </a:ln>
+        </p:spPr>
+        <p:style>
+          <a:lnRef idx="1">
+            <a:schemeClr val="accent1"/>
+          </a:lnRef>
+          <a:fillRef idx="3">
+            <a:schemeClr val="accent1"/>
+          </a:fillRef>
+          <a:effectRef idx="2">
+            <a:schemeClr val="accent1"/>
+          </a:effectRef>
+          <a:fontRef idx="minor">
+            <a:schemeClr val="lt1"/>
+          </a:fontRef>
+        </p:style>
+        <p:txBody>
+          <a:bodyPr rtlCol="0" anchor="ctr" wrap="square" lIns="101600" rIns="101600" tIns="76200" bIns="76200"/>
+          <a:lstStyle/>
+          <a:p>
+            <a:pPr algn="ctr">
+              <a:defRPr sz="2000" b="1">
+                <a:solidFill>
+                  <a:srgbClr val="1A1A2E"/>
+                </a:solidFill>
+                <a:latin typeface="Calibri"/>
+              </a:defRPr>
+            </a:pPr>
+            <a:r>
+              <a:t>3</a:t>
+            </a:r>
+          </a:p>
+        </p:txBody>
+      </p:sp>
+      <p:sp>
+        <p:nvSpPr>
+          <p:cNvPr id="11" name="TextBox 10"/>
+          <p:cNvSpPr txBox="1"/>
+          <p:nvPr/>
+        </p:nvSpPr>
+        <p:spPr>
+          <a:xfrm>
+            <a:off x="1645920" y="3840480"/>
+            <a:ext cx="9601200" cy="457200"/>
+          </a:xfrm>
+          <a:prstGeom prst="rect">
+            <a:avLst/>
+          </a:prstGeom>
+          <a:noFill/>
+        </p:spPr>
+        <p:txBody>
+          <a:bodyPr wrap="square">
+            <a:spAutoFit/>
+          </a:bodyPr>
+          <a:lstStyle/>
+          <a:p>
+            <a:pPr algn="l">
+              <a:spcAft>
+                <a:spcPts val="660"/>
+              </a:spcAft>
+              <a:defRPr sz="2200" b="1">
+                <a:solidFill>
+                  <a:srgbClr val="B46A00"/>
+                </a:solidFill>
+                <a:latin typeface="Calibri"/>
+              </a:defRPr>
+            </a:pPr>
+            <a:r>
+              <a:t>Kernel names are fingerprints</a:t>
+            </a:r>
+          </a:p>
+        </p:txBody>
+      </p:sp>
+      <p:sp>
+        <p:nvSpPr>
+          <p:cNvPr id="12" name="TextBox 11"/>
+          <p:cNvSpPr txBox="1"/>
+          <p:nvPr/>
+        </p:nvSpPr>
+        <p:spPr>
+          <a:xfrm>
+            <a:off x="1645920" y="4297680"/>
+            <a:ext cx="9601200" cy="365760"/>
+          </a:xfrm>
+          <a:prstGeom prst="rect">
+            <a:avLst/>
+          </a:prstGeom>
+          <a:noFill/>
+        </p:spPr>
+        <p:txBody>
+          <a:bodyPr wrap="square">
+            <a:spAutoFit/>
+          </a:bodyPr>
+          <a:lstStyle/>
+          <a:p>
+            <a:pPr algn="l">
+              <a:spcAft>
+                <a:spcPts val="480"/>
+              </a:spcAft>
+              <a:defRPr sz="1600" b="0">
+                <a:solidFill>
+                  <a:srgbClr val="555555"/>
+                </a:solidFill>
+                <a:latin typeface="Calibri"/>
+              </a:defRPr>
+            </a:pPr>
+            <a:r>
+              <a:t>sm90, fp8, 1d2d, device_kernel, quackgemm</a:t>
+            </a:r>
+          </a:p>
+        </p:txBody>
+      </p:sp>
+      <p:sp>
+        <p:nvSpPr>
+          <p:cNvPr id="13" name="Rounded Rectangle 12"/>
+          <p:cNvSpPr/>
+          <p:nvPr/>
+        </p:nvSpPr>
+        <p:spPr>
+          <a:xfrm>
+            <a:off x="822960" y="5074920"/>
+            <a:ext cx="548640" cy="548640"/>
+          </a:xfrm>
+          <a:prstGeom prst="roundRect">
+            <a:avLst/>
+          </a:prstGeom>
+          <a:solidFill>
+            <a:srgbClr val="1A1A2E"/>
+          </a:solidFill>
+          <a:ln>
+            <a:noFill/>
+          </a:ln>
+        </p:spPr>
+        <p:style>
+          <a:lnRef idx="1">
+            <a:schemeClr val="accent1"/>
+          </a:lnRef>
+          <a:fillRef idx="3">
+            <a:schemeClr val="accent1"/>
+          </a:fillRef>
+          <a:effectRef idx="2">
+            <a:schemeClr val="accent1"/>
+          </a:effectRef>
+          <a:fontRef idx="minor">
+            <a:schemeClr val="lt1"/>
+          </a:fontRef>
+        </p:style>
+        <p:txBody>
+          <a:bodyPr rtlCol="0" anchor="ctr" wrap="square" lIns="101600" rIns="101600" tIns="76200" bIns="76200"/>
+          <a:lstStyle/>
+          <a:p>
+            <a:pPr algn="ctr">
+              <a:defRPr sz="2000" b="1">
+                <a:solidFill>
+                  <a:srgbClr val="1A1A2E"/>
+                </a:solidFill>
+                <a:latin typeface="Calibri"/>
+              </a:defRPr>
+            </a:pPr>
+            <a:r>
+              <a:t>4</a:t>
+            </a:r>
+          </a:p>
+        </p:txBody>
+      </p:sp>
+      <p:sp>
+        <p:nvSpPr>
+          <p:cNvPr id="14" name="TextBox 13"/>
+          <p:cNvSpPr txBox="1"/>
+          <p:nvPr/>
+        </p:nvSpPr>
+        <p:spPr>
+          <a:xfrm>
+            <a:off x="1645920" y="5074920"/>
+            <a:ext cx="9601200" cy="457200"/>
+          </a:xfrm>
+          <a:prstGeom prst="rect">
+            <a:avLst/>
+          </a:prstGeom>
+          <a:noFill/>
+        </p:spPr>
+        <p:txBody>
+          <a:bodyPr wrap="square">
+            <a:spAutoFit/>
+          </a:bodyPr>
+          <a:lstStyle/>
+          <a:p>
+            <a:pPr algn="l">
+              <a:spcAft>
+                <a:spcPts val="660"/>
+              </a:spcAft>
+              <a:defRPr sz="2200" b="1">
+                <a:solidFill>
+                  <a:srgbClr val="1A1A2E"/>
+                </a:solidFill>
+                <a:latin typeface="Calibri"/>
+              </a:defRPr>
+            </a:pPr>
+            <a:r>
+              <a:t>Profile first. Then optimize. Then profile again.</a:t>
+            </a:r>
+          </a:p>
+        </p:txBody>
+      </p:sp>
+      <p:sp>
+        <p:nvSpPr>
+          <p:cNvPr id="15" name="TextBox 14"/>
+          <p:cNvSpPr txBox="1"/>
+          <p:nvPr/>
+        </p:nvSpPr>
+        <p:spPr>
+          <a:xfrm>
+            <a:off x="11155680" y="6400800"/>
+            <a:ext cx="914400" cy="365760"/>
+          </a:xfrm>
+          <a:prstGeom prst="rect">
+            <a:avLst/>
+          </a:prstGeom>
+          <a:noFill/>
+        </p:spPr>
+        <p:txBody>
+          <a:bodyPr wrap="square">
+            <a:spAutoFit/>
+          </a:bodyPr>
+          <a:lstStyle/>
+          <a:p>
             <a:pPr algn="r">
               <a:spcAft>
                 <a:spcPts val="330"/>
@@ -20320,7 +21498,7 @@
               </a:defRPr>
             </a:pPr>
             <a:r>
-              <a:t>35/36</a:t>
+              <a:t>35/37</a:t>
             </a:r>
           </a:p>
         </p:txBody>
@@ -20359,8 +21537,8 @@
         </p:nvSpPr>
         <p:spPr>
           <a:xfrm>
-            <a:off x="0" y="0"/>
-            <a:ext cx="12191695" cy="54864"/>
+            <a:off x="548640" y="274320"/>
+            <a:ext cx="109728" cy="502920"/>
           </a:xfrm>
           <a:prstGeom prst="rect">
             <a:avLst/>
@@ -20402,8 +21580,8 @@
         </p:nvSpPr>
         <p:spPr>
           <a:xfrm>
-            <a:off x="1371600" y="1828800"/>
-            <a:ext cx="9418320" cy="914400"/>
+            <a:off x="822960" y="228600"/>
+            <a:ext cx="10058400" cy="640080"/>
           </a:xfrm>
           <a:prstGeom prst="rect">
             <a:avLst/>
@@ -20416,11 +21594,89 @@
           </a:bodyPr>
           <a:lstStyle/>
           <a:p>
-            <a:pPr algn="ctr">
-              <a:spcAft>
-                <a:spcPts val="1200"/>
-              </a:spcAft>
-              <a:defRPr sz="4000" b="1">
+            <a:pPr algn="l">
+              <a:spcAft>
+                <a:spcPts val="960"/>
+              </a:spcAft>
+              <a:defRPr sz="3200" b="1">
+                <a:solidFill>
+                  <a:srgbClr val="0E6EB8"/>
+                </a:solidFill>
+                <a:latin typeface="Calibri"/>
+              </a:defRPr>
+            </a:pPr>
+            <a:r>
+              <a:t>Resources</a:t>
+            </a:r>
+          </a:p>
+        </p:txBody>
+      </p:sp>
+      <p:sp>
+        <p:nvSpPr>
+          <p:cNvPr id="4" name="TextBox 3"/>
+          <p:cNvSpPr txBox="1"/>
+          <p:nvPr/>
+        </p:nvSpPr>
+        <p:spPr>
+          <a:xfrm>
+            <a:off x="1097280" y="1371600"/>
+            <a:ext cx="3657600" cy="457200"/>
+          </a:xfrm>
+          <a:prstGeom prst="rect">
+            <a:avLst/>
+          </a:prstGeom>
+          <a:noFill/>
+        </p:spPr>
+        <p:txBody>
+          <a:bodyPr wrap="square">
+            <a:spAutoFit/>
+          </a:bodyPr>
+          <a:lstStyle/>
+          <a:p>
+            <a:pPr algn="l">
+              <a:spcAft>
+                <a:spcPts val="600"/>
+              </a:spcAft>
+              <a:defRPr sz="2000" b="1">
+                <a:solidFill>
+                  <a:srgbClr val="0E6EB8"/>
+                </a:solidFill>
+                <a:latin typeface="Calibri"/>
+              </a:defRPr>
+            </a:pPr>
+            <a:r>
+              <a:t>▶  Workshop Repo</a:t>
+            </a:r>
+          </a:p>
+        </p:txBody>
+      </p:sp>
+      <p:sp>
+        <p:nvSpPr>
+          <p:cNvPr id="5" name="TextBox 4"/>
+          <p:cNvSpPr txBox="1"/>
+          <p:nvPr/>
+        </p:nvSpPr>
+        <p:spPr>
+          <a:xfrm>
+            <a:off x="5029200" y="1371600"/>
+            <a:ext cx="6400800" cy="457200"/>
+          </a:xfrm>
+          <a:prstGeom prst="rect">
+            <a:avLst/>
+          </a:prstGeom>
+          <a:noFill/>
+        </p:spPr>
+        <p:txBody>
+          <a:bodyPr wrap="square">
+            <a:spAutoFit/>
+          </a:bodyPr>
+          <a:lstStyle/>
+          <a:p>
+            <a:pPr algn="l">
+              <a:spcAft>
+                <a:spcPts val="540"/>
+              </a:spcAft>
+              <a:defRPr sz="1800" b="0">
                 <a:solidFill>
                   <a:srgbClr val="1A1A2E"/>
                 </a:solidFill>
@@ -20428,21 +21684,333 @@
               </a:defRPr>
             </a:pPr>
             <a:r>
-              <a:t>How Fast Is Your Kernel, Really?</a:t>
-            </a:r>
-          </a:p>
-        </p:txBody>
-      </p:sp>
-      <p:sp>
-        <p:nvSpPr>
-          <p:cNvPr id="4" name="Rectangle 3"/>
+              <a:t>github.com/XAheli/torch-profiler</a:t>
+            </a:r>
+          </a:p>
+        </p:txBody>
+      </p:sp>
+      <p:sp>
+        <p:nvSpPr>
+          <p:cNvPr id="6" name="TextBox 5"/>
+          <p:cNvSpPr txBox="1"/>
+          <p:nvPr/>
+        </p:nvSpPr>
+        <p:spPr>
+          <a:xfrm>
+            <a:off x="1097280" y="2194560"/>
+            <a:ext cx="3657600" cy="457200"/>
+          </a:xfrm>
+          <a:prstGeom prst="rect">
+            <a:avLst/>
+          </a:prstGeom>
+          <a:noFill/>
+        </p:spPr>
+        <p:txBody>
+          <a:bodyPr wrap="square">
+            <a:spAutoFit/>
+          </a:bodyPr>
+          <a:lstStyle/>
+          <a:p>
+            <a:pPr algn="l">
+              <a:spcAft>
+                <a:spcPts val="600"/>
+              </a:spcAft>
+              <a:defRPr sz="2000" b="1">
+                <a:solidFill>
+                  <a:srgbClr val="0E6EB8"/>
+                </a:solidFill>
+                <a:latin typeface="Calibri"/>
+              </a:defRPr>
+            </a:pPr>
+            <a:r>
+              <a:t>▶  DeepGEMM</a:t>
+            </a:r>
+          </a:p>
+        </p:txBody>
+      </p:sp>
+      <p:sp>
+        <p:nvSpPr>
+          <p:cNvPr id="7" name="TextBox 6"/>
+          <p:cNvSpPr txBox="1"/>
+          <p:nvPr/>
+        </p:nvSpPr>
+        <p:spPr>
+          <a:xfrm>
+            <a:off x="5029200" y="2194560"/>
+            <a:ext cx="6400800" cy="457200"/>
+          </a:xfrm>
+          <a:prstGeom prst="rect">
+            <a:avLst/>
+          </a:prstGeom>
+          <a:noFill/>
+        </p:spPr>
+        <p:txBody>
+          <a:bodyPr wrap="square">
+            <a:spAutoFit/>
+          </a:bodyPr>
+          <a:lstStyle/>
+          <a:p>
+            <a:pPr algn="l">
+              <a:spcAft>
+                <a:spcPts val="540"/>
+              </a:spcAft>
+              <a:defRPr sz="1800" b="0">
+                <a:solidFill>
+                  <a:srgbClr val="1A1A2E"/>
+                </a:solidFill>
+                <a:latin typeface="Calibri"/>
+              </a:defRPr>
+            </a:pPr>
+            <a:r>
+              <a:t>github.com/deepseek-ai/DeepGEMM</a:t>
+            </a:r>
+          </a:p>
+        </p:txBody>
+      </p:sp>
+      <p:sp>
+        <p:nvSpPr>
+          <p:cNvPr id="8" name="TextBox 7"/>
+          <p:cNvSpPr txBox="1"/>
+          <p:nvPr/>
+        </p:nvSpPr>
+        <p:spPr>
+          <a:xfrm>
+            <a:off x="1097280" y="3017520"/>
+            <a:ext cx="3657600" cy="457200"/>
+          </a:xfrm>
+          <a:prstGeom prst="rect">
+            <a:avLst/>
+          </a:prstGeom>
+          <a:noFill/>
+        </p:spPr>
+        <p:txBody>
+          <a:bodyPr wrap="square">
+            <a:spAutoFit/>
+          </a:bodyPr>
+          <a:lstStyle/>
+          <a:p>
+            <a:pPr algn="l">
+              <a:spcAft>
+                <a:spcPts val="600"/>
+              </a:spcAft>
+              <a:defRPr sz="2000" b="1">
+                <a:solidFill>
+                  <a:srgbClr val="057A55"/>
+                </a:solidFill>
+                <a:latin typeface="Calibri"/>
+              </a:defRPr>
+            </a:pPr>
+            <a:r>
+              <a:t>▶  FlashAttention-3</a:t>
+            </a:r>
+          </a:p>
+        </p:txBody>
+      </p:sp>
+      <p:sp>
+        <p:nvSpPr>
+          <p:cNvPr id="9" name="TextBox 8"/>
+          <p:cNvSpPr txBox="1"/>
+          <p:nvPr/>
+        </p:nvSpPr>
+        <p:spPr>
+          <a:xfrm>
+            <a:off x="5029200" y="3017520"/>
+            <a:ext cx="6400800" cy="457200"/>
+          </a:xfrm>
+          <a:prstGeom prst="rect">
+            <a:avLst/>
+          </a:prstGeom>
+          <a:noFill/>
+        </p:spPr>
+        <p:txBody>
+          <a:bodyPr wrap="square">
+            <a:spAutoFit/>
+          </a:bodyPr>
+          <a:lstStyle/>
+          <a:p>
+            <a:pPr algn="l">
+              <a:spcAft>
+                <a:spcPts val="540"/>
+              </a:spcAft>
+              <a:defRPr sz="1800" b="0">
+                <a:solidFill>
+                  <a:srgbClr val="1A1A2E"/>
+                </a:solidFill>
+                <a:latin typeface="Calibri"/>
+              </a:defRPr>
+            </a:pPr>
+            <a:r>
+              <a:t>github.com/Dao-AILab/flash-attention</a:t>
+            </a:r>
+          </a:p>
+        </p:txBody>
+      </p:sp>
+      <p:sp>
+        <p:nvSpPr>
+          <p:cNvPr id="10" name="TextBox 9"/>
+          <p:cNvSpPr txBox="1"/>
+          <p:nvPr/>
+        </p:nvSpPr>
+        <p:spPr>
+          <a:xfrm>
+            <a:off x="1097280" y="3840480"/>
+            <a:ext cx="3657600" cy="457200"/>
+          </a:xfrm>
+          <a:prstGeom prst="rect">
+            <a:avLst/>
+          </a:prstGeom>
+          <a:noFill/>
+        </p:spPr>
+        <p:txBody>
+          <a:bodyPr wrap="square">
+            <a:spAutoFit/>
+          </a:bodyPr>
+          <a:lstStyle/>
+          <a:p>
+            <a:pPr algn="l">
+              <a:spcAft>
+                <a:spcPts val="600"/>
+              </a:spcAft>
+              <a:defRPr sz="2000" b="1">
+                <a:solidFill>
+                  <a:srgbClr val="B46A00"/>
+                </a:solidFill>
+                <a:latin typeface="Calibri"/>
+              </a:defRPr>
+            </a:pPr>
+            <a:r>
+              <a:t>▶  SonicMoE</a:t>
+            </a:r>
+          </a:p>
+        </p:txBody>
+      </p:sp>
+      <p:sp>
+        <p:nvSpPr>
+          <p:cNvPr id="11" name="TextBox 10"/>
+          <p:cNvSpPr txBox="1"/>
+          <p:nvPr/>
+        </p:nvSpPr>
+        <p:spPr>
+          <a:xfrm>
+            <a:off x="5029200" y="3840480"/>
+            <a:ext cx="6400800" cy="457200"/>
+          </a:xfrm>
+          <a:prstGeom prst="rect">
+            <a:avLst/>
+          </a:prstGeom>
+          <a:noFill/>
+        </p:spPr>
+        <p:txBody>
+          <a:bodyPr wrap="square">
+            <a:spAutoFit/>
+          </a:bodyPr>
+          <a:lstStyle/>
+          <a:p>
+            <a:pPr algn="l">
+              <a:spcAft>
+                <a:spcPts val="540"/>
+              </a:spcAft>
+              <a:defRPr sz="1800" b="0">
+                <a:solidFill>
+                  <a:srgbClr val="1A1A2E"/>
+                </a:solidFill>
+                <a:latin typeface="Calibri"/>
+              </a:defRPr>
+            </a:pPr>
+            <a:r>
+              <a:t>github.com/Dao-AILab/sonic-moe</a:t>
+            </a:r>
+          </a:p>
+        </p:txBody>
+      </p:sp>
+      <p:sp>
+        <p:nvSpPr>
+          <p:cNvPr id="12" name="TextBox 11"/>
+          <p:cNvSpPr txBox="1"/>
+          <p:nvPr/>
+        </p:nvSpPr>
+        <p:spPr>
+          <a:xfrm>
+            <a:off x="1097280" y="4663440"/>
+            <a:ext cx="3657600" cy="457200"/>
+          </a:xfrm>
+          <a:prstGeom prst="rect">
+            <a:avLst/>
+          </a:prstGeom>
+          <a:noFill/>
+        </p:spPr>
+        <p:txBody>
+          <a:bodyPr wrap="square">
+            <a:spAutoFit/>
+          </a:bodyPr>
+          <a:lstStyle/>
+          <a:p>
+            <a:pPr algn="l">
+              <a:spcAft>
+                <a:spcPts val="600"/>
+              </a:spcAft>
+              <a:defRPr sz="2000" b="1">
+                <a:solidFill>
+                  <a:srgbClr val="555555"/>
+                </a:solidFill>
+                <a:latin typeface="Calibri"/>
+              </a:defRPr>
+            </a:pPr>
+            <a:r>
+              <a:t>▶  Perfetto UI</a:t>
+            </a:r>
+          </a:p>
+        </p:txBody>
+      </p:sp>
+      <p:sp>
+        <p:nvSpPr>
+          <p:cNvPr id="13" name="TextBox 12"/>
+          <p:cNvSpPr txBox="1"/>
+          <p:nvPr/>
+        </p:nvSpPr>
+        <p:spPr>
+          <a:xfrm>
+            <a:off x="5029200" y="4663440"/>
+            <a:ext cx="6400800" cy="457200"/>
+          </a:xfrm>
+          <a:prstGeom prst="rect">
+            <a:avLst/>
+          </a:prstGeom>
+          <a:noFill/>
+        </p:spPr>
+        <p:txBody>
+          <a:bodyPr wrap="square">
+            <a:spAutoFit/>
+          </a:bodyPr>
+          <a:lstStyle/>
+          <a:p>
+            <a:pPr algn="l">
+              <a:spcAft>
+                <a:spcPts val="540"/>
+              </a:spcAft>
+              <a:defRPr sz="1800" b="0">
+                <a:solidFill>
+                  <a:srgbClr val="1A1A2E"/>
+                </a:solidFill>
+                <a:latin typeface="Calibri"/>
+              </a:defRPr>
+            </a:pPr>
+            <a:r>
+              <a:t>ui.perfetto.dev</a:t>
+            </a:r>
+          </a:p>
+        </p:txBody>
+      </p:sp>
+      <p:sp>
+        <p:nvSpPr>
+          <p:cNvPr id="14" name="Rectangle 13"/>
           <p:cNvSpPr/>
           <p:nvPr/>
         </p:nvSpPr>
         <p:spPr>
           <a:xfrm>
-            <a:off x="5029200" y="2926080"/>
-            <a:ext cx="2103120" cy="36576"/>
+            <a:off x="1097280" y="5669280"/>
+            <a:ext cx="10058400" cy="27432"/>
           </a:xfrm>
           <a:prstGeom prst="rect">
             <a:avLst/>
@@ -20478,14 +22046,14 @@
       </p:sp>
       <p:sp>
         <p:nvSpPr>
-          <p:cNvPr id="5" name="TextBox 4"/>
+          <p:cNvPr id="15" name="TextBox 14"/>
           <p:cNvSpPr txBox="1"/>
           <p:nvPr/>
         </p:nvSpPr>
         <p:spPr>
           <a:xfrm>
-            <a:off x="1371600" y="3291840"/>
-            <a:ext cx="9418320" cy="548640"/>
+            <a:off x="1097280" y="5852160"/>
+            <a:ext cx="10058400" cy="457200"/>
           </a:xfrm>
           <a:prstGeom prst="rect">
             <a:avLst/>
@@ -20500,31 +22068,31 @@
           <a:p>
             <a:pPr algn="ctr">
               <a:spcAft>
-                <a:spcPts val="1080"/>
-              </a:spcAft>
-              <a:defRPr sz="3600" b="1">
-                <a:solidFill>
-                  <a:srgbClr val="0E6EB8"/>
-                </a:solidFill>
-                <a:latin typeface="Calibri"/>
-              </a:defRPr>
-            </a:pPr>
-            <a:r>
-              <a:t>Thank You!</a:t>
-            </a:r>
-          </a:p>
-        </p:txBody>
-      </p:sp>
-      <p:sp>
-        <p:nvSpPr>
-          <p:cNvPr id="6" name="TextBox 5"/>
+                <a:spcPts val="540"/>
+              </a:spcAft>
+              <a:defRPr sz="1800" b="0">
+                <a:solidFill>
+                  <a:srgbClr val="555555"/>
+                </a:solidFill>
+                <a:latin typeface="Calibri"/>
+              </a:defRPr>
+            </a:pPr>
+            <a:r>
+              <a:t>Aheli Poddar  |  Red Hat PyTorch Team</a:t>
+            </a:r>
+          </a:p>
+        </p:txBody>
+      </p:sp>
+      <p:sp>
+        <p:nvSpPr>
+          <p:cNvPr id="16" name="TextBox 15"/>
           <p:cNvSpPr txBox="1"/>
           <p:nvPr/>
         </p:nvSpPr>
         <p:spPr>
           <a:xfrm>
-            <a:off x="1371600" y="4206240"/>
-            <a:ext cx="9418320" cy="457200"/>
+            <a:off x="11155680" y="6400800"/>
+            <a:ext cx="914400" cy="365760"/>
           </a:xfrm>
           <a:prstGeom prst="rect">
             <a:avLst/>
@@ -20537,71 +22105,58 @@
           </a:bodyPr>
           <a:lstStyle/>
           <a:p>
-            <a:pPr algn="ctr">
-              <a:spcAft>
-                <a:spcPts val="660"/>
-              </a:spcAft>
-              <a:defRPr sz="2200" b="0">
-                <a:solidFill>
-                  <a:srgbClr val="555555"/>
-                </a:solidFill>
-                <a:latin typeface="Calibri"/>
-              </a:defRPr>
-            </a:pPr>
-            <a:r>
-              <a:t>Aheli Poddar  |  Red Hat PyTorch Team</a:t>
-            </a:r>
-          </a:p>
-        </p:txBody>
-      </p:sp>
-      <p:sp>
-        <p:nvSpPr>
-          <p:cNvPr id="7" name="TextBox 6"/>
-          <p:cNvSpPr txBox="1"/>
-          <p:nvPr/>
-        </p:nvSpPr>
-        <p:spPr>
-          <a:xfrm>
-            <a:off x="1371600" y="5029200"/>
-            <a:ext cx="9418320" cy="457200"/>
-          </a:xfrm>
-          <a:prstGeom prst="rect">
-            <a:avLst/>
-          </a:prstGeom>
-          <a:noFill/>
-        </p:spPr>
-        <p:txBody>
-          <a:bodyPr wrap="square">
-            <a:spAutoFit/>
-          </a:bodyPr>
-          <a:lstStyle/>
-          <a:p>
-            <a:pPr algn="ctr">
-              <a:spcAft>
-                <a:spcPts val="840"/>
-              </a:spcAft>
-              <a:defRPr sz="2800" b="1">
-                <a:solidFill>
-                  <a:srgbClr val="B46A00"/>
-                </a:solidFill>
-                <a:latin typeface="Calibri"/>
-              </a:defRPr>
-            </a:pPr>
-            <a:r>
-              <a:t>Questions?</a:t>
-            </a:r>
-          </a:p>
-        </p:txBody>
-      </p:sp>
-      <p:sp>
-        <p:nvSpPr>
-          <p:cNvPr id="8" name="Rectangle 7"/>
+            <a:pPr algn="r">
+              <a:spcAft>
+                <a:spcPts val="330"/>
+              </a:spcAft>
+              <a:defRPr sz="1100" b="0">
+                <a:solidFill>
+                  <a:srgbClr val="777777"/>
+                </a:solidFill>
+                <a:latin typeface="Calibri"/>
+              </a:defRPr>
+            </a:pPr>
+            <a:r>
+              <a:t>36/37</a:t>
+            </a:r>
+          </a:p>
+        </p:txBody>
+      </p:sp>
+    </p:spTree>
+  </p:cSld>
+  <p:clrMapOvr>
+    <a:masterClrMapping/>
+  </p:clrMapOvr>
+</p:sld>
+</file>
+
+<file path=ppt/slides/slide37.xml><?xml version="1.0" encoding="utf-8"?>
+<p:sld xmlns:a="http://schemas.openxmlformats.org/drawingml/2006/main" xmlns:p="http://schemas.openxmlformats.org/presentationml/2006/main" xmlns:r="http://schemas.openxmlformats.org/officeDocument/2006/relationships">
+  <p:cSld>
+    <p:bg>
+      <p:bgPr>
+        <a:solidFill>
+          <a:srgbClr val="FFFFFF"/>
+        </a:solidFill>
+        <a:effectLst/>
+      </p:bgPr>
+    </p:bg>
+    <p:spTree>
+      <p:nvGrpSpPr>
+        <p:cNvPr id="1" name=""/>
+        <p:cNvGrpSpPr/>
+        <p:nvPr/>
+      </p:nvGrpSpPr>
+      <p:grpSpPr/>
+      <p:sp>
+        <p:nvSpPr>
+          <p:cNvPr id="2" name="Rectangle 1"/>
           <p:cNvSpPr/>
           <p:nvPr/>
         </p:nvSpPr>
         <p:spPr>
           <a:xfrm>
-            <a:off x="0" y="6803136"/>
+            <a:off x="0" y="0"/>
             <a:ext cx="12191695" cy="54864"/>
           </a:xfrm>
           <a:prstGeom prst="rect">
@@ -20638,14 +22193,14 @@
       </p:sp>
       <p:sp>
         <p:nvSpPr>
-          <p:cNvPr id="9" name="TextBox 8"/>
+          <p:cNvPr id="3" name="TextBox 2"/>
           <p:cNvSpPr txBox="1"/>
           <p:nvPr/>
         </p:nvSpPr>
         <p:spPr>
           <a:xfrm>
-            <a:off x="11155680" y="6400800"/>
-            <a:ext cx="914400" cy="365760"/>
+            <a:off x="1371600" y="1828800"/>
+            <a:ext cx="9418320" cy="914400"/>
           </a:xfrm>
           <a:prstGeom prst="rect">
             <a:avLst/>
@@ -20658,6 +22213,248 @@
           </a:bodyPr>
           <a:lstStyle/>
           <a:p>
+            <a:pPr algn="ctr">
+              <a:spcAft>
+                <a:spcPts val="1200"/>
+              </a:spcAft>
+              <a:defRPr sz="4000" b="1">
+                <a:solidFill>
+                  <a:srgbClr val="1A1A2E"/>
+                </a:solidFill>
+                <a:latin typeface="Calibri"/>
+              </a:defRPr>
+            </a:pPr>
+            <a:r>
+              <a:t>How Fast Is Your Kernel, Really?</a:t>
+            </a:r>
+          </a:p>
+        </p:txBody>
+      </p:sp>
+      <p:sp>
+        <p:nvSpPr>
+          <p:cNvPr id="4" name="Rectangle 3"/>
+          <p:cNvSpPr/>
+          <p:nvPr/>
+        </p:nvSpPr>
+        <p:spPr>
+          <a:xfrm>
+            <a:off x="5029200" y="2926080"/>
+            <a:ext cx="2103120" cy="36576"/>
+          </a:xfrm>
+          <a:prstGeom prst="rect">
+            <a:avLst/>
+          </a:prstGeom>
+          <a:solidFill>
+            <a:srgbClr val="0E6EB8"/>
+          </a:solidFill>
+          <a:ln>
+            <a:noFill/>
+          </a:ln>
+        </p:spPr>
+        <p:style>
+          <a:lnRef idx="1">
+            <a:schemeClr val="accent1"/>
+          </a:lnRef>
+          <a:fillRef idx="3">
+            <a:schemeClr val="accent1"/>
+          </a:fillRef>
+          <a:effectRef idx="2">
+            <a:schemeClr val="accent1"/>
+          </a:effectRef>
+          <a:fontRef idx="minor">
+            <a:schemeClr val="lt1"/>
+          </a:fontRef>
+        </p:style>
+        <p:txBody>
+          <a:bodyPr rtlCol="0" anchor="ctr"/>
+          <a:lstStyle/>
+          <a:p>
+            <a:pPr algn="ctr"/>
+          </a:p>
+        </p:txBody>
+      </p:sp>
+      <p:sp>
+        <p:nvSpPr>
+          <p:cNvPr id="5" name="TextBox 4"/>
+          <p:cNvSpPr txBox="1"/>
+          <p:nvPr/>
+        </p:nvSpPr>
+        <p:spPr>
+          <a:xfrm>
+            <a:off x="1371600" y="3291840"/>
+            <a:ext cx="9418320" cy="548640"/>
+          </a:xfrm>
+          <a:prstGeom prst="rect">
+            <a:avLst/>
+          </a:prstGeom>
+          <a:noFill/>
+        </p:spPr>
+        <p:txBody>
+          <a:bodyPr wrap="square">
+            <a:spAutoFit/>
+          </a:bodyPr>
+          <a:lstStyle/>
+          <a:p>
+            <a:pPr algn="ctr">
+              <a:spcAft>
+                <a:spcPts val="1080"/>
+              </a:spcAft>
+              <a:defRPr sz="3600" b="1">
+                <a:solidFill>
+                  <a:srgbClr val="0E6EB8"/>
+                </a:solidFill>
+                <a:latin typeface="Calibri"/>
+              </a:defRPr>
+            </a:pPr>
+            <a:r>
+              <a:t>Thank You!</a:t>
+            </a:r>
+          </a:p>
+        </p:txBody>
+      </p:sp>
+      <p:sp>
+        <p:nvSpPr>
+          <p:cNvPr id="6" name="TextBox 5"/>
+          <p:cNvSpPr txBox="1"/>
+          <p:nvPr/>
+        </p:nvSpPr>
+        <p:spPr>
+          <a:xfrm>
+            <a:off x="1371600" y="4206240"/>
+            <a:ext cx="9418320" cy="457200"/>
+          </a:xfrm>
+          <a:prstGeom prst="rect">
+            <a:avLst/>
+          </a:prstGeom>
+          <a:noFill/>
+        </p:spPr>
+        <p:txBody>
+          <a:bodyPr wrap="square">
+            <a:spAutoFit/>
+          </a:bodyPr>
+          <a:lstStyle/>
+          <a:p>
+            <a:pPr algn="ctr">
+              <a:spcAft>
+                <a:spcPts val="660"/>
+              </a:spcAft>
+              <a:defRPr sz="2200" b="0">
+                <a:solidFill>
+                  <a:srgbClr val="555555"/>
+                </a:solidFill>
+                <a:latin typeface="Calibri"/>
+              </a:defRPr>
+            </a:pPr>
+            <a:r>
+              <a:t>Aheli Poddar  |  Red Hat PyTorch Team</a:t>
+            </a:r>
+          </a:p>
+        </p:txBody>
+      </p:sp>
+      <p:sp>
+        <p:nvSpPr>
+          <p:cNvPr id="7" name="TextBox 6"/>
+          <p:cNvSpPr txBox="1"/>
+          <p:nvPr/>
+        </p:nvSpPr>
+        <p:spPr>
+          <a:xfrm>
+            <a:off x="1371600" y="5029200"/>
+            <a:ext cx="9418320" cy="457200"/>
+          </a:xfrm>
+          <a:prstGeom prst="rect">
+            <a:avLst/>
+          </a:prstGeom>
+          <a:noFill/>
+        </p:spPr>
+        <p:txBody>
+          <a:bodyPr wrap="square">
+            <a:spAutoFit/>
+          </a:bodyPr>
+          <a:lstStyle/>
+          <a:p>
+            <a:pPr algn="ctr">
+              <a:spcAft>
+                <a:spcPts val="840"/>
+              </a:spcAft>
+              <a:defRPr sz="2800" b="1">
+                <a:solidFill>
+                  <a:srgbClr val="B46A00"/>
+                </a:solidFill>
+                <a:latin typeface="Calibri"/>
+              </a:defRPr>
+            </a:pPr>
+            <a:r>
+              <a:t>Questions?</a:t>
+            </a:r>
+          </a:p>
+        </p:txBody>
+      </p:sp>
+      <p:sp>
+        <p:nvSpPr>
+          <p:cNvPr id="8" name="Rectangle 7"/>
+          <p:cNvSpPr/>
+          <p:nvPr/>
+        </p:nvSpPr>
+        <p:spPr>
+          <a:xfrm>
+            <a:off x="0" y="6803136"/>
+            <a:ext cx="12191695" cy="54864"/>
+          </a:xfrm>
+          <a:prstGeom prst="rect">
+            <a:avLst/>
+          </a:prstGeom>
+          <a:solidFill>
+            <a:srgbClr val="0E6EB8"/>
+          </a:solidFill>
+          <a:ln>
+            <a:noFill/>
+          </a:ln>
+        </p:spPr>
+        <p:style>
+          <a:lnRef idx="1">
+            <a:schemeClr val="accent1"/>
+          </a:lnRef>
+          <a:fillRef idx="3">
+            <a:schemeClr val="accent1"/>
+          </a:fillRef>
+          <a:effectRef idx="2">
+            <a:schemeClr val="accent1"/>
+          </a:effectRef>
+          <a:fontRef idx="minor">
+            <a:schemeClr val="lt1"/>
+          </a:fontRef>
+        </p:style>
+        <p:txBody>
+          <a:bodyPr rtlCol="0" anchor="ctr"/>
+          <a:lstStyle/>
+          <a:p>
+            <a:pPr algn="ctr"/>
+          </a:p>
+        </p:txBody>
+      </p:sp>
+      <p:sp>
+        <p:nvSpPr>
+          <p:cNvPr id="9" name="TextBox 8"/>
+          <p:cNvSpPr txBox="1"/>
+          <p:nvPr/>
+        </p:nvSpPr>
+        <p:spPr>
+          <a:xfrm>
+            <a:off x="11155680" y="6400800"/>
+            <a:ext cx="914400" cy="365760"/>
+          </a:xfrm>
+          <a:prstGeom prst="rect">
+            <a:avLst/>
+          </a:prstGeom>
+          <a:noFill/>
+        </p:spPr>
+        <p:txBody>
+          <a:bodyPr wrap="square">
+            <a:spAutoFit/>
+          </a:bodyPr>
+          <a:lstStyle/>
+          <a:p>
             <a:pPr algn="r">
               <a:spcAft>
                 <a:spcPts val="330"/>
@@ -20670,7 +22467,7 @@
               </a:defRPr>
             </a:pPr>
             <a:r>
-              <a:t>36/36</a:t>
+              <a:t>37/37</a:t>
             </a:r>
           </a:p>
         </p:txBody>
@@ -20950,7 +22747,7 @@
               </a:defRPr>
             </a:pPr>
             <a:r>
-              <a:t>4/36</a:t>
+              <a:t>4/37</a:t>
             </a:r>
           </a:p>
         </p:txBody>
@@ -21274,7 +23071,7 @@
               </a:defRPr>
             </a:pPr>
             <a:r>
-              <a:t>5/36</a:t>
+              <a:t>5/37</a:t>
             </a:r>
           </a:p>
         </p:txBody>
@@ -21767,7 +23564,7 @@
               </a:defRPr>
             </a:pPr>
             <a:r>
-              <a:t>6/36</a:t>
+              <a:t>6/37</a:t>
             </a:r>
           </a:p>
         </p:txBody>
@@ -22016,7 +23813,7 @@
               </a:defRPr>
             </a:pPr>
             <a:r>
-              <a:t>7/36</a:t>
+              <a:t>7/37</a:t>
             </a:r>
           </a:p>
         </p:txBody>
@@ -22283,7 +24080,7 @@
               </a:defRPr>
             </a:pPr>
             <a:r>
-              <a:t>8/36</a:t>
+              <a:t>8/37</a:t>
             </a:r>
           </a:p>
         </p:txBody>
@@ -22550,7 +24347,7 @@
               </a:defRPr>
             </a:pPr>
             <a:r>
-              <a:t>9/36</a:t>
+              <a:t>9/37</a:t>
             </a:r>
           </a:p>
         </p:txBody>
